--- a/docs/figs/blog_figures.pptx
+++ b/docs/figs/blog_figures.pptx
@@ -8,6 +8,7 @@
     <p:sldId id="258" r:id="rId2"/>
     <p:sldId id="257" r:id="rId3"/>
     <p:sldId id="259" r:id="rId4"/>
+    <p:sldId id="260" r:id="rId5"/>
   </p:sldIdLst>
   <p:sldSz cx="12192000" cy="6858000"/>
   <p:notesSz cx="6858000" cy="9144000"/>
@@ -263,7 +264,7 @@
           <a:p>
             <a:fld id="{922860D0-EBC9-4CCD-82FB-90EB89E22FA7}" type="datetimeFigureOut">
               <a:rPr lang="en-NL" smtClean="0"/>
-              <a:t>13/09/2025</a:t>
+              <a:t>21/09/2025</a:t>
             </a:fld>
             <a:endParaRPr lang="en-NL"/>
           </a:p>
@@ -463,7 +464,7 @@
           <a:p>
             <a:fld id="{922860D0-EBC9-4CCD-82FB-90EB89E22FA7}" type="datetimeFigureOut">
               <a:rPr lang="en-NL" smtClean="0"/>
-              <a:t>13/09/2025</a:t>
+              <a:t>21/09/2025</a:t>
             </a:fld>
             <a:endParaRPr lang="en-NL"/>
           </a:p>
@@ -673,7 +674,7 @@
           <a:p>
             <a:fld id="{922860D0-EBC9-4CCD-82FB-90EB89E22FA7}" type="datetimeFigureOut">
               <a:rPr lang="en-NL" smtClean="0"/>
-              <a:t>13/09/2025</a:t>
+              <a:t>21/09/2025</a:t>
             </a:fld>
             <a:endParaRPr lang="en-NL"/>
           </a:p>
@@ -873,7 +874,7 @@
           <a:p>
             <a:fld id="{922860D0-EBC9-4CCD-82FB-90EB89E22FA7}" type="datetimeFigureOut">
               <a:rPr lang="en-NL" smtClean="0"/>
-              <a:t>13/09/2025</a:t>
+              <a:t>21/09/2025</a:t>
             </a:fld>
             <a:endParaRPr lang="en-NL"/>
           </a:p>
@@ -1149,7 +1150,7 @@
           <a:p>
             <a:fld id="{922860D0-EBC9-4CCD-82FB-90EB89E22FA7}" type="datetimeFigureOut">
               <a:rPr lang="en-NL" smtClean="0"/>
-              <a:t>13/09/2025</a:t>
+              <a:t>21/09/2025</a:t>
             </a:fld>
             <a:endParaRPr lang="en-NL"/>
           </a:p>
@@ -1417,7 +1418,7 @@
           <a:p>
             <a:fld id="{922860D0-EBC9-4CCD-82FB-90EB89E22FA7}" type="datetimeFigureOut">
               <a:rPr lang="en-NL" smtClean="0"/>
-              <a:t>13/09/2025</a:t>
+              <a:t>21/09/2025</a:t>
             </a:fld>
             <a:endParaRPr lang="en-NL"/>
           </a:p>
@@ -1832,7 +1833,7 @@
           <a:p>
             <a:fld id="{922860D0-EBC9-4CCD-82FB-90EB89E22FA7}" type="datetimeFigureOut">
               <a:rPr lang="en-NL" smtClean="0"/>
-              <a:t>13/09/2025</a:t>
+              <a:t>21/09/2025</a:t>
             </a:fld>
             <a:endParaRPr lang="en-NL"/>
           </a:p>
@@ -1974,7 +1975,7 @@
           <a:p>
             <a:fld id="{922860D0-EBC9-4CCD-82FB-90EB89E22FA7}" type="datetimeFigureOut">
               <a:rPr lang="en-NL" smtClean="0"/>
-              <a:t>13/09/2025</a:t>
+              <a:t>21/09/2025</a:t>
             </a:fld>
             <a:endParaRPr lang="en-NL"/>
           </a:p>
@@ -2087,7 +2088,7 @@
           <a:p>
             <a:fld id="{922860D0-EBC9-4CCD-82FB-90EB89E22FA7}" type="datetimeFigureOut">
               <a:rPr lang="en-NL" smtClean="0"/>
-              <a:t>13/09/2025</a:t>
+              <a:t>21/09/2025</a:t>
             </a:fld>
             <a:endParaRPr lang="en-NL"/>
           </a:p>
@@ -2400,7 +2401,7 @@
           <a:p>
             <a:fld id="{922860D0-EBC9-4CCD-82FB-90EB89E22FA7}" type="datetimeFigureOut">
               <a:rPr lang="en-NL" smtClean="0"/>
-              <a:t>13/09/2025</a:t>
+              <a:t>21/09/2025</a:t>
             </a:fld>
             <a:endParaRPr lang="en-NL"/>
           </a:p>
@@ -2689,7 +2690,7 @@
           <a:p>
             <a:fld id="{922860D0-EBC9-4CCD-82FB-90EB89E22FA7}" type="datetimeFigureOut">
               <a:rPr lang="en-NL" smtClean="0"/>
-              <a:t>13/09/2025</a:t>
+              <a:t>21/09/2025</a:t>
             </a:fld>
             <a:endParaRPr lang="en-NL"/>
           </a:p>
@@ -2932,7 +2933,7 @@
           <a:p>
             <a:fld id="{922860D0-EBC9-4CCD-82FB-90EB89E22FA7}" type="datetimeFigureOut">
               <a:rPr lang="en-NL" smtClean="0"/>
-              <a:t>13/09/2025</a:t>
+              <a:t>21/09/2025</a:t>
             </a:fld>
             <a:endParaRPr lang="en-NL"/>
           </a:p>
@@ -10074,6 +10075,2736 @@
 </p:sld>
 </file>
 
+<file path=ppt/slides/slide4.xml><?xml version="1.0" encoding="utf-8"?>
+<p:sld xmlns:a="http://schemas.openxmlformats.org/drawingml/2006/main" xmlns:r="http://schemas.openxmlformats.org/officeDocument/2006/relationships" xmlns:p="http://schemas.openxmlformats.org/presentationml/2006/main">
+  <p:cSld>
+    <p:spTree>
+      <p:nvGrpSpPr>
+        <p:cNvPr id="1" name="">
+          <a:extLst>
+            <a:ext uri="{FF2B5EF4-FFF2-40B4-BE49-F238E27FC236}">
+              <a16:creationId xmlns:a16="http://schemas.microsoft.com/office/drawing/2014/main" id="{7FE1AAAE-948B-697F-3DE9-4D51D28F020C}"/>
+            </a:ext>
+          </a:extLst>
+        </p:cNvPr>
+        <p:cNvGrpSpPr/>
+        <p:nvPr/>
+      </p:nvGrpSpPr>
+      <p:grpSpPr>
+        <a:xfrm>
+          <a:off x="0" y="0"/>
+          <a:ext cx="0" cy="0"/>
+          <a:chOff x="0" y="0"/>
+          <a:chExt cx="0" cy="0"/>
+        </a:xfrm>
+      </p:grpSpPr>
+      <p:sp>
+        <p:nvSpPr>
+          <p:cNvPr id="160" name="Rectangle 159">
+            <a:extLst>
+              <a:ext uri="{FF2B5EF4-FFF2-40B4-BE49-F238E27FC236}">
+                <a16:creationId xmlns:a16="http://schemas.microsoft.com/office/drawing/2014/main" id="{58840E08-2444-C545-ABFE-F1198A9D9204}"/>
+              </a:ext>
+            </a:extLst>
+          </p:cNvPr>
+          <p:cNvSpPr/>
+          <p:nvPr/>
+        </p:nvSpPr>
+        <p:spPr>
+          <a:xfrm>
+            <a:off x="7023535" y="3333483"/>
+            <a:ext cx="774646" cy="918766"/>
+          </a:xfrm>
+          <a:prstGeom prst="rect">
+            <a:avLst/>
+          </a:prstGeom>
+          <a:solidFill>
+            <a:sysClr val="window" lastClr="FFFFFF"/>
+          </a:solidFill>
+          <a:ln w="12700" cap="flat" cmpd="sng" algn="ctr">
+            <a:solidFill>
+              <a:srgbClr val="C4232A">
+                <a:lumMod val="60000"/>
+                <a:lumOff val="40000"/>
+              </a:srgbClr>
+            </a:solidFill>
+            <a:prstDash val="dash"/>
+            <a:miter lim="800000"/>
+          </a:ln>
+          <a:effectLst/>
+        </p:spPr>
+        <p:txBody>
+          <a:bodyPr rtlCol="0" anchor="ctr"/>
+          <a:lstStyle/>
+          <a:p>
+            <a:pPr marL="0" marR="0" lvl="0" indent="0" algn="ctr" defTabSz="914400" eaLnBrk="1" fontAlgn="auto" latinLnBrk="0" hangingPunct="1">
+              <a:lnSpc>
+                <a:spcPct val="100000"/>
+              </a:lnSpc>
+              <a:spcBef>
+                <a:spcPts val="0"/>
+              </a:spcBef>
+              <a:spcAft>
+                <a:spcPts val="0"/>
+              </a:spcAft>
+              <a:buClrTx/>
+              <a:buSzTx/>
+              <a:buFontTx/>
+              <a:buNone/>
+              <a:tabLst/>
+              <a:defRPr/>
+            </a:pPr>
+            <a:endParaRPr kumimoji="0" lang="nl-NL" sz="1800" b="0" i="0" u="none" strike="noStrike" kern="0" cap="none" spc="0" normalizeH="0" baseline="0" noProof="0">
+              <a:ln>
+                <a:noFill/>
+              </a:ln>
+              <a:solidFill>
+                <a:prstClr val="white"/>
+              </a:solidFill>
+              <a:effectLst/>
+              <a:uLnTx/>
+              <a:uFillTx/>
+              <a:latin typeface="Segoe UI Light"/>
+              <a:ea typeface="+mn-ea"/>
+              <a:cs typeface="+mn-cs"/>
+            </a:endParaRPr>
+          </a:p>
+        </p:txBody>
+      </p:sp>
+      <p:sp>
+        <p:nvSpPr>
+          <p:cNvPr id="82" name="Rectangle 81">
+            <a:extLst>
+              <a:ext uri="{FF2B5EF4-FFF2-40B4-BE49-F238E27FC236}">
+                <a16:creationId xmlns:a16="http://schemas.microsoft.com/office/drawing/2014/main" id="{D7284B7F-74B3-C07A-A47C-5576E441D90E}"/>
+              </a:ext>
+            </a:extLst>
+          </p:cNvPr>
+          <p:cNvSpPr/>
+          <p:nvPr/>
+        </p:nvSpPr>
+        <p:spPr>
+          <a:xfrm>
+            <a:off x="5646957" y="3342706"/>
+            <a:ext cx="774646" cy="918766"/>
+          </a:xfrm>
+          <a:prstGeom prst="rect">
+            <a:avLst/>
+          </a:prstGeom>
+          <a:solidFill>
+            <a:sysClr val="window" lastClr="FFFFFF"/>
+          </a:solidFill>
+          <a:ln w="12700" cap="flat" cmpd="sng" algn="ctr">
+            <a:solidFill>
+              <a:srgbClr val="C4232A">
+                <a:lumMod val="60000"/>
+                <a:lumOff val="40000"/>
+              </a:srgbClr>
+            </a:solidFill>
+            <a:prstDash val="dash"/>
+            <a:miter lim="800000"/>
+          </a:ln>
+          <a:effectLst/>
+        </p:spPr>
+        <p:txBody>
+          <a:bodyPr rtlCol="0" anchor="ctr"/>
+          <a:lstStyle/>
+          <a:p>
+            <a:pPr marL="0" marR="0" lvl="0" indent="0" algn="ctr" defTabSz="914400" eaLnBrk="1" fontAlgn="auto" latinLnBrk="0" hangingPunct="1">
+              <a:lnSpc>
+                <a:spcPct val="100000"/>
+              </a:lnSpc>
+              <a:spcBef>
+                <a:spcPts val="0"/>
+              </a:spcBef>
+              <a:spcAft>
+                <a:spcPts val="0"/>
+              </a:spcAft>
+              <a:buClrTx/>
+              <a:buSzTx/>
+              <a:buFontTx/>
+              <a:buNone/>
+              <a:tabLst/>
+              <a:defRPr/>
+            </a:pPr>
+            <a:endParaRPr kumimoji="0" lang="nl-NL" sz="1800" b="0" i="0" u="none" strike="noStrike" kern="0" cap="none" spc="0" normalizeH="0" baseline="0" noProof="0">
+              <a:ln>
+                <a:noFill/>
+              </a:ln>
+              <a:solidFill>
+                <a:prstClr val="white"/>
+              </a:solidFill>
+              <a:effectLst/>
+              <a:uLnTx/>
+              <a:uFillTx/>
+              <a:latin typeface="Segoe UI Light"/>
+              <a:ea typeface="+mn-ea"/>
+              <a:cs typeface="+mn-cs"/>
+            </a:endParaRPr>
+          </a:p>
+        </p:txBody>
+      </p:sp>
+      <p:grpSp>
+        <p:nvGrpSpPr>
+          <p:cNvPr id="83" name="Group 82">
+            <a:extLst>
+              <a:ext uri="{FF2B5EF4-FFF2-40B4-BE49-F238E27FC236}">
+                <a16:creationId xmlns:a16="http://schemas.microsoft.com/office/drawing/2014/main" id="{AFA73960-A823-9D36-5A0F-58D530C16498}"/>
+              </a:ext>
+            </a:extLst>
+          </p:cNvPr>
+          <p:cNvGrpSpPr/>
+          <p:nvPr/>
+        </p:nvGrpSpPr>
+        <p:grpSpPr>
+          <a:xfrm>
+            <a:off x="1986266" y="3118647"/>
+            <a:ext cx="2211423" cy="1242027"/>
+            <a:chOff x="2269137" y="4929447"/>
+            <a:chExt cx="2211423" cy="1242027"/>
+          </a:xfrm>
+        </p:grpSpPr>
+        <p:sp>
+          <p:nvSpPr>
+            <p:cNvPr id="84" name="Cylinder 83">
+              <a:extLst>
+                <a:ext uri="{FF2B5EF4-FFF2-40B4-BE49-F238E27FC236}">
+                  <a16:creationId xmlns:a16="http://schemas.microsoft.com/office/drawing/2014/main" id="{A94A7FA4-7198-2B7D-D285-51ACDF9FC726}"/>
+                </a:ext>
+              </a:extLst>
+            </p:cNvPr>
+            <p:cNvSpPr/>
+            <p:nvPr/>
+          </p:nvSpPr>
+          <p:spPr>
+            <a:xfrm>
+              <a:off x="3596386" y="5070506"/>
+              <a:ext cx="673582" cy="841319"/>
+            </a:xfrm>
+            <a:prstGeom prst="can">
+              <a:avLst/>
+            </a:prstGeom>
+            <a:solidFill>
+              <a:sysClr val="window" lastClr="FFFFFF"/>
+            </a:solidFill>
+            <a:ln w="12700" cap="flat" cmpd="sng" algn="ctr">
+              <a:solidFill>
+                <a:sysClr val="windowText" lastClr="000000"/>
+              </a:solidFill>
+              <a:prstDash val="solid"/>
+              <a:miter lim="800000"/>
+            </a:ln>
+            <a:effectLst/>
+          </p:spPr>
+          <p:txBody>
+            <a:bodyPr rtlCol="0" anchor="ctr"/>
+            <a:lstStyle/>
+            <a:p>
+              <a:pPr marL="0" marR="0" lvl="0" indent="0" algn="ctr" defTabSz="914400" eaLnBrk="1" fontAlgn="auto" latinLnBrk="0" hangingPunct="1">
+                <a:lnSpc>
+                  <a:spcPct val="100000"/>
+                </a:lnSpc>
+                <a:spcBef>
+                  <a:spcPts val="0"/>
+                </a:spcBef>
+                <a:spcAft>
+                  <a:spcPts val="0"/>
+                </a:spcAft>
+                <a:buClrTx/>
+                <a:buSzTx/>
+                <a:buFontTx/>
+                <a:buNone/>
+                <a:tabLst/>
+                <a:defRPr/>
+              </a:pPr>
+              <a:endParaRPr kumimoji="0" lang="nl-NL" sz="1800" b="0" i="0" u="none" strike="noStrike" kern="0" cap="none" spc="0" normalizeH="0" baseline="0" noProof="0">
+                <a:ln>
+                  <a:noFill/>
+                </a:ln>
+                <a:solidFill>
+                  <a:prstClr val="white"/>
+                </a:solidFill>
+                <a:effectLst/>
+                <a:uLnTx/>
+                <a:uFillTx/>
+                <a:latin typeface="Segoe UI Light"/>
+                <a:ea typeface="+mn-ea"/>
+                <a:cs typeface="+mn-cs"/>
+              </a:endParaRPr>
+            </a:p>
+          </p:txBody>
+        </p:sp>
+        <p:sp>
+          <p:nvSpPr>
+            <p:cNvPr id="85" name="TextBox 84">
+              <a:extLst>
+                <a:ext uri="{FF2B5EF4-FFF2-40B4-BE49-F238E27FC236}">
+                  <a16:creationId xmlns:a16="http://schemas.microsoft.com/office/drawing/2014/main" id="{43D8B686-9B69-7335-BE66-986BFE348E30}"/>
+                </a:ext>
+              </a:extLst>
+            </p:cNvPr>
+            <p:cNvSpPr txBox="1"/>
+            <p:nvPr/>
+          </p:nvSpPr>
+          <p:spPr>
+            <a:xfrm>
+              <a:off x="3561592" y="5345092"/>
+              <a:ext cx="726481" cy="272062"/>
+            </a:xfrm>
+            <a:prstGeom prst="rect">
+              <a:avLst/>
+            </a:prstGeom>
+            <a:noFill/>
+          </p:spPr>
+          <p:txBody>
+            <a:bodyPr wrap="none" rtlCol="0">
+              <a:spAutoFit/>
+            </a:bodyPr>
+            <a:lstStyle/>
+            <a:p>
+              <a:pPr marL="0" marR="0" lvl="0" indent="0" algn="ctr" defTabSz="914400" eaLnBrk="1" fontAlgn="auto" latinLnBrk="0" hangingPunct="1">
+                <a:lnSpc>
+                  <a:spcPct val="150000"/>
+                </a:lnSpc>
+                <a:spcBef>
+                  <a:spcPts val="0"/>
+                </a:spcBef>
+                <a:spcAft>
+                  <a:spcPts val="0"/>
+                </a:spcAft>
+                <a:buClrTx/>
+                <a:buSzTx/>
+                <a:buFontTx/>
+                <a:buNone/>
+                <a:tabLst/>
+                <a:defRPr/>
+              </a:pPr>
+              <a:r>
+                <a:rPr kumimoji="0" lang="en-US" sz="900" b="0" i="0" u="none" strike="noStrike" kern="0" cap="none" spc="0" normalizeH="0" baseline="0" noProof="0" dirty="0">
+                  <a:ln>
+                    <a:noFill/>
+                  </a:ln>
+                  <a:solidFill>
+                    <a:prstClr val="black"/>
+                  </a:solidFill>
+                  <a:effectLst/>
+                  <a:uLnTx/>
+                  <a:uFillTx/>
+                  <a:latin typeface="Verdana" panose="020B0604030504040204" pitchFamily="34" charset="0"/>
+                  <a:ea typeface="Verdana" panose="020B0604030504040204" pitchFamily="34" charset="0"/>
+                </a:rPr>
+                <a:t>Database</a:t>
+              </a:r>
+            </a:p>
+          </p:txBody>
+        </p:sp>
+        <p:sp>
+          <p:nvSpPr>
+            <p:cNvPr id="88" name="TextBox 87">
+              <a:extLst>
+                <a:ext uri="{FF2B5EF4-FFF2-40B4-BE49-F238E27FC236}">
+                  <a16:creationId xmlns:a16="http://schemas.microsoft.com/office/drawing/2014/main" id="{E5EA8912-E7D9-21D5-9A82-60EBF667D82C}"/>
+                </a:ext>
+              </a:extLst>
+            </p:cNvPr>
+            <p:cNvSpPr txBox="1"/>
+            <p:nvPr/>
+          </p:nvSpPr>
+          <p:spPr>
+            <a:xfrm>
+              <a:off x="2787015" y="5262879"/>
+              <a:ext cx="673582" cy="461665"/>
+            </a:xfrm>
+            <a:prstGeom prst="rect">
+              <a:avLst/>
+            </a:prstGeom>
+            <a:noFill/>
+          </p:spPr>
+          <p:txBody>
+            <a:bodyPr wrap="none" rtlCol="0">
+              <a:spAutoFit/>
+            </a:bodyPr>
+            <a:lstStyle/>
+            <a:p>
+              <a:pPr marL="0" marR="0" lvl="0" indent="0" algn="ctr" defTabSz="914400" eaLnBrk="1" fontAlgn="auto" latinLnBrk="0" hangingPunct="1">
+                <a:lnSpc>
+                  <a:spcPct val="100000"/>
+                </a:lnSpc>
+                <a:spcBef>
+                  <a:spcPts val="0"/>
+                </a:spcBef>
+                <a:spcAft>
+                  <a:spcPts val="0"/>
+                </a:spcAft>
+                <a:buClrTx/>
+                <a:buSzTx/>
+                <a:buFontTx/>
+                <a:buNone/>
+                <a:tabLst/>
+                <a:defRPr/>
+              </a:pPr>
+              <a:r>
+                <a:rPr kumimoji="0" lang="en-US" sz="800" b="0" i="0" u="none" strike="noStrike" kern="0" cap="none" spc="0" normalizeH="0" baseline="0" noProof="0" dirty="0">
+                  <a:ln>
+                    <a:noFill/>
+                  </a:ln>
+                  <a:solidFill>
+                    <a:prstClr val="black"/>
+                  </a:solidFill>
+                  <a:effectLst/>
+                  <a:uLnTx/>
+                  <a:uFillTx/>
+                  <a:latin typeface="Verdana" panose="020B0604030504040204" pitchFamily="34" charset="0"/>
+                  <a:ea typeface="Verdana" panose="020B0604030504040204" pitchFamily="34" charset="0"/>
+                </a:rPr>
+                <a:t>Chunking</a:t>
+              </a:r>
+            </a:p>
+            <a:p>
+              <a:pPr marL="0" marR="0" lvl="0" indent="0" algn="ctr" defTabSz="914400" eaLnBrk="1" fontAlgn="auto" latinLnBrk="0" hangingPunct="1">
+                <a:lnSpc>
+                  <a:spcPct val="100000"/>
+                </a:lnSpc>
+                <a:spcBef>
+                  <a:spcPts val="0"/>
+                </a:spcBef>
+                <a:spcAft>
+                  <a:spcPts val="0"/>
+                </a:spcAft>
+                <a:buClrTx/>
+                <a:buSzTx/>
+                <a:buFontTx/>
+                <a:buNone/>
+                <a:tabLst/>
+                <a:defRPr/>
+              </a:pPr>
+              <a:r>
+                <a:rPr kumimoji="0" lang="en-US" sz="800" b="0" i="0" u="none" strike="noStrike" kern="0" cap="none" spc="0" normalizeH="0" baseline="0" noProof="0" dirty="0">
+                  <a:ln>
+                    <a:noFill/>
+                  </a:ln>
+                  <a:solidFill>
+                    <a:prstClr val="black"/>
+                  </a:solidFill>
+                  <a:effectLst/>
+                  <a:uLnTx/>
+                  <a:uFillTx/>
+                  <a:latin typeface="Verdana" panose="020B0604030504040204" pitchFamily="34" charset="0"/>
+                  <a:ea typeface="Verdana" panose="020B0604030504040204" pitchFamily="34" charset="0"/>
+                </a:rPr>
+                <a:t>&amp;</a:t>
+              </a:r>
+            </a:p>
+            <a:p>
+              <a:pPr marL="0" marR="0" lvl="0" indent="0" algn="ctr" defTabSz="914400" eaLnBrk="1" fontAlgn="auto" latinLnBrk="0" hangingPunct="1">
+                <a:lnSpc>
+                  <a:spcPct val="100000"/>
+                </a:lnSpc>
+                <a:spcBef>
+                  <a:spcPts val="0"/>
+                </a:spcBef>
+                <a:spcAft>
+                  <a:spcPts val="0"/>
+                </a:spcAft>
+                <a:buClrTx/>
+                <a:buSzTx/>
+                <a:buFontTx/>
+                <a:buNone/>
+                <a:tabLst/>
+                <a:defRPr/>
+              </a:pPr>
+              <a:r>
+                <a:rPr kumimoji="0" lang="en-US" sz="800" b="0" i="0" u="none" strike="noStrike" kern="0" cap="none" spc="0" normalizeH="0" baseline="0" noProof="0" dirty="0">
+                  <a:ln>
+                    <a:noFill/>
+                  </a:ln>
+                  <a:solidFill>
+                    <a:prstClr val="black"/>
+                  </a:solidFill>
+                  <a:effectLst/>
+                  <a:uLnTx/>
+                  <a:uFillTx/>
+                  <a:latin typeface="Verdana" panose="020B0604030504040204" pitchFamily="34" charset="0"/>
+                  <a:ea typeface="Verdana" panose="020B0604030504040204" pitchFamily="34" charset="0"/>
+                </a:rPr>
+                <a:t>Indexing</a:t>
+              </a:r>
+              <a:endParaRPr kumimoji="0" lang="nl-NL" sz="800" b="0" i="0" u="none" strike="noStrike" kern="0" cap="none" spc="0" normalizeH="0" baseline="0" noProof="0" dirty="0" err="1">
+                <a:ln>
+                  <a:noFill/>
+                </a:ln>
+                <a:solidFill>
+                  <a:prstClr val="black"/>
+                </a:solidFill>
+                <a:effectLst/>
+                <a:uLnTx/>
+                <a:uFillTx/>
+                <a:latin typeface="Verdana" panose="020B0604030504040204" pitchFamily="34" charset="0"/>
+                <a:ea typeface="Verdana" panose="020B0604030504040204" pitchFamily="34" charset="0"/>
+              </a:endParaRPr>
+            </a:p>
+          </p:txBody>
+        </p:sp>
+        <p:sp>
+          <p:nvSpPr>
+            <p:cNvPr id="89" name="Arrow: Right 88">
+              <a:extLst>
+                <a:ext uri="{FF2B5EF4-FFF2-40B4-BE49-F238E27FC236}">
+                  <a16:creationId xmlns:a16="http://schemas.microsoft.com/office/drawing/2014/main" id="{2CD4A441-3FAE-4676-583D-4F2D48522C99}"/>
+                </a:ext>
+              </a:extLst>
+            </p:cNvPr>
+            <p:cNvSpPr/>
+            <p:nvPr/>
+          </p:nvSpPr>
+          <p:spPr>
+            <a:xfrm>
+              <a:off x="2269137" y="5464428"/>
+              <a:ext cx="293409" cy="172063"/>
+            </a:xfrm>
+            <a:prstGeom prst="rightArrow">
+              <a:avLst/>
+            </a:prstGeom>
+            <a:solidFill>
+              <a:sysClr val="window" lastClr="FFFFFF">
+                <a:lumMod val="95000"/>
+              </a:sysClr>
+            </a:solidFill>
+            <a:ln w="9525" cap="flat" cmpd="sng" algn="ctr">
+              <a:solidFill>
+                <a:sysClr val="windowText" lastClr="000000"/>
+              </a:solidFill>
+              <a:prstDash val="solid"/>
+              <a:miter lim="800000"/>
+            </a:ln>
+            <a:effectLst/>
+          </p:spPr>
+          <p:txBody>
+            <a:bodyPr rtlCol="0" anchor="ctr"/>
+            <a:lstStyle/>
+            <a:p>
+              <a:pPr marL="0" marR="0" lvl="0" indent="0" algn="ctr" defTabSz="914400" eaLnBrk="1" fontAlgn="auto" latinLnBrk="0" hangingPunct="1">
+                <a:lnSpc>
+                  <a:spcPct val="100000"/>
+                </a:lnSpc>
+                <a:spcBef>
+                  <a:spcPts val="0"/>
+                </a:spcBef>
+                <a:spcAft>
+                  <a:spcPts val="0"/>
+                </a:spcAft>
+                <a:buClrTx/>
+                <a:buSzTx/>
+                <a:buFontTx/>
+                <a:buNone/>
+                <a:tabLst/>
+                <a:defRPr/>
+              </a:pPr>
+              <a:endParaRPr kumimoji="0" lang="nl-NL" sz="1800" b="0" i="0" u="none" strike="noStrike" kern="0" cap="none" spc="0" normalizeH="0" baseline="0" noProof="0">
+                <a:ln>
+                  <a:noFill/>
+                </a:ln>
+                <a:solidFill>
+                  <a:prstClr val="white"/>
+                </a:solidFill>
+                <a:effectLst/>
+                <a:uLnTx/>
+                <a:uFillTx/>
+                <a:latin typeface="Segoe UI Light"/>
+                <a:ea typeface="+mn-ea"/>
+                <a:cs typeface="+mn-cs"/>
+              </a:endParaRPr>
+            </a:p>
+          </p:txBody>
+        </p:sp>
+        <p:sp>
+          <p:nvSpPr>
+            <p:cNvPr id="90" name="Rectangle 89">
+              <a:extLst>
+                <a:ext uri="{FF2B5EF4-FFF2-40B4-BE49-F238E27FC236}">
+                  <a16:creationId xmlns:a16="http://schemas.microsoft.com/office/drawing/2014/main" id="{1C70AB30-1F51-FACE-8DA1-3640E278B04B}"/>
+                </a:ext>
+              </a:extLst>
+            </p:cNvPr>
+            <p:cNvSpPr/>
+            <p:nvPr/>
+          </p:nvSpPr>
+          <p:spPr>
+            <a:xfrm>
+              <a:off x="2686020" y="4929447"/>
+              <a:ext cx="1794540" cy="1242027"/>
+            </a:xfrm>
+            <a:prstGeom prst="rect">
+              <a:avLst/>
+            </a:prstGeom>
+            <a:noFill/>
+            <a:ln w="12700" cap="flat" cmpd="sng" algn="ctr">
+              <a:solidFill>
+                <a:srgbClr val="C4232A">
+                  <a:lumMod val="60000"/>
+                  <a:lumOff val="40000"/>
+                </a:srgbClr>
+              </a:solidFill>
+              <a:prstDash val="dash"/>
+              <a:miter lim="800000"/>
+            </a:ln>
+            <a:effectLst/>
+          </p:spPr>
+          <p:txBody>
+            <a:bodyPr rtlCol="0" anchor="ctr"/>
+            <a:lstStyle/>
+            <a:p>
+              <a:pPr marL="0" marR="0" lvl="0" indent="0" algn="ctr" defTabSz="914400" eaLnBrk="1" fontAlgn="auto" latinLnBrk="0" hangingPunct="1">
+                <a:lnSpc>
+                  <a:spcPct val="100000"/>
+                </a:lnSpc>
+                <a:spcBef>
+                  <a:spcPts val="0"/>
+                </a:spcBef>
+                <a:spcAft>
+                  <a:spcPts val="0"/>
+                </a:spcAft>
+                <a:buClrTx/>
+                <a:buSzTx/>
+                <a:buFontTx/>
+                <a:buNone/>
+                <a:tabLst/>
+                <a:defRPr/>
+              </a:pPr>
+              <a:endParaRPr kumimoji="0" lang="nl-NL" sz="1800" b="0" i="0" u="none" strike="noStrike" kern="0" cap="none" spc="0" normalizeH="0" baseline="0" noProof="0">
+                <a:ln>
+                  <a:noFill/>
+                </a:ln>
+                <a:solidFill>
+                  <a:prstClr val="white"/>
+                </a:solidFill>
+                <a:effectLst/>
+                <a:uLnTx/>
+                <a:uFillTx/>
+                <a:latin typeface="Segoe UI Light"/>
+                <a:ea typeface="+mn-ea"/>
+                <a:cs typeface="+mn-cs"/>
+              </a:endParaRPr>
+            </a:p>
+          </p:txBody>
+        </p:sp>
+      </p:grpSp>
+      <p:pic>
+        <p:nvPicPr>
+          <p:cNvPr id="91" name="Picture 90">
+            <a:extLst>
+              <a:ext uri="{FF2B5EF4-FFF2-40B4-BE49-F238E27FC236}">
+                <a16:creationId xmlns:a16="http://schemas.microsoft.com/office/drawing/2014/main" id="{5BBEF78F-E7EA-F270-FBE4-627774415814}"/>
+              </a:ext>
+            </a:extLst>
+          </p:cNvPr>
+          <p:cNvPicPr>
+            <a:picLocks noChangeAspect="1"/>
+          </p:cNvPicPr>
+          <p:nvPr/>
+        </p:nvPicPr>
+        <p:blipFill>
+          <a:blip r:embed="rId2">
+            <a:clrChange>
+              <a:clrFrom>
+                <a:srgbClr val="F4F4F6"/>
+              </a:clrFrom>
+              <a:clrTo>
+                <a:srgbClr val="F4F4F6">
+                  <a:alpha val="0"/>
+                </a:srgbClr>
+              </a:clrTo>
+            </a:clrChange>
+          </a:blip>
+          <a:stretch>
+            <a:fillRect/>
+          </a:stretch>
+        </p:blipFill>
+        <p:spPr>
+          <a:xfrm>
+            <a:off x="3191613" y="2684787"/>
+            <a:ext cx="370435" cy="349023"/>
+          </a:xfrm>
+          <a:prstGeom prst="rect">
+            <a:avLst/>
+          </a:prstGeom>
+        </p:spPr>
+      </p:pic>
+      <p:cxnSp>
+        <p:nvCxnSpPr>
+          <p:cNvPr id="94" name="Straight Arrow Connector 93">
+            <a:extLst>
+              <a:ext uri="{FF2B5EF4-FFF2-40B4-BE49-F238E27FC236}">
+                <a16:creationId xmlns:a16="http://schemas.microsoft.com/office/drawing/2014/main" id="{0BD1CE13-781E-90D1-4D30-DAB668CE82F4}"/>
+              </a:ext>
+            </a:extLst>
+          </p:cNvPr>
+          <p:cNvCxnSpPr>
+            <a:cxnSpLocks/>
+          </p:cNvCxnSpPr>
+          <p:nvPr/>
+        </p:nvCxnSpPr>
+        <p:spPr>
+          <a:xfrm flipV="1">
+            <a:off x="3122685" y="2731184"/>
+            <a:ext cx="0" cy="274320"/>
+          </a:xfrm>
+          <a:prstGeom prst="straightConnector1">
+            <a:avLst/>
+          </a:prstGeom>
+          <a:ln w="19050" cap="flat" cmpd="sng" algn="ctr">
+            <a:solidFill>
+              <a:schemeClr val="accent3"/>
+            </a:solidFill>
+            <a:prstDash val="solid"/>
+            <a:round/>
+            <a:headEnd type="none" w="med" len="med"/>
+            <a:tailEnd type="arrow" w="med" len="med"/>
+          </a:ln>
+        </p:spPr>
+        <p:style>
+          <a:lnRef idx="0">
+            <a:scrgbClr r="0" g="0" b="0"/>
+          </a:lnRef>
+          <a:fillRef idx="0">
+            <a:scrgbClr r="0" g="0" b="0"/>
+          </a:fillRef>
+          <a:effectRef idx="0">
+            <a:scrgbClr r="0" g="0" b="0"/>
+          </a:effectRef>
+          <a:fontRef idx="minor">
+            <a:schemeClr val="tx1"/>
+          </a:fontRef>
+        </p:style>
+      </p:cxnSp>
+      <p:grpSp>
+        <p:nvGrpSpPr>
+          <p:cNvPr id="96" name="Group 95">
+            <a:extLst>
+              <a:ext uri="{FF2B5EF4-FFF2-40B4-BE49-F238E27FC236}">
+                <a16:creationId xmlns:a16="http://schemas.microsoft.com/office/drawing/2014/main" id="{D570DF7C-8A62-C81A-43B3-4DFD59F2EB4D}"/>
+              </a:ext>
+            </a:extLst>
+          </p:cNvPr>
+          <p:cNvGrpSpPr/>
+          <p:nvPr/>
+        </p:nvGrpSpPr>
+        <p:grpSpPr>
+          <a:xfrm>
+            <a:off x="2419147" y="1748558"/>
+            <a:ext cx="1862635" cy="584775"/>
+            <a:chOff x="2961190" y="3065338"/>
+            <a:chExt cx="1862635" cy="584775"/>
+          </a:xfrm>
+        </p:grpSpPr>
+        <p:sp>
+          <p:nvSpPr>
+            <p:cNvPr id="98" name="Rectangle: Rounded Corners 97">
+              <a:extLst>
+                <a:ext uri="{FF2B5EF4-FFF2-40B4-BE49-F238E27FC236}">
+                  <a16:creationId xmlns:a16="http://schemas.microsoft.com/office/drawing/2014/main" id="{7C39A6FF-D997-AF5F-F5CD-D5096C6C845F}"/>
+                </a:ext>
+              </a:extLst>
+            </p:cNvPr>
+            <p:cNvSpPr/>
+            <p:nvPr/>
+          </p:nvSpPr>
+          <p:spPr>
+            <a:xfrm>
+              <a:off x="3010964" y="3067514"/>
+              <a:ext cx="1812861" cy="548639"/>
+            </a:xfrm>
+            <a:prstGeom prst="roundRect">
+              <a:avLst/>
+            </a:prstGeom>
+            <a:solidFill>
+              <a:srgbClr val="FFC000">
+                <a:alpha val="24000"/>
+              </a:srgbClr>
+            </a:solidFill>
+            <a:ln w="12700" cap="flat" cmpd="sng" algn="ctr">
+              <a:solidFill>
+                <a:srgbClr val="3C9BD5">
+                  <a:shade val="15000"/>
+                </a:srgbClr>
+              </a:solidFill>
+              <a:prstDash val="solid"/>
+              <a:miter lim="800000"/>
+            </a:ln>
+            <a:effectLst/>
+          </p:spPr>
+          <p:txBody>
+            <a:bodyPr rtlCol="0" anchor="ctr"/>
+            <a:lstStyle/>
+            <a:p>
+              <a:pPr marL="0" marR="0" lvl="0" indent="0" algn="ctr" defTabSz="914400" eaLnBrk="1" fontAlgn="auto" latinLnBrk="0" hangingPunct="1">
+                <a:lnSpc>
+                  <a:spcPct val="100000"/>
+                </a:lnSpc>
+                <a:spcBef>
+                  <a:spcPts val="0"/>
+                </a:spcBef>
+                <a:spcAft>
+                  <a:spcPts val="0"/>
+                </a:spcAft>
+                <a:buClrTx/>
+                <a:buSzTx/>
+                <a:buFontTx/>
+                <a:buNone/>
+                <a:tabLst/>
+                <a:defRPr/>
+              </a:pPr>
+              <a:endParaRPr kumimoji="0" lang="nl-NL" sz="1800" b="0" i="0" u="none" strike="noStrike" kern="0" cap="none" spc="0" normalizeH="0" baseline="0" noProof="0">
+                <a:ln>
+                  <a:noFill/>
+                </a:ln>
+                <a:solidFill>
+                  <a:prstClr val="white"/>
+                </a:solidFill>
+                <a:effectLst/>
+                <a:uLnTx/>
+                <a:uFillTx/>
+                <a:latin typeface="Segoe UI Light"/>
+                <a:ea typeface="+mn-ea"/>
+                <a:cs typeface="+mn-cs"/>
+              </a:endParaRPr>
+            </a:p>
+          </p:txBody>
+        </p:sp>
+        <p:sp>
+          <p:nvSpPr>
+            <p:cNvPr id="99" name="TextBox 98">
+              <a:extLst>
+                <a:ext uri="{FF2B5EF4-FFF2-40B4-BE49-F238E27FC236}">
+                  <a16:creationId xmlns:a16="http://schemas.microsoft.com/office/drawing/2014/main" id="{7E0F777C-C89C-F41A-DFA9-9060AD5A2B3D}"/>
+                </a:ext>
+              </a:extLst>
+            </p:cNvPr>
+            <p:cNvSpPr txBox="1"/>
+            <p:nvPr/>
+          </p:nvSpPr>
+          <p:spPr>
+            <a:xfrm>
+              <a:off x="2961190" y="3065338"/>
+              <a:ext cx="1647036" cy="584775"/>
+            </a:xfrm>
+            <a:prstGeom prst="rect">
+              <a:avLst/>
+            </a:prstGeom>
+            <a:noFill/>
+          </p:spPr>
+          <p:txBody>
+            <a:bodyPr wrap="square" rtlCol="0">
+              <a:spAutoFit/>
+            </a:bodyPr>
+            <a:lstStyle/>
+            <a:p>
+              <a:pPr marL="0" marR="0" lvl="0" indent="0" defTabSz="914400" eaLnBrk="1" fontAlgn="auto" latinLnBrk="0" hangingPunct="1">
+                <a:lnSpc>
+                  <a:spcPct val="100000"/>
+                </a:lnSpc>
+                <a:spcBef>
+                  <a:spcPts val="0"/>
+                </a:spcBef>
+                <a:spcAft>
+                  <a:spcPts val="0"/>
+                </a:spcAft>
+                <a:buClrTx/>
+                <a:buSzTx/>
+                <a:buFontTx/>
+                <a:buNone/>
+                <a:tabLst/>
+                <a:defRPr/>
+              </a:pPr>
+              <a:r>
+                <a:rPr kumimoji="0" lang="en-US" sz="800" b="0" i="0" u="none" strike="noStrike" kern="0" cap="none" spc="0" normalizeH="0" baseline="0" noProof="0" dirty="0">
+                  <a:ln>
+                    <a:noFill/>
+                  </a:ln>
+                  <a:solidFill>
+                    <a:prstClr val="black"/>
+                  </a:solidFill>
+                  <a:effectLst/>
+                  <a:uLnTx/>
+                  <a:uFillTx/>
+                  <a:latin typeface="Verdana" panose="020B0604030504040204" pitchFamily="34" charset="0"/>
+                  <a:ea typeface="Verdana" panose="020B0604030504040204" pitchFamily="34" charset="0"/>
+                </a:rPr>
+                <a:t>- Retrieve last N summaries</a:t>
+              </a:r>
+            </a:p>
+            <a:p>
+              <a:pPr marL="0" marR="0" lvl="0" indent="0" defTabSz="914400" eaLnBrk="1" fontAlgn="auto" latinLnBrk="0" hangingPunct="1">
+                <a:lnSpc>
+                  <a:spcPct val="100000"/>
+                </a:lnSpc>
+                <a:spcBef>
+                  <a:spcPts val="0"/>
+                </a:spcBef>
+                <a:spcAft>
+                  <a:spcPts val="0"/>
+                </a:spcAft>
+                <a:buClrTx/>
+                <a:buSzTx/>
+                <a:buFontTx/>
+                <a:buNone/>
+                <a:tabLst/>
+                <a:defRPr/>
+              </a:pPr>
+              <a:r>
+                <a:rPr lang="en-US" sz="800" kern="0" dirty="0">
+                  <a:solidFill>
+                    <a:prstClr val="black"/>
+                  </a:solidFill>
+                  <a:latin typeface="Verdana" panose="020B0604030504040204" pitchFamily="34" charset="0"/>
+                  <a:ea typeface="Verdana" panose="020B0604030504040204" pitchFamily="34" charset="0"/>
+                </a:rPr>
+                <a:t>- Add current chunk</a:t>
+              </a:r>
+            </a:p>
+            <a:p>
+              <a:pPr marL="0" marR="0" lvl="0" indent="0" defTabSz="914400" eaLnBrk="1" fontAlgn="auto" latinLnBrk="0" hangingPunct="1">
+                <a:lnSpc>
+                  <a:spcPct val="100000"/>
+                </a:lnSpc>
+                <a:spcBef>
+                  <a:spcPts val="0"/>
+                </a:spcBef>
+                <a:spcAft>
+                  <a:spcPts val="0"/>
+                </a:spcAft>
+                <a:buClrTx/>
+                <a:buSzTx/>
+                <a:buFontTx/>
+                <a:buNone/>
+                <a:tabLst/>
+                <a:defRPr/>
+              </a:pPr>
+              <a:r>
+                <a:rPr kumimoji="0" lang="nl-NL" sz="800" b="0" i="0" u="none" strike="noStrike" kern="0" cap="none" spc="0" normalizeH="0" baseline="0" noProof="0" dirty="0">
+                  <a:ln>
+                    <a:noFill/>
+                  </a:ln>
+                  <a:solidFill>
+                    <a:prstClr val="black"/>
+                  </a:solidFill>
+                  <a:effectLst/>
+                  <a:uLnTx/>
+                  <a:uFillTx/>
+                  <a:latin typeface="Verdana" panose="020B0604030504040204" pitchFamily="34" charset="0"/>
+                  <a:ea typeface="Verdana" panose="020B0604030504040204" pitchFamily="34" charset="0"/>
+                </a:rPr>
+                <a:t>- Add Instructions + Query</a:t>
+              </a:r>
+            </a:p>
+            <a:p>
+              <a:pPr marL="0" marR="0" lvl="0" indent="0" defTabSz="914400" eaLnBrk="1" fontAlgn="auto" latinLnBrk="0" hangingPunct="1">
+                <a:lnSpc>
+                  <a:spcPct val="100000"/>
+                </a:lnSpc>
+                <a:spcBef>
+                  <a:spcPts val="0"/>
+                </a:spcBef>
+                <a:spcAft>
+                  <a:spcPts val="0"/>
+                </a:spcAft>
+                <a:buClrTx/>
+                <a:buSzTx/>
+                <a:buFontTx/>
+                <a:buNone/>
+                <a:tabLst/>
+                <a:defRPr/>
+              </a:pPr>
+              <a:r>
+                <a:rPr kumimoji="0" lang="nl-NL" sz="800" b="0" i="0" u="none" strike="noStrike" kern="0" cap="none" spc="0" normalizeH="0" baseline="0" noProof="0" dirty="0">
+                  <a:ln>
+                    <a:noFill/>
+                  </a:ln>
+                  <a:solidFill>
+                    <a:prstClr val="black"/>
+                  </a:solidFill>
+                  <a:effectLst/>
+                  <a:uLnTx/>
+                  <a:uFillTx/>
+                  <a:latin typeface="Verdana" panose="020B0604030504040204" pitchFamily="34" charset="0"/>
+                  <a:ea typeface="Verdana" panose="020B0604030504040204" pitchFamily="34" charset="0"/>
+                </a:rPr>
+                <a:t>- Send Prompt to LLM</a:t>
+              </a:r>
+            </a:p>
+          </p:txBody>
+        </p:sp>
+      </p:grpSp>
+      <p:grpSp>
+        <p:nvGrpSpPr>
+          <p:cNvPr id="101" name="Group 100">
+            <a:extLst>
+              <a:ext uri="{FF2B5EF4-FFF2-40B4-BE49-F238E27FC236}">
+                <a16:creationId xmlns:a16="http://schemas.microsoft.com/office/drawing/2014/main" id="{8BE059F2-1350-E65E-EA76-162F7D1512F8}"/>
+              </a:ext>
+            </a:extLst>
+          </p:cNvPr>
+          <p:cNvGrpSpPr/>
+          <p:nvPr/>
+        </p:nvGrpSpPr>
+        <p:grpSpPr>
+          <a:xfrm>
+            <a:off x="4477965" y="1750734"/>
+            <a:ext cx="1040927" cy="548639"/>
+            <a:chOff x="3160592" y="3067514"/>
+            <a:chExt cx="1297881" cy="548639"/>
+          </a:xfrm>
+        </p:grpSpPr>
+        <p:sp>
+          <p:nvSpPr>
+            <p:cNvPr id="103" name="Rectangle: Rounded Corners 102">
+              <a:extLst>
+                <a:ext uri="{FF2B5EF4-FFF2-40B4-BE49-F238E27FC236}">
+                  <a16:creationId xmlns:a16="http://schemas.microsoft.com/office/drawing/2014/main" id="{BF6A94C0-1457-5884-E621-A61C8C7D2DC8}"/>
+                </a:ext>
+              </a:extLst>
+            </p:cNvPr>
+            <p:cNvSpPr/>
+            <p:nvPr/>
+          </p:nvSpPr>
+          <p:spPr>
+            <a:xfrm>
+              <a:off x="3195952" y="3067514"/>
+              <a:ext cx="1109383" cy="548639"/>
+            </a:xfrm>
+            <a:prstGeom prst="roundRect">
+              <a:avLst/>
+            </a:prstGeom>
+            <a:solidFill>
+              <a:srgbClr val="FFC000">
+                <a:alpha val="24000"/>
+              </a:srgbClr>
+            </a:solidFill>
+            <a:ln w="12700" cap="flat" cmpd="sng" algn="ctr">
+              <a:solidFill>
+                <a:srgbClr val="3C9BD5">
+                  <a:shade val="15000"/>
+                </a:srgbClr>
+              </a:solidFill>
+              <a:prstDash val="solid"/>
+              <a:miter lim="800000"/>
+            </a:ln>
+            <a:effectLst/>
+          </p:spPr>
+          <p:txBody>
+            <a:bodyPr rtlCol="0" anchor="ctr"/>
+            <a:lstStyle/>
+            <a:p>
+              <a:pPr marL="0" marR="0" lvl="0" indent="0" algn="ctr" defTabSz="914400" eaLnBrk="1" fontAlgn="auto" latinLnBrk="0" hangingPunct="1">
+                <a:lnSpc>
+                  <a:spcPct val="100000"/>
+                </a:lnSpc>
+                <a:spcBef>
+                  <a:spcPts val="0"/>
+                </a:spcBef>
+                <a:spcAft>
+                  <a:spcPts val="0"/>
+                </a:spcAft>
+                <a:buClrTx/>
+                <a:buSzTx/>
+                <a:buFontTx/>
+                <a:buNone/>
+                <a:tabLst/>
+                <a:defRPr/>
+              </a:pPr>
+              <a:endParaRPr kumimoji="0" lang="nl-NL" sz="1800" b="0" i="0" u="none" strike="noStrike" kern="0" cap="none" spc="0" normalizeH="0" baseline="0" noProof="0">
+                <a:ln>
+                  <a:noFill/>
+                </a:ln>
+                <a:solidFill>
+                  <a:prstClr val="white"/>
+                </a:solidFill>
+                <a:effectLst/>
+                <a:uLnTx/>
+                <a:uFillTx/>
+                <a:latin typeface="Segoe UI Light"/>
+                <a:ea typeface="+mn-ea"/>
+                <a:cs typeface="+mn-cs"/>
+              </a:endParaRPr>
+            </a:p>
+          </p:txBody>
+        </p:sp>
+        <p:sp>
+          <p:nvSpPr>
+            <p:cNvPr id="104" name="TextBox 103">
+              <a:extLst>
+                <a:ext uri="{FF2B5EF4-FFF2-40B4-BE49-F238E27FC236}">
+                  <a16:creationId xmlns:a16="http://schemas.microsoft.com/office/drawing/2014/main" id="{67FA9D7D-D8FF-582F-377C-9879BCDCA71E}"/>
+                </a:ext>
+              </a:extLst>
+            </p:cNvPr>
+            <p:cNvSpPr txBox="1"/>
+            <p:nvPr/>
+          </p:nvSpPr>
+          <p:spPr>
+            <a:xfrm>
+              <a:off x="3160592" y="3163175"/>
+              <a:ext cx="1297881" cy="338554"/>
+            </a:xfrm>
+            <a:prstGeom prst="rect">
+              <a:avLst/>
+            </a:prstGeom>
+            <a:noFill/>
+          </p:spPr>
+          <p:txBody>
+            <a:bodyPr wrap="square" rtlCol="0">
+              <a:spAutoFit/>
+            </a:bodyPr>
+            <a:lstStyle/>
+            <a:p>
+              <a:pPr marL="0" marR="0" lvl="0" indent="0" defTabSz="914400" eaLnBrk="1" fontAlgn="auto" latinLnBrk="0" hangingPunct="1">
+                <a:lnSpc>
+                  <a:spcPct val="100000"/>
+                </a:lnSpc>
+                <a:spcBef>
+                  <a:spcPts val="0"/>
+                </a:spcBef>
+                <a:spcAft>
+                  <a:spcPts val="0"/>
+                </a:spcAft>
+                <a:buClrTx/>
+                <a:buSzTx/>
+                <a:buFontTx/>
+                <a:buNone/>
+                <a:tabLst/>
+                <a:defRPr/>
+              </a:pPr>
+              <a:r>
+                <a:rPr kumimoji="0" lang="en-US" sz="800" b="0" i="0" u="none" strike="noStrike" kern="0" cap="none" spc="0" normalizeH="0" baseline="0" noProof="0" dirty="0">
+                  <a:ln>
+                    <a:noFill/>
+                  </a:ln>
+                  <a:solidFill>
+                    <a:prstClr val="black"/>
+                  </a:solidFill>
+                  <a:effectLst/>
+                  <a:uLnTx/>
+                  <a:uFillTx/>
+                  <a:latin typeface="Verdana" panose="020B0604030504040204" pitchFamily="34" charset="0"/>
+                  <a:ea typeface="Verdana" panose="020B0604030504040204" pitchFamily="34" charset="0"/>
+                </a:rPr>
+                <a:t>Append partial result to list</a:t>
+              </a:r>
+              <a:endParaRPr kumimoji="0" lang="nl-NL" sz="800" b="0" i="0" u="none" strike="noStrike" kern="0" cap="none" spc="0" normalizeH="0" baseline="0" noProof="0" dirty="0" err="1">
+                <a:ln>
+                  <a:noFill/>
+                </a:ln>
+                <a:solidFill>
+                  <a:prstClr val="black"/>
+                </a:solidFill>
+                <a:effectLst/>
+                <a:uLnTx/>
+                <a:uFillTx/>
+                <a:latin typeface="Verdana" panose="020B0604030504040204" pitchFamily="34" charset="0"/>
+                <a:ea typeface="Verdana" panose="020B0604030504040204" pitchFamily="34" charset="0"/>
+              </a:endParaRPr>
+            </a:p>
+          </p:txBody>
+        </p:sp>
+      </p:grpSp>
+      <p:pic>
+        <p:nvPicPr>
+          <p:cNvPr id="108" name="Picture 2" descr="Bot (informática) - EcuRed">
+            <a:extLst>
+              <a:ext uri="{FF2B5EF4-FFF2-40B4-BE49-F238E27FC236}">
+                <a16:creationId xmlns:a16="http://schemas.microsoft.com/office/drawing/2014/main" id="{38E5DCFD-FE47-A683-79A5-08298210F18D}"/>
+              </a:ext>
+            </a:extLst>
+          </p:cNvPr>
+          <p:cNvPicPr>
+            <a:picLocks noChangeAspect="1" noChangeArrowheads="1"/>
+          </p:cNvPicPr>
+          <p:nvPr/>
+        </p:nvPicPr>
+        <p:blipFill rotWithShape="1">
+          <a:blip r:embed="rId3">
+            <a:clrChange>
+              <a:clrFrom>
+                <a:srgbClr val="FFFFFF"/>
+              </a:clrFrom>
+              <a:clrTo>
+                <a:srgbClr val="FFFFFF">
+                  <a:alpha val="0"/>
+                </a:srgbClr>
+              </a:clrTo>
+            </a:clrChange>
+            <a:duotone>
+              <a:srgbClr val="3C9BD5">
+                <a:shade val="45000"/>
+                <a:satMod val="135000"/>
+              </a:srgbClr>
+              <a:prstClr val="white"/>
+            </a:duotone>
+            <a:extLst>
+              <a:ext uri="{28A0092B-C50C-407E-A947-70E740481C1C}">
+                <a14:useLocalDpi xmlns:a14="http://schemas.microsoft.com/office/drawing/2010/main" val="0"/>
+              </a:ext>
+            </a:extLst>
+          </a:blip>
+          <a:srcRect l="18962" t="6530" r="16637" b="12432"/>
+          <a:stretch/>
+        </p:blipFill>
+        <p:spPr bwMode="auto">
+          <a:xfrm>
+            <a:off x="5843751" y="3375679"/>
+            <a:ext cx="381057" cy="479497"/>
+          </a:xfrm>
+          <a:prstGeom prst="rect">
+            <a:avLst/>
+          </a:prstGeom>
+          <a:noFill/>
+          <a:extLst>
+            <a:ext uri="{909E8E84-426E-40DD-AFC4-6F175D3DCCD1}">
+              <a14:hiddenFill xmlns:a14="http://schemas.microsoft.com/office/drawing/2010/main">
+                <a:solidFill>
+                  <a:srgbClr val="FFFFFF"/>
+                </a:solidFill>
+              </a14:hiddenFill>
+            </a:ext>
+          </a:extLst>
+        </p:spPr>
+      </p:pic>
+      <p:sp>
+        <p:nvSpPr>
+          <p:cNvPr id="138" name="Rectangle 137">
+            <a:extLst>
+              <a:ext uri="{FF2B5EF4-FFF2-40B4-BE49-F238E27FC236}">
+                <a16:creationId xmlns:a16="http://schemas.microsoft.com/office/drawing/2014/main" id="{9FCAF378-10F3-3756-067E-FA20E0EEB8AC}"/>
+              </a:ext>
+            </a:extLst>
+          </p:cNvPr>
+          <p:cNvSpPr/>
+          <p:nvPr/>
+        </p:nvSpPr>
+        <p:spPr>
+          <a:xfrm>
+            <a:off x="2403149" y="1600120"/>
+            <a:ext cx="3074425" cy="958275"/>
+          </a:xfrm>
+          <a:prstGeom prst="rect">
+            <a:avLst/>
+          </a:prstGeom>
+          <a:noFill/>
+          <a:ln w="12700" cap="flat" cmpd="sng" algn="ctr">
+            <a:solidFill>
+              <a:srgbClr val="C4232A">
+                <a:lumMod val="60000"/>
+                <a:lumOff val="40000"/>
+              </a:srgbClr>
+            </a:solidFill>
+            <a:prstDash val="dash"/>
+            <a:miter lim="800000"/>
+          </a:ln>
+          <a:effectLst/>
+        </p:spPr>
+        <p:txBody>
+          <a:bodyPr rtlCol="0" anchor="ctr"/>
+          <a:lstStyle/>
+          <a:p>
+            <a:pPr marL="0" marR="0" lvl="0" indent="0" algn="ctr" defTabSz="914400" eaLnBrk="1" fontAlgn="auto" latinLnBrk="0" hangingPunct="1">
+              <a:lnSpc>
+                <a:spcPct val="100000"/>
+              </a:lnSpc>
+              <a:spcBef>
+                <a:spcPts val="0"/>
+              </a:spcBef>
+              <a:spcAft>
+                <a:spcPts val="0"/>
+              </a:spcAft>
+              <a:buClrTx/>
+              <a:buSzTx/>
+              <a:buFontTx/>
+              <a:buNone/>
+              <a:tabLst/>
+              <a:defRPr/>
+            </a:pPr>
+            <a:endParaRPr kumimoji="0" lang="nl-NL" sz="1800" b="0" i="0" u="none" strike="noStrike" kern="0" cap="none" spc="0" normalizeH="0" baseline="0" noProof="0">
+              <a:ln>
+                <a:noFill/>
+              </a:ln>
+              <a:solidFill>
+                <a:prstClr val="white"/>
+              </a:solidFill>
+              <a:effectLst/>
+              <a:uLnTx/>
+              <a:uFillTx/>
+              <a:latin typeface="Segoe UI Light"/>
+              <a:ea typeface="+mn-ea"/>
+              <a:cs typeface="+mn-cs"/>
+            </a:endParaRPr>
+          </a:p>
+        </p:txBody>
+      </p:sp>
+      <p:sp>
+        <p:nvSpPr>
+          <p:cNvPr id="141" name="TextBox 140">
+            <a:extLst>
+              <a:ext uri="{FF2B5EF4-FFF2-40B4-BE49-F238E27FC236}">
+                <a16:creationId xmlns:a16="http://schemas.microsoft.com/office/drawing/2014/main" id="{3DB36235-9051-F190-A5BC-FAFBC153D022}"/>
+              </a:ext>
+            </a:extLst>
+          </p:cNvPr>
+          <p:cNvSpPr txBox="1"/>
+          <p:nvPr/>
+        </p:nvSpPr>
+        <p:spPr>
+          <a:xfrm>
+            <a:off x="5667277" y="3890780"/>
+            <a:ext cx="754288" cy="338554"/>
+          </a:xfrm>
+          <a:prstGeom prst="rect">
+            <a:avLst/>
+          </a:prstGeom>
+          <a:noFill/>
+        </p:spPr>
+        <p:txBody>
+          <a:bodyPr wrap="square" rtlCol="0">
+            <a:spAutoFit/>
+          </a:bodyPr>
+          <a:lstStyle/>
+          <a:p>
+            <a:pPr algn="ctr"/>
+            <a:r>
+              <a:rPr lang="en-US" sz="800" b="1" dirty="0">
+                <a:solidFill>
+                  <a:prstClr val="black"/>
+                </a:solidFill>
+                <a:latin typeface="Verdana" panose="020B0604030504040204" pitchFamily="34" charset="0"/>
+                <a:ea typeface="Verdana" panose="020B0604030504040204" pitchFamily="34" charset="0"/>
+              </a:rPr>
+              <a:t>Language</a:t>
+            </a:r>
+          </a:p>
+          <a:p>
+            <a:pPr algn="ctr"/>
+            <a:r>
+              <a:rPr lang="en-US" sz="800" b="1" dirty="0">
+                <a:solidFill>
+                  <a:prstClr val="black"/>
+                </a:solidFill>
+                <a:latin typeface="Verdana" panose="020B0604030504040204" pitchFamily="34" charset="0"/>
+                <a:ea typeface="Verdana" panose="020B0604030504040204" pitchFamily="34" charset="0"/>
+              </a:rPr>
+              <a:t>Model</a:t>
+            </a:r>
+            <a:endParaRPr lang="nl-NL" sz="800" b="1" dirty="0" err="1">
+              <a:solidFill>
+                <a:prstClr val="black"/>
+              </a:solidFill>
+              <a:latin typeface="Verdana" panose="020B0604030504040204" pitchFamily="34" charset="0"/>
+              <a:ea typeface="Verdana" panose="020B0604030504040204" pitchFamily="34" charset="0"/>
+            </a:endParaRPr>
+          </a:p>
+        </p:txBody>
+      </p:sp>
+      <p:cxnSp>
+        <p:nvCxnSpPr>
+          <p:cNvPr id="149" name="Straight Arrow Connector 148">
+            <a:extLst>
+              <a:ext uri="{FF2B5EF4-FFF2-40B4-BE49-F238E27FC236}">
+                <a16:creationId xmlns:a16="http://schemas.microsoft.com/office/drawing/2014/main" id="{A3522D56-DCCA-EECB-7C09-2BB28B3A496C}"/>
+              </a:ext>
+            </a:extLst>
+          </p:cNvPr>
+          <p:cNvCxnSpPr>
+            <a:cxnSpLocks/>
+          </p:cNvCxnSpPr>
+          <p:nvPr/>
+        </p:nvCxnSpPr>
+        <p:spPr>
+          <a:xfrm>
+            <a:off x="4298963" y="2141648"/>
+            <a:ext cx="180000" cy="0"/>
+          </a:xfrm>
+          <a:prstGeom prst="straightConnector1">
+            <a:avLst/>
+          </a:prstGeom>
+          <a:ln w="19050" cap="flat" cmpd="sng" algn="ctr">
+            <a:solidFill>
+              <a:schemeClr val="accent3"/>
+            </a:solidFill>
+            <a:prstDash val="solid"/>
+            <a:round/>
+            <a:headEnd type="none" w="med" len="med"/>
+            <a:tailEnd type="arrow" w="med" len="med"/>
+          </a:ln>
+        </p:spPr>
+        <p:style>
+          <a:lnRef idx="0">
+            <a:scrgbClr r="0" g="0" b="0"/>
+          </a:lnRef>
+          <a:fillRef idx="0">
+            <a:scrgbClr r="0" g="0" b="0"/>
+          </a:fillRef>
+          <a:effectRef idx="0">
+            <a:scrgbClr r="0" g="0" b="0"/>
+          </a:effectRef>
+          <a:fontRef idx="minor">
+            <a:schemeClr val="tx1"/>
+          </a:fontRef>
+        </p:style>
+      </p:cxnSp>
+      <p:pic>
+        <p:nvPicPr>
+          <p:cNvPr id="156" name="Picture 155">
+            <a:extLst>
+              <a:ext uri="{FF2B5EF4-FFF2-40B4-BE49-F238E27FC236}">
+                <a16:creationId xmlns:a16="http://schemas.microsoft.com/office/drawing/2014/main" id="{9B2F6680-0DFB-6E89-0D06-FC4BB56D9D29}"/>
+              </a:ext>
+            </a:extLst>
+          </p:cNvPr>
+          <p:cNvPicPr>
+            <a:picLocks noChangeAspect="1"/>
+          </p:cNvPicPr>
+          <p:nvPr/>
+        </p:nvPicPr>
+        <p:blipFill>
+          <a:blip r:embed="rId4">
+            <a:clrChange>
+              <a:clrFrom>
+                <a:srgbClr val="F4F4F6"/>
+              </a:clrFrom>
+              <a:clrTo>
+                <a:srgbClr val="F4F4F6">
+                  <a:alpha val="0"/>
+                </a:srgbClr>
+              </a:clrTo>
+            </a:clrChange>
+          </a:blip>
+          <a:stretch>
+            <a:fillRect/>
+          </a:stretch>
+        </p:blipFill>
+        <p:spPr>
+          <a:xfrm>
+            <a:off x="7181598" y="3506787"/>
+            <a:ext cx="507697" cy="523199"/>
+          </a:xfrm>
+          <a:prstGeom prst="rect">
+            <a:avLst/>
+          </a:prstGeom>
+        </p:spPr>
+      </p:pic>
+      <p:sp>
+        <p:nvSpPr>
+          <p:cNvPr id="157" name="TextBox 156">
+            <a:extLst>
+              <a:ext uri="{FF2B5EF4-FFF2-40B4-BE49-F238E27FC236}">
+                <a16:creationId xmlns:a16="http://schemas.microsoft.com/office/drawing/2014/main" id="{02C5A887-C98D-4C80-6596-9913B522E9C3}"/>
+              </a:ext>
+            </a:extLst>
+          </p:cNvPr>
+          <p:cNvSpPr txBox="1"/>
+          <p:nvPr/>
+        </p:nvSpPr>
+        <p:spPr>
+          <a:xfrm>
+            <a:off x="6446225" y="3913744"/>
+            <a:ext cx="540533" cy="215444"/>
+          </a:xfrm>
+          <a:prstGeom prst="rect">
+            <a:avLst/>
+          </a:prstGeom>
+          <a:noFill/>
+        </p:spPr>
+        <p:txBody>
+          <a:bodyPr wrap="none" rtlCol="0">
+            <a:spAutoFit/>
+          </a:bodyPr>
+          <a:lstStyle/>
+          <a:p>
+            <a:pPr algn="ctr"/>
+            <a:r>
+              <a:rPr lang="en-US" sz="800" dirty="0">
+                <a:latin typeface="Verdana" panose="020B0604030504040204" pitchFamily="34" charset="0"/>
+                <a:ea typeface="Verdana" panose="020B0604030504040204" pitchFamily="34" charset="0"/>
+              </a:rPr>
+              <a:t>Output</a:t>
+            </a:r>
+          </a:p>
+        </p:txBody>
+      </p:sp>
+      <p:cxnSp>
+        <p:nvCxnSpPr>
+          <p:cNvPr id="158" name="Straight Arrow Connector 157">
+            <a:extLst>
+              <a:ext uri="{FF2B5EF4-FFF2-40B4-BE49-F238E27FC236}">
+                <a16:creationId xmlns:a16="http://schemas.microsoft.com/office/drawing/2014/main" id="{A9C6D676-7C32-98E9-0780-02D442D351AF}"/>
+              </a:ext>
+            </a:extLst>
+          </p:cNvPr>
+          <p:cNvCxnSpPr>
+            <a:cxnSpLocks/>
+          </p:cNvCxnSpPr>
+          <p:nvPr/>
+        </p:nvCxnSpPr>
+        <p:spPr>
+          <a:xfrm>
+            <a:off x="5574423" y="2101586"/>
+            <a:ext cx="324000" cy="0"/>
+          </a:xfrm>
+          <a:prstGeom prst="straightConnector1">
+            <a:avLst/>
+          </a:prstGeom>
+          <a:ln w="19050" cap="flat" cmpd="sng" algn="ctr">
+            <a:solidFill>
+              <a:schemeClr val="accent3"/>
+            </a:solidFill>
+            <a:prstDash val="solid"/>
+            <a:round/>
+            <a:headEnd type="none" w="med" len="med"/>
+            <a:tailEnd type="arrow" w="med" len="med"/>
+          </a:ln>
+        </p:spPr>
+        <p:style>
+          <a:lnRef idx="0">
+            <a:scrgbClr r="0" g="0" b="0"/>
+          </a:lnRef>
+          <a:fillRef idx="0">
+            <a:scrgbClr r="0" g="0" b="0"/>
+          </a:fillRef>
+          <a:effectRef idx="0">
+            <a:scrgbClr r="0" g="0" b="0"/>
+          </a:effectRef>
+          <a:fontRef idx="minor">
+            <a:schemeClr val="tx1"/>
+          </a:fontRef>
+        </p:style>
+      </p:cxnSp>
+      <p:sp>
+        <p:nvSpPr>
+          <p:cNvPr id="163" name="TextBox 162">
+            <a:extLst>
+              <a:ext uri="{FF2B5EF4-FFF2-40B4-BE49-F238E27FC236}">
+                <a16:creationId xmlns:a16="http://schemas.microsoft.com/office/drawing/2014/main" id="{456DE010-F3A7-C85E-DF6E-F12709326CB6}"/>
+              </a:ext>
+            </a:extLst>
+          </p:cNvPr>
+          <p:cNvSpPr txBox="1"/>
+          <p:nvPr/>
+        </p:nvSpPr>
+        <p:spPr>
+          <a:xfrm>
+            <a:off x="2418237" y="1361227"/>
+            <a:ext cx="3055365" cy="246221"/>
+          </a:xfrm>
+          <a:prstGeom prst="rect">
+            <a:avLst/>
+          </a:prstGeom>
+          <a:noFill/>
+        </p:spPr>
+        <p:txBody>
+          <a:bodyPr wrap="square" rtlCol="0">
+            <a:spAutoFit/>
+          </a:bodyPr>
+          <a:lstStyle/>
+          <a:p>
+            <a:pPr algn="ctr"/>
+            <a:r>
+              <a:rPr lang="en-US" sz="1000" b="1" dirty="0">
+                <a:solidFill>
+                  <a:prstClr val="black"/>
+                </a:solidFill>
+                <a:latin typeface="Verdana" panose="020B0604030504040204" pitchFamily="34" charset="0"/>
+                <a:ea typeface="Verdana" panose="020B0604030504040204" pitchFamily="34" charset="0"/>
+              </a:rPr>
+              <a:t>Chunk-Loop</a:t>
+            </a:r>
+            <a:endParaRPr lang="nl-NL" sz="1000" b="1" dirty="0" err="1">
+              <a:solidFill>
+                <a:prstClr val="black"/>
+              </a:solidFill>
+              <a:latin typeface="Verdana" panose="020B0604030504040204" pitchFamily="34" charset="0"/>
+              <a:ea typeface="Verdana" panose="020B0604030504040204" pitchFamily="34" charset="0"/>
+            </a:endParaRPr>
+          </a:p>
+        </p:txBody>
+      </p:sp>
+      <p:cxnSp>
+        <p:nvCxnSpPr>
+          <p:cNvPr id="166" name="Straight Arrow Connector 165">
+            <a:extLst>
+              <a:ext uri="{FF2B5EF4-FFF2-40B4-BE49-F238E27FC236}">
+                <a16:creationId xmlns:a16="http://schemas.microsoft.com/office/drawing/2014/main" id="{5C17D29A-B579-A486-96FC-78ABDBD1C8C3}"/>
+              </a:ext>
+            </a:extLst>
+          </p:cNvPr>
+          <p:cNvCxnSpPr>
+            <a:cxnSpLocks/>
+          </p:cNvCxnSpPr>
+          <p:nvPr/>
+        </p:nvCxnSpPr>
+        <p:spPr>
+          <a:xfrm>
+            <a:off x="6532999" y="3739661"/>
+            <a:ext cx="380040" cy="0"/>
+          </a:xfrm>
+          <a:prstGeom prst="straightConnector1">
+            <a:avLst/>
+          </a:prstGeom>
+          <a:ln w="19050" cap="flat" cmpd="sng" algn="ctr">
+            <a:solidFill>
+              <a:schemeClr val="accent3"/>
+            </a:solidFill>
+            <a:prstDash val="solid"/>
+            <a:round/>
+            <a:headEnd type="none" w="med" len="med"/>
+            <a:tailEnd type="arrow" w="med" len="med"/>
+          </a:ln>
+        </p:spPr>
+        <p:style>
+          <a:lnRef idx="0">
+            <a:scrgbClr r="0" g="0" b="0"/>
+          </a:lnRef>
+          <a:fillRef idx="0">
+            <a:scrgbClr r="0" g="0" b="0"/>
+          </a:fillRef>
+          <a:effectRef idx="0">
+            <a:scrgbClr r="0" g="0" b="0"/>
+          </a:effectRef>
+          <a:fontRef idx="minor">
+            <a:schemeClr val="tx1"/>
+          </a:fontRef>
+        </p:style>
+      </p:cxnSp>
+      <p:pic>
+        <p:nvPicPr>
+          <p:cNvPr id="1026" name="Picture 2" descr="Gear Icon Images – Browse 1,547,415 Stock Photos, Vectors ...">
+            <a:extLst>
+              <a:ext uri="{FF2B5EF4-FFF2-40B4-BE49-F238E27FC236}">
+                <a16:creationId xmlns:a16="http://schemas.microsoft.com/office/drawing/2014/main" id="{1AECB0A3-77BC-66E6-2B68-47C34414435E}"/>
+              </a:ext>
+            </a:extLst>
+          </p:cNvPr>
+          <p:cNvPicPr>
+            <a:picLocks noChangeAspect="1" noChangeArrowheads="1"/>
+          </p:cNvPicPr>
+          <p:nvPr/>
+        </p:nvPicPr>
+        <p:blipFill>
+          <a:blip r:embed="rId5">
+            <a:extLst>
+              <a:ext uri="{28A0092B-C50C-407E-A947-70E740481C1C}">
+                <a14:useLocalDpi xmlns:a14="http://schemas.microsoft.com/office/drawing/2010/main" val="0"/>
+              </a:ext>
+            </a:extLst>
+          </a:blip>
+          <a:srcRect/>
+          <a:stretch>
+            <a:fillRect/>
+          </a:stretch>
+        </p:blipFill>
+        <p:spPr bwMode="auto">
+          <a:xfrm>
+            <a:off x="5532104" y="3222872"/>
+            <a:ext cx="267741" cy="267741"/>
+          </a:xfrm>
+          <a:prstGeom prst="rect">
+            <a:avLst/>
+          </a:prstGeom>
+          <a:noFill/>
+          <a:extLst>
+            <a:ext uri="{909E8E84-426E-40DD-AFC4-6F175D3DCCD1}">
+              <a14:hiddenFill xmlns:a14="http://schemas.microsoft.com/office/drawing/2010/main">
+                <a:solidFill>
+                  <a:srgbClr val="FFFFFF"/>
+                </a:solidFill>
+              </a14:hiddenFill>
+            </a:ext>
+          </a:extLst>
+        </p:spPr>
+      </p:pic>
+      <p:sp>
+        <p:nvSpPr>
+          <p:cNvPr id="3" name="TextBox 2">
+            <a:extLst>
+              <a:ext uri="{FF2B5EF4-FFF2-40B4-BE49-F238E27FC236}">
+                <a16:creationId xmlns:a16="http://schemas.microsoft.com/office/drawing/2014/main" id="{07143970-893A-DC63-B472-1AF91A9C6CFA}"/>
+              </a:ext>
+            </a:extLst>
+          </p:cNvPr>
+          <p:cNvSpPr txBox="1"/>
+          <p:nvPr/>
+        </p:nvSpPr>
+        <p:spPr>
+          <a:xfrm>
+            <a:off x="5001999" y="3213556"/>
+            <a:ext cx="471603" cy="215444"/>
+          </a:xfrm>
+          <a:prstGeom prst="rect">
+            <a:avLst/>
+          </a:prstGeom>
+          <a:noFill/>
+        </p:spPr>
+        <p:txBody>
+          <a:bodyPr wrap="none" rtlCol="0">
+            <a:spAutoFit/>
+          </a:bodyPr>
+          <a:lstStyle/>
+          <a:p>
+            <a:r>
+              <a:rPr lang="en-US" sz="800" dirty="0">
+                <a:latin typeface="Verdana" panose="020B0604030504040204" pitchFamily="34" charset="0"/>
+                <a:ea typeface="Verdana" panose="020B0604030504040204" pitchFamily="34" charset="0"/>
+              </a:rPr>
+              <a:t>Temp</a:t>
+            </a:r>
+          </a:p>
+        </p:txBody>
+      </p:sp>
+      <p:sp>
+        <p:nvSpPr>
+          <p:cNvPr id="4" name="TextBox 3">
+            <a:extLst>
+              <a:ext uri="{FF2B5EF4-FFF2-40B4-BE49-F238E27FC236}">
+                <a16:creationId xmlns:a16="http://schemas.microsoft.com/office/drawing/2014/main" id="{A7BD0719-6936-4181-1582-39240C2BE1CF}"/>
+              </a:ext>
+            </a:extLst>
+          </p:cNvPr>
+          <p:cNvSpPr txBox="1"/>
+          <p:nvPr/>
+        </p:nvSpPr>
+        <p:spPr>
+          <a:xfrm rot="3268670">
+            <a:off x="5186235" y="2997322"/>
+            <a:ext cx="473206" cy="215444"/>
+          </a:xfrm>
+          <a:prstGeom prst="rect">
+            <a:avLst/>
+          </a:prstGeom>
+          <a:noFill/>
+        </p:spPr>
+        <p:txBody>
+          <a:bodyPr wrap="none" rtlCol="0">
+            <a:spAutoFit/>
+          </a:bodyPr>
+          <a:lstStyle/>
+          <a:p>
+            <a:pPr algn="r"/>
+            <a:r>
+              <a:rPr lang="en-US" sz="800" dirty="0">
+                <a:latin typeface="Verdana" panose="020B0604030504040204" pitchFamily="34" charset="0"/>
+                <a:ea typeface="Verdana" panose="020B0604030504040204" pitchFamily="34" charset="0"/>
+              </a:rPr>
+              <a:t>Top P</a:t>
+            </a:r>
+          </a:p>
+        </p:txBody>
+      </p:sp>
+      <p:sp>
+        <p:nvSpPr>
+          <p:cNvPr id="5" name="TextBox 4">
+            <a:extLst>
+              <a:ext uri="{FF2B5EF4-FFF2-40B4-BE49-F238E27FC236}">
+                <a16:creationId xmlns:a16="http://schemas.microsoft.com/office/drawing/2014/main" id="{EA93EA8B-9F21-03A5-8C88-73F69F622485}"/>
+              </a:ext>
+            </a:extLst>
+          </p:cNvPr>
+          <p:cNvSpPr txBox="1"/>
+          <p:nvPr/>
+        </p:nvSpPr>
+        <p:spPr>
+          <a:xfrm rot="5400000">
+            <a:off x="5433520" y="2949812"/>
+            <a:ext cx="481222" cy="215444"/>
+          </a:xfrm>
+          <a:prstGeom prst="rect">
+            <a:avLst/>
+          </a:prstGeom>
+          <a:noFill/>
+        </p:spPr>
+        <p:txBody>
+          <a:bodyPr wrap="none" rtlCol="0">
+            <a:spAutoFit/>
+          </a:bodyPr>
+          <a:lstStyle/>
+          <a:p>
+            <a:pPr algn="ctr"/>
+            <a:r>
+              <a:rPr lang="en-US" sz="800" dirty="0">
+                <a:latin typeface="Verdana" panose="020B0604030504040204" pitchFamily="34" charset="0"/>
+                <a:ea typeface="Verdana" panose="020B0604030504040204" pitchFamily="34" charset="0"/>
+              </a:rPr>
+              <a:t>Top K</a:t>
+            </a:r>
+          </a:p>
+        </p:txBody>
+      </p:sp>
+      <p:sp>
+        <p:nvSpPr>
+          <p:cNvPr id="2" name="Rectangle 1">
+            <a:extLst>
+              <a:ext uri="{FF2B5EF4-FFF2-40B4-BE49-F238E27FC236}">
+                <a16:creationId xmlns:a16="http://schemas.microsoft.com/office/drawing/2014/main" id="{55D402E2-C131-C549-CC2C-D65D07D6961A}"/>
+              </a:ext>
+            </a:extLst>
+          </p:cNvPr>
+          <p:cNvSpPr/>
+          <p:nvPr/>
+        </p:nvSpPr>
+        <p:spPr>
+          <a:xfrm>
+            <a:off x="5935023" y="1579114"/>
+            <a:ext cx="1583378" cy="983351"/>
+          </a:xfrm>
+          <a:prstGeom prst="rect">
+            <a:avLst/>
+          </a:prstGeom>
+          <a:noFill/>
+          <a:ln w="12700" cap="flat" cmpd="sng" algn="ctr">
+            <a:solidFill>
+              <a:srgbClr val="C4232A">
+                <a:lumMod val="60000"/>
+                <a:lumOff val="40000"/>
+              </a:srgbClr>
+            </a:solidFill>
+            <a:prstDash val="dash"/>
+            <a:miter lim="800000"/>
+          </a:ln>
+          <a:effectLst/>
+        </p:spPr>
+        <p:txBody>
+          <a:bodyPr rtlCol="0" anchor="ctr"/>
+          <a:lstStyle/>
+          <a:p>
+            <a:pPr marL="0" marR="0" lvl="0" indent="0" algn="ctr" defTabSz="914400" eaLnBrk="1" fontAlgn="auto" latinLnBrk="0" hangingPunct="1">
+              <a:lnSpc>
+                <a:spcPct val="100000"/>
+              </a:lnSpc>
+              <a:spcBef>
+                <a:spcPts val="0"/>
+              </a:spcBef>
+              <a:spcAft>
+                <a:spcPts val="0"/>
+              </a:spcAft>
+              <a:buClrTx/>
+              <a:buSzTx/>
+              <a:buFontTx/>
+              <a:buNone/>
+              <a:tabLst/>
+              <a:defRPr/>
+            </a:pPr>
+            <a:endParaRPr kumimoji="0" lang="nl-NL" sz="1800" b="0" i="0" u="none" strike="noStrike" kern="0" cap="none" spc="0" normalizeH="0" baseline="0" noProof="0">
+              <a:ln>
+                <a:noFill/>
+              </a:ln>
+              <a:solidFill>
+                <a:prstClr val="white"/>
+              </a:solidFill>
+              <a:effectLst/>
+              <a:uLnTx/>
+              <a:uFillTx/>
+              <a:latin typeface="Segoe UI Light"/>
+              <a:ea typeface="+mn-ea"/>
+              <a:cs typeface="+mn-cs"/>
+            </a:endParaRPr>
+          </a:p>
+        </p:txBody>
+      </p:sp>
+      <p:sp>
+        <p:nvSpPr>
+          <p:cNvPr id="9" name="Rectangle: Rounded Corners 8">
+            <a:extLst>
+              <a:ext uri="{FF2B5EF4-FFF2-40B4-BE49-F238E27FC236}">
+                <a16:creationId xmlns:a16="http://schemas.microsoft.com/office/drawing/2014/main" id="{CE14E054-E291-C6E8-6457-09AC473102DB}"/>
+              </a:ext>
+            </a:extLst>
+          </p:cNvPr>
+          <p:cNvSpPr/>
+          <p:nvPr/>
+        </p:nvSpPr>
+        <p:spPr>
+          <a:xfrm>
+            <a:off x="6014999" y="1767530"/>
+            <a:ext cx="1279585" cy="548639"/>
+          </a:xfrm>
+          <a:prstGeom prst="roundRect">
+            <a:avLst/>
+          </a:prstGeom>
+          <a:solidFill>
+            <a:srgbClr val="FFC000">
+              <a:alpha val="24000"/>
+            </a:srgbClr>
+          </a:solidFill>
+          <a:ln w="12700" cap="flat" cmpd="sng" algn="ctr">
+            <a:solidFill>
+              <a:srgbClr val="3C9BD5">
+                <a:shade val="15000"/>
+              </a:srgbClr>
+            </a:solidFill>
+            <a:prstDash val="solid"/>
+            <a:miter lim="800000"/>
+          </a:ln>
+          <a:effectLst/>
+        </p:spPr>
+        <p:txBody>
+          <a:bodyPr rtlCol="0" anchor="ctr"/>
+          <a:lstStyle/>
+          <a:p>
+            <a:pPr marL="0" marR="0" lvl="0" indent="0" algn="ctr" defTabSz="914400" eaLnBrk="1" fontAlgn="auto" latinLnBrk="0" hangingPunct="1">
+              <a:lnSpc>
+                <a:spcPct val="100000"/>
+              </a:lnSpc>
+              <a:spcBef>
+                <a:spcPts val="0"/>
+              </a:spcBef>
+              <a:spcAft>
+                <a:spcPts val="0"/>
+              </a:spcAft>
+              <a:buClrTx/>
+              <a:buSzTx/>
+              <a:buFontTx/>
+              <a:buNone/>
+              <a:tabLst/>
+              <a:defRPr/>
+            </a:pPr>
+            <a:endParaRPr kumimoji="0" lang="nl-NL" sz="1800" b="0" i="0" u="none" strike="noStrike" kern="0" cap="none" spc="0" normalizeH="0" baseline="0" noProof="0">
+              <a:ln>
+                <a:noFill/>
+              </a:ln>
+              <a:solidFill>
+                <a:prstClr val="white"/>
+              </a:solidFill>
+              <a:effectLst/>
+              <a:uLnTx/>
+              <a:uFillTx/>
+              <a:latin typeface="Segoe UI Light"/>
+              <a:ea typeface="+mn-ea"/>
+              <a:cs typeface="+mn-cs"/>
+            </a:endParaRPr>
+          </a:p>
+        </p:txBody>
+      </p:sp>
+      <p:pic>
+        <p:nvPicPr>
+          <p:cNvPr id="12" name="Picture 11">
+            <a:extLst>
+              <a:ext uri="{FF2B5EF4-FFF2-40B4-BE49-F238E27FC236}">
+                <a16:creationId xmlns:a16="http://schemas.microsoft.com/office/drawing/2014/main" id="{7AC2BBA1-E50F-77AE-E512-A7D976B2AA49}"/>
+              </a:ext>
+            </a:extLst>
+          </p:cNvPr>
+          <p:cNvPicPr>
+            <a:picLocks noChangeAspect="1"/>
+          </p:cNvPicPr>
+          <p:nvPr/>
+        </p:nvPicPr>
+        <p:blipFill>
+          <a:blip r:embed="rId6">
+            <a:clrChange>
+              <a:clrFrom>
+                <a:srgbClr val="F4F4F6"/>
+              </a:clrFrom>
+              <a:clrTo>
+                <a:srgbClr val="F4F4F6">
+                  <a:alpha val="0"/>
+                </a:srgbClr>
+              </a:clrTo>
+            </a:clrChange>
+          </a:blip>
+          <a:stretch>
+            <a:fillRect/>
+          </a:stretch>
+        </p:blipFill>
+        <p:spPr>
+          <a:xfrm>
+            <a:off x="6090218" y="1851960"/>
+            <a:ext cx="366849" cy="404445"/>
+          </a:xfrm>
+          <a:prstGeom prst="rect">
+            <a:avLst/>
+          </a:prstGeom>
+        </p:spPr>
+      </p:pic>
+      <p:cxnSp>
+        <p:nvCxnSpPr>
+          <p:cNvPr id="15" name="Straight Arrow Connector 14">
+            <a:extLst>
+              <a:ext uri="{FF2B5EF4-FFF2-40B4-BE49-F238E27FC236}">
+                <a16:creationId xmlns:a16="http://schemas.microsoft.com/office/drawing/2014/main" id="{26D61310-7AF7-FE94-8BE0-71109D836C84}"/>
+              </a:ext>
+            </a:extLst>
+          </p:cNvPr>
+          <p:cNvCxnSpPr/>
+          <p:nvPr/>
+        </p:nvCxnSpPr>
+        <p:spPr>
+          <a:xfrm>
+            <a:off x="6085340" y="2684787"/>
+            <a:ext cx="0" cy="504000"/>
+          </a:xfrm>
+          <a:prstGeom prst="straightConnector1">
+            <a:avLst/>
+          </a:prstGeom>
+          <a:ln w="19050" cap="flat" cmpd="sng" algn="ctr">
+            <a:solidFill>
+              <a:schemeClr val="accent3"/>
+            </a:solidFill>
+            <a:prstDash val="solid"/>
+            <a:round/>
+            <a:headEnd type="none" w="med" len="med"/>
+            <a:tailEnd type="arrow" w="med" len="med"/>
+          </a:ln>
+        </p:spPr>
+        <p:style>
+          <a:lnRef idx="0">
+            <a:scrgbClr r="0" g="0" b="0"/>
+          </a:lnRef>
+          <a:fillRef idx="0">
+            <a:scrgbClr r="0" g="0" b="0"/>
+          </a:fillRef>
+          <a:effectRef idx="0">
+            <a:scrgbClr r="0" g="0" b="0"/>
+          </a:effectRef>
+          <a:fontRef idx="minor">
+            <a:schemeClr val="tx1"/>
+          </a:fontRef>
+        </p:style>
+      </p:cxnSp>
+      <p:pic>
+        <p:nvPicPr>
+          <p:cNvPr id="21" name="Picture 20">
+            <a:extLst>
+              <a:ext uri="{FF2B5EF4-FFF2-40B4-BE49-F238E27FC236}">
+                <a16:creationId xmlns:a16="http://schemas.microsoft.com/office/drawing/2014/main" id="{0930579D-C566-862B-C133-CE51C8ECFF3A}"/>
+              </a:ext>
+            </a:extLst>
+          </p:cNvPr>
+          <p:cNvPicPr>
+            <a:picLocks noChangeAspect="1"/>
+          </p:cNvPicPr>
+          <p:nvPr/>
+        </p:nvPicPr>
+        <p:blipFill>
+          <a:blip r:embed="rId7">
+            <a:clrChange>
+              <a:clrFrom>
+                <a:srgbClr val="F4F4F6"/>
+              </a:clrFrom>
+              <a:clrTo>
+                <a:srgbClr val="F4F4F6">
+                  <a:alpha val="0"/>
+                </a:srgbClr>
+              </a:clrTo>
+            </a:clrChange>
+          </a:blip>
+          <a:stretch>
+            <a:fillRect/>
+          </a:stretch>
+        </p:blipFill>
+        <p:spPr>
+          <a:xfrm>
+            <a:off x="6185787" y="2639445"/>
+            <a:ext cx="694423" cy="611897"/>
+          </a:xfrm>
+          <a:prstGeom prst="rect">
+            <a:avLst/>
+          </a:prstGeom>
+        </p:spPr>
+      </p:pic>
+      <p:sp>
+        <p:nvSpPr>
+          <p:cNvPr id="22" name="TextBox 21">
+            <a:extLst>
+              <a:ext uri="{FF2B5EF4-FFF2-40B4-BE49-F238E27FC236}">
+                <a16:creationId xmlns:a16="http://schemas.microsoft.com/office/drawing/2014/main" id="{DD257119-8E76-1076-C58F-1DE57AE597E1}"/>
+              </a:ext>
+            </a:extLst>
+          </p:cNvPr>
+          <p:cNvSpPr txBox="1"/>
+          <p:nvPr/>
+        </p:nvSpPr>
+        <p:spPr>
+          <a:xfrm>
+            <a:off x="6792926" y="2753514"/>
+            <a:ext cx="678391" cy="338554"/>
+          </a:xfrm>
+          <a:prstGeom prst="rect">
+            <a:avLst/>
+          </a:prstGeom>
+          <a:noFill/>
+        </p:spPr>
+        <p:txBody>
+          <a:bodyPr wrap="none" rtlCol="0">
+            <a:spAutoFit/>
+          </a:bodyPr>
+          <a:lstStyle/>
+          <a:p>
+            <a:pPr marL="0" marR="0" lvl="0" indent="0" defTabSz="914400" eaLnBrk="1" fontAlgn="auto" latinLnBrk="0" hangingPunct="1">
+              <a:lnSpc>
+                <a:spcPct val="100000"/>
+              </a:lnSpc>
+              <a:spcBef>
+                <a:spcPts val="0"/>
+              </a:spcBef>
+              <a:spcAft>
+                <a:spcPts val="0"/>
+              </a:spcAft>
+              <a:buClrTx/>
+              <a:buSzTx/>
+              <a:buFontTx/>
+              <a:buNone/>
+              <a:tabLst/>
+              <a:defRPr/>
+            </a:pPr>
+            <a:r>
+              <a:rPr lang="en-US" sz="800" kern="0" dirty="0">
+                <a:solidFill>
+                  <a:prstClr val="black"/>
+                </a:solidFill>
+                <a:latin typeface="Verdana" panose="020B0604030504040204" pitchFamily="34" charset="0"/>
+                <a:ea typeface="Verdana" panose="020B0604030504040204" pitchFamily="34" charset="0"/>
+              </a:rPr>
+              <a:t>Optimize </a:t>
+            </a:r>
+          </a:p>
+          <a:p>
+            <a:pPr marL="0" marR="0" lvl="0" indent="0" defTabSz="914400" eaLnBrk="1" fontAlgn="auto" latinLnBrk="0" hangingPunct="1">
+              <a:lnSpc>
+                <a:spcPct val="100000"/>
+              </a:lnSpc>
+              <a:spcBef>
+                <a:spcPts val="0"/>
+              </a:spcBef>
+              <a:spcAft>
+                <a:spcPts val="0"/>
+              </a:spcAft>
+              <a:buClrTx/>
+              <a:buSzTx/>
+              <a:buFontTx/>
+              <a:buNone/>
+              <a:tabLst/>
+              <a:defRPr/>
+            </a:pPr>
+            <a:r>
+              <a:rPr lang="en-US" sz="800" kern="0" dirty="0">
+                <a:solidFill>
+                  <a:prstClr val="black"/>
+                </a:solidFill>
+                <a:latin typeface="Verdana" panose="020B0604030504040204" pitchFamily="34" charset="0"/>
+                <a:ea typeface="Verdana" panose="020B0604030504040204" pitchFamily="34" charset="0"/>
+              </a:rPr>
+              <a:t>Prompt</a:t>
+            </a:r>
+            <a:endParaRPr kumimoji="0" lang="nl-NL" sz="800" b="0" i="0" u="none" strike="noStrike" kern="0" cap="none" spc="0" normalizeH="0" baseline="0" noProof="0" dirty="0" err="1">
+              <a:ln>
+                <a:noFill/>
+              </a:ln>
+              <a:solidFill>
+                <a:prstClr val="black"/>
+              </a:solidFill>
+              <a:effectLst/>
+              <a:uLnTx/>
+              <a:uFillTx/>
+              <a:latin typeface="Verdana" panose="020B0604030504040204" pitchFamily="34" charset="0"/>
+              <a:ea typeface="Verdana" panose="020B0604030504040204" pitchFamily="34" charset="0"/>
+            </a:endParaRPr>
+          </a:p>
+        </p:txBody>
+      </p:sp>
+      <p:sp>
+        <p:nvSpPr>
+          <p:cNvPr id="23" name="TextBox 22">
+            <a:extLst>
+              <a:ext uri="{FF2B5EF4-FFF2-40B4-BE49-F238E27FC236}">
+                <a16:creationId xmlns:a16="http://schemas.microsoft.com/office/drawing/2014/main" id="{38ABEC97-B079-F5C5-31AC-FB52D373ADFC}"/>
+              </a:ext>
+            </a:extLst>
+          </p:cNvPr>
+          <p:cNvSpPr txBox="1"/>
+          <p:nvPr/>
+        </p:nvSpPr>
+        <p:spPr>
+          <a:xfrm>
+            <a:off x="5935023" y="1345494"/>
+            <a:ext cx="1583378" cy="246221"/>
+          </a:xfrm>
+          <a:prstGeom prst="rect">
+            <a:avLst/>
+          </a:prstGeom>
+          <a:noFill/>
+        </p:spPr>
+        <p:txBody>
+          <a:bodyPr wrap="square" rtlCol="0">
+            <a:spAutoFit/>
+          </a:bodyPr>
+          <a:lstStyle/>
+          <a:p>
+            <a:pPr algn="ctr"/>
+            <a:r>
+              <a:rPr lang="en-US" sz="1000" b="1" dirty="0">
+                <a:solidFill>
+                  <a:prstClr val="black"/>
+                </a:solidFill>
+                <a:latin typeface="Verdana" panose="020B0604030504040204" pitchFamily="34" charset="0"/>
+                <a:ea typeface="Verdana" panose="020B0604030504040204" pitchFamily="34" charset="0"/>
+              </a:rPr>
+              <a:t>Synthesis</a:t>
+            </a:r>
+            <a:endParaRPr lang="nl-NL" sz="1000" b="1" dirty="0" err="1">
+              <a:solidFill>
+                <a:prstClr val="black"/>
+              </a:solidFill>
+              <a:latin typeface="Verdana" panose="020B0604030504040204" pitchFamily="34" charset="0"/>
+              <a:ea typeface="Verdana" panose="020B0604030504040204" pitchFamily="34" charset="0"/>
+            </a:endParaRPr>
+          </a:p>
+        </p:txBody>
+      </p:sp>
+      <p:sp>
+        <p:nvSpPr>
+          <p:cNvPr id="24" name="TextBox 23">
+            <a:extLst>
+              <a:ext uri="{FF2B5EF4-FFF2-40B4-BE49-F238E27FC236}">
+                <a16:creationId xmlns:a16="http://schemas.microsoft.com/office/drawing/2014/main" id="{11E2D11D-110B-D6D0-B97D-2C06468FD6EA}"/>
+              </a:ext>
+            </a:extLst>
+          </p:cNvPr>
+          <p:cNvSpPr txBox="1"/>
+          <p:nvPr/>
+        </p:nvSpPr>
+        <p:spPr>
+          <a:xfrm>
+            <a:off x="2418237" y="2344370"/>
+            <a:ext cx="1944763" cy="215444"/>
+          </a:xfrm>
+          <a:prstGeom prst="rect">
+            <a:avLst/>
+          </a:prstGeom>
+          <a:noFill/>
+        </p:spPr>
+        <p:txBody>
+          <a:bodyPr wrap="none" rtlCol="0">
+            <a:spAutoFit/>
+          </a:bodyPr>
+          <a:lstStyle/>
+          <a:p>
+            <a:pPr marL="0" marR="0" lvl="0" indent="0" defTabSz="914400" eaLnBrk="1" fontAlgn="auto" latinLnBrk="0" hangingPunct="1">
+              <a:lnSpc>
+                <a:spcPct val="100000"/>
+              </a:lnSpc>
+              <a:spcBef>
+                <a:spcPts val="0"/>
+              </a:spcBef>
+              <a:spcAft>
+                <a:spcPts val="0"/>
+              </a:spcAft>
+              <a:buClrTx/>
+              <a:buSzTx/>
+              <a:buFontTx/>
+              <a:buNone/>
+              <a:tabLst/>
+              <a:defRPr/>
+            </a:pPr>
+            <a:r>
+              <a:rPr kumimoji="0" lang="en-US" sz="800" b="0" i="0" u="none" strike="noStrike" kern="0" cap="none" spc="0" normalizeH="0" baseline="0" noProof="0" dirty="0">
+                <a:ln>
+                  <a:noFill/>
+                </a:ln>
+                <a:solidFill>
+                  <a:prstClr val="black"/>
+                </a:solidFill>
+                <a:effectLst/>
+                <a:uLnTx/>
+                <a:uFillTx/>
+                <a:latin typeface="Verdana" panose="020B0604030504040204" pitchFamily="34" charset="0"/>
+                <a:ea typeface="Verdana" panose="020B0604030504040204" pitchFamily="34" charset="0"/>
+              </a:rPr>
+              <a:t>(Select context and Build prompt)</a:t>
+            </a:r>
+            <a:endParaRPr kumimoji="0" lang="nl-NL" sz="800" b="0" i="0" u="none" strike="noStrike" kern="0" cap="none" spc="0" normalizeH="0" baseline="0" noProof="0" dirty="0" err="1">
+              <a:ln>
+                <a:noFill/>
+              </a:ln>
+              <a:solidFill>
+                <a:prstClr val="black"/>
+              </a:solidFill>
+              <a:effectLst/>
+              <a:uLnTx/>
+              <a:uFillTx/>
+              <a:latin typeface="Verdana" panose="020B0604030504040204" pitchFamily="34" charset="0"/>
+              <a:ea typeface="Verdana" panose="020B0604030504040204" pitchFamily="34" charset="0"/>
+            </a:endParaRPr>
+          </a:p>
+        </p:txBody>
+      </p:sp>
+      <p:sp>
+        <p:nvSpPr>
+          <p:cNvPr id="25" name="TextBox 24">
+            <a:extLst>
+              <a:ext uri="{FF2B5EF4-FFF2-40B4-BE49-F238E27FC236}">
+                <a16:creationId xmlns:a16="http://schemas.microsoft.com/office/drawing/2014/main" id="{115339E1-09CC-DD16-22F5-C721566B75D9}"/>
+              </a:ext>
+            </a:extLst>
+          </p:cNvPr>
+          <p:cNvSpPr txBox="1"/>
+          <p:nvPr/>
+        </p:nvSpPr>
+        <p:spPr>
+          <a:xfrm>
+            <a:off x="4553562" y="2327797"/>
+            <a:ext cx="965329" cy="215444"/>
+          </a:xfrm>
+          <a:prstGeom prst="rect">
+            <a:avLst/>
+          </a:prstGeom>
+          <a:noFill/>
+        </p:spPr>
+        <p:txBody>
+          <a:bodyPr wrap="none" rtlCol="0">
+            <a:spAutoFit/>
+          </a:bodyPr>
+          <a:lstStyle/>
+          <a:p>
+            <a:pPr marL="0" marR="0" lvl="0" indent="0" defTabSz="914400" eaLnBrk="1" fontAlgn="auto" latinLnBrk="0" hangingPunct="1">
+              <a:lnSpc>
+                <a:spcPct val="100000"/>
+              </a:lnSpc>
+              <a:spcBef>
+                <a:spcPts val="0"/>
+              </a:spcBef>
+              <a:spcAft>
+                <a:spcPts val="0"/>
+              </a:spcAft>
+              <a:buClrTx/>
+              <a:buSzTx/>
+              <a:buFontTx/>
+              <a:buNone/>
+              <a:tabLst/>
+              <a:defRPr/>
+            </a:pPr>
+            <a:r>
+              <a:rPr kumimoji="0" lang="en-US" sz="800" b="0" i="0" u="none" strike="noStrike" kern="0" cap="none" spc="0" normalizeH="0" baseline="0" noProof="0" dirty="0">
+                <a:ln>
+                  <a:noFill/>
+                </a:ln>
+                <a:solidFill>
+                  <a:prstClr val="black"/>
+                </a:solidFill>
+                <a:effectLst/>
+                <a:uLnTx/>
+                <a:uFillTx/>
+                <a:latin typeface="Verdana" panose="020B0604030504040204" pitchFamily="34" charset="0"/>
+                <a:ea typeface="Verdana" panose="020B0604030504040204" pitchFamily="34" charset="0"/>
+              </a:rPr>
+              <a:t>(Store Results)</a:t>
+            </a:r>
+            <a:endParaRPr kumimoji="0" lang="nl-NL" sz="800" b="0" i="0" u="none" strike="noStrike" kern="0" cap="none" spc="0" normalizeH="0" baseline="0" noProof="0" dirty="0" err="1">
+              <a:ln>
+                <a:noFill/>
+              </a:ln>
+              <a:solidFill>
+                <a:prstClr val="black"/>
+              </a:solidFill>
+              <a:effectLst/>
+              <a:uLnTx/>
+              <a:uFillTx/>
+              <a:latin typeface="Verdana" panose="020B0604030504040204" pitchFamily="34" charset="0"/>
+              <a:ea typeface="Verdana" panose="020B0604030504040204" pitchFamily="34" charset="0"/>
+            </a:endParaRPr>
+          </a:p>
+        </p:txBody>
+      </p:sp>
+      <p:sp>
+        <p:nvSpPr>
+          <p:cNvPr id="11" name="TextBox 10">
+            <a:extLst>
+              <a:ext uri="{FF2B5EF4-FFF2-40B4-BE49-F238E27FC236}">
+                <a16:creationId xmlns:a16="http://schemas.microsoft.com/office/drawing/2014/main" id="{3BE61575-4C1B-D681-BFBE-2245974F11BE}"/>
+              </a:ext>
+            </a:extLst>
+          </p:cNvPr>
+          <p:cNvSpPr txBox="1"/>
+          <p:nvPr/>
+        </p:nvSpPr>
+        <p:spPr>
+          <a:xfrm>
+            <a:off x="6380135" y="1858725"/>
+            <a:ext cx="1001224" cy="338554"/>
+          </a:xfrm>
+          <a:prstGeom prst="rect">
+            <a:avLst/>
+          </a:prstGeom>
+          <a:noFill/>
+        </p:spPr>
+        <p:txBody>
+          <a:bodyPr wrap="square" rtlCol="0">
+            <a:spAutoFit/>
+          </a:bodyPr>
+          <a:lstStyle/>
+          <a:p>
+            <a:pPr lvl="0">
+              <a:defRPr/>
+            </a:pPr>
+            <a:r>
+              <a:rPr lang="en-US" sz="800" kern="0" dirty="0">
+                <a:solidFill>
+                  <a:prstClr val="black"/>
+                </a:solidFill>
+                <a:latin typeface="Verdana" panose="020B0604030504040204" pitchFamily="34" charset="0"/>
+                <a:ea typeface="Verdana" panose="020B0604030504040204" pitchFamily="34" charset="0"/>
+              </a:rPr>
+              <a:t>- Merge results</a:t>
+            </a:r>
+          </a:p>
+          <a:p>
+            <a:pPr lvl="0">
+              <a:defRPr/>
+            </a:pPr>
+            <a:r>
+              <a:rPr kumimoji="0" lang="nl-NL" sz="800" b="0" i="0" u="none" strike="noStrike" kern="0" cap="none" spc="0" normalizeH="0" baseline="0" noProof="0" dirty="0">
+                <a:ln>
+                  <a:noFill/>
+                </a:ln>
+                <a:solidFill>
+                  <a:prstClr val="black"/>
+                </a:solidFill>
+                <a:effectLst/>
+                <a:uLnTx/>
+                <a:uFillTx/>
+                <a:latin typeface="Verdana" panose="020B0604030504040204" pitchFamily="34" charset="0"/>
+                <a:ea typeface="Verdana" panose="020B0604030504040204" pitchFamily="34" charset="0"/>
+              </a:rPr>
+              <a:t>- Build prompt</a:t>
+            </a:r>
+          </a:p>
+        </p:txBody>
+      </p:sp>
+      <p:sp>
+        <p:nvSpPr>
+          <p:cNvPr id="27" name="TextBox 26">
+            <a:extLst>
+              <a:ext uri="{FF2B5EF4-FFF2-40B4-BE49-F238E27FC236}">
+                <a16:creationId xmlns:a16="http://schemas.microsoft.com/office/drawing/2014/main" id="{FE0FB4D6-2B91-77C8-FCC9-F2742F89C6D4}"/>
+              </a:ext>
+            </a:extLst>
+          </p:cNvPr>
+          <p:cNvSpPr txBox="1"/>
+          <p:nvPr/>
+        </p:nvSpPr>
+        <p:spPr>
+          <a:xfrm>
+            <a:off x="3552967" y="2721337"/>
+            <a:ext cx="1000595" cy="246221"/>
+          </a:xfrm>
+          <a:prstGeom prst="rect">
+            <a:avLst/>
+          </a:prstGeom>
+          <a:noFill/>
+        </p:spPr>
+        <p:txBody>
+          <a:bodyPr wrap="none" rtlCol="0">
+            <a:spAutoFit/>
+          </a:bodyPr>
+          <a:lstStyle/>
+          <a:p>
+            <a:r>
+              <a:rPr lang="en-US" sz="1000" b="1" dirty="0">
+                <a:solidFill>
+                  <a:prstClr val="black"/>
+                </a:solidFill>
+                <a:latin typeface="Verdana" panose="020B0604030504040204" pitchFamily="34" charset="0"/>
+                <a:ea typeface="Verdana" panose="020B0604030504040204" pitchFamily="34" charset="0"/>
+              </a:rPr>
+              <a:t>New Chunk</a:t>
+            </a:r>
+            <a:endParaRPr lang="nl-NL" sz="1000" b="1" dirty="0" err="1">
+              <a:solidFill>
+                <a:prstClr val="black"/>
+              </a:solidFill>
+              <a:latin typeface="Verdana" panose="020B0604030504040204" pitchFamily="34" charset="0"/>
+              <a:ea typeface="Verdana" panose="020B0604030504040204" pitchFamily="34" charset="0"/>
+            </a:endParaRPr>
+          </a:p>
+        </p:txBody>
+      </p:sp>
+      <p:sp>
+        <p:nvSpPr>
+          <p:cNvPr id="29" name="TextBox 28">
+            <a:extLst>
+              <a:ext uri="{FF2B5EF4-FFF2-40B4-BE49-F238E27FC236}">
+                <a16:creationId xmlns:a16="http://schemas.microsoft.com/office/drawing/2014/main" id="{320F9636-110B-74FF-2C84-D2767FBF9410}"/>
+              </a:ext>
+            </a:extLst>
+          </p:cNvPr>
+          <p:cNvSpPr txBox="1"/>
+          <p:nvPr/>
+        </p:nvSpPr>
+        <p:spPr>
+          <a:xfrm>
+            <a:off x="2581732" y="4091057"/>
+            <a:ext cx="1519968" cy="246221"/>
+          </a:xfrm>
+          <a:prstGeom prst="rect">
+            <a:avLst/>
+          </a:prstGeom>
+          <a:noFill/>
+        </p:spPr>
+        <p:txBody>
+          <a:bodyPr wrap="none" rtlCol="0">
+            <a:spAutoFit/>
+          </a:bodyPr>
+          <a:lstStyle/>
+          <a:p>
+            <a:r>
+              <a:rPr lang="en-US" sz="1000" b="1" dirty="0">
+                <a:solidFill>
+                  <a:prstClr val="black"/>
+                </a:solidFill>
+                <a:latin typeface="Verdana" panose="020B0604030504040204" pitchFamily="34" charset="0"/>
+                <a:ea typeface="Verdana" panose="020B0604030504040204" pitchFamily="34" charset="0"/>
+              </a:rPr>
+              <a:t>Chunking Strategy</a:t>
+            </a:r>
+            <a:endParaRPr lang="nl-NL" sz="1000" b="1" dirty="0" err="1">
+              <a:solidFill>
+                <a:prstClr val="black"/>
+              </a:solidFill>
+              <a:latin typeface="Verdana" panose="020B0604030504040204" pitchFamily="34" charset="0"/>
+              <a:ea typeface="Verdana" panose="020B0604030504040204" pitchFamily="34" charset="0"/>
+            </a:endParaRPr>
+          </a:p>
+        </p:txBody>
+      </p:sp>
+      <p:pic>
+        <p:nvPicPr>
+          <p:cNvPr id="6" name="Picture 5">
+            <a:extLst>
+              <a:ext uri="{FF2B5EF4-FFF2-40B4-BE49-F238E27FC236}">
+                <a16:creationId xmlns:a16="http://schemas.microsoft.com/office/drawing/2014/main" id="{C48F68A5-2C15-5324-6EFE-EEFC6ECF31EC}"/>
+              </a:ext>
+            </a:extLst>
+          </p:cNvPr>
+          <p:cNvPicPr>
+            <a:picLocks noChangeAspect="1"/>
+          </p:cNvPicPr>
+          <p:nvPr/>
+        </p:nvPicPr>
+        <p:blipFill>
+          <a:blip r:embed="rId8">
+            <a:clrChange>
+              <a:clrFrom>
+                <a:srgbClr val="F4F4F6"/>
+              </a:clrFrom>
+              <a:clrTo>
+                <a:srgbClr val="F4F4F6">
+                  <a:alpha val="0"/>
+                </a:srgbClr>
+              </a:clrTo>
+            </a:clrChange>
+          </a:blip>
+          <a:stretch>
+            <a:fillRect/>
+          </a:stretch>
+        </p:blipFill>
+        <p:spPr>
+          <a:xfrm>
+            <a:off x="1337751" y="3421219"/>
+            <a:ext cx="613721" cy="650917"/>
+          </a:xfrm>
+          <a:prstGeom prst="rect">
+            <a:avLst/>
+          </a:prstGeom>
+        </p:spPr>
+      </p:pic>
+      <p:sp>
+        <p:nvSpPr>
+          <p:cNvPr id="7" name="TextBox 6">
+            <a:extLst>
+              <a:ext uri="{FF2B5EF4-FFF2-40B4-BE49-F238E27FC236}">
+                <a16:creationId xmlns:a16="http://schemas.microsoft.com/office/drawing/2014/main" id="{D03CE48F-D58E-65A9-BA6C-B5137CD1971C}"/>
+              </a:ext>
+            </a:extLst>
+          </p:cNvPr>
+          <p:cNvSpPr txBox="1"/>
+          <p:nvPr/>
+        </p:nvSpPr>
+        <p:spPr>
+          <a:xfrm>
+            <a:off x="1233500" y="3118647"/>
+            <a:ext cx="856325" cy="252120"/>
+          </a:xfrm>
+          <a:prstGeom prst="rect">
+            <a:avLst/>
+          </a:prstGeom>
+          <a:noFill/>
+        </p:spPr>
+        <p:txBody>
+          <a:bodyPr wrap="none" rtlCol="0">
+            <a:spAutoFit/>
+          </a:bodyPr>
+          <a:lstStyle/>
+          <a:p>
+            <a:pPr marL="0" marR="0" lvl="0" indent="0" defTabSz="914400" eaLnBrk="1" fontAlgn="auto" latinLnBrk="0" hangingPunct="1">
+              <a:lnSpc>
+                <a:spcPct val="150000"/>
+              </a:lnSpc>
+              <a:spcBef>
+                <a:spcPts val="0"/>
+              </a:spcBef>
+              <a:spcAft>
+                <a:spcPts val="0"/>
+              </a:spcAft>
+              <a:buClrTx/>
+              <a:buSzTx/>
+              <a:buFontTx/>
+              <a:buNone/>
+              <a:tabLst/>
+              <a:defRPr/>
+            </a:pPr>
+            <a:r>
+              <a:rPr lang="en-US" sz="800" kern="0" dirty="0">
+                <a:solidFill>
+                  <a:prstClr val="black"/>
+                </a:solidFill>
+                <a:latin typeface="Verdana" panose="020B0604030504040204" pitchFamily="34" charset="0"/>
+                <a:ea typeface="Verdana" panose="020B0604030504040204" pitchFamily="34" charset="0"/>
+              </a:rPr>
+              <a:t>Document(s)</a:t>
+            </a:r>
+            <a:endParaRPr kumimoji="0" lang="nl-NL" sz="800" b="0" i="0" u="none" strike="noStrike" kern="0" cap="none" spc="0" normalizeH="0" baseline="0" noProof="0" dirty="0" err="1">
+              <a:ln>
+                <a:noFill/>
+              </a:ln>
+              <a:solidFill>
+                <a:prstClr val="black"/>
+              </a:solidFill>
+              <a:effectLst/>
+              <a:uLnTx/>
+              <a:uFillTx/>
+              <a:latin typeface="Verdana" panose="020B0604030504040204" pitchFamily="34" charset="0"/>
+              <a:ea typeface="Verdana" panose="020B0604030504040204" pitchFamily="34" charset="0"/>
+            </a:endParaRPr>
+          </a:p>
+        </p:txBody>
+      </p:sp>
+      <p:cxnSp>
+        <p:nvCxnSpPr>
+          <p:cNvPr id="10" name="Straight Arrow Connector 9">
+            <a:extLst>
+              <a:ext uri="{FF2B5EF4-FFF2-40B4-BE49-F238E27FC236}">
+                <a16:creationId xmlns:a16="http://schemas.microsoft.com/office/drawing/2014/main" id="{1C938317-D636-242E-0273-A948D86864E5}"/>
+              </a:ext>
+            </a:extLst>
+          </p:cNvPr>
+          <p:cNvCxnSpPr>
+            <a:cxnSpLocks/>
+          </p:cNvCxnSpPr>
+          <p:nvPr/>
+        </p:nvCxnSpPr>
+        <p:spPr>
+          <a:xfrm flipH="1">
+            <a:off x="4294437" y="1906698"/>
+            <a:ext cx="180000" cy="0"/>
+          </a:xfrm>
+          <a:prstGeom prst="straightConnector1">
+            <a:avLst/>
+          </a:prstGeom>
+          <a:ln w="19050" cap="flat" cmpd="sng" algn="ctr">
+            <a:solidFill>
+              <a:schemeClr val="accent3"/>
+            </a:solidFill>
+            <a:prstDash val="solid"/>
+            <a:round/>
+            <a:headEnd type="none" w="med" len="med"/>
+            <a:tailEnd type="arrow" w="med" len="med"/>
+          </a:ln>
+        </p:spPr>
+        <p:style>
+          <a:lnRef idx="0">
+            <a:scrgbClr r="0" g="0" b="0"/>
+          </a:lnRef>
+          <a:fillRef idx="0">
+            <a:scrgbClr r="0" g="0" b="0"/>
+          </a:fillRef>
+          <a:effectRef idx="0">
+            <a:scrgbClr r="0" g="0" b="0"/>
+          </a:effectRef>
+          <a:fontRef idx="minor">
+            <a:schemeClr val="tx1"/>
+          </a:fontRef>
+        </p:style>
+      </p:cxnSp>
+      <p:pic>
+        <p:nvPicPr>
+          <p:cNvPr id="30" name="Picture 2" descr="Bot (informática) - EcuRed">
+            <a:extLst>
+              <a:ext uri="{FF2B5EF4-FFF2-40B4-BE49-F238E27FC236}">
+                <a16:creationId xmlns:a16="http://schemas.microsoft.com/office/drawing/2014/main" id="{ECC3BD2E-355D-70C9-77FB-3613C260972D}"/>
+              </a:ext>
+            </a:extLst>
+          </p:cNvPr>
+          <p:cNvPicPr>
+            <a:picLocks noChangeAspect="1" noChangeArrowheads="1"/>
+          </p:cNvPicPr>
+          <p:nvPr/>
+        </p:nvPicPr>
+        <p:blipFill rotWithShape="1">
+          <a:blip r:embed="rId3">
+            <a:clrChange>
+              <a:clrFrom>
+                <a:srgbClr val="FFFFFF"/>
+              </a:clrFrom>
+              <a:clrTo>
+                <a:srgbClr val="FFFFFF">
+                  <a:alpha val="0"/>
+                </a:srgbClr>
+              </a:clrTo>
+            </a:clrChange>
+            <a:duotone>
+              <a:schemeClr val="accent2">
+                <a:shade val="45000"/>
+                <a:satMod val="135000"/>
+              </a:schemeClr>
+              <a:prstClr val="white"/>
+            </a:duotone>
+            <a:extLst>
+              <a:ext uri="{28A0092B-C50C-407E-A947-70E740481C1C}">
+                <a14:useLocalDpi xmlns:a14="http://schemas.microsoft.com/office/drawing/2010/main" val="0"/>
+              </a:ext>
+            </a:extLst>
+          </a:blip>
+          <a:srcRect l="18962" t="6530" r="16637" b="12432"/>
+          <a:stretch/>
+        </p:blipFill>
+        <p:spPr bwMode="auto">
+          <a:xfrm>
+            <a:off x="3962281" y="1840836"/>
+            <a:ext cx="269049" cy="338554"/>
+          </a:xfrm>
+          <a:prstGeom prst="rect">
+            <a:avLst/>
+          </a:prstGeom>
+          <a:noFill/>
+          <a:extLst>
+            <a:ext uri="{909E8E84-426E-40DD-AFC4-6F175D3DCCD1}">
+              <a14:hiddenFill xmlns:a14="http://schemas.microsoft.com/office/drawing/2010/main">
+                <a:solidFill>
+                  <a:srgbClr val="FFFFFF"/>
+                </a:solidFill>
+              </a14:hiddenFill>
+            </a:ext>
+          </a:extLst>
+        </p:spPr>
+      </p:pic>
+    </p:spTree>
+    <p:extLst>
+      <p:ext uri="{BB962C8B-B14F-4D97-AF65-F5344CB8AC3E}">
+        <p14:creationId xmlns:p14="http://schemas.microsoft.com/office/powerpoint/2010/main" val="683859720"/>
+      </p:ext>
+    </p:extLst>
+  </p:cSld>
+  <p:clrMapOvr>
+    <a:masterClrMapping/>
+  </p:clrMapOvr>
+</p:sld>
+</file>
+
 <file path=ppt/theme/theme1.xml><?xml version="1.0" encoding="utf-8"?>
 <a:theme xmlns:a="http://schemas.openxmlformats.org/drawingml/2006/main" name="Office Theme">
   <a:themeElements>

--- a/docs/figs/blog_figures.pptx
+++ b/docs/figs/blog_figures.pptx
@@ -9,6 +9,9 @@
     <p:sldId id="257" r:id="rId3"/>
     <p:sldId id="259" r:id="rId4"/>
     <p:sldId id="260" r:id="rId5"/>
+    <p:sldId id="261" r:id="rId6"/>
+    <p:sldId id="264" r:id="rId7"/>
+    <p:sldId id="265" r:id="rId8"/>
   </p:sldIdLst>
   <p:sldSz cx="12192000" cy="6858000"/>
   <p:notesSz cx="6858000" cy="9144000"/>
@@ -264,7 +267,7 @@
           <a:p>
             <a:fld id="{922860D0-EBC9-4CCD-82FB-90EB89E22FA7}" type="datetimeFigureOut">
               <a:rPr lang="en-NL" smtClean="0"/>
-              <a:t>21/09/2025</a:t>
+              <a:t>11/06/2026</a:t>
             </a:fld>
             <a:endParaRPr lang="en-NL"/>
           </a:p>
@@ -464,7 +467,7 @@
           <a:p>
             <a:fld id="{922860D0-EBC9-4CCD-82FB-90EB89E22FA7}" type="datetimeFigureOut">
               <a:rPr lang="en-NL" smtClean="0"/>
-              <a:t>21/09/2025</a:t>
+              <a:t>11/06/2026</a:t>
             </a:fld>
             <a:endParaRPr lang="en-NL"/>
           </a:p>
@@ -674,7 +677,7 @@
           <a:p>
             <a:fld id="{922860D0-EBC9-4CCD-82FB-90EB89E22FA7}" type="datetimeFigureOut">
               <a:rPr lang="en-NL" smtClean="0"/>
-              <a:t>21/09/2025</a:t>
+              <a:t>11/06/2026</a:t>
             </a:fld>
             <a:endParaRPr lang="en-NL"/>
           </a:p>
@@ -874,7 +877,7 @@
           <a:p>
             <a:fld id="{922860D0-EBC9-4CCD-82FB-90EB89E22FA7}" type="datetimeFigureOut">
               <a:rPr lang="en-NL" smtClean="0"/>
-              <a:t>21/09/2025</a:t>
+              <a:t>11/06/2026</a:t>
             </a:fld>
             <a:endParaRPr lang="en-NL"/>
           </a:p>
@@ -1150,7 +1153,7 @@
           <a:p>
             <a:fld id="{922860D0-EBC9-4CCD-82FB-90EB89E22FA7}" type="datetimeFigureOut">
               <a:rPr lang="en-NL" smtClean="0"/>
-              <a:t>21/09/2025</a:t>
+              <a:t>11/06/2026</a:t>
             </a:fld>
             <a:endParaRPr lang="en-NL"/>
           </a:p>
@@ -1418,7 +1421,7 @@
           <a:p>
             <a:fld id="{922860D0-EBC9-4CCD-82FB-90EB89E22FA7}" type="datetimeFigureOut">
               <a:rPr lang="en-NL" smtClean="0"/>
-              <a:t>21/09/2025</a:t>
+              <a:t>11/06/2026</a:t>
             </a:fld>
             <a:endParaRPr lang="en-NL"/>
           </a:p>
@@ -1833,7 +1836,7 @@
           <a:p>
             <a:fld id="{922860D0-EBC9-4CCD-82FB-90EB89E22FA7}" type="datetimeFigureOut">
               <a:rPr lang="en-NL" smtClean="0"/>
-              <a:t>21/09/2025</a:t>
+              <a:t>11/06/2026</a:t>
             </a:fld>
             <a:endParaRPr lang="en-NL"/>
           </a:p>
@@ -1975,7 +1978,7 @@
           <a:p>
             <a:fld id="{922860D0-EBC9-4CCD-82FB-90EB89E22FA7}" type="datetimeFigureOut">
               <a:rPr lang="en-NL" smtClean="0"/>
-              <a:t>21/09/2025</a:t>
+              <a:t>11/06/2026</a:t>
             </a:fld>
             <a:endParaRPr lang="en-NL"/>
           </a:p>
@@ -2088,7 +2091,7 @@
           <a:p>
             <a:fld id="{922860D0-EBC9-4CCD-82FB-90EB89E22FA7}" type="datetimeFigureOut">
               <a:rPr lang="en-NL" smtClean="0"/>
-              <a:t>21/09/2025</a:t>
+              <a:t>11/06/2026</a:t>
             </a:fld>
             <a:endParaRPr lang="en-NL"/>
           </a:p>
@@ -2401,7 +2404,7 @@
           <a:p>
             <a:fld id="{922860D0-EBC9-4CCD-82FB-90EB89E22FA7}" type="datetimeFigureOut">
               <a:rPr lang="en-NL" smtClean="0"/>
-              <a:t>21/09/2025</a:t>
+              <a:t>11/06/2026</a:t>
             </a:fld>
             <a:endParaRPr lang="en-NL"/>
           </a:p>
@@ -2690,7 +2693,7 @@
           <a:p>
             <a:fld id="{922860D0-EBC9-4CCD-82FB-90EB89E22FA7}" type="datetimeFigureOut">
               <a:rPr lang="en-NL" smtClean="0"/>
-              <a:t>21/09/2025</a:t>
+              <a:t>11/06/2026</a:t>
             </a:fld>
             <a:endParaRPr lang="en-NL"/>
           </a:p>
@@ -2933,7 +2936,7 @@
           <a:p>
             <a:fld id="{922860D0-EBC9-4CCD-82FB-90EB89E22FA7}" type="datetimeFigureOut">
               <a:rPr lang="en-NL" smtClean="0"/>
-              <a:t>21/09/2025</a:t>
+              <a:t>11/06/2026</a:t>
             </a:fld>
             <a:endParaRPr lang="en-NL"/>
           </a:p>
@@ -12805,6 +12808,7390 @@
 </p:sld>
 </file>
 
+<file path=ppt/slides/slide5.xml><?xml version="1.0" encoding="utf-8"?>
+<p:sld xmlns:a="http://schemas.openxmlformats.org/drawingml/2006/main" xmlns:r="http://schemas.openxmlformats.org/officeDocument/2006/relationships" xmlns:p="http://schemas.openxmlformats.org/presentationml/2006/main">
+  <p:cSld>
+    <p:spTree>
+      <p:nvGrpSpPr>
+        <p:cNvPr id="1" name=""/>
+        <p:cNvGrpSpPr/>
+        <p:nvPr/>
+      </p:nvGrpSpPr>
+      <p:grpSpPr>
+        <a:xfrm>
+          <a:off x="0" y="0"/>
+          <a:ext cx="0" cy="0"/>
+          <a:chOff x="0" y="0"/>
+          <a:chExt cx="0" cy="0"/>
+        </a:xfrm>
+      </p:grpSpPr>
+      <p:sp>
+        <p:nvSpPr>
+          <p:cNvPr id="58" name="Rectangle: Rounded Corners 57">
+            <a:extLst>
+              <a:ext uri="{FF2B5EF4-FFF2-40B4-BE49-F238E27FC236}">
+                <a16:creationId xmlns:a16="http://schemas.microsoft.com/office/drawing/2014/main" id="{1758E9BA-13E8-3DEA-45FF-2B017BFDA1AA}"/>
+              </a:ext>
+            </a:extLst>
+          </p:cNvPr>
+          <p:cNvSpPr/>
+          <p:nvPr/>
+        </p:nvSpPr>
+        <p:spPr>
+          <a:xfrm>
+            <a:off x="2992189" y="2646512"/>
+            <a:ext cx="1980416" cy="645070"/>
+          </a:xfrm>
+          <a:prstGeom prst="roundRect">
+            <a:avLst/>
+          </a:prstGeom>
+          <a:solidFill>
+            <a:srgbClr val="A1C93A">
+              <a:lumMod val="20000"/>
+              <a:lumOff val="80000"/>
+              <a:alpha val="24000"/>
+            </a:srgbClr>
+          </a:solidFill>
+          <a:ln w="12700" cap="flat" cmpd="sng" algn="ctr">
+            <a:solidFill>
+              <a:srgbClr val="3C9BD5">
+                <a:shade val="15000"/>
+              </a:srgbClr>
+            </a:solidFill>
+            <a:prstDash val="solid"/>
+            <a:miter lim="800000"/>
+          </a:ln>
+          <a:effectLst/>
+        </p:spPr>
+        <p:txBody>
+          <a:bodyPr rtlCol="0" anchor="ctr"/>
+          <a:lstStyle/>
+          <a:p>
+            <a:pPr marL="0" marR="0" lvl="0" indent="0" algn="ctr" defTabSz="914400" eaLnBrk="1" fontAlgn="auto" latinLnBrk="0" hangingPunct="1">
+              <a:lnSpc>
+                <a:spcPct val="100000"/>
+              </a:lnSpc>
+              <a:spcBef>
+                <a:spcPts val="0"/>
+              </a:spcBef>
+              <a:spcAft>
+                <a:spcPts val="0"/>
+              </a:spcAft>
+              <a:buClrTx/>
+              <a:buSzTx/>
+              <a:buFontTx/>
+              <a:buNone/>
+              <a:tabLst/>
+              <a:defRPr/>
+            </a:pPr>
+            <a:endParaRPr kumimoji="0" lang="nl-NL" sz="1800" b="0" i="0" u="none" strike="noStrike" kern="0" cap="none" spc="0" normalizeH="0" baseline="0" noProof="0">
+              <a:ln>
+                <a:noFill/>
+              </a:ln>
+              <a:solidFill>
+                <a:prstClr val="white"/>
+              </a:solidFill>
+              <a:effectLst/>
+              <a:uLnTx/>
+              <a:uFillTx/>
+              <a:latin typeface="Segoe UI Light"/>
+              <a:ea typeface="+mn-ea"/>
+              <a:cs typeface="+mn-cs"/>
+            </a:endParaRPr>
+          </a:p>
+        </p:txBody>
+      </p:sp>
+      <p:grpSp>
+        <p:nvGrpSpPr>
+          <p:cNvPr id="60" name="Group 59">
+            <a:extLst>
+              <a:ext uri="{FF2B5EF4-FFF2-40B4-BE49-F238E27FC236}">
+                <a16:creationId xmlns:a16="http://schemas.microsoft.com/office/drawing/2014/main" id="{63E318DA-F639-D352-CAB2-D8A905AB53BA}"/>
+              </a:ext>
+            </a:extLst>
+          </p:cNvPr>
+          <p:cNvGrpSpPr/>
+          <p:nvPr/>
+        </p:nvGrpSpPr>
+        <p:grpSpPr>
+          <a:xfrm>
+            <a:off x="368598" y="2080235"/>
+            <a:ext cx="1655946" cy="638149"/>
+            <a:chOff x="1850066" y="2865619"/>
+            <a:chExt cx="1655946" cy="638149"/>
+          </a:xfrm>
+        </p:grpSpPr>
+        <p:sp>
+          <p:nvSpPr>
+            <p:cNvPr id="61" name="Rectangle: Rounded Corners 60">
+              <a:extLst>
+                <a:ext uri="{FF2B5EF4-FFF2-40B4-BE49-F238E27FC236}">
+                  <a16:creationId xmlns:a16="http://schemas.microsoft.com/office/drawing/2014/main" id="{0AC6DDE1-1487-DD2C-6CE7-EA90203B5795}"/>
+                </a:ext>
+              </a:extLst>
+            </p:cNvPr>
+            <p:cNvSpPr/>
+            <p:nvPr/>
+          </p:nvSpPr>
+          <p:spPr>
+            <a:xfrm>
+              <a:off x="1850067" y="2865619"/>
+              <a:ext cx="1633908" cy="638149"/>
+            </a:xfrm>
+            <a:prstGeom prst="roundRect">
+              <a:avLst/>
+            </a:prstGeom>
+            <a:solidFill>
+              <a:srgbClr val="FFC000">
+                <a:alpha val="24000"/>
+              </a:srgbClr>
+            </a:solidFill>
+            <a:ln w="12700" cap="flat" cmpd="sng" algn="ctr">
+              <a:solidFill>
+                <a:srgbClr val="3C9BD5">
+                  <a:shade val="15000"/>
+                </a:srgbClr>
+              </a:solidFill>
+              <a:prstDash val="solid"/>
+              <a:miter lim="800000"/>
+            </a:ln>
+            <a:effectLst/>
+          </p:spPr>
+          <p:txBody>
+            <a:bodyPr rtlCol="0" anchor="ctr"/>
+            <a:lstStyle/>
+            <a:p>
+              <a:pPr marL="0" marR="0" lvl="0" indent="0" algn="ctr" defTabSz="914400" eaLnBrk="1" fontAlgn="auto" latinLnBrk="0" hangingPunct="1">
+                <a:lnSpc>
+                  <a:spcPct val="100000"/>
+                </a:lnSpc>
+                <a:spcBef>
+                  <a:spcPts val="0"/>
+                </a:spcBef>
+                <a:spcAft>
+                  <a:spcPts val="0"/>
+                </a:spcAft>
+                <a:buClrTx/>
+                <a:buSzTx/>
+                <a:buFontTx/>
+                <a:buNone/>
+                <a:tabLst/>
+                <a:defRPr/>
+              </a:pPr>
+              <a:endParaRPr kumimoji="0" lang="nl-NL" sz="1800" b="0" i="0" u="none" strike="noStrike" kern="0" cap="none" spc="0" normalizeH="0" baseline="0" noProof="0">
+                <a:ln>
+                  <a:noFill/>
+                </a:ln>
+                <a:solidFill>
+                  <a:prstClr val="white"/>
+                </a:solidFill>
+                <a:effectLst/>
+                <a:uLnTx/>
+                <a:uFillTx/>
+                <a:latin typeface="Segoe UI Light"/>
+                <a:ea typeface="+mn-ea"/>
+                <a:cs typeface="+mn-cs"/>
+              </a:endParaRPr>
+            </a:p>
+          </p:txBody>
+        </p:sp>
+        <p:pic>
+          <p:nvPicPr>
+            <p:cNvPr id="62" name="Picture 61">
+              <a:extLst>
+                <a:ext uri="{FF2B5EF4-FFF2-40B4-BE49-F238E27FC236}">
+                  <a16:creationId xmlns:a16="http://schemas.microsoft.com/office/drawing/2014/main" id="{AD85B549-1C89-9BA6-3B38-86A60846E461}"/>
+                </a:ext>
+              </a:extLst>
+            </p:cNvPr>
+            <p:cNvPicPr>
+              <a:picLocks noChangeAspect="1"/>
+            </p:cNvPicPr>
+            <p:nvPr/>
+          </p:nvPicPr>
+          <p:blipFill>
+            <a:blip r:embed="rId2">
+              <a:clrChange>
+                <a:clrFrom>
+                  <a:srgbClr val="F4F4F6"/>
+                </a:clrFrom>
+                <a:clrTo>
+                  <a:srgbClr val="F4F4F6">
+                    <a:alpha val="0"/>
+                  </a:srgbClr>
+                </a:clrTo>
+              </a:clrChange>
+            </a:blip>
+            <a:stretch>
+              <a:fillRect/>
+            </a:stretch>
+          </p:blipFill>
+          <p:spPr>
+            <a:xfrm>
+              <a:off x="2899742" y="2870864"/>
+              <a:ext cx="606270" cy="606270"/>
+            </a:xfrm>
+            <a:prstGeom prst="rect">
+              <a:avLst/>
+            </a:prstGeom>
+          </p:spPr>
+        </p:pic>
+        <p:sp>
+          <p:nvSpPr>
+            <p:cNvPr id="63" name="TextBox 62">
+              <a:extLst>
+                <a:ext uri="{FF2B5EF4-FFF2-40B4-BE49-F238E27FC236}">
+                  <a16:creationId xmlns:a16="http://schemas.microsoft.com/office/drawing/2014/main" id="{8B6C5585-5036-2191-92FB-2F700916E6C6}"/>
+                </a:ext>
+              </a:extLst>
+            </p:cNvPr>
+            <p:cNvSpPr txBox="1"/>
+            <p:nvPr/>
+          </p:nvSpPr>
+          <p:spPr>
+            <a:xfrm>
+              <a:off x="1850066" y="2970231"/>
+              <a:ext cx="1200970" cy="338554"/>
+            </a:xfrm>
+            <a:prstGeom prst="rect">
+              <a:avLst/>
+            </a:prstGeom>
+            <a:noFill/>
+          </p:spPr>
+          <p:txBody>
+            <a:bodyPr wrap="none" rtlCol="0">
+              <a:spAutoFit/>
+            </a:bodyPr>
+            <a:lstStyle/>
+            <a:p>
+              <a:pPr marL="0" marR="0" lvl="0" indent="0" defTabSz="914400" eaLnBrk="1" fontAlgn="auto" latinLnBrk="0" hangingPunct="1">
+                <a:lnSpc>
+                  <a:spcPct val="100000"/>
+                </a:lnSpc>
+                <a:spcBef>
+                  <a:spcPts val="0"/>
+                </a:spcBef>
+                <a:spcAft>
+                  <a:spcPts val="0"/>
+                </a:spcAft>
+                <a:buClrTx/>
+                <a:buSzTx/>
+                <a:buFontTx/>
+                <a:buNone/>
+                <a:tabLst/>
+                <a:defRPr/>
+              </a:pPr>
+              <a:r>
+                <a:rPr kumimoji="0" lang="en-US" sz="800" b="0" i="0" u="none" strike="noStrike" kern="0" cap="none" spc="0" normalizeH="0" baseline="0" noProof="0" dirty="0">
+                  <a:ln>
+                    <a:noFill/>
+                  </a:ln>
+                  <a:solidFill>
+                    <a:prstClr val="black"/>
+                  </a:solidFill>
+                  <a:effectLst/>
+                  <a:uLnTx/>
+                  <a:uFillTx/>
+                  <a:latin typeface="Verdana" panose="020B0604030504040204" pitchFamily="34" charset="0"/>
+                  <a:ea typeface="Verdana" panose="020B0604030504040204" pitchFamily="34" charset="0"/>
+                </a:rPr>
+                <a:t>Start discussion </a:t>
+              </a:r>
+            </a:p>
+            <a:p>
+              <a:pPr marL="0" marR="0" lvl="0" indent="0" defTabSz="914400" eaLnBrk="1" fontAlgn="auto" latinLnBrk="0" hangingPunct="1">
+                <a:lnSpc>
+                  <a:spcPct val="100000"/>
+                </a:lnSpc>
+                <a:spcBef>
+                  <a:spcPts val="0"/>
+                </a:spcBef>
+                <a:spcAft>
+                  <a:spcPts val="0"/>
+                </a:spcAft>
+                <a:buClrTx/>
+                <a:buSzTx/>
+                <a:buFontTx/>
+                <a:buNone/>
+                <a:tabLst/>
+                <a:defRPr/>
+              </a:pPr>
+              <a:r>
+                <a:rPr kumimoji="0" lang="en-US" sz="800" b="0" i="0" u="none" strike="noStrike" kern="0" cap="none" spc="0" normalizeH="0" baseline="0" noProof="0" dirty="0">
+                  <a:ln>
+                    <a:noFill/>
+                  </a:ln>
+                  <a:solidFill>
+                    <a:prstClr val="black"/>
+                  </a:solidFill>
+                  <a:effectLst/>
+                  <a:uLnTx/>
+                  <a:uFillTx/>
+                  <a:latin typeface="Verdana" panose="020B0604030504040204" pitchFamily="34" charset="0"/>
+                  <a:ea typeface="Verdana" panose="020B0604030504040204" pitchFamily="34" charset="0"/>
+                </a:rPr>
+                <a:t>on topic of interest.</a:t>
+              </a:r>
+            </a:p>
+          </p:txBody>
+        </p:sp>
+      </p:grpSp>
+      <p:cxnSp>
+        <p:nvCxnSpPr>
+          <p:cNvPr id="64" name="Straight Arrow Connector 63">
+            <a:extLst>
+              <a:ext uri="{FF2B5EF4-FFF2-40B4-BE49-F238E27FC236}">
+                <a16:creationId xmlns:a16="http://schemas.microsoft.com/office/drawing/2014/main" id="{5B85E252-791A-1233-4EED-1EA9D337AEE6}"/>
+              </a:ext>
+            </a:extLst>
+          </p:cNvPr>
+          <p:cNvCxnSpPr>
+            <a:cxnSpLocks/>
+          </p:cNvCxnSpPr>
+          <p:nvPr/>
+        </p:nvCxnSpPr>
+        <p:spPr>
+          <a:xfrm>
+            <a:off x="2134087" y="2405901"/>
+            <a:ext cx="365760" cy="0"/>
+          </a:xfrm>
+          <a:prstGeom prst="straightConnector1">
+            <a:avLst/>
+          </a:prstGeom>
+          <a:noFill/>
+          <a:ln w="9525" cap="flat" cmpd="sng" algn="ctr">
+            <a:solidFill>
+              <a:sysClr val="windowText" lastClr="000000"/>
+            </a:solidFill>
+            <a:prstDash val="solid"/>
+            <a:miter lim="800000"/>
+            <a:tailEnd type="triangle"/>
+          </a:ln>
+          <a:effectLst/>
+        </p:spPr>
+      </p:cxnSp>
+      <p:sp>
+        <p:nvSpPr>
+          <p:cNvPr id="65" name="TextBox 64">
+            <a:extLst>
+              <a:ext uri="{FF2B5EF4-FFF2-40B4-BE49-F238E27FC236}">
+                <a16:creationId xmlns:a16="http://schemas.microsoft.com/office/drawing/2014/main" id="{968592CC-B476-CE75-5A7E-D7ED16C1A107}"/>
+              </a:ext>
+            </a:extLst>
+          </p:cNvPr>
+          <p:cNvSpPr txBox="1"/>
+          <p:nvPr/>
+        </p:nvSpPr>
+        <p:spPr>
+          <a:xfrm>
+            <a:off x="2971478" y="2718384"/>
+            <a:ext cx="1468302" cy="584775"/>
+          </a:xfrm>
+          <a:prstGeom prst="rect">
+            <a:avLst/>
+          </a:prstGeom>
+          <a:noFill/>
+        </p:spPr>
+        <p:txBody>
+          <a:bodyPr wrap="square" rtlCol="0">
+            <a:spAutoFit/>
+          </a:bodyPr>
+          <a:lstStyle/>
+          <a:p>
+            <a:r>
+              <a:rPr lang="en-US" sz="800" dirty="0">
+                <a:solidFill>
+                  <a:prstClr val="black"/>
+                </a:solidFill>
+                <a:latin typeface="Verdana" panose="020B0604030504040204" pitchFamily="34" charset="0"/>
+                <a:ea typeface="Verdana" panose="020B0604030504040204" pitchFamily="34" charset="0"/>
+              </a:rPr>
+              <a:t>Discuss the importance of the use of Large Language Models and AI.</a:t>
+            </a:r>
+            <a:endParaRPr lang="nl-NL" sz="800" dirty="0" err="1">
+              <a:solidFill>
+                <a:prstClr val="black"/>
+              </a:solidFill>
+              <a:latin typeface="Verdana" panose="020B0604030504040204" pitchFamily="34" charset="0"/>
+              <a:ea typeface="Verdana" panose="020B0604030504040204" pitchFamily="34" charset="0"/>
+            </a:endParaRPr>
+          </a:p>
+        </p:txBody>
+      </p:sp>
+      <p:pic>
+        <p:nvPicPr>
+          <p:cNvPr id="66" name="Picture 65">
+            <a:extLst>
+              <a:ext uri="{FF2B5EF4-FFF2-40B4-BE49-F238E27FC236}">
+                <a16:creationId xmlns:a16="http://schemas.microsoft.com/office/drawing/2014/main" id="{C519ABEB-3703-594F-D500-20D57E1FAFE9}"/>
+              </a:ext>
+            </a:extLst>
+          </p:cNvPr>
+          <p:cNvPicPr>
+            <a:picLocks noChangeAspect="1"/>
+          </p:cNvPicPr>
+          <p:nvPr/>
+        </p:nvPicPr>
+        <p:blipFill>
+          <a:blip r:embed="rId3">
+            <a:clrChange>
+              <a:clrFrom>
+                <a:srgbClr val="F4F4F6"/>
+              </a:clrFrom>
+              <a:clrTo>
+                <a:srgbClr val="F4F4F6">
+                  <a:alpha val="0"/>
+                </a:srgbClr>
+              </a:clrTo>
+            </a:clrChange>
+          </a:blip>
+          <a:stretch>
+            <a:fillRect/>
+          </a:stretch>
+        </p:blipFill>
+        <p:spPr>
+          <a:xfrm>
+            <a:off x="4385624" y="2691444"/>
+            <a:ext cx="427382" cy="504548"/>
+          </a:xfrm>
+          <a:prstGeom prst="rect">
+            <a:avLst/>
+          </a:prstGeom>
+        </p:spPr>
+      </p:pic>
+      <p:grpSp>
+        <p:nvGrpSpPr>
+          <p:cNvPr id="67" name="Group 66">
+            <a:extLst>
+              <a:ext uri="{FF2B5EF4-FFF2-40B4-BE49-F238E27FC236}">
+                <a16:creationId xmlns:a16="http://schemas.microsoft.com/office/drawing/2014/main" id="{76937992-7428-426A-E53C-A4697906F4D2}"/>
+              </a:ext>
+            </a:extLst>
+          </p:cNvPr>
+          <p:cNvGrpSpPr/>
+          <p:nvPr/>
+        </p:nvGrpSpPr>
+        <p:grpSpPr>
+          <a:xfrm>
+            <a:off x="3685492" y="1372778"/>
+            <a:ext cx="754288" cy="988926"/>
+            <a:chOff x="4081920" y="2487881"/>
+            <a:chExt cx="754288" cy="988926"/>
+          </a:xfrm>
+        </p:grpSpPr>
+        <p:pic>
+          <p:nvPicPr>
+            <p:cNvPr id="68" name="Picture 2" descr="Bot (informática) - EcuRed">
+              <a:extLst>
+                <a:ext uri="{FF2B5EF4-FFF2-40B4-BE49-F238E27FC236}">
+                  <a16:creationId xmlns:a16="http://schemas.microsoft.com/office/drawing/2014/main" id="{FECA5F51-80F0-F286-B6A8-B0D557B4ABCC}"/>
+                </a:ext>
+              </a:extLst>
+            </p:cNvPr>
+            <p:cNvPicPr>
+              <a:picLocks noChangeAspect="1" noChangeArrowheads="1"/>
+            </p:cNvPicPr>
+            <p:nvPr/>
+          </p:nvPicPr>
+          <p:blipFill rotWithShape="1">
+            <a:blip r:embed="rId4">
+              <a:clrChange>
+                <a:clrFrom>
+                  <a:srgbClr val="FFFFFF"/>
+                </a:clrFrom>
+                <a:clrTo>
+                  <a:srgbClr val="FFFFFF">
+                    <a:alpha val="0"/>
+                  </a:srgbClr>
+                </a:clrTo>
+              </a:clrChange>
+              <a:duotone>
+                <a:srgbClr val="A1C93A">
+                  <a:shade val="45000"/>
+                  <a:satMod val="135000"/>
+                </a:srgbClr>
+                <a:prstClr val="white"/>
+              </a:duotone>
+              <a:extLst>
+                <a:ext uri="{28A0092B-C50C-407E-A947-70E740481C1C}">
+                  <a14:useLocalDpi xmlns:a14="http://schemas.microsoft.com/office/drawing/2010/main" val="0"/>
+                </a:ext>
+              </a:extLst>
+            </a:blip>
+            <a:srcRect l="18962" t="6530" r="16637" b="12432"/>
+            <a:stretch/>
+          </p:blipFill>
+          <p:spPr bwMode="auto">
+            <a:xfrm>
+              <a:off x="4289396" y="2583023"/>
+              <a:ext cx="381057" cy="479497"/>
+            </a:xfrm>
+            <a:prstGeom prst="rect">
+              <a:avLst/>
+            </a:prstGeom>
+            <a:noFill/>
+            <a:extLst>
+              <a:ext uri="{909E8E84-426E-40DD-AFC4-6F175D3DCCD1}">
+                <a14:hiddenFill xmlns:a14="http://schemas.microsoft.com/office/drawing/2010/main">
+                  <a:solidFill>
+                    <a:srgbClr val="FFFFFF"/>
+                  </a:solidFill>
+                </a14:hiddenFill>
+              </a:ext>
+            </a:extLst>
+          </p:spPr>
+        </p:pic>
+        <p:sp>
+          <p:nvSpPr>
+            <p:cNvPr id="69" name="TextBox 68">
+              <a:extLst>
+                <a:ext uri="{FF2B5EF4-FFF2-40B4-BE49-F238E27FC236}">
+                  <a16:creationId xmlns:a16="http://schemas.microsoft.com/office/drawing/2014/main" id="{E2226DE5-58DF-6BA2-95B5-E46A315BFBC8}"/>
+                </a:ext>
+              </a:extLst>
+            </p:cNvPr>
+            <p:cNvSpPr txBox="1"/>
+            <p:nvPr/>
+          </p:nvSpPr>
+          <p:spPr>
+            <a:xfrm>
+              <a:off x="4081920" y="3015142"/>
+              <a:ext cx="754288" cy="461665"/>
+            </a:xfrm>
+            <a:prstGeom prst="rect">
+              <a:avLst/>
+            </a:prstGeom>
+            <a:noFill/>
+          </p:spPr>
+          <p:txBody>
+            <a:bodyPr wrap="square" rtlCol="0">
+              <a:spAutoFit/>
+            </a:bodyPr>
+            <a:lstStyle/>
+            <a:p>
+              <a:pPr marL="0" marR="0" lvl="0" indent="0" algn="ctr" defTabSz="914400" eaLnBrk="1" fontAlgn="auto" latinLnBrk="0" hangingPunct="1">
+                <a:lnSpc>
+                  <a:spcPct val="100000"/>
+                </a:lnSpc>
+                <a:spcBef>
+                  <a:spcPts val="0"/>
+                </a:spcBef>
+                <a:spcAft>
+                  <a:spcPts val="0"/>
+                </a:spcAft>
+                <a:buClrTx/>
+                <a:buSzTx/>
+                <a:buFontTx/>
+                <a:buNone/>
+                <a:tabLst/>
+                <a:defRPr/>
+              </a:pPr>
+              <a:r>
+                <a:rPr kumimoji="0" lang="en-US" sz="800" b="0" i="0" u="none" strike="noStrike" kern="0" cap="none" spc="0" normalizeH="0" baseline="0" noProof="0" dirty="0">
+                  <a:ln>
+                    <a:noFill/>
+                  </a:ln>
+                  <a:solidFill>
+                    <a:prstClr val="black"/>
+                  </a:solidFill>
+                  <a:effectLst/>
+                  <a:uLnTx/>
+                  <a:uFillTx/>
+                  <a:latin typeface="Verdana" panose="020B0604030504040204" pitchFamily="34" charset="0"/>
+                  <a:ea typeface="Verdana" panose="020B0604030504040204" pitchFamily="34" charset="0"/>
+                </a:rPr>
+                <a:t>Data Science</a:t>
+              </a:r>
+            </a:p>
+            <a:p>
+              <a:pPr marL="0" marR="0" lvl="0" indent="0" algn="ctr" defTabSz="914400" eaLnBrk="1" fontAlgn="auto" latinLnBrk="0" hangingPunct="1">
+                <a:lnSpc>
+                  <a:spcPct val="100000"/>
+                </a:lnSpc>
+                <a:spcBef>
+                  <a:spcPts val="0"/>
+                </a:spcBef>
+                <a:spcAft>
+                  <a:spcPts val="0"/>
+                </a:spcAft>
+                <a:buClrTx/>
+                <a:buSzTx/>
+                <a:buFontTx/>
+                <a:buNone/>
+                <a:tabLst/>
+                <a:defRPr/>
+              </a:pPr>
+              <a:r>
+                <a:rPr kumimoji="0" lang="en-US" sz="800" b="0" i="0" u="none" strike="noStrike" kern="0" cap="none" spc="0" normalizeH="0" baseline="0" noProof="0" dirty="0">
+                  <a:ln>
+                    <a:noFill/>
+                  </a:ln>
+                  <a:solidFill>
+                    <a:prstClr val="black"/>
+                  </a:solidFill>
+                  <a:effectLst/>
+                  <a:uLnTx/>
+                  <a:uFillTx/>
+                  <a:latin typeface="Verdana" panose="020B0604030504040204" pitchFamily="34" charset="0"/>
+                  <a:ea typeface="Verdana" panose="020B0604030504040204" pitchFamily="34" charset="0"/>
+                </a:rPr>
+                <a:t>Agent</a:t>
+              </a:r>
+            </a:p>
+          </p:txBody>
+        </p:sp>
+        <p:sp>
+          <p:nvSpPr>
+            <p:cNvPr id="70" name="Rectangle 69">
+              <a:extLst>
+                <a:ext uri="{FF2B5EF4-FFF2-40B4-BE49-F238E27FC236}">
+                  <a16:creationId xmlns:a16="http://schemas.microsoft.com/office/drawing/2014/main" id="{1E16690B-8CEA-CEFE-4742-17EEE8314BC9}"/>
+                </a:ext>
+              </a:extLst>
+            </p:cNvPr>
+            <p:cNvSpPr/>
+            <p:nvPr/>
+          </p:nvSpPr>
+          <p:spPr>
+            <a:xfrm>
+              <a:off x="4127947" y="2487881"/>
+              <a:ext cx="662234" cy="972663"/>
+            </a:xfrm>
+            <a:prstGeom prst="rect">
+              <a:avLst/>
+            </a:prstGeom>
+            <a:noFill/>
+            <a:ln w="12700" cap="flat" cmpd="sng" algn="ctr">
+              <a:solidFill>
+                <a:srgbClr val="C4232A">
+                  <a:lumMod val="60000"/>
+                  <a:lumOff val="40000"/>
+                </a:srgbClr>
+              </a:solidFill>
+              <a:prstDash val="dash"/>
+              <a:miter lim="800000"/>
+            </a:ln>
+            <a:effectLst/>
+          </p:spPr>
+          <p:txBody>
+            <a:bodyPr rtlCol="0" anchor="ctr"/>
+            <a:lstStyle/>
+            <a:p>
+              <a:pPr marL="0" marR="0" lvl="0" indent="0" algn="ctr" defTabSz="914400" eaLnBrk="1" fontAlgn="auto" latinLnBrk="0" hangingPunct="1">
+                <a:lnSpc>
+                  <a:spcPct val="100000"/>
+                </a:lnSpc>
+                <a:spcBef>
+                  <a:spcPts val="0"/>
+                </a:spcBef>
+                <a:spcAft>
+                  <a:spcPts val="0"/>
+                </a:spcAft>
+                <a:buClrTx/>
+                <a:buSzTx/>
+                <a:buFontTx/>
+                <a:buNone/>
+                <a:tabLst/>
+                <a:defRPr/>
+              </a:pPr>
+              <a:endParaRPr kumimoji="0" lang="nl-NL" sz="1800" b="0" i="0" u="none" strike="noStrike" kern="0" cap="none" spc="0" normalizeH="0" baseline="0" noProof="0">
+                <a:ln>
+                  <a:noFill/>
+                </a:ln>
+                <a:solidFill>
+                  <a:prstClr val="white"/>
+                </a:solidFill>
+                <a:effectLst/>
+                <a:uLnTx/>
+                <a:uFillTx/>
+                <a:latin typeface="Segoe UI Light"/>
+                <a:ea typeface="+mn-ea"/>
+                <a:cs typeface="+mn-cs"/>
+              </a:endParaRPr>
+            </a:p>
+          </p:txBody>
+        </p:sp>
+      </p:grpSp>
+      <p:cxnSp>
+        <p:nvCxnSpPr>
+          <p:cNvPr id="71" name="Straight Arrow Connector 70">
+            <a:extLst>
+              <a:ext uri="{FF2B5EF4-FFF2-40B4-BE49-F238E27FC236}">
+                <a16:creationId xmlns:a16="http://schemas.microsoft.com/office/drawing/2014/main" id="{944FF972-FAD0-4A58-0E8E-EECC4A5E6B25}"/>
+              </a:ext>
+            </a:extLst>
+          </p:cNvPr>
+          <p:cNvCxnSpPr>
+            <a:cxnSpLocks/>
+          </p:cNvCxnSpPr>
+          <p:nvPr/>
+        </p:nvCxnSpPr>
+        <p:spPr>
+          <a:xfrm>
+            <a:off x="4043419" y="2436392"/>
+            <a:ext cx="0" cy="180896"/>
+          </a:xfrm>
+          <a:prstGeom prst="straightConnector1">
+            <a:avLst/>
+          </a:prstGeom>
+          <a:noFill/>
+          <a:ln w="9525" cap="flat" cmpd="sng" algn="ctr">
+            <a:solidFill>
+              <a:sysClr val="windowText" lastClr="000000"/>
+            </a:solidFill>
+            <a:prstDash val="solid"/>
+            <a:miter lim="800000"/>
+            <a:tailEnd type="triangle"/>
+          </a:ln>
+          <a:effectLst/>
+        </p:spPr>
+      </p:cxnSp>
+      <p:sp>
+        <p:nvSpPr>
+          <p:cNvPr id="72" name="Rectangle 71">
+            <a:extLst>
+              <a:ext uri="{FF2B5EF4-FFF2-40B4-BE49-F238E27FC236}">
+                <a16:creationId xmlns:a16="http://schemas.microsoft.com/office/drawing/2014/main" id="{A2C4DA7B-ADC3-1261-302E-8AAD5468144B}"/>
+              </a:ext>
+            </a:extLst>
+          </p:cNvPr>
+          <p:cNvSpPr/>
+          <p:nvPr/>
+        </p:nvSpPr>
+        <p:spPr>
+          <a:xfrm>
+            <a:off x="2630940" y="1105617"/>
+            <a:ext cx="6088135" cy="2555879"/>
+          </a:xfrm>
+          <a:prstGeom prst="rect">
+            <a:avLst/>
+          </a:prstGeom>
+          <a:noFill/>
+          <a:ln w="12700" cap="flat" cmpd="sng" algn="ctr">
+            <a:solidFill>
+              <a:srgbClr val="C4232A">
+                <a:lumMod val="60000"/>
+                <a:lumOff val="40000"/>
+              </a:srgbClr>
+            </a:solidFill>
+            <a:prstDash val="dash"/>
+            <a:miter lim="800000"/>
+          </a:ln>
+          <a:effectLst/>
+        </p:spPr>
+        <p:txBody>
+          <a:bodyPr rtlCol="0" anchor="ctr"/>
+          <a:lstStyle/>
+          <a:p>
+            <a:pPr marL="0" marR="0" lvl="0" indent="0" algn="ctr" defTabSz="914400" eaLnBrk="1" fontAlgn="auto" latinLnBrk="0" hangingPunct="1">
+              <a:lnSpc>
+                <a:spcPct val="100000"/>
+              </a:lnSpc>
+              <a:spcBef>
+                <a:spcPts val="0"/>
+              </a:spcBef>
+              <a:spcAft>
+                <a:spcPts val="0"/>
+              </a:spcAft>
+              <a:buClrTx/>
+              <a:buSzTx/>
+              <a:buFontTx/>
+              <a:buNone/>
+              <a:tabLst/>
+              <a:defRPr/>
+            </a:pPr>
+            <a:endParaRPr kumimoji="0" lang="nl-NL" sz="1800" b="0" i="0" u="none" strike="noStrike" kern="0" cap="none" spc="0" normalizeH="0" baseline="0" noProof="0">
+              <a:ln>
+                <a:noFill/>
+              </a:ln>
+              <a:solidFill>
+                <a:prstClr val="white"/>
+              </a:solidFill>
+              <a:effectLst/>
+              <a:uLnTx/>
+              <a:uFillTx/>
+              <a:latin typeface="Segoe UI Light"/>
+              <a:ea typeface="+mn-ea"/>
+              <a:cs typeface="+mn-cs"/>
+            </a:endParaRPr>
+          </a:p>
+        </p:txBody>
+      </p:sp>
+      <p:grpSp>
+        <p:nvGrpSpPr>
+          <p:cNvPr id="73" name="Group 72">
+            <a:extLst>
+              <a:ext uri="{FF2B5EF4-FFF2-40B4-BE49-F238E27FC236}">
+                <a16:creationId xmlns:a16="http://schemas.microsoft.com/office/drawing/2014/main" id="{B4ABF253-33BD-7A7C-DC8D-4926234712D7}"/>
+              </a:ext>
+            </a:extLst>
+          </p:cNvPr>
+          <p:cNvGrpSpPr/>
+          <p:nvPr/>
+        </p:nvGrpSpPr>
+        <p:grpSpPr>
+          <a:xfrm>
+            <a:off x="6791545" y="1417862"/>
+            <a:ext cx="754288" cy="972663"/>
+            <a:chOff x="838155" y="2691430"/>
+            <a:chExt cx="754288" cy="972663"/>
+          </a:xfrm>
+        </p:grpSpPr>
+        <p:pic>
+          <p:nvPicPr>
+            <p:cNvPr id="74" name="Picture 2" descr="Bot (informática) - EcuRed">
+              <a:extLst>
+                <a:ext uri="{FF2B5EF4-FFF2-40B4-BE49-F238E27FC236}">
+                  <a16:creationId xmlns:a16="http://schemas.microsoft.com/office/drawing/2014/main" id="{5DEC7284-C86D-81E2-2ED2-F9F78A0D4D01}"/>
+                </a:ext>
+              </a:extLst>
+            </p:cNvPr>
+            <p:cNvPicPr>
+              <a:picLocks noChangeAspect="1" noChangeArrowheads="1"/>
+            </p:cNvPicPr>
+            <p:nvPr/>
+          </p:nvPicPr>
+          <p:blipFill rotWithShape="1">
+            <a:blip r:embed="rId4">
+              <a:clrChange>
+                <a:clrFrom>
+                  <a:srgbClr val="FFFFFF"/>
+                </a:clrFrom>
+                <a:clrTo>
+                  <a:srgbClr val="FFFFFF">
+                    <a:alpha val="0"/>
+                  </a:srgbClr>
+                </a:clrTo>
+              </a:clrChange>
+              <a:duotone>
+                <a:srgbClr val="187398">
+                  <a:shade val="45000"/>
+                  <a:satMod val="135000"/>
+                </a:srgbClr>
+                <a:prstClr val="white"/>
+              </a:duotone>
+              <a:extLst>
+                <a:ext uri="{28A0092B-C50C-407E-A947-70E740481C1C}">
+                  <a14:useLocalDpi xmlns:a14="http://schemas.microsoft.com/office/drawing/2010/main" val="0"/>
+                </a:ext>
+              </a:extLst>
+            </a:blip>
+            <a:srcRect l="18962" t="6530" r="16637" b="12432"/>
+            <a:stretch/>
+          </p:blipFill>
+          <p:spPr bwMode="auto">
+            <a:xfrm>
+              <a:off x="1036816" y="2861045"/>
+              <a:ext cx="381057" cy="479497"/>
+            </a:xfrm>
+            <a:prstGeom prst="rect">
+              <a:avLst/>
+            </a:prstGeom>
+            <a:noFill/>
+            <a:extLst>
+              <a:ext uri="{909E8E84-426E-40DD-AFC4-6F175D3DCCD1}">
+                <a14:hiddenFill xmlns:a14="http://schemas.microsoft.com/office/drawing/2010/main">
+                  <a:solidFill>
+                    <a:srgbClr val="FFFFFF"/>
+                  </a:solidFill>
+                </a14:hiddenFill>
+              </a:ext>
+            </a:extLst>
+          </p:spPr>
+        </p:pic>
+        <p:sp>
+          <p:nvSpPr>
+            <p:cNvPr id="75" name="TextBox 74">
+              <a:extLst>
+                <a:ext uri="{FF2B5EF4-FFF2-40B4-BE49-F238E27FC236}">
+                  <a16:creationId xmlns:a16="http://schemas.microsoft.com/office/drawing/2014/main" id="{D1CF1B6D-7B61-AD0F-EA37-8DF1D6D83BDE}"/>
+                </a:ext>
+              </a:extLst>
+            </p:cNvPr>
+            <p:cNvSpPr txBox="1"/>
+            <p:nvPr/>
+          </p:nvSpPr>
+          <p:spPr>
+            <a:xfrm>
+              <a:off x="838155" y="3301091"/>
+              <a:ext cx="754288" cy="338554"/>
+            </a:xfrm>
+            <a:prstGeom prst="rect">
+              <a:avLst/>
+            </a:prstGeom>
+            <a:noFill/>
+          </p:spPr>
+          <p:txBody>
+            <a:bodyPr wrap="square" rtlCol="0">
+              <a:spAutoFit/>
+            </a:bodyPr>
+            <a:lstStyle/>
+            <a:p>
+              <a:pPr marL="0" marR="0" lvl="0" indent="0" algn="ctr" defTabSz="914400" eaLnBrk="1" fontAlgn="auto" latinLnBrk="0" hangingPunct="1">
+                <a:lnSpc>
+                  <a:spcPct val="100000"/>
+                </a:lnSpc>
+                <a:spcBef>
+                  <a:spcPts val="0"/>
+                </a:spcBef>
+                <a:spcAft>
+                  <a:spcPts val="0"/>
+                </a:spcAft>
+                <a:buClrTx/>
+                <a:buSzTx/>
+                <a:buFontTx/>
+                <a:buNone/>
+                <a:tabLst/>
+                <a:defRPr/>
+              </a:pPr>
+              <a:r>
+                <a:rPr kumimoji="0" lang="en-US" sz="800" b="0" i="0" u="none" strike="noStrike" kern="0" cap="none" spc="0" normalizeH="0" baseline="0" noProof="0" dirty="0">
+                  <a:ln>
+                    <a:noFill/>
+                  </a:ln>
+                  <a:solidFill>
+                    <a:prstClr val="black"/>
+                  </a:solidFill>
+                  <a:effectLst/>
+                  <a:uLnTx/>
+                  <a:uFillTx/>
+                  <a:latin typeface="Verdana" panose="020B0604030504040204" pitchFamily="34" charset="0"/>
+                  <a:ea typeface="Verdana" panose="020B0604030504040204" pitchFamily="34" charset="0"/>
+                </a:rPr>
+                <a:t>Farmer</a:t>
+              </a:r>
+            </a:p>
+            <a:p>
+              <a:pPr marL="0" marR="0" lvl="0" indent="0" algn="ctr" defTabSz="914400" eaLnBrk="1" fontAlgn="auto" latinLnBrk="0" hangingPunct="1">
+                <a:lnSpc>
+                  <a:spcPct val="100000"/>
+                </a:lnSpc>
+                <a:spcBef>
+                  <a:spcPts val="0"/>
+                </a:spcBef>
+                <a:spcAft>
+                  <a:spcPts val="0"/>
+                </a:spcAft>
+                <a:buClrTx/>
+                <a:buSzTx/>
+                <a:buFontTx/>
+                <a:buNone/>
+                <a:tabLst/>
+                <a:defRPr/>
+              </a:pPr>
+              <a:r>
+                <a:rPr kumimoji="0" lang="en-US" sz="800" b="0" i="0" u="none" strike="noStrike" kern="0" cap="none" spc="0" normalizeH="0" baseline="0" noProof="0" dirty="0">
+                  <a:ln>
+                    <a:noFill/>
+                  </a:ln>
+                  <a:solidFill>
+                    <a:prstClr val="black"/>
+                  </a:solidFill>
+                  <a:effectLst/>
+                  <a:uLnTx/>
+                  <a:uFillTx/>
+                  <a:latin typeface="Verdana" panose="020B0604030504040204" pitchFamily="34" charset="0"/>
+                  <a:ea typeface="Verdana" panose="020B0604030504040204" pitchFamily="34" charset="0"/>
+                </a:rPr>
+                <a:t>Agent</a:t>
+              </a:r>
+              <a:endParaRPr kumimoji="0" lang="nl-NL" sz="800" b="0" i="0" u="none" strike="noStrike" kern="0" cap="none" spc="0" normalizeH="0" baseline="0" noProof="0" dirty="0" err="1">
+                <a:ln>
+                  <a:noFill/>
+                </a:ln>
+                <a:solidFill>
+                  <a:prstClr val="black"/>
+                </a:solidFill>
+                <a:effectLst/>
+                <a:uLnTx/>
+                <a:uFillTx/>
+                <a:latin typeface="Verdana" panose="020B0604030504040204" pitchFamily="34" charset="0"/>
+                <a:ea typeface="Verdana" panose="020B0604030504040204" pitchFamily="34" charset="0"/>
+              </a:endParaRPr>
+            </a:p>
+          </p:txBody>
+        </p:sp>
+        <p:sp>
+          <p:nvSpPr>
+            <p:cNvPr id="76" name="Rectangle 75">
+              <a:extLst>
+                <a:ext uri="{FF2B5EF4-FFF2-40B4-BE49-F238E27FC236}">
+                  <a16:creationId xmlns:a16="http://schemas.microsoft.com/office/drawing/2014/main" id="{CB14F1DA-3DA3-74D2-CBB0-609C82178EE3}"/>
+                </a:ext>
+              </a:extLst>
+            </p:cNvPr>
+            <p:cNvSpPr/>
+            <p:nvPr/>
+          </p:nvSpPr>
+          <p:spPr>
+            <a:xfrm>
+              <a:off x="878471" y="2691430"/>
+              <a:ext cx="662234" cy="972663"/>
+            </a:xfrm>
+            <a:prstGeom prst="rect">
+              <a:avLst/>
+            </a:prstGeom>
+            <a:noFill/>
+            <a:ln w="12700" cap="flat" cmpd="sng" algn="ctr">
+              <a:solidFill>
+                <a:srgbClr val="C4232A">
+                  <a:lumMod val="60000"/>
+                  <a:lumOff val="40000"/>
+                </a:srgbClr>
+              </a:solidFill>
+              <a:prstDash val="dash"/>
+              <a:miter lim="800000"/>
+            </a:ln>
+            <a:effectLst/>
+          </p:spPr>
+          <p:txBody>
+            <a:bodyPr rtlCol="0" anchor="ctr"/>
+            <a:lstStyle/>
+            <a:p>
+              <a:pPr marL="0" marR="0" lvl="0" indent="0" algn="ctr" defTabSz="914400" eaLnBrk="1" fontAlgn="auto" latinLnBrk="0" hangingPunct="1">
+                <a:lnSpc>
+                  <a:spcPct val="100000"/>
+                </a:lnSpc>
+                <a:spcBef>
+                  <a:spcPts val="0"/>
+                </a:spcBef>
+                <a:spcAft>
+                  <a:spcPts val="0"/>
+                </a:spcAft>
+                <a:buClrTx/>
+                <a:buSzTx/>
+                <a:buFontTx/>
+                <a:buNone/>
+                <a:tabLst/>
+                <a:defRPr/>
+              </a:pPr>
+              <a:endParaRPr kumimoji="0" lang="nl-NL" sz="1800" b="0" i="0" u="none" strike="noStrike" kern="0" cap="none" spc="0" normalizeH="0" baseline="0" noProof="0">
+                <a:ln>
+                  <a:noFill/>
+                </a:ln>
+                <a:solidFill>
+                  <a:prstClr val="white"/>
+                </a:solidFill>
+                <a:effectLst/>
+                <a:uLnTx/>
+                <a:uFillTx/>
+                <a:latin typeface="Segoe UI Light"/>
+                <a:ea typeface="+mn-ea"/>
+                <a:cs typeface="+mn-cs"/>
+              </a:endParaRPr>
+            </a:p>
+          </p:txBody>
+        </p:sp>
+      </p:grpSp>
+      <p:sp>
+        <p:nvSpPr>
+          <p:cNvPr id="77" name="Rectangle: Rounded Corners 76">
+            <a:extLst>
+              <a:ext uri="{FF2B5EF4-FFF2-40B4-BE49-F238E27FC236}">
+                <a16:creationId xmlns:a16="http://schemas.microsoft.com/office/drawing/2014/main" id="{1373BA30-18E3-015D-D22C-7C0E2CEC7D5E}"/>
+              </a:ext>
+            </a:extLst>
+          </p:cNvPr>
+          <p:cNvSpPr/>
+          <p:nvPr/>
+        </p:nvSpPr>
+        <p:spPr>
+          <a:xfrm>
+            <a:off x="6052867" y="2626640"/>
+            <a:ext cx="2194685" cy="645070"/>
+          </a:xfrm>
+          <a:prstGeom prst="roundRect">
+            <a:avLst/>
+          </a:prstGeom>
+          <a:solidFill>
+            <a:srgbClr val="187398">
+              <a:lumMod val="20000"/>
+              <a:lumOff val="80000"/>
+              <a:alpha val="24000"/>
+            </a:srgbClr>
+          </a:solidFill>
+          <a:ln w="12700" cap="flat" cmpd="sng" algn="ctr">
+            <a:solidFill>
+              <a:srgbClr val="3C9BD5">
+                <a:shade val="15000"/>
+              </a:srgbClr>
+            </a:solidFill>
+            <a:prstDash val="solid"/>
+            <a:miter lim="800000"/>
+          </a:ln>
+          <a:effectLst/>
+        </p:spPr>
+        <p:txBody>
+          <a:bodyPr rtlCol="0" anchor="ctr"/>
+          <a:lstStyle/>
+          <a:p>
+            <a:pPr marL="0" marR="0" lvl="0" indent="0" algn="ctr" defTabSz="914400" eaLnBrk="1" fontAlgn="auto" latinLnBrk="0" hangingPunct="1">
+              <a:lnSpc>
+                <a:spcPct val="100000"/>
+              </a:lnSpc>
+              <a:spcBef>
+                <a:spcPts val="0"/>
+              </a:spcBef>
+              <a:spcAft>
+                <a:spcPts val="0"/>
+              </a:spcAft>
+              <a:buClrTx/>
+              <a:buSzTx/>
+              <a:buFontTx/>
+              <a:buNone/>
+              <a:tabLst/>
+              <a:defRPr/>
+            </a:pPr>
+            <a:endParaRPr kumimoji="0" lang="nl-NL" sz="1800" b="0" i="0" u="none" strike="noStrike" kern="0" cap="none" spc="0" normalizeH="0" baseline="0" noProof="0">
+              <a:ln>
+                <a:noFill/>
+              </a:ln>
+              <a:solidFill>
+                <a:prstClr val="white"/>
+              </a:solidFill>
+              <a:effectLst/>
+              <a:uLnTx/>
+              <a:uFillTx/>
+              <a:latin typeface="Segoe UI Light"/>
+              <a:ea typeface="+mn-ea"/>
+              <a:cs typeface="+mn-cs"/>
+            </a:endParaRPr>
+          </a:p>
+        </p:txBody>
+      </p:sp>
+      <p:sp>
+        <p:nvSpPr>
+          <p:cNvPr id="78" name="TextBox 77">
+            <a:extLst>
+              <a:ext uri="{FF2B5EF4-FFF2-40B4-BE49-F238E27FC236}">
+                <a16:creationId xmlns:a16="http://schemas.microsoft.com/office/drawing/2014/main" id="{F7A9E183-3835-539A-3541-E848FF157F89}"/>
+              </a:ext>
+            </a:extLst>
+          </p:cNvPr>
+          <p:cNvSpPr txBox="1"/>
+          <p:nvPr/>
+        </p:nvSpPr>
+        <p:spPr>
+          <a:xfrm>
+            <a:off x="6031724" y="2734327"/>
+            <a:ext cx="1667446" cy="461665"/>
+          </a:xfrm>
+          <a:prstGeom prst="rect">
+            <a:avLst/>
+          </a:prstGeom>
+          <a:noFill/>
+        </p:spPr>
+        <p:txBody>
+          <a:bodyPr wrap="square" rtlCol="0">
+            <a:spAutoFit/>
+          </a:bodyPr>
+          <a:lstStyle/>
+          <a:p>
+            <a:r>
+              <a:rPr lang="en-US" sz="800" u="sng" dirty="0">
+                <a:solidFill>
+                  <a:prstClr val="black"/>
+                </a:solidFill>
+                <a:latin typeface="Verdana" panose="020B0604030504040204" pitchFamily="34" charset="0"/>
+                <a:ea typeface="Verdana" panose="020B0604030504040204" pitchFamily="34" charset="0"/>
+              </a:rPr>
+              <a:t>E</a:t>
+            </a:r>
+            <a:r>
+              <a:rPr lang="en-US" sz="800" dirty="0">
+                <a:solidFill>
+                  <a:prstClr val="black"/>
+                </a:solidFill>
+                <a:latin typeface="Verdana" panose="020B0604030504040204" pitchFamily="34" charset="0"/>
+                <a:ea typeface="Verdana" panose="020B0604030504040204" pitchFamily="34" charset="0"/>
+              </a:rPr>
+              <a:t>valuate </a:t>
+            </a:r>
+            <a:r>
+              <a:rPr lang="en-US" sz="800" u="sng" dirty="0">
+                <a:solidFill>
+                  <a:prstClr val="black"/>
+                </a:solidFill>
+                <a:latin typeface="Verdana" panose="020B0604030504040204" pitchFamily="34" charset="0"/>
+                <a:ea typeface="Verdana" panose="020B0604030504040204" pitchFamily="34" charset="0"/>
+              </a:rPr>
+              <a:t>arguments</a:t>
+            </a:r>
+            <a:r>
+              <a:rPr lang="en-US" sz="800" dirty="0">
+                <a:solidFill>
+                  <a:prstClr val="black"/>
+                </a:solidFill>
+                <a:latin typeface="Verdana" panose="020B0604030504040204" pitchFamily="34" charset="0"/>
+                <a:ea typeface="Verdana" panose="020B0604030504040204" pitchFamily="34" charset="0"/>
+              </a:rPr>
+              <a:t>. </a:t>
+            </a:r>
+          </a:p>
+          <a:p>
+            <a:r>
+              <a:rPr lang="nl-NL" sz="800" dirty="0" err="1">
+                <a:solidFill>
+                  <a:prstClr val="black"/>
+                </a:solidFill>
+                <a:latin typeface="Verdana" panose="020B0604030504040204" pitchFamily="34" charset="0"/>
+                <a:ea typeface="Verdana" panose="020B0604030504040204" pitchFamily="34" charset="0"/>
+              </a:rPr>
+              <a:t>Respond</a:t>
+            </a:r>
+            <a:r>
+              <a:rPr lang="nl-NL" sz="800" dirty="0">
+                <a:solidFill>
+                  <a:prstClr val="black"/>
+                </a:solidFill>
+                <a:latin typeface="Verdana" panose="020B0604030504040204" pitchFamily="34" charset="0"/>
+                <a:ea typeface="Verdana" panose="020B0604030504040204" pitchFamily="34" charset="0"/>
+              </a:rPr>
+              <a:t> </a:t>
+            </a:r>
+            <a:r>
+              <a:rPr lang="nl-NL" sz="800" dirty="0" err="1">
+                <a:solidFill>
+                  <a:prstClr val="black"/>
+                </a:solidFill>
+                <a:latin typeface="Verdana" panose="020B0604030504040204" pitchFamily="34" charset="0"/>
+                <a:ea typeface="Verdana" panose="020B0604030504040204" pitchFamily="34" charset="0"/>
+              </a:rPr>
+              <a:t>and</a:t>
+            </a:r>
+            <a:r>
+              <a:rPr lang="nl-NL" sz="800" dirty="0">
+                <a:solidFill>
+                  <a:prstClr val="black"/>
+                </a:solidFill>
+                <a:latin typeface="Verdana" panose="020B0604030504040204" pitchFamily="34" charset="0"/>
+                <a:ea typeface="Verdana" panose="020B0604030504040204" pitchFamily="34" charset="0"/>
+              </a:rPr>
+              <a:t> </a:t>
+            </a:r>
+            <a:r>
+              <a:rPr lang="nl-NL" sz="800" dirty="0" err="1">
+                <a:solidFill>
+                  <a:prstClr val="black"/>
+                </a:solidFill>
+                <a:latin typeface="Verdana" panose="020B0604030504040204" pitchFamily="34" charset="0"/>
+                <a:ea typeface="Verdana" panose="020B0604030504040204" pitchFamily="34" charset="0"/>
+              </a:rPr>
+              <a:t>ask</a:t>
+            </a:r>
+            <a:r>
+              <a:rPr lang="nl-NL" sz="800" dirty="0">
+                <a:solidFill>
+                  <a:prstClr val="black"/>
+                </a:solidFill>
+                <a:latin typeface="Verdana" panose="020B0604030504040204" pitchFamily="34" charset="0"/>
+                <a:ea typeface="Verdana" panose="020B0604030504040204" pitchFamily="34" charset="0"/>
+              </a:rPr>
+              <a:t> follow-up</a:t>
+            </a:r>
+          </a:p>
+          <a:p>
+            <a:r>
+              <a:rPr lang="nl-NL" sz="800" dirty="0">
+                <a:solidFill>
+                  <a:prstClr val="black"/>
+                </a:solidFill>
+                <a:latin typeface="Verdana" panose="020B0604030504040204" pitchFamily="34" charset="0"/>
+                <a:ea typeface="Verdana" panose="020B0604030504040204" pitchFamily="34" charset="0"/>
+              </a:rPr>
+              <a:t>question.</a:t>
+            </a:r>
+          </a:p>
+        </p:txBody>
+      </p:sp>
+      <p:pic>
+        <p:nvPicPr>
+          <p:cNvPr id="79" name="Picture 78">
+            <a:extLst>
+              <a:ext uri="{FF2B5EF4-FFF2-40B4-BE49-F238E27FC236}">
+                <a16:creationId xmlns:a16="http://schemas.microsoft.com/office/drawing/2014/main" id="{319AC893-60BB-4A5C-23E8-2B8CE985E94E}"/>
+              </a:ext>
+            </a:extLst>
+          </p:cNvPr>
+          <p:cNvPicPr>
+            <a:picLocks noChangeAspect="1"/>
+          </p:cNvPicPr>
+          <p:nvPr/>
+        </p:nvPicPr>
+        <p:blipFill>
+          <a:blip r:embed="rId5">
+            <a:clrChange>
+              <a:clrFrom>
+                <a:srgbClr val="F4F4F6"/>
+              </a:clrFrom>
+              <a:clrTo>
+                <a:srgbClr val="F4F4F6">
+                  <a:alpha val="0"/>
+                </a:srgbClr>
+              </a:clrTo>
+            </a:clrChange>
+          </a:blip>
+          <a:stretch>
+            <a:fillRect/>
+          </a:stretch>
+        </p:blipFill>
+        <p:spPr>
+          <a:xfrm>
+            <a:off x="7552864" y="2635004"/>
+            <a:ext cx="662234" cy="620443"/>
+          </a:xfrm>
+          <a:prstGeom prst="rect">
+            <a:avLst/>
+          </a:prstGeom>
+        </p:spPr>
+      </p:pic>
+      <p:cxnSp>
+        <p:nvCxnSpPr>
+          <p:cNvPr id="80" name="Straight Arrow Connector 79">
+            <a:extLst>
+              <a:ext uri="{FF2B5EF4-FFF2-40B4-BE49-F238E27FC236}">
+                <a16:creationId xmlns:a16="http://schemas.microsoft.com/office/drawing/2014/main" id="{8481AA98-6020-8318-0DF2-694434202CE9}"/>
+              </a:ext>
+            </a:extLst>
+          </p:cNvPr>
+          <p:cNvCxnSpPr>
+            <a:cxnSpLocks/>
+          </p:cNvCxnSpPr>
+          <p:nvPr/>
+        </p:nvCxnSpPr>
+        <p:spPr>
+          <a:xfrm>
+            <a:off x="7161684" y="2431156"/>
+            <a:ext cx="0" cy="180896"/>
+          </a:xfrm>
+          <a:prstGeom prst="straightConnector1">
+            <a:avLst/>
+          </a:prstGeom>
+          <a:noFill/>
+          <a:ln w="9525" cap="flat" cmpd="sng" algn="ctr">
+            <a:solidFill>
+              <a:sysClr val="windowText" lastClr="000000"/>
+            </a:solidFill>
+            <a:prstDash val="solid"/>
+            <a:miter lim="800000"/>
+            <a:tailEnd type="triangle"/>
+          </a:ln>
+          <a:effectLst/>
+        </p:spPr>
+      </p:cxnSp>
+      <p:cxnSp>
+        <p:nvCxnSpPr>
+          <p:cNvPr id="81" name="Straight Arrow Connector 80">
+            <a:extLst>
+              <a:ext uri="{FF2B5EF4-FFF2-40B4-BE49-F238E27FC236}">
+                <a16:creationId xmlns:a16="http://schemas.microsoft.com/office/drawing/2014/main" id="{9D15C3F4-BDA9-E516-A845-DFE9081EC7B0}"/>
+              </a:ext>
+            </a:extLst>
+          </p:cNvPr>
+          <p:cNvCxnSpPr>
+            <a:cxnSpLocks/>
+          </p:cNvCxnSpPr>
+          <p:nvPr/>
+        </p:nvCxnSpPr>
+        <p:spPr>
+          <a:xfrm>
+            <a:off x="5245185" y="2833805"/>
+            <a:ext cx="540000" cy="0"/>
+          </a:xfrm>
+          <a:prstGeom prst="straightConnector1">
+            <a:avLst/>
+          </a:prstGeom>
+          <a:noFill/>
+          <a:ln w="9525" cap="flat" cmpd="sng" algn="ctr">
+            <a:solidFill>
+              <a:sysClr val="windowText" lastClr="000000"/>
+            </a:solidFill>
+            <a:prstDash val="solid"/>
+            <a:miter lim="800000"/>
+            <a:tailEnd type="triangle"/>
+          </a:ln>
+          <a:effectLst/>
+        </p:spPr>
+      </p:cxnSp>
+      <p:sp>
+        <p:nvSpPr>
+          <p:cNvPr id="100" name="TextBox 99">
+            <a:extLst>
+              <a:ext uri="{FF2B5EF4-FFF2-40B4-BE49-F238E27FC236}">
+                <a16:creationId xmlns:a16="http://schemas.microsoft.com/office/drawing/2014/main" id="{406B51B1-D260-40C6-C033-E987EAB8F416}"/>
+              </a:ext>
+            </a:extLst>
+          </p:cNvPr>
+          <p:cNvSpPr txBox="1"/>
+          <p:nvPr/>
+        </p:nvSpPr>
+        <p:spPr>
+          <a:xfrm>
+            <a:off x="3639411" y="1133231"/>
+            <a:ext cx="1745124" cy="215444"/>
+          </a:xfrm>
+          <a:prstGeom prst="rect">
+            <a:avLst/>
+          </a:prstGeom>
+          <a:noFill/>
+        </p:spPr>
+        <p:txBody>
+          <a:bodyPr wrap="square" rtlCol="0">
+            <a:spAutoFit/>
+          </a:bodyPr>
+          <a:lstStyle/>
+          <a:p>
+            <a:r>
+              <a:rPr lang="en-US" sz="800" b="1" dirty="0">
+                <a:solidFill>
+                  <a:prstClr val="black"/>
+                </a:solidFill>
+                <a:latin typeface="Verdana" panose="020B0604030504040204" pitchFamily="34" charset="0"/>
+                <a:ea typeface="Verdana" panose="020B0604030504040204" pitchFamily="34" charset="0"/>
+              </a:rPr>
+              <a:t>gemma-4-26b-a4b</a:t>
+            </a:r>
+            <a:endParaRPr lang="nl-NL" sz="800" b="1" dirty="0" err="1">
+              <a:solidFill>
+                <a:prstClr val="black"/>
+              </a:solidFill>
+              <a:latin typeface="Verdana" panose="020B0604030504040204" pitchFamily="34" charset="0"/>
+              <a:ea typeface="Verdana" panose="020B0604030504040204" pitchFamily="34" charset="0"/>
+            </a:endParaRPr>
+          </a:p>
+        </p:txBody>
+      </p:sp>
+      <p:sp>
+        <p:nvSpPr>
+          <p:cNvPr id="101" name="TextBox 100">
+            <a:extLst>
+              <a:ext uri="{FF2B5EF4-FFF2-40B4-BE49-F238E27FC236}">
+                <a16:creationId xmlns:a16="http://schemas.microsoft.com/office/drawing/2014/main" id="{9604646C-7379-BEF8-61E9-4D7FAD759691}"/>
+              </a:ext>
+            </a:extLst>
+          </p:cNvPr>
+          <p:cNvSpPr txBox="1"/>
+          <p:nvPr/>
+        </p:nvSpPr>
+        <p:spPr>
+          <a:xfrm>
+            <a:off x="6816674" y="1129720"/>
+            <a:ext cx="1745124" cy="215444"/>
+          </a:xfrm>
+          <a:prstGeom prst="rect">
+            <a:avLst/>
+          </a:prstGeom>
+          <a:noFill/>
+        </p:spPr>
+        <p:txBody>
+          <a:bodyPr wrap="square" rtlCol="0">
+            <a:spAutoFit/>
+          </a:bodyPr>
+          <a:lstStyle/>
+          <a:p>
+            <a:r>
+              <a:rPr lang="en-US" sz="800" b="1" dirty="0">
+                <a:solidFill>
+                  <a:prstClr val="black"/>
+                </a:solidFill>
+                <a:latin typeface="Verdana" panose="020B0604030504040204" pitchFamily="34" charset="0"/>
+                <a:ea typeface="Verdana" panose="020B0604030504040204" pitchFamily="34" charset="0"/>
+              </a:rPr>
+              <a:t>gemma-4-26b-a4b</a:t>
+            </a:r>
+            <a:endParaRPr lang="nl-NL" sz="800" b="1" dirty="0" err="1">
+              <a:solidFill>
+                <a:prstClr val="black"/>
+              </a:solidFill>
+              <a:latin typeface="Verdana" panose="020B0604030504040204" pitchFamily="34" charset="0"/>
+              <a:ea typeface="Verdana" panose="020B0604030504040204" pitchFamily="34" charset="0"/>
+            </a:endParaRPr>
+          </a:p>
+        </p:txBody>
+      </p:sp>
+      <p:pic>
+        <p:nvPicPr>
+          <p:cNvPr id="105" name="Picture 104">
+            <a:extLst>
+              <a:ext uri="{FF2B5EF4-FFF2-40B4-BE49-F238E27FC236}">
+                <a16:creationId xmlns:a16="http://schemas.microsoft.com/office/drawing/2014/main" id="{A8A96FA9-0666-C552-47EA-B5FC7D803AAD}"/>
+              </a:ext>
+            </a:extLst>
+          </p:cNvPr>
+          <p:cNvPicPr>
+            <a:picLocks noChangeAspect="1"/>
+          </p:cNvPicPr>
+          <p:nvPr/>
+        </p:nvPicPr>
+        <p:blipFill>
+          <a:blip r:embed="rId6">
+            <a:clrChange>
+              <a:clrFrom>
+                <a:srgbClr val="F4F4F6"/>
+              </a:clrFrom>
+              <a:clrTo>
+                <a:srgbClr val="F4F4F6">
+                  <a:alpha val="0"/>
+                </a:srgbClr>
+              </a:clrTo>
+            </a:clrChange>
+          </a:blip>
+          <a:stretch>
+            <a:fillRect/>
+          </a:stretch>
+        </p:blipFill>
+        <p:spPr>
+          <a:xfrm>
+            <a:off x="5324608" y="3143140"/>
+            <a:ext cx="453712" cy="467566"/>
+          </a:xfrm>
+          <a:prstGeom prst="rect">
+            <a:avLst/>
+          </a:prstGeom>
+        </p:spPr>
+      </p:pic>
+      <p:pic>
+        <p:nvPicPr>
+          <p:cNvPr id="107" name="Picture 106">
+            <a:extLst>
+              <a:ext uri="{FF2B5EF4-FFF2-40B4-BE49-F238E27FC236}">
+                <a16:creationId xmlns:a16="http://schemas.microsoft.com/office/drawing/2014/main" id="{AE92771D-E1C7-4E1C-8F67-A03D25F8353F}"/>
+              </a:ext>
+            </a:extLst>
+          </p:cNvPr>
+          <p:cNvPicPr>
+            <a:picLocks noChangeAspect="1"/>
+          </p:cNvPicPr>
+          <p:nvPr/>
+        </p:nvPicPr>
+        <p:blipFill>
+          <a:blip r:embed="rId7">
+            <a:clrChange>
+              <a:clrFrom>
+                <a:srgbClr val="F4F4F6"/>
+              </a:clrFrom>
+              <a:clrTo>
+                <a:srgbClr val="F4F4F6">
+                  <a:alpha val="0"/>
+                </a:srgbClr>
+              </a:clrTo>
+            </a:clrChange>
+          </a:blip>
+          <a:stretch>
+            <a:fillRect/>
+          </a:stretch>
+        </p:blipFill>
+        <p:spPr>
+          <a:xfrm>
+            <a:off x="5366372" y="2297577"/>
+            <a:ext cx="336791" cy="406956"/>
+          </a:xfrm>
+          <a:prstGeom prst="rect">
+            <a:avLst/>
+          </a:prstGeom>
+        </p:spPr>
+      </p:pic>
+      <p:cxnSp>
+        <p:nvCxnSpPr>
+          <p:cNvPr id="112" name="Straight Arrow Connector 111">
+            <a:extLst>
+              <a:ext uri="{FF2B5EF4-FFF2-40B4-BE49-F238E27FC236}">
+                <a16:creationId xmlns:a16="http://schemas.microsoft.com/office/drawing/2014/main" id="{C359AB24-B3ED-6F8D-EEF5-BDC097D73A95}"/>
+              </a:ext>
+            </a:extLst>
+          </p:cNvPr>
+          <p:cNvCxnSpPr>
+            <a:cxnSpLocks/>
+          </p:cNvCxnSpPr>
+          <p:nvPr/>
+        </p:nvCxnSpPr>
+        <p:spPr>
+          <a:xfrm flipH="1">
+            <a:off x="5245185" y="3092350"/>
+            <a:ext cx="540000" cy="0"/>
+          </a:xfrm>
+          <a:prstGeom prst="straightConnector1">
+            <a:avLst/>
+          </a:prstGeom>
+          <a:noFill/>
+          <a:ln w="9525" cap="flat" cmpd="sng" algn="ctr">
+            <a:solidFill>
+              <a:sysClr val="windowText" lastClr="000000"/>
+            </a:solidFill>
+            <a:prstDash val="solid"/>
+            <a:miter lim="800000"/>
+            <a:tailEnd type="triangle"/>
+          </a:ln>
+          <a:effectLst/>
+        </p:spPr>
+      </p:cxnSp>
+    </p:spTree>
+    <p:extLst>
+      <p:ext uri="{BB962C8B-B14F-4D97-AF65-F5344CB8AC3E}">
+        <p14:creationId xmlns:p14="http://schemas.microsoft.com/office/powerpoint/2010/main" val="1104323984"/>
+      </p:ext>
+    </p:extLst>
+  </p:cSld>
+  <p:clrMapOvr>
+    <a:masterClrMapping/>
+  </p:clrMapOvr>
+  <p:timing>
+    <p:tnLst>
+      <p:par>
+        <p:cTn id="1" dur="indefinite" restart="never" nodeType="tmRoot">
+          <p:childTnLst>
+            <p:seq concurrent="1" nextAc="seek">
+              <p:cTn id="2" dur="indefinite" nodeType="mainSeq">
+                <p:childTnLst>
+                  <p:par>
+                    <p:cTn id="3" fill="hold">
+                      <p:stCondLst>
+                        <p:cond delay="indefinite"/>
+                        <p:cond evt="onBegin" delay="0">
+                          <p:tn val="2"/>
+                        </p:cond>
+                      </p:stCondLst>
+                      <p:childTnLst>
+                        <p:par>
+                          <p:cTn id="4" fill="hold">
+                            <p:stCondLst>
+                              <p:cond delay="0"/>
+                            </p:stCondLst>
+                            <p:childTnLst>
+                              <p:par>
+                                <p:cTn id="5" presetID="10" presetClass="entr" presetSubtype="0" fill="hold" grpId="0" nodeType="withEffect">
+                                  <p:stCondLst>
+                                    <p:cond delay="0"/>
+                                  </p:stCondLst>
+                                  <p:childTnLst>
+                                    <p:set>
+                                      <p:cBhvr>
+                                        <p:cTn id="6" dur="1" fill="hold">
+                                          <p:stCondLst>
+                                            <p:cond delay="0"/>
+                                          </p:stCondLst>
+                                        </p:cTn>
+                                        <p:tgtEl>
+                                          <p:spTgt spid="100"/>
+                                        </p:tgtEl>
+                                        <p:attrNameLst>
+                                          <p:attrName>style.visibility</p:attrName>
+                                        </p:attrNameLst>
+                                      </p:cBhvr>
+                                      <p:to>
+                                        <p:strVal val="visible"/>
+                                      </p:to>
+                                    </p:set>
+                                    <p:animEffect transition="in" filter="fade">
+                                      <p:cBhvr>
+                                        <p:cTn id="7" dur="500"/>
+                                        <p:tgtEl>
+                                          <p:spTgt spid="100"/>
+                                        </p:tgtEl>
+                                      </p:cBhvr>
+                                    </p:animEffect>
+                                  </p:childTnLst>
+                                </p:cTn>
+                              </p:par>
+                              <p:par>
+                                <p:cTn id="8" presetID="10" presetClass="entr" presetSubtype="0" fill="hold" grpId="0" nodeType="withEffect">
+                                  <p:stCondLst>
+                                    <p:cond delay="0"/>
+                                  </p:stCondLst>
+                                  <p:childTnLst>
+                                    <p:set>
+                                      <p:cBhvr>
+                                        <p:cTn id="9" dur="1" fill="hold">
+                                          <p:stCondLst>
+                                            <p:cond delay="0"/>
+                                          </p:stCondLst>
+                                        </p:cTn>
+                                        <p:tgtEl>
+                                          <p:spTgt spid="101"/>
+                                        </p:tgtEl>
+                                        <p:attrNameLst>
+                                          <p:attrName>style.visibility</p:attrName>
+                                        </p:attrNameLst>
+                                      </p:cBhvr>
+                                      <p:to>
+                                        <p:strVal val="visible"/>
+                                      </p:to>
+                                    </p:set>
+                                    <p:animEffect transition="in" filter="fade">
+                                      <p:cBhvr>
+                                        <p:cTn id="10" dur="500"/>
+                                        <p:tgtEl>
+                                          <p:spTgt spid="101"/>
+                                        </p:tgtEl>
+                                      </p:cBhvr>
+                                    </p:animEffect>
+                                  </p:childTnLst>
+                                </p:cTn>
+                              </p:par>
+                            </p:childTnLst>
+                          </p:cTn>
+                        </p:par>
+                      </p:childTnLst>
+                    </p:cTn>
+                  </p:par>
+                </p:childTnLst>
+              </p:cTn>
+              <p:prevCondLst>
+                <p:cond evt="onPrev" delay="0">
+                  <p:tgtEl>
+                    <p:sldTgt/>
+                  </p:tgtEl>
+                </p:cond>
+              </p:prevCondLst>
+              <p:nextCondLst>
+                <p:cond evt="onNext" delay="0">
+                  <p:tgtEl>
+                    <p:sldTgt/>
+                  </p:tgtEl>
+                </p:cond>
+              </p:nextCondLst>
+            </p:seq>
+          </p:childTnLst>
+        </p:cTn>
+      </p:par>
+    </p:tnLst>
+    <p:bldLst>
+      <p:bldP spid="100" grpId="0"/>
+      <p:bldP spid="101" grpId="0"/>
+    </p:bldLst>
+  </p:timing>
+</p:sld>
+</file>
+
+<file path=ppt/slides/slide6.xml><?xml version="1.0" encoding="utf-8"?>
+<p:sld xmlns:a="http://schemas.openxmlformats.org/drawingml/2006/main" xmlns:r="http://schemas.openxmlformats.org/officeDocument/2006/relationships" xmlns:p="http://schemas.openxmlformats.org/presentationml/2006/main">
+  <p:cSld>
+    <p:spTree>
+      <p:nvGrpSpPr>
+        <p:cNvPr id="1" name="">
+          <a:extLst>
+            <a:ext uri="{FF2B5EF4-FFF2-40B4-BE49-F238E27FC236}">
+              <a16:creationId xmlns:a16="http://schemas.microsoft.com/office/drawing/2014/main" id="{4742C271-B13B-1A08-3D76-487E3A4A391B}"/>
+            </a:ext>
+          </a:extLst>
+        </p:cNvPr>
+        <p:cNvGrpSpPr/>
+        <p:nvPr/>
+      </p:nvGrpSpPr>
+      <p:grpSpPr>
+        <a:xfrm>
+          <a:off x="0" y="0"/>
+          <a:ext cx="0" cy="0"/>
+          <a:chOff x="0" y="0"/>
+          <a:chExt cx="0" cy="0"/>
+        </a:xfrm>
+      </p:grpSpPr>
+      <p:sp>
+        <p:nvSpPr>
+          <p:cNvPr id="58" name="Rectangle: Rounded Corners 57">
+            <a:extLst>
+              <a:ext uri="{FF2B5EF4-FFF2-40B4-BE49-F238E27FC236}">
+                <a16:creationId xmlns:a16="http://schemas.microsoft.com/office/drawing/2014/main" id="{B67556F6-7597-3CD1-8034-8D2466CB5FC8}"/>
+              </a:ext>
+            </a:extLst>
+          </p:cNvPr>
+          <p:cNvSpPr/>
+          <p:nvPr/>
+        </p:nvSpPr>
+        <p:spPr>
+          <a:xfrm>
+            <a:off x="2992189" y="2646512"/>
+            <a:ext cx="1980416" cy="645070"/>
+          </a:xfrm>
+          <a:prstGeom prst="roundRect">
+            <a:avLst/>
+          </a:prstGeom>
+          <a:solidFill>
+            <a:srgbClr val="A1C93A">
+              <a:lumMod val="20000"/>
+              <a:lumOff val="80000"/>
+              <a:alpha val="24000"/>
+            </a:srgbClr>
+          </a:solidFill>
+          <a:ln w="12700" cap="flat" cmpd="sng" algn="ctr">
+            <a:solidFill>
+              <a:srgbClr val="3C9BD5">
+                <a:shade val="15000"/>
+              </a:srgbClr>
+            </a:solidFill>
+            <a:prstDash val="solid"/>
+            <a:miter lim="800000"/>
+          </a:ln>
+          <a:effectLst/>
+        </p:spPr>
+        <p:txBody>
+          <a:bodyPr rtlCol="0" anchor="ctr"/>
+          <a:lstStyle/>
+          <a:p>
+            <a:pPr marL="0" marR="0" lvl="0" indent="0" algn="ctr" defTabSz="914400" eaLnBrk="1" fontAlgn="auto" latinLnBrk="0" hangingPunct="1">
+              <a:lnSpc>
+                <a:spcPct val="100000"/>
+              </a:lnSpc>
+              <a:spcBef>
+                <a:spcPts val="0"/>
+              </a:spcBef>
+              <a:spcAft>
+                <a:spcPts val="0"/>
+              </a:spcAft>
+              <a:buClrTx/>
+              <a:buSzTx/>
+              <a:buFontTx/>
+              <a:buNone/>
+              <a:tabLst/>
+              <a:defRPr/>
+            </a:pPr>
+            <a:endParaRPr kumimoji="0" lang="nl-NL" sz="1800" b="0" i="0" u="none" strike="noStrike" kern="0" cap="none" spc="0" normalizeH="0" baseline="0" noProof="0">
+              <a:ln>
+                <a:noFill/>
+              </a:ln>
+              <a:solidFill>
+                <a:prstClr val="white"/>
+              </a:solidFill>
+              <a:effectLst/>
+              <a:uLnTx/>
+              <a:uFillTx/>
+              <a:latin typeface="Segoe UI Light"/>
+              <a:ea typeface="+mn-ea"/>
+              <a:cs typeface="+mn-cs"/>
+            </a:endParaRPr>
+          </a:p>
+        </p:txBody>
+      </p:sp>
+      <p:grpSp>
+        <p:nvGrpSpPr>
+          <p:cNvPr id="60" name="Group 59">
+            <a:extLst>
+              <a:ext uri="{FF2B5EF4-FFF2-40B4-BE49-F238E27FC236}">
+                <a16:creationId xmlns:a16="http://schemas.microsoft.com/office/drawing/2014/main" id="{ABF3B39E-84BF-0759-6EC1-D45A4D17439C}"/>
+              </a:ext>
+            </a:extLst>
+          </p:cNvPr>
+          <p:cNvGrpSpPr/>
+          <p:nvPr/>
+        </p:nvGrpSpPr>
+        <p:grpSpPr>
+          <a:xfrm>
+            <a:off x="388946" y="2635004"/>
+            <a:ext cx="1655946" cy="638149"/>
+            <a:chOff x="1850066" y="2865619"/>
+            <a:chExt cx="1655946" cy="638149"/>
+          </a:xfrm>
+        </p:grpSpPr>
+        <p:sp>
+          <p:nvSpPr>
+            <p:cNvPr id="61" name="Rectangle: Rounded Corners 60">
+              <a:extLst>
+                <a:ext uri="{FF2B5EF4-FFF2-40B4-BE49-F238E27FC236}">
+                  <a16:creationId xmlns:a16="http://schemas.microsoft.com/office/drawing/2014/main" id="{3A4CD1C7-33DE-C037-58CF-A7E01FD68851}"/>
+                </a:ext>
+              </a:extLst>
+            </p:cNvPr>
+            <p:cNvSpPr/>
+            <p:nvPr/>
+          </p:nvSpPr>
+          <p:spPr>
+            <a:xfrm>
+              <a:off x="1850067" y="2865619"/>
+              <a:ext cx="1633908" cy="638149"/>
+            </a:xfrm>
+            <a:prstGeom prst="roundRect">
+              <a:avLst/>
+            </a:prstGeom>
+            <a:solidFill>
+              <a:srgbClr val="FFC000">
+                <a:alpha val="24000"/>
+              </a:srgbClr>
+            </a:solidFill>
+            <a:ln w="12700" cap="flat" cmpd="sng" algn="ctr">
+              <a:solidFill>
+                <a:srgbClr val="3C9BD5">
+                  <a:shade val="15000"/>
+                </a:srgbClr>
+              </a:solidFill>
+              <a:prstDash val="solid"/>
+              <a:miter lim="800000"/>
+            </a:ln>
+            <a:effectLst/>
+          </p:spPr>
+          <p:txBody>
+            <a:bodyPr rtlCol="0" anchor="ctr"/>
+            <a:lstStyle/>
+            <a:p>
+              <a:pPr marL="0" marR="0" lvl="0" indent="0" algn="ctr" defTabSz="914400" eaLnBrk="1" fontAlgn="auto" latinLnBrk="0" hangingPunct="1">
+                <a:lnSpc>
+                  <a:spcPct val="100000"/>
+                </a:lnSpc>
+                <a:spcBef>
+                  <a:spcPts val="0"/>
+                </a:spcBef>
+                <a:spcAft>
+                  <a:spcPts val="0"/>
+                </a:spcAft>
+                <a:buClrTx/>
+                <a:buSzTx/>
+                <a:buFontTx/>
+                <a:buNone/>
+                <a:tabLst/>
+                <a:defRPr/>
+              </a:pPr>
+              <a:endParaRPr kumimoji="0" lang="nl-NL" sz="1800" b="0" i="0" u="none" strike="noStrike" kern="0" cap="none" spc="0" normalizeH="0" baseline="0" noProof="0">
+                <a:ln>
+                  <a:noFill/>
+                </a:ln>
+                <a:solidFill>
+                  <a:prstClr val="white"/>
+                </a:solidFill>
+                <a:effectLst/>
+                <a:uLnTx/>
+                <a:uFillTx/>
+                <a:latin typeface="Segoe UI Light"/>
+                <a:ea typeface="+mn-ea"/>
+                <a:cs typeface="+mn-cs"/>
+              </a:endParaRPr>
+            </a:p>
+          </p:txBody>
+        </p:sp>
+        <p:pic>
+          <p:nvPicPr>
+            <p:cNvPr id="62" name="Picture 61">
+              <a:extLst>
+                <a:ext uri="{FF2B5EF4-FFF2-40B4-BE49-F238E27FC236}">
+                  <a16:creationId xmlns:a16="http://schemas.microsoft.com/office/drawing/2014/main" id="{3140AC67-A2DB-61C5-B847-64F889F8FCE7}"/>
+                </a:ext>
+              </a:extLst>
+            </p:cNvPr>
+            <p:cNvPicPr>
+              <a:picLocks noChangeAspect="1"/>
+            </p:cNvPicPr>
+            <p:nvPr/>
+          </p:nvPicPr>
+          <p:blipFill>
+            <a:blip r:embed="rId2">
+              <a:clrChange>
+                <a:clrFrom>
+                  <a:srgbClr val="F4F4F6"/>
+                </a:clrFrom>
+                <a:clrTo>
+                  <a:srgbClr val="F4F4F6">
+                    <a:alpha val="0"/>
+                  </a:srgbClr>
+                </a:clrTo>
+              </a:clrChange>
+            </a:blip>
+            <a:stretch>
+              <a:fillRect/>
+            </a:stretch>
+          </p:blipFill>
+          <p:spPr>
+            <a:xfrm>
+              <a:off x="2899742" y="2870864"/>
+              <a:ext cx="606270" cy="606270"/>
+            </a:xfrm>
+            <a:prstGeom prst="rect">
+              <a:avLst/>
+            </a:prstGeom>
+          </p:spPr>
+        </p:pic>
+        <p:sp>
+          <p:nvSpPr>
+            <p:cNvPr id="63" name="TextBox 62">
+              <a:extLst>
+                <a:ext uri="{FF2B5EF4-FFF2-40B4-BE49-F238E27FC236}">
+                  <a16:creationId xmlns:a16="http://schemas.microsoft.com/office/drawing/2014/main" id="{EC74B90C-DEC6-DE27-B745-C7B330DAB110}"/>
+                </a:ext>
+              </a:extLst>
+            </p:cNvPr>
+            <p:cNvSpPr txBox="1"/>
+            <p:nvPr/>
+          </p:nvSpPr>
+          <p:spPr>
+            <a:xfrm>
+              <a:off x="1850066" y="2970231"/>
+              <a:ext cx="1200970" cy="338554"/>
+            </a:xfrm>
+            <a:prstGeom prst="rect">
+              <a:avLst/>
+            </a:prstGeom>
+            <a:noFill/>
+          </p:spPr>
+          <p:txBody>
+            <a:bodyPr wrap="none" rtlCol="0">
+              <a:spAutoFit/>
+            </a:bodyPr>
+            <a:lstStyle/>
+            <a:p>
+              <a:pPr marL="0" marR="0" lvl="0" indent="0" defTabSz="914400" eaLnBrk="1" fontAlgn="auto" latinLnBrk="0" hangingPunct="1">
+                <a:lnSpc>
+                  <a:spcPct val="100000"/>
+                </a:lnSpc>
+                <a:spcBef>
+                  <a:spcPts val="0"/>
+                </a:spcBef>
+                <a:spcAft>
+                  <a:spcPts val="0"/>
+                </a:spcAft>
+                <a:buClrTx/>
+                <a:buSzTx/>
+                <a:buFontTx/>
+                <a:buNone/>
+                <a:tabLst/>
+                <a:defRPr/>
+              </a:pPr>
+              <a:r>
+                <a:rPr kumimoji="0" lang="en-US" sz="800" b="0" i="0" u="none" strike="noStrike" kern="0" cap="none" spc="0" normalizeH="0" baseline="0" noProof="0" dirty="0">
+                  <a:ln>
+                    <a:noFill/>
+                  </a:ln>
+                  <a:solidFill>
+                    <a:prstClr val="black"/>
+                  </a:solidFill>
+                  <a:effectLst/>
+                  <a:uLnTx/>
+                  <a:uFillTx/>
+                  <a:latin typeface="Verdana" panose="020B0604030504040204" pitchFamily="34" charset="0"/>
+                  <a:ea typeface="Verdana" panose="020B0604030504040204" pitchFamily="34" charset="0"/>
+                </a:rPr>
+                <a:t>Start discussion </a:t>
+              </a:r>
+            </a:p>
+            <a:p>
+              <a:pPr marL="0" marR="0" lvl="0" indent="0" defTabSz="914400" eaLnBrk="1" fontAlgn="auto" latinLnBrk="0" hangingPunct="1">
+                <a:lnSpc>
+                  <a:spcPct val="100000"/>
+                </a:lnSpc>
+                <a:spcBef>
+                  <a:spcPts val="0"/>
+                </a:spcBef>
+                <a:spcAft>
+                  <a:spcPts val="0"/>
+                </a:spcAft>
+                <a:buClrTx/>
+                <a:buSzTx/>
+                <a:buFontTx/>
+                <a:buNone/>
+                <a:tabLst/>
+                <a:defRPr/>
+              </a:pPr>
+              <a:r>
+                <a:rPr kumimoji="0" lang="en-US" sz="800" b="0" i="0" u="none" strike="noStrike" kern="0" cap="none" spc="0" normalizeH="0" baseline="0" noProof="0" dirty="0">
+                  <a:ln>
+                    <a:noFill/>
+                  </a:ln>
+                  <a:solidFill>
+                    <a:prstClr val="black"/>
+                  </a:solidFill>
+                  <a:effectLst/>
+                  <a:uLnTx/>
+                  <a:uFillTx/>
+                  <a:latin typeface="Verdana" panose="020B0604030504040204" pitchFamily="34" charset="0"/>
+                  <a:ea typeface="Verdana" panose="020B0604030504040204" pitchFamily="34" charset="0"/>
+                </a:rPr>
+                <a:t>on topic of interest.</a:t>
+              </a:r>
+            </a:p>
+          </p:txBody>
+        </p:sp>
+      </p:grpSp>
+      <p:cxnSp>
+        <p:nvCxnSpPr>
+          <p:cNvPr id="64" name="Straight Arrow Connector 63">
+            <a:extLst>
+              <a:ext uri="{FF2B5EF4-FFF2-40B4-BE49-F238E27FC236}">
+                <a16:creationId xmlns:a16="http://schemas.microsoft.com/office/drawing/2014/main" id="{C1982BBE-95E1-A5AF-BCC6-248404CFCA6C}"/>
+              </a:ext>
+            </a:extLst>
+          </p:cNvPr>
+          <p:cNvCxnSpPr>
+            <a:cxnSpLocks/>
+          </p:cNvCxnSpPr>
+          <p:nvPr/>
+        </p:nvCxnSpPr>
+        <p:spPr>
+          <a:xfrm>
+            <a:off x="2154435" y="2960670"/>
+            <a:ext cx="365760" cy="0"/>
+          </a:xfrm>
+          <a:prstGeom prst="straightConnector1">
+            <a:avLst/>
+          </a:prstGeom>
+          <a:noFill/>
+          <a:ln w="9525" cap="flat" cmpd="sng" algn="ctr">
+            <a:solidFill>
+              <a:sysClr val="windowText" lastClr="000000"/>
+            </a:solidFill>
+            <a:prstDash val="solid"/>
+            <a:miter lim="800000"/>
+            <a:tailEnd type="triangle"/>
+          </a:ln>
+          <a:effectLst/>
+        </p:spPr>
+      </p:cxnSp>
+      <p:sp>
+        <p:nvSpPr>
+          <p:cNvPr id="65" name="TextBox 64">
+            <a:extLst>
+              <a:ext uri="{FF2B5EF4-FFF2-40B4-BE49-F238E27FC236}">
+                <a16:creationId xmlns:a16="http://schemas.microsoft.com/office/drawing/2014/main" id="{BA312F6C-413E-EBAC-4088-784BE9DEF1DE}"/>
+              </a:ext>
+            </a:extLst>
+          </p:cNvPr>
+          <p:cNvSpPr txBox="1"/>
+          <p:nvPr/>
+        </p:nvSpPr>
+        <p:spPr>
+          <a:xfrm>
+            <a:off x="2971477" y="2718384"/>
+            <a:ext cx="1520147" cy="461665"/>
+          </a:xfrm>
+          <a:prstGeom prst="rect">
+            <a:avLst/>
+          </a:prstGeom>
+          <a:noFill/>
+        </p:spPr>
+        <p:txBody>
+          <a:bodyPr wrap="square" rtlCol="0">
+            <a:spAutoFit/>
+          </a:bodyPr>
+          <a:lstStyle/>
+          <a:p>
+            <a:r>
+              <a:rPr lang="en-US" sz="800" dirty="0">
+                <a:solidFill>
+                  <a:prstClr val="black"/>
+                </a:solidFill>
+                <a:latin typeface="Verdana" panose="020B0604030504040204" pitchFamily="34" charset="0"/>
+                <a:ea typeface="Verdana" panose="020B0604030504040204" pitchFamily="34" charset="0"/>
+              </a:rPr>
+              <a:t>Discuss the importance of the use of Large Language Models and AI.</a:t>
+            </a:r>
+            <a:endParaRPr lang="nl-NL" sz="800" dirty="0" err="1">
+              <a:solidFill>
+                <a:prstClr val="black"/>
+              </a:solidFill>
+              <a:latin typeface="Verdana" panose="020B0604030504040204" pitchFamily="34" charset="0"/>
+              <a:ea typeface="Verdana" panose="020B0604030504040204" pitchFamily="34" charset="0"/>
+            </a:endParaRPr>
+          </a:p>
+        </p:txBody>
+      </p:sp>
+      <p:pic>
+        <p:nvPicPr>
+          <p:cNvPr id="66" name="Picture 65">
+            <a:extLst>
+              <a:ext uri="{FF2B5EF4-FFF2-40B4-BE49-F238E27FC236}">
+                <a16:creationId xmlns:a16="http://schemas.microsoft.com/office/drawing/2014/main" id="{4212BBCA-847B-C681-E198-883EF55F9EDF}"/>
+              </a:ext>
+            </a:extLst>
+          </p:cNvPr>
+          <p:cNvPicPr>
+            <a:picLocks noChangeAspect="1"/>
+          </p:cNvPicPr>
+          <p:nvPr/>
+        </p:nvPicPr>
+        <p:blipFill>
+          <a:blip r:embed="rId3">
+            <a:clrChange>
+              <a:clrFrom>
+                <a:srgbClr val="F4F4F6"/>
+              </a:clrFrom>
+              <a:clrTo>
+                <a:srgbClr val="F4F4F6">
+                  <a:alpha val="0"/>
+                </a:srgbClr>
+              </a:clrTo>
+            </a:clrChange>
+          </a:blip>
+          <a:stretch>
+            <a:fillRect/>
+          </a:stretch>
+        </p:blipFill>
+        <p:spPr>
+          <a:xfrm>
+            <a:off x="4528574" y="2708103"/>
+            <a:ext cx="398594" cy="470562"/>
+          </a:xfrm>
+          <a:prstGeom prst="rect">
+            <a:avLst/>
+          </a:prstGeom>
+        </p:spPr>
+      </p:pic>
+      <p:grpSp>
+        <p:nvGrpSpPr>
+          <p:cNvPr id="67" name="Group 66">
+            <a:extLst>
+              <a:ext uri="{FF2B5EF4-FFF2-40B4-BE49-F238E27FC236}">
+                <a16:creationId xmlns:a16="http://schemas.microsoft.com/office/drawing/2014/main" id="{F5145826-A868-F1AD-4D66-912F77AD75A3}"/>
+              </a:ext>
+            </a:extLst>
+          </p:cNvPr>
+          <p:cNvGrpSpPr/>
+          <p:nvPr/>
+        </p:nvGrpSpPr>
+        <p:grpSpPr>
+          <a:xfrm>
+            <a:off x="3685492" y="1372778"/>
+            <a:ext cx="754288" cy="988926"/>
+            <a:chOff x="4081920" y="2487881"/>
+            <a:chExt cx="754288" cy="988926"/>
+          </a:xfrm>
+        </p:grpSpPr>
+        <p:pic>
+          <p:nvPicPr>
+            <p:cNvPr id="68" name="Picture 2" descr="Bot (informática) - EcuRed">
+              <a:extLst>
+                <a:ext uri="{FF2B5EF4-FFF2-40B4-BE49-F238E27FC236}">
+                  <a16:creationId xmlns:a16="http://schemas.microsoft.com/office/drawing/2014/main" id="{F958EC35-AC4F-552E-EAEF-BA854E05BC24}"/>
+                </a:ext>
+              </a:extLst>
+            </p:cNvPr>
+            <p:cNvPicPr>
+              <a:picLocks noChangeAspect="1" noChangeArrowheads="1"/>
+            </p:cNvPicPr>
+            <p:nvPr/>
+          </p:nvPicPr>
+          <p:blipFill rotWithShape="1">
+            <a:blip r:embed="rId4">
+              <a:clrChange>
+                <a:clrFrom>
+                  <a:srgbClr val="FFFFFF"/>
+                </a:clrFrom>
+                <a:clrTo>
+                  <a:srgbClr val="FFFFFF">
+                    <a:alpha val="0"/>
+                  </a:srgbClr>
+                </a:clrTo>
+              </a:clrChange>
+              <a:duotone>
+                <a:srgbClr val="A1C93A">
+                  <a:shade val="45000"/>
+                  <a:satMod val="135000"/>
+                </a:srgbClr>
+                <a:prstClr val="white"/>
+              </a:duotone>
+              <a:extLst>
+                <a:ext uri="{28A0092B-C50C-407E-A947-70E740481C1C}">
+                  <a14:useLocalDpi xmlns:a14="http://schemas.microsoft.com/office/drawing/2010/main" val="0"/>
+                </a:ext>
+              </a:extLst>
+            </a:blip>
+            <a:srcRect l="18962" t="6530" r="16637" b="12432"/>
+            <a:stretch/>
+          </p:blipFill>
+          <p:spPr bwMode="auto">
+            <a:xfrm>
+              <a:off x="4289396" y="2583023"/>
+              <a:ext cx="381057" cy="479497"/>
+            </a:xfrm>
+            <a:prstGeom prst="rect">
+              <a:avLst/>
+            </a:prstGeom>
+            <a:noFill/>
+            <a:extLst>
+              <a:ext uri="{909E8E84-426E-40DD-AFC4-6F175D3DCCD1}">
+                <a14:hiddenFill xmlns:a14="http://schemas.microsoft.com/office/drawing/2010/main">
+                  <a:solidFill>
+                    <a:srgbClr val="FFFFFF"/>
+                  </a:solidFill>
+                </a14:hiddenFill>
+              </a:ext>
+            </a:extLst>
+          </p:spPr>
+        </p:pic>
+        <p:sp>
+          <p:nvSpPr>
+            <p:cNvPr id="69" name="TextBox 68">
+              <a:extLst>
+                <a:ext uri="{FF2B5EF4-FFF2-40B4-BE49-F238E27FC236}">
+                  <a16:creationId xmlns:a16="http://schemas.microsoft.com/office/drawing/2014/main" id="{662E9DB6-2979-4E5C-D594-C162AD9FCFA1}"/>
+                </a:ext>
+              </a:extLst>
+            </p:cNvPr>
+            <p:cNvSpPr txBox="1"/>
+            <p:nvPr/>
+          </p:nvSpPr>
+          <p:spPr>
+            <a:xfrm>
+              <a:off x="4081920" y="3015142"/>
+              <a:ext cx="754288" cy="461665"/>
+            </a:xfrm>
+            <a:prstGeom prst="rect">
+              <a:avLst/>
+            </a:prstGeom>
+            <a:noFill/>
+          </p:spPr>
+          <p:txBody>
+            <a:bodyPr wrap="square" rtlCol="0">
+              <a:spAutoFit/>
+            </a:bodyPr>
+            <a:lstStyle/>
+            <a:p>
+              <a:pPr marL="0" marR="0" lvl="0" indent="0" algn="ctr" defTabSz="914400" eaLnBrk="1" fontAlgn="auto" latinLnBrk="0" hangingPunct="1">
+                <a:lnSpc>
+                  <a:spcPct val="100000"/>
+                </a:lnSpc>
+                <a:spcBef>
+                  <a:spcPts val="0"/>
+                </a:spcBef>
+                <a:spcAft>
+                  <a:spcPts val="0"/>
+                </a:spcAft>
+                <a:buClrTx/>
+                <a:buSzTx/>
+                <a:buFontTx/>
+                <a:buNone/>
+                <a:tabLst/>
+                <a:defRPr/>
+              </a:pPr>
+              <a:r>
+                <a:rPr kumimoji="0" lang="en-US" sz="800" b="0" i="0" u="none" strike="noStrike" kern="0" cap="none" spc="0" normalizeH="0" baseline="0" noProof="0" dirty="0">
+                  <a:ln>
+                    <a:noFill/>
+                  </a:ln>
+                  <a:solidFill>
+                    <a:prstClr val="black"/>
+                  </a:solidFill>
+                  <a:effectLst/>
+                  <a:uLnTx/>
+                  <a:uFillTx/>
+                  <a:latin typeface="Verdana" panose="020B0604030504040204" pitchFamily="34" charset="0"/>
+                  <a:ea typeface="Verdana" panose="020B0604030504040204" pitchFamily="34" charset="0"/>
+                </a:rPr>
+                <a:t>Data Science</a:t>
+              </a:r>
+            </a:p>
+            <a:p>
+              <a:pPr marL="0" marR="0" lvl="0" indent="0" algn="ctr" defTabSz="914400" eaLnBrk="1" fontAlgn="auto" latinLnBrk="0" hangingPunct="1">
+                <a:lnSpc>
+                  <a:spcPct val="100000"/>
+                </a:lnSpc>
+                <a:spcBef>
+                  <a:spcPts val="0"/>
+                </a:spcBef>
+                <a:spcAft>
+                  <a:spcPts val="0"/>
+                </a:spcAft>
+                <a:buClrTx/>
+                <a:buSzTx/>
+                <a:buFontTx/>
+                <a:buNone/>
+                <a:tabLst/>
+                <a:defRPr/>
+              </a:pPr>
+              <a:r>
+                <a:rPr kumimoji="0" lang="en-US" sz="800" b="0" i="0" u="none" strike="noStrike" kern="0" cap="none" spc="0" normalizeH="0" baseline="0" noProof="0" dirty="0">
+                  <a:ln>
+                    <a:noFill/>
+                  </a:ln>
+                  <a:solidFill>
+                    <a:prstClr val="black"/>
+                  </a:solidFill>
+                  <a:effectLst/>
+                  <a:uLnTx/>
+                  <a:uFillTx/>
+                  <a:latin typeface="Verdana" panose="020B0604030504040204" pitchFamily="34" charset="0"/>
+                  <a:ea typeface="Verdana" panose="020B0604030504040204" pitchFamily="34" charset="0"/>
+                </a:rPr>
+                <a:t>Agent</a:t>
+              </a:r>
+            </a:p>
+          </p:txBody>
+        </p:sp>
+        <p:sp>
+          <p:nvSpPr>
+            <p:cNvPr id="70" name="Rectangle 69">
+              <a:extLst>
+                <a:ext uri="{FF2B5EF4-FFF2-40B4-BE49-F238E27FC236}">
+                  <a16:creationId xmlns:a16="http://schemas.microsoft.com/office/drawing/2014/main" id="{AF02A1AD-E366-3E80-8777-26BE109AEDC4}"/>
+                </a:ext>
+              </a:extLst>
+            </p:cNvPr>
+            <p:cNvSpPr/>
+            <p:nvPr/>
+          </p:nvSpPr>
+          <p:spPr>
+            <a:xfrm>
+              <a:off x="4127947" y="2487881"/>
+              <a:ext cx="662234" cy="972663"/>
+            </a:xfrm>
+            <a:prstGeom prst="rect">
+              <a:avLst/>
+            </a:prstGeom>
+            <a:noFill/>
+            <a:ln w="12700" cap="flat" cmpd="sng" algn="ctr">
+              <a:solidFill>
+                <a:srgbClr val="C4232A">
+                  <a:lumMod val="60000"/>
+                  <a:lumOff val="40000"/>
+                </a:srgbClr>
+              </a:solidFill>
+              <a:prstDash val="dash"/>
+              <a:miter lim="800000"/>
+            </a:ln>
+            <a:effectLst/>
+          </p:spPr>
+          <p:txBody>
+            <a:bodyPr rtlCol="0" anchor="ctr"/>
+            <a:lstStyle/>
+            <a:p>
+              <a:pPr marL="0" marR="0" lvl="0" indent="0" algn="ctr" defTabSz="914400" eaLnBrk="1" fontAlgn="auto" latinLnBrk="0" hangingPunct="1">
+                <a:lnSpc>
+                  <a:spcPct val="100000"/>
+                </a:lnSpc>
+                <a:spcBef>
+                  <a:spcPts val="0"/>
+                </a:spcBef>
+                <a:spcAft>
+                  <a:spcPts val="0"/>
+                </a:spcAft>
+                <a:buClrTx/>
+                <a:buSzTx/>
+                <a:buFontTx/>
+                <a:buNone/>
+                <a:tabLst/>
+                <a:defRPr/>
+              </a:pPr>
+              <a:endParaRPr kumimoji="0" lang="nl-NL" sz="1800" b="0" i="0" u="none" strike="noStrike" kern="0" cap="none" spc="0" normalizeH="0" baseline="0" noProof="0">
+                <a:ln>
+                  <a:noFill/>
+                </a:ln>
+                <a:solidFill>
+                  <a:prstClr val="white"/>
+                </a:solidFill>
+                <a:effectLst/>
+                <a:uLnTx/>
+                <a:uFillTx/>
+                <a:latin typeface="Segoe UI Light"/>
+                <a:ea typeface="+mn-ea"/>
+                <a:cs typeface="+mn-cs"/>
+              </a:endParaRPr>
+            </a:p>
+          </p:txBody>
+        </p:sp>
+      </p:grpSp>
+      <p:cxnSp>
+        <p:nvCxnSpPr>
+          <p:cNvPr id="71" name="Straight Arrow Connector 70">
+            <a:extLst>
+              <a:ext uri="{FF2B5EF4-FFF2-40B4-BE49-F238E27FC236}">
+                <a16:creationId xmlns:a16="http://schemas.microsoft.com/office/drawing/2014/main" id="{D3C59D0A-3365-2960-2BD4-E271C8048AA9}"/>
+              </a:ext>
+            </a:extLst>
+          </p:cNvPr>
+          <p:cNvCxnSpPr>
+            <a:cxnSpLocks/>
+          </p:cNvCxnSpPr>
+          <p:nvPr/>
+        </p:nvCxnSpPr>
+        <p:spPr>
+          <a:xfrm>
+            <a:off x="4043419" y="2436392"/>
+            <a:ext cx="0" cy="180896"/>
+          </a:xfrm>
+          <a:prstGeom prst="straightConnector1">
+            <a:avLst/>
+          </a:prstGeom>
+          <a:noFill/>
+          <a:ln w="9525" cap="flat" cmpd="sng" algn="ctr">
+            <a:solidFill>
+              <a:sysClr val="windowText" lastClr="000000"/>
+            </a:solidFill>
+            <a:prstDash val="solid"/>
+            <a:miter lim="800000"/>
+            <a:tailEnd type="triangle"/>
+          </a:ln>
+          <a:effectLst/>
+        </p:spPr>
+      </p:cxnSp>
+      <p:grpSp>
+        <p:nvGrpSpPr>
+          <p:cNvPr id="73" name="Group 72">
+            <a:extLst>
+              <a:ext uri="{FF2B5EF4-FFF2-40B4-BE49-F238E27FC236}">
+                <a16:creationId xmlns:a16="http://schemas.microsoft.com/office/drawing/2014/main" id="{9E16890C-22C1-91CC-871A-8D6B3EAC6D49}"/>
+              </a:ext>
+            </a:extLst>
+          </p:cNvPr>
+          <p:cNvGrpSpPr/>
+          <p:nvPr/>
+        </p:nvGrpSpPr>
+        <p:grpSpPr>
+          <a:xfrm>
+            <a:off x="6791545" y="1417862"/>
+            <a:ext cx="754288" cy="972663"/>
+            <a:chOff x="838155" y="2691430"/>
+            <a:chExt cx="754288" cy="972663"/>
+          </a:xfrm>
+        </p:grpSpPr>
+        <p:pic>
+          <p:nvPicPr>
+            <p:cNvPr id="74" name="Picture 2" descr="Bot (informática) - EcuRed">
+              <a:extLst>
+                <a:ext uri="{FF2B5EF4-FFF2-40B4-BE49-F238E27FC236}">
+                  <a16:creationId xmlns:a16="http://schemas.microsoft.com/office/drawing/2014/main" id="{9F4557E9-7236-8E63-12DE-599F0655FBF9}"/>
+                </a:ext>
+              </a:extLst>
+            </p:cNvPr>
+            <p:cNvPicPr>
+              <a:picLocks noChangeAspect="1" noChangeArrowheads="1"/>
+            </p:cNvPicPr>
+            <p:nvPr/>
+          </p:nvPicPr>
+          <p:blipFill rotWithShape="1">
+            <a:blip r:embed="rId4">
+              <a:clrChange>
+                <a:clrFrom>
+                  <a:srgbClr val="FFFFFF"/>
+                </a:clrFrom>
+                <a:clrTo>
+                  <a:srgbClr val="FFFFFF">
+                    <a:alpha val="0"/>
+                  </a:srgbClr>
+                </a:clrTo>
+              </a:clrChange>
+              <a:duotone>
+                <a:srgbClr val="187398">
+                  <a:shade val="45000"/>
+                  <a:satMod val="135000"/>
+                </a:srgbClr>
+                <a:prstClr val="white"/>
+              </a:duotone>
+              <a:extLst>
+                <a:ext uri="{28A0092B-C50C-407E-A947-70E740481C1C}">
+                  <a14:useLocalDpi xmlns:a14="http://schemas.microsoft.com/office/drawing/2010/main" val="0"/>
+                </a:ext>
+              </a:extLst>
+            </a:blip>
+            <a:srcRect l="18962" t="6530" r="16637" b="12432"/>
+            <a:stretch/>
+          </p:blipFill>
+          <p:spPr bwMode="auto">
+            <a:xfrm>
+              <a:off x="1036816" y="2861045"/>
+              <a:ext cx="381057" cy="479497"/>
+            </a:xfrm>
+            <a:prstGeom prst="rect">
+              <a:avLst/>
+            </a:prstGeom>
+            <a:noFill/>
+            <a:extLst>
+              <a:ext uri="{909E8E84-426E-40DD-AFC4-6F175D3DCCD1}">
+                <a14:hiddenFill xmlns:a14="http://schemas.microsoft.com/office/drawing/2010/main">
+                  <a:solidFill>
+                    <a:srgbClr val="FFFFFF"/>
+                  </a:solidFill>
+                </a14:hiddenFill>
+              </a:ext>
+            </a:extLst>
+          </p:spPr>
+        </p:pic>
+        <p:sp>
+          <p:nvSpPr>
+            <p:cNvPr id="75" name="TextBox 74">
+              <a:extLst>
+                <a:ext uri="{FF2B5EF4-FFF2-40B4-BE49-F238E27FC236}">
+                  <a16:creationId xmlns:a16="http://schemas.microsoft.com/office/drawing/2014/main" id="{159D918A-BF19-6ED4-36BB-8C80F8CB61C4}"/>
+                </a:ext>
+              </a:extLst>
+            </p:cNvPr>
+            <p:cNvSpPr txBox="1"/>
+            <p:nvPr/>
+          </p:nvSpPr>
+          <p:spPr>
+            <a:xfrm>
+              <a:off x="838155" y="3301091"/>
+              <a:ext cx="754288" cy="338554"/>
+            </a:xfrm>
+            <a:prstGeom prst="rect">
+              <a:avLst/>
+            </a:prstGeom>
+            <a:noFill/>
+          </p:spPr>
+          <p:txBody>
+            <a:bodyPr wrap="square" rtlCol="0">
+              <a:spAutoFit/>
+            </a:bodyPr>
+            <a:lstStyle/>
+            <a:p>
+              <a:pPr marL="0" marR="0" lvl="0" indent="0" algn="ctr" defTabSz="914400" eaLnBrk="1" fontAlgn="auto" latinLnBrk="0" hangingPunct="1">
+                <a:lnSpc>
+                  <a:spcPct val="100000"/>
+                </a:lnSpc>
+                <a:spcBef>
+                  <a:spcPts val="0"/>
+                </a:spcBef>
+                <a:spcAft>
+                  <a:spcPts val="0"/>
+                </a:spcAft>
+                <a:buClrTx/>
+                <a:buSzTx/>
+                <a:buFontTx/>
+                <a:buNone/>
+                <a:tabLst/>
+                <a:defRPr/>
+              </a:pPr>
+              <a:r>
+                <a:rPr kumimoji="0" lang="en-US" sz="800" b="0" i="0" u="none" strike="noStrike" kern="0" cap="none" spc="0" normalizeH="0" baseline="0" noProof="0" dirty="0">
+                  <a:ln>
+                    <a:noFill/>
+                  </a:ln>
+                  <a:solidFill>
+                    <a:prstClr val="black"/>
+                  </a:solidFill>
+                  <a:effectLst/>
+                  <a:uLnTx/>
+                  <a:uFillTx/>
+                  <a:latin typeface="Verdana" panose="020B0604030504040204" pitchFamily="34" charset="0"/>
+                  <a:ea typeface="Verdana" panose="020B0604030504040204" pitchFamily="34" charset="0"/>
+                </a:rPr>
+                <a:t>Farmer</a:t>
+              </a:r>
+            </a:p>
+            <a:p>
+              <a:pPr marL="0" marR="0" lvl="0" indent="0" algn="ctr" defTabSz="914400" eaLnBrk="1" fontAlgn="auto" latinLnBrk="0" hangingPunct="1">
+                <a:lnSpc>
+                  <a:spcPct val="100000"/>
+                </a:lnSpc>
+                <a:spcBef>
+                  <a:spcPts val="0"/>
+                </a:spcBef>
+                <a:spcAft>
+                  <a:spcPts val="0"/>
+                </a:spcAft>
+                <a:buClrTx/>
+                <a:buSzTx/>
+                <a:buFontTx/>
+                <a:buNone/>
+                <a:tabLst/>
+                <a:defRPr/>
+              </a:pPr>
+              <a:r>
+                <a:rPr kumimoji="0" lang="en-US" sz="800" b="0" i="0" u="none" strike="noStrike" kern="0" cap="none" spc="0" normalizeH="0" baseline="0" noProof="0" dirty="0">
+                  <a:ln>
+                    <a:noFill/>
+                  </a:ln>
+                  <a:solidFill>
+                    <a:prstClr val="black"/>
+                  </a:solidFill>
+                  <a:effectLst/>
+                  <a:uLnTx/>
+                  <a:uFillTx/>
+                  <a:latin typeface="Verdana" panose="020B0604030504040204" pitchFamily="34" charset="0"/>
+                  <a:ea typeface="Verdana" panose="020B0604030504040204" pitchFamily="34" charset="0"/>
+                </a:rPr>
+                <a:t>Agent</a:t>
+              </a:r>
+              <a:endParaRPr kumimoji="0" lang="nl-NL" sz="800" b="0" i="0" u="none" strike="noStrike" kern="0" cap="none" spc="0" normalizeH="0" baseline="0" noProof="0" dirty="0" err="1">
+                <a:ln>
+                  <a:noFill/>
+                </a:ln>
+                <a:solidFill>
+                  <a:prstClr val="black"/>
+                </a:solidFill>
+                <a:effectLst/>
+                <a:uLnTx/>
+                <a:uFillTx/>
+                <a:latin typeface="Verdana" panose="020B0604030504040204" pitchFamily="34" charset="0"/>
+                <a:ea typeface="Verdana" panose="020B0604030504040204" pitchFamily="34" charset="0"/>
+              </a:endParaRPr>
+            </a:p>
+          </p:txBody>
+        </p:sp>
+        <p:sp>
+          <p:nvSpPr>
+            <p:cNvPr id="76" name="Rectangle 75">
+              <a:extLst>
+                <a:ext uri="{FF2B5EF4-FFF2-40B4-BE49-F238E27FC236}">
+                  <a16:creationId xmlns:a16="http://schemas.microsoft.com/office/drawing/2014/main" id="{BE453F9A-B20E-3582-F3F3-9E4EF24B0CF9}"/>
+                </a:ext>
+              </a:extLst>
+            </p:cNvPr>
+            <p:cNvSpPr/>
+            <p:nvPr/>
+          </p:nvSpPr>
+          <p:spPr>
+            <a:xfrm>
+              <a:off x="878471" y="2691430"/>
+              <a:ext cx="662234" cy="972663"/>
+            </a:xfrm>
+            <a:prstGeom prst="rect">
+              <a:avLst/>
+            </a:prstGeom>
+            <a:noFill/>
+            <a:ln w="12700" cap="flat" cmpd="sng" algn="ctr">
+              <a:solidFill>
+                <a:srgbClr val="C4232A">
+                  <a:lumMod val="60000"/>
+                  <a:lumOff val="40000"/>
+                </a:srgbClr>
+              </a:solidFill>
+              <a:prstDash val="dash"/>
+              <a:miter lim="800000"/>
+            </a:ln>
+            <a:effectLst/>
+          </p:spPr>
+          <p:txBody>
+            <a:bodyPr rtlCol="0" anchor="ctr"/>
+            <a:lstStyle/>
+            <a:p>
+              <a:pPr marL="0" marR="0" lvl="0" indent="0" algn="ctr" defTabSz="914400" eaLnBrk="1" fontAlgn="auto" latinLnBrk="0" hangingPunct="1">
+                <a:lnSpc>
+                  <a:spcPct val="100000"/>
+                </a:lnSpc>
+                <a:spcBef>
+                  <a:spcPts val="0"/>
+                </a:spcBef>
+                <a:spcAft>
+                  <a:spcPts val="0"/>
+                </a:spcAft>
+                <a:buClrTx/>
+                <a:buSzTx/>
+                <a:buFontTx/>
+                <a:buNone/>
+                <a:tabLst/>
+                <a:defRPr/>
+              </a:pPr>
+              <a:endParaRPr kumimoji="0" lang="nl-NL" sz="1800" b="0" i="0" u="none" strike="noStrike" kern="0" cap="none" spc="0" normalizeH="0" baseline="0" noProof="0">
+                <a:ln>
+                  <a:noFill/>
+                </a:ln>
+                <a:solidFill>
+                  <a:prstClr val="white"/>
+                </a:solidFill>
+                <a:effectLst/>
+                <a:uLnTx/>
+                <a:uFillTx/>
+                <a:latin typeface="Segoe UI Light"/>
+                <a:ea typeface="+mn-ea"/>
+                <a:cs typeface="+mn-cs"/>
+              </a:endParaRPr>
+            </a:p>
+          </p:txBody>
+        </p:sp>
+      </p:grpSp>
+      <p:sp>
+        <p:nvSpPr>
+          <p:cNvPr id="77" name="Rectangle: Rounded Corners 76">
+            <a:extLst>
+              <a:ext uri="{FF2B5EF4-FFF2-40B4-BE49-F238E27FC236}">
+                <a16:creationId xmlns:a16="http://schemas.microsoft.com/office/drawing/2014/main" id="{FC7C91FB-C74E-35AB-E6B0-8F5D439EA82B}"/>
+              </a:ext>
+            </a:extLst>
+          </p:cNvPr>
+          <p:cNvSpPr/>
+          <p:nvPr/>
+        </p:nvSpPr>
+        <p:spPr>
+          <a:xfrm>
+            <a:off x="6052867" y="2626640"/>
+            <a:ext cx="2194685" cy="645070"/>
+          </a:xfrm>
+          <a:prstGeom prst="roundRect">
+            <a:avLst/>
+          </a:prstGeom>
+          <a:solidFill>
+            <a:srgbClr val="187398">
+              <a:lumMod val="20000"/>
+              <a:lumOff val="80000"/>
+              <a:alpha val="24000"/>
+            </a:srgbClr>
+          </a:solidFill>
+          <a:ln w="12700" cap="flat" cmpd="sng" algn="ctr">
+            <a:solidFill>
+              <a:srgbClr val="3C9BD5">
+                <a:shade val="15000"/>
+              </a:srgbClr>
+            </a:solidFill>
+            <a:prstDash val="solid"/>
+            <a:miter lim="800000"/>
+          </a:ln>
+          <a:effectLst/>
+        </p:spPr>
+        <p:txBody>
+          <a:bodyPr rtlCol="0" anchor="ctr"/>
+          <a:lstStyle/>
+          <a:p>
+            <a:pPr marL="0" marR="0" lvl="0" indent="0" algn="ctr" defTabSz="914400" eaLnBrk="1" fontAlgn="auto" latinLnBrk="0" hangingPunct="1">
+              <a:lnSpc>
+                <a:spcPct val="100000"/>
+              </a:lnSpc>
+              <a:spcBef>
+                <a:spcPts val="0"/>
+              </a:spcBef>
+              <a:spcAft>
+                <a:spcPts val="0"/>
+              </a:spcAft>
+              <a:buClrTx/>
+              <a:buSzTx/>
+              <a:buFontTx/>
+              <a:buNone/>
+              <a:tabLst/>
+              <a:defRPr/>
+            </a:pPr>
+            <a:endParaRPr kumimoji="0" lang="nl-NL" sz="1800" b="0" i="0" u="none" strike="noStrike" kern="0" cap="none" spc="0" normalizeH="0" baseline="0" noProof="0">
+              <a:ln>
+                <a:noFill/>
+              </a:ln>
+              <a:solidFill>
+                <a:prstClr val="white"/>
+              </a:solidFill>
+              <a:effectLst/>
+              <a:uLnTx/>
+              <a:uFillTx/>
+              <a:latin typeface="Segoe UI Light"/>
+              <a:ea typeface="+mn-ea"/>
+              <a:cs typeface="+mn-cs"/>
+            </a:endParaRPr>
+          </a:p>
+        </p:txBody>
+      </p:sp>
+      <p:sp>
+        <p:nvSpPr>
+          <p:cNvPr id="78" name="TextBox 77">
+            <a:extLst>
+              <a:ext uri="{FF2B5EF4-FFF2-40B4-BE49-F238E27FC236}">
+                <a16:creationId xmlns:a16="http://schemas.microsoft.com/office/drawing/2014/main" id="{727CBF11-4551-557B-FE49-3E02CDBB45D3}"/>
+              </a:ext>
+            </a:extLst>
+          </p:cNvPr>
+          <p:cNvSpPr txBox="1"/>
+          <p:nvPr/>
+        </p:nvSpPr>
+        <p:spPr>
+          <a:xfrm>
+            <a:off x="6031724" y="2734327"/>
+            <a:ext cx="1667446" cy="461665"/>
+          </a:xfrm>
+          <a:prstGeom prst="rect">
+            <a:avLst/>
+          </a:prstGeom>
+          <a:noFill/>
+        </p:spPr>
+        <p:txBody>
+          <a:bodyPr wrap="square" rtlCol="0">
+            <a:spAutoFit/>
+          </a:bodyPr>
+          <a:lstStyle/>
+          <a:p>
+            <a:r>
+              <a:rPr lang="en-US" sz="800" u="sng" dirty="0">
+                <a:solidFill>
+                  <a:prstClr val="black"/>
+                </a:solidFill>
+                <a:latin typeface="Verdana" panose="020B0604030504040204" pitchFamily="34" charset="0"/>
+                <a:ea typeface="Verdana" panose="020B0604030504040204" pitchFamily="34" charset="0"/>
+              </a:rPr>
+              <a:t>E</a:t>
+            </a:r>
+            <a:r>
+              <a:rPr lang="en-US" sz="800" dirty="0">
+                <a:solidFill>
+                  <a:prstClr val="black"/>
+                </a:solidFill>
+                <a:latin typeface="Verdana" panose="020B0604030504040204" pitchFamily="34" charset="0"/>
+                <a:ea typeface="Verdana" panose="020B0604030504040204" pitchFamily="34" charset="0"/>
+              </a:rPr>
+              <a:t>valuate </a:t>
+            </a:r>
+            <a:r>
+              <a:rPr lang="en-US" sz="800" u="sng" dirty="0">
+                <a:solidFill>
+                  <a:prstClr val="black"/>
+                </a:solidFill>
+                <a:latin typeface="Verdana" panose="020B0604030504040204" pitchFamily="34" charset="0"/>
+                <a:ea typeface="Verdana" panose="020B0604030504040204" pitchFamily="34" charset="0"/>
+              </a:rPr>
+              <a:t>arguments</a:t>
+            </a:r>
+            <a:r>
+              <a:rPr lang="en-US" sz="800" dirty="0">
+                <a:solidFill>
+                  <a:prstClr val="black"/>
+                </a:solidFill>
+                <a:latin typeface="Verdana" panose="020B0604030504040204" pitchFamily="34" charset="0"/>
+                <a:ea typeface="Verdana" panose="020B0604030504040204" pitchFamily="34" charset="0"/>
+              </a:rPr>
+              <a:t>. </a:t>
+            </a:r>
+          </a:p>
+          <a:p>
+            <a:r>
+              <a:rPr lang="nl-NL" sz="800" dirty="0" err="1">
+                <a:solidFill>
+                  <a:prstClr val="black"/>
+                </a:solidFill>
+                <a:latin typeface="Verdana" panose="020B0604030504040204" pitchFamily="34" charset="0"/>
+                <a:ea typeface="Verdana" panose="020B0604030504040204" pitchFamily="34" charset="0"/>
+              </a:rPr>
+              <a:t>Respond</a:t>
+            </a:r>
+            <a:r>
+              <a:rPr lang="nl-NL" sz="800" dirty="0">
+                <a:solidFill>
+                  <a:prstClr val="black"/>
+                </a:solidFill>
+                <a:latin typeface="Verdana" panose="020B0604030504040204" pitchFamily="34" charset="0"/>
+                <a:ea typeface="Verdana" panose="020B0604030504040204" pitchFamily="34" charset="0"/>
+              </a:rPr>
+              <a:t> </a:t>
+            </a:r>
+            <a:r>
+              <a:rPr lang="nl-NL" sz="800" dirty="0" err="1">
+                <a:solidFill>
+                  <a:prstClr val="black"/>
+                </a:solidFill>
+                <a:latin typeface="Verdana" panose="020B0604030504040204" pitchFamily="34" charset="0"/>
+                <a:ea typeface="Verdana" panose="020B0604030504040204" pitchFamily="34" charset="0"/>
+              </a:rPr>
+              <a:t>and</a:t>
+            </a:r>
+            <a:r>
+              <a:rPr lang="nl-NL" sz="800" dirty="0">
+                <a:solidFill>
+                  <a:prstClr val="black"/>
+                </a:solidFill>
+                <a:latin typeface="Verdana" panose="020B0604030504040204" pitchFamily="34" charset="0"/>
+                <a:ea typeface="Verdana" panose="020B0604030504040204" pitchFamily="34" charset="0"/>
+              </a:rPr>
+              <a:t> </a:t>
+            </a:r>
+            <a:r>
+              <a:rPr lang="nl-NL" sz="800" dirty="0" err="1">
+                <a:solidFill>
+                  <a:prstClr val="black"/>
+                </a:solidFill>
+                <a:latin typeface="Verdana" panose="020B0604030504040204" pitchFamily="34" charset="0"/>
+                <a:ea typeface="Verdana" panose="020B0604030504040204" pitchFamily="34" charset="0"/>
+              </a:rPr>
+              <a:t>ask</a:t>
+            </a:r>
+            <a:r>
+              <a:rPr lang="nl-NL" sz="800" dirty="0">
+                <a:solidFill>
+                  <a:prstClr val="black"/>
+                </a:solidFill>
+                <a:latin typeface="Verdana" panose="020B0604030504040204" pitchFamily="34" charset="0"/>
+                <a:ea typeface="Verdana" panose="020B0604030504040204" pitchFamily="34" charset="0"/>
+              </a:rPr>
+              <a:t> follow-up</a:t>
+            </a:r>
+          </a:p>
+          <a:p>
+            <a:r>
+              <a:rPr lang="nl-NL" sz="800" dirty="0">
+                <a:solidFill>
+                  <a:prstClr val="black"/>
+                </a:solidFill>
+                <a:latin typeface="Verdana" panose="020B0604030504040204" pitchFamily="34" charset="0"/>
+                <a:ea typeface="Verdana" panose="020B0604030504040204" pitchFamily="34" charset="0"/>
+              </a:rPr>
+              <a:t>question.</a:t>
+            </a:r>
+          </a:p>
+        </p:txBody>
+      </p:sp>
+      <p:pic>
+        <p:nvPicPr>
+          <p:cNvPr id="79" name="Picture 78">
+            <a:extLst>
+              <a:ext uri="{FF2B5EF4-FFF2-40B4-BE49-F238E27FC236}">
+                <a16:creationId xmlns:a16="http://schemas.microsoft.com/office/drawing/2014/main" id="{20230E76-38DC-B1AA-210B-1523095EF547}"/>
+              </a:ext>
+            </a:extLst>
+          </p:cNvPr>
+          <p:cNvPicPr>
+            <a:picLocks noChangeAspect="1"/>
+          </p:cNvPicPr>
+          <p:nvPr/>
+        </p:nvPicPr>
+        <p:blipFill>
+          <a:blip r:embed="rId5">
+            <a:clrChange>
+              <a:clrFrom>
+                <a:srgbClr val="F4F4F6"/>
+              </a:clrFrom>
+              <a:clrTo>
+                <a:srgbClr val="F4F4F6">
+                  <a:alpha val="0"/>
+                </a:srgbClr>
+              </a:clrTo>
+            </a:clrChange>
+          </a:blip>
+          <a:stretch>
+            <a:fillRect/>
+          </a:stretch>
+        </p:blipFill>
+        <p:spPr>
+          <a:xfrm>
+            <a:off x="7552864" y="2635004"/>
+            <a:ext cx="662234" cy="620443"/>
+          </a:xfrm>
+          <a:prstGeom prst="rect">
+            <a:avLst/>
+          </a:prstGeom>
+        </p:spPr>
+      </p:pic>
+      <p:cxnSp>
+        <p:nvCxnSpPr>
+          <p:cNvPr id="80" name="Straight Arrow Connector 79">
+            <a:extLst>
+              <a:ext uri="{FF2B5EF4-FFF2-40B4-BE49-F238E27FC236}">
+                <a16:creationId xmlns:a16="http://schemas.microsoft.com/office/drawing/2014/main" id="{F00297C7-DACF-3BAF-14A2-87523CE2864C}"/>
+              </a:ext>
+            </a:extLst>
+          </p:cNvPr>
+          <p:cNvCxnSpPr>
+            <a:cxnSpLocks/>
+          </p:cNvCxnSpPr>
+          <p:nvPr/>
+        </p:nvCxnSpPr>
+        <p:spPr>
+          <a:xfrm>
+            <a:off x="7161684" y="2431156"/>
+            <a:ext cx="0" cy="180896"/>
+          </a:xfrm>
+          <a:prstGeom prst="straightConnector1">
+            <a:avLst/>
+          </a:prstGeom>
+          <a:noFill/>
+          <a:ln w="9525" cap="flat" cmpd="sng" algn="ctr">
+            <a:solidFill>
+              <a:sysClr val="windowText" lastClr="000000"/>
+            </a:solidFill>
+            <a:prstDash val="solid"/>
+            <a:miter lim="800000"/>
+            <a:tailEnd type="triangle"/>
+          </a:ln>
+          <a:effectLst/>
+        </p:spPr>
+      </p:cxnSp>
+      <p:cxnSp>
+        <p:nvCxnSpPr>
+          <p:cNvPr id="81" name="Straight Arrow Connector 80">
+            <a:extLst>
+              <a:ext uri="{FF2B5EF4-FFF2-40B4-BE49-F238E27FC236}">
+                <a16:creationId xmlns:a16="http://schemas.microsoft.com/office/drawing/2014/main" id="{0B13E674-CE92-B1C2-F3D1-CB3D9764CD17}"/>
+              </a:ext>
+            </a:extLst>
+          </p:cNvPr>
+          <p:cNvCxnSpPr>
+            <a:cxnSpLocks/>
+          </p:cNvCxnSpPr>
+          <p:nvPr/>
+        </p:nvCxnSpPr>
+        <p:spPr>
+          <a:xfrm>
+            <a:off x="5219381" y="2969848"/>
+            <a:ext cx="648000" cy="0"/>
+          </a:xfrm>
+          <a:prstGeom prst="straightConnector1">
+            <a:avLst/>
+          </a:prstGeom>
+          <a:noFill/>
+          <a:ln w="9525" cap="flat" cmpd="sng" algn="ctr">
+            <a:solidFill>
+              <a:sysClr val="windowText" lastClr="000000"/>
+            </a:solidFill>
+            <a:prstDash val="solid"/>
+            <a:miter lim="800000"/>
+            <a:tailEnd type="triangle"/>
+          </a:ln>
+          <a:effectLst/>
+        </p:spPr>
+      </p:cxnSp>
+      <p:sp>
+        <p:nvSpPr>
+          <p:cNvPr id="100" name="TextBox 99">
+            <a:extLst>
+              <a:ext uri="{FF2B5EF4-FFF2-40B4-BE49-F238E27FC236}">
+                <a16:creationId xmlns:a16="http://schemas.microsoft.com/office/drawing/2014/main" id="{E0C04B19-29F7-6C26-0A51-FC2C80B72CE7}"/>
+              </a:ext>
+            </a:extLst>
+          </p:cNvPr>
+          <p:cNvSpPr txBox="1"/>
+          <p:nvPr/>
+        </p:nvSpPr>
+        <p:spPr>
+          <a:xfrm>
+            <a:off x="3639411" y="1133231"/>
+            <a:ext cx="1745124" cy="215444"/>
+          </a:xfrm>
+          <a:prstGeom prst="rect">
+            <a:avLst/>
+          </a:prstGeom>
+          <a:noFill/>
+        </p:spPr>
+        <p:txBody>
+          <a:bodyPr wrap="square" rtlCol="0">
+            <a:spAutoFit/>
+          </a:bodyPr>
+          <a:lstStyle/>
+          <a:p>
+            <a:r>
+              <a:rPr lang="en-US" sz="800" b="1" dirty="0">
+                <a:solidFill>
+                  <a:prstClr val="black"/>
+                </a:solidFill>
+                <a:latin typeface="Verdana" panose="020B0604030504040204" pitchFamily="34" charset="0"/>
+                <a:ea typeface="Verdana" panose="020B0604030504040204" pitchFamily="34" charset="0"/>
+              </a:rPr>
+              <a:t>gemma-4-26b-a4b</a:t>
+            </a:r>
+            <a:endParaRPr lang="nl-NL" sz="800" b="1" dirty="0" err="1">
+              <a:solidFill>
+                <a:prstClr val="black"/>
+              </a:solidFill>
+              <a:latin typeface="Verdana" panose="020B0604030504040204" pitchFamily="34" charset="0"/>
+              <a:ea typeface="Verdana" panose="020B0604030504040204" pitchFamily="34" charset="0"/>
+            </a:endParaRPr>
+          </a:p>
+        </p:txBody>
+      </p:sp>
+      <p:sp>
+        <p:nvSpPr>
+          <p:cNvPr id="101" name="TextBox 100">
+            <a:extLst>
+              <a:ext uri="{FF2B5EF4-FFF2-40B4-BE49-F238E27FC236}">
+                <a16:creationId xmlns:a16="http://schemas.microsoft.com/office/drawing/2014/main" id="{0FDE234B-CB81-8FDD-EA5E-351CF514FA6C}"/>
+              </a:ext>
+            </a:extLst>
+          </p:cNvPr>
+          <p:cNvSpPr txBox="1"/>
+          <p:nvPr/>
+        </p:nvSpPr>
+        <p:spPr>
+          <a:xfrm>
+            <a:off x="6816674" y="1129720"/>
+            <a:ext cx="1745124" cy="215444"/>
+          </a:xfrm>
+          <a:prstGeom prst="rect">
+            <a:avLst/>
+          </a:prstGeom>
+          <a:noFill/>
+        </p:spPr>
+        <p:txBody>
+          <a:bodyPr wrap="square" rtlCol="0">
+            <a:spAutoFit/>
+          </a:bodyPr>
+          <a:lstStyle/>
+          <a:p>
+            <a:r>
+              <a:rPr lang="en-US" sz="800" b="1" dirty="0">
+                <a:solidFill>
+                  <a:prstClr val="black"/>
+                </a:solidFill>
+                <a:latin typeface="Verdana" panose="020B0604030504040204" pitchFamily="34" charset="0"/>
+                <a:ea typeface="Verdana" panose="020B0604030504040204" pitchFamily="34" charset="0"/>
+              </a:rPr>
+              <a:t>gemma-4-26b-a4b</a:t>
+            </a:r>
+            <a:endParaRPr lang="nl-NL" sz="800" b="1" dirty="0" err="1">
+              <a:solidFill>
+                <a:prstClr val="black"/>
+              </a:solidFill>
+              <a:latin typeface="Verdana" panose="020B0604030504040204" pitchFamily="34" charset="0"/>
+              <a:ea typeface="Verdana" panose="020B0604030504040204" pitchFamily="34" charset="0"/>
+            </a:endParaRPr>
+          </a:p>
+        </p:txBody>
+      </p:sp>
+      <p:pic>
+        <p:nvPicPr>
+          <p:cNvPr id="107" name="Picture 106">
+            <a:extLst>
+              <a:ext uri="{FF2B5EF4-FFF2-40B4-BE49-F238E27FC236}">
+                <a16:creationId xmlns:a16="http://schemas.microsoft.com/office/drawing/2014/main" id="{377AC07D-9B07-870D-CD55-6B150D58B2BF}"/>
+              </a:ext>
+            </a:extLst>
+          </p:cNvPr>
+          <p:cNvPicPr>
+            <a:picLocks noChangeAspect="1"/>
+          </p:cNvPicPr>
+          <p:nvPr/>
+        </p:nvPicPr>
+        <p:blipFill>
+          <a:blip r:embed="rId6">
+            <a:clrChange>
+              <a:clrFrom>
+                <a:srgbClr val="F4F4F6"/>
+              </a:clrFrom>
+              <a:clrTo>
+                <a:srgbClr val="F4F4F6">
+                  <a:alpha val="0"/>
+                </a:srgbClr>
+              </a:clrTo>
+            </a:clrChange>
+          </a:blip>
+          <a:stretch>
+            <a:fillRect/>
+          </a:stretch>
+        </p:blipFill>
+        <p:spPr>
+          <a:xfrm>
+            <a:off x="5366372" y="2297577"/>
+            <a:ext cx="336791" cy="406956"/>
+          </a:xfrm>
+          <a:prstGeom prst="rect">
+            <a:avLst/>
+          </a:prstGeom>
+        </p:spPr>
+      </p:pic>
+      <p:sp>
+        <p:nvSpPr>
+          <p:cNvPr id="2" name="Rectangle 1">
+            <a:extLst>
+              <a:ext uri="{FF2B5EF4-FFF2-40B4-BE49-F238E27FC236}">
+                <a16:creationId xmlns:a16="http://schemas.microsoft.com/office/drawing/2014/main" id="{AB0C4FD1-C3A8-2981-48D4-90F3D676112C}"/>
+              </a:ext>
+            </a:extLst>
+          </p:cNvPr>
+          <p:cNvSpPr/>
+          <p:nvPr/>
+        </p:nvSpPr>
+        <p:spPr>
+          <a:xfrm>
+            <a:off x="2629319" y="1105616"/>
+            <a:ext cx="6088135" cy="4478969"/>
+          </a:xfrm>
+          <a:prstGeom prst="rect">
+            <a:avLst/>
+          </a:prstGeom>
+          <a:noFill/>
+          <a:ln w="12700" cap="flat" cmpd="sng" algn="ctr">
+            <a:solidFill>
+              <a:srgbClr val="C4232A">
+                <a:lumMod val="60000"/>
+                <a:lumOff val="40000"/>
+              </a:srgbClr>
+            </a:solidFill>
+            <a:prstDash val="dash"/>
+            <a:miter lim="800000"/>
+          </a:ln>
+          <a:effectLst/>
+        </p:spPr>
+        <p:txBody>
+          <a:bodyPr rtlCol="0" anchor="ctr"/>
+          <a:lstStyle/>
+          <a:p>
+            <a:pPr marL="0" marR="0" lvl="0" indent="0" algn="ctr" defTabSz="914400" eaLnBrk="1" fontAlgn="auto" latinLnBrk="0" hangingPunct="1">
+              <a:lnSpc>
+                <a:spcPct val="100000"/>
+              </a:lnSpc>
+              <a:spcBef>
+                <a:spcPts val="0"/>
+              </a:spcBef>
+              <a:spcAft>
+                <a:spcPts val="0"/>
+              </a:spcAft>
+              <a:buClrTx/>
+              <a:buSzTx/>
+              <a:buFontTx/>
+              <a:buNone/>
+              <a:tabLst/>
+              <a:defRPr/>
+            </a:pPr>
+            <a:endParaRPr kumimoji="0" lang="nl-NL" sz="1800" b="0" i="0" u="none" strike="noStrike" kern="0" cap="none" spc="0" normalizeH="0" baseline="0" noProof="0">
+              <a:ln>
+                <a:noFill/>
+              </a:ln>
+              <a:solidFill>
+                <a:prstClr val="white"/>
+              </a:solidFill>
+              <a:effectLst/>
+              <a:uLnTx/>
+              <a:uFillTx/>
+              <a:latin typeface="Segoe UI Light"/>
+              <a:ea typeface="+mn-ea"/>
+              <a:cs typeface="+mn-cs"/>
+            </a:endParaRPr>
+          </a:p>
+        </p:txBody>
+      </p:sp>
+      <p:grpSp>
+        <p:nvGrpSpPr>
+          <p:cNvPr id="11" name="Group 10">
+            <a:extLst>
+              <a:ext uri="{FF2B5EF4-FFF2-40B4-BE49-F238E27FC236}">
+                <a16:creationId xmlns:a16="http://schemas.microsoft.com/office/drawing/2014/main" id="{F1624C4C-7063-D9CB-2736-AEC3547825CB}"/>
+              </a:ext>
+            </a:extLst>
+          </p:cNvPr>
+          <p:cNvGrpSpPr/>
+          <p:nvPr/>
+        </p:nvGrpSpPr>
+        <p:grpSpPr>
+          <a:xfrm>
+            <a:off x="5234298" y="4615691"/>
+            <a:ext cx="754288" cy="869511"/>
+            <a:chOff x="838155" y="2794582"/>
+            <a:chExt cx="754288" cy="869511"/>
+          </a:xfrm>
+        </p:grpSpPr>
+        <p:pic>
+          <p:nvPicPr>
+            <p:cNvPr id="12" name="Picture 2" descr="Bot (informática) - EcuRed">
+              <a:extLst>
+                <a:ext uri="{FF2B5EF4-FFF2-40B4-BE49-F238E27FC236}">
+                  <a16:creationId xmlns:a16="http://schemas.microsoft.com/office/drawing/2014/main" id="{238979C2-78E9-A796-D164-18EF6C46BAAD}"/>
+                </a:ext>
+              </a:extLst>
+            </p:cNvPr>
+            <p:cNvPicPr>
+              <a:picLocks noChangeAspect="1" noChangeArrowheads="1"/>
+            </p:cNvPicPr>
+            <p:nvPr/>
+          </p:nvPicPr>
+          <p:blipFill rotWithShape="1">
+            <a:blip r:embed="rId4">
+              <a:clrChange>
+                <a:clrFrom>
+                  <a:srgbClr val="FFFFFF"/>
+                </a:clrFrom>
+                <a:clrTo>
+                  <a:srgbClr val="FFFFFF">
+                    <a:alpha val="0"/>
+                  </a:srgbClr>
+                </a:clrTo>
+              </a:clrChange>
+              <a:duotone>
+                <a:srgbClr val="634DA9">
+                  <a:shade val="45000"/>
+                  <a:satMod val="135000"/>
+                </a:srgbClr>
+                <a:prstClr val="white"/>
+              </a:duotone>
+              <a:extLst>
+                <a:ext uri="{28A0092B-C50C-407E-A947-70E740481C1C}">
+                  <a14:useLocalDpi xmlns:a14="http://schemas.microsoft.com/office/drawing/2010/main" val="0"/>
+                </a:ext>
+              </a:extLst>
+            </a:blip>
+            <a:srcRect l="18962" t="6530" r="16637" b="12432"/>
+            <a:stretch/>
+          </p:blipFill>
+          <p:spPr bwMode="auto">
+            <a:xfrm>
+              <a:off x="1036816" y="2861045"/>
+              <a:ext cx="381057" cy="479497"/>
+            </a:xfrm>
+            <a:prstGeom prst="rect">
+              <a:avLst/>
+            </a:prstGeom>
+            <a:noFill/>
+            <a:extLst>
+              <a:ext uri="{909E8E84-426E-40DD-AFC4-6F175D3DCCD1}">
+                <a14:hiddenFill xmlns:a14="http://schemas.microsoft.com/office/drawing/2010/main">
+                  <a:solidFill>
+                    <a:srgbClr val="FFFFFF"/>
+                  </a:solidFill>
+                </a14:hiddenFill>
+              </a:ext>
+            </a:extLst>
+          </p:spPr>
+        </p:pic>
+        <p:sp>
+          <p:nvSpPr>
+            <p:cNvPr id="13" name="TextBox 12">
+              <a:extLst>
+                <a:ext uri="{FF2B5EF4-FFF2-40B4-BE49-F238E27FC236}">
+                  <a16:creationId xmlns:a16="http://schemas.microsoft.com/office/drawing/2014/main" id="{A8FEB28A-1610-19AD-C4A6-B648095B2689}"/>
+                </a:ext>
+              </a:extLst>
+            </p:cNvPr>
+            <p:cNvSpPr txBox="1"/>
+            <p:nvPr/>
+          </p:nvSpPr>
+          <p:spPr>
+            <a:xfrm>
+              <a:off x="838155" y="3301091"/>
+              <a:ext cx="754288" cy="338554"/>
+            </a:xfrm>
+            <a:prstGeom prst="rect">
+              <a:avLst/>
+            </a:prstGeom>
+            <a:noFill/>
+          </p:spPr>
+          <p:txBody>
+            <a:bodyPr wrap="square" rtlCol="0">
+              <a:spAutoFit/>
+            </a:bodyPr>
+            <a:lstStyle/>
+            <a:p>
+              <a:pPr marL="0" marR="0" lvl="0" indent="0" algn="ctr" defTabSz="914400" eaLnBrk="1" fontAlgn="auto" latinLnBrk="0" hangingPunct="1">
+                <a:lnSpc>
+                  <a:spcPct val="100000"/>
+                </a:lnSpc>
+                <a:spcBef>
+                  <a:spcPts val="0"/>
+                </a:spcBef>
+                <a:spcAft>
+                  <a:spcPts val="0"/>
+                </a:spcAft>
+                <a:buClrTx/>
+                <a:buSzTx/>
+                <a:buFontTx/>
+                <a:buNone/>
+                <a:tabLst/>
+                <a:defRPr/>
+              </a:pPr>
+              <a:r>
+                <a:rPr kumimoji="0" lang="en-US" sz="800" b="0" i="0" u="none" strike="noStrike" kern="0" cap="none" spc="0" normalizeH="0" baseline="0" noProof="0" dirty="0">
+                  <a:ln>
+                    <a:noFill/>
+                  </a:ln>
+                  <a:solidFill>
+                    <a:prstClr val="black"/>
+                  </a:solidFill>
+                  <a:effectLst/>
+                  <a:uLnTx/>
+                  <a:uFillTx/>
+                  <a:latin typeface="Verdana" panose="020B0604030504040204" pitchFamily="34" charset="0"/>
+                  <a:ea typeface="Verdana" panose="020B0604030504040204" pitchFamily="34" charset="0"/>
+                </a:rPr>
+                <a:t>Moderator</a:t>
+              </a:r>
+            </a:p>
+            <a:p>
+              <a:pPr marL="0" marR="0" lvl="0" indent="0" algn="ctr" defTabSz="914400" eaLnBrk="1" fontAlgn="auto" latinLnBrk="0" hangingPunct="1">
+                <a:lnSpc>
+                  <a:spcPct val="100000"/>
+                </a:lnSpc>
+                <a:spcBef>
+                  <a:spcPts val="0"/>
+                </a:spcBef>
+                <a:spcAft>
+                  <a:spcPts val="0"/>
+                </a:spcAft>
+                <a:buClrTx/>
+                <a:buSzTx/>
+                <a:buFontTx/>
+                <a:buNone/>
+                <a:tabLst/>
+                <a:defRPr/>
+              </a:pPr>
+              <a:r>
+                <a:rPr kumimoji="0" lang="en-US" sz="800" b="0" i="0" u="none" strike="noStrike" kern="0" cap="none" spc="0" normalizeH="0" baseline="0" noProof="0" dirty="0">
+                  <a:ln>
+                    <a:noFill/>
+                  </a:ln>
+                  <a:solidFill>
+                    <a:prstClr val="black"/>
+                  </a:solidFill>
+                  <a:effectLst/>
+                  <a:uLnTx/>
+                  <a:uFillTx/>
+                  <a:latin typeface="Verdana" panose="020B0604030504040204" pitchFamily="34" charset="0"/>
+                  <a:ea typeface="Verdana" panose="020B0604030504040204" pitchFamily="34" charset="0"/>
+                </a:rPr>
+                <a:t>Agent</a:t>
+              </a:r>
+              <a:endParaRPr kumimoji="0" lang="nl-NL" sz="800" b="0" i="0" u="none" strike="noStrike" kern="0" cap="none" spc="0" normalizeH="0" baseline="0" noProof="0" dirty="0" err="1">
+                <a:ln>
+                  <a:noFill/>
+                </a:ln>
+                <a:solidFill>
+                  <a:prstClr val="black"/>
+                </a:solidFill>
+                <a:effectLst/>
+                <a:uLnTx/>
+                <a:uFillTx/>
+                <a:latin typeface="Verdana" panose="020B0604030504040204" pitchFamily="34" charset="0"/>
+                <a:ea typeface="Verdana" panose="020B0604030504040204" pitchFamily="34" charset="0"/>
+              </a:endParaRPr>
+            </a:p>
+          </p:txBody>
+        </p:sp>
+        <p:sp>
+          <p:nvSpPr>
+            <p:cNvPr id="14" name="Rectangle 13">
+              <a:extLst>
+                <a:ext uri="{FF2B5EF4-FFF2-40B4-BE49-F238E27FC236}">
+                  <a16:creationId xmlns:a16="http://schemas.microsoft.com/office/drawing/2014/main" id="{DE8BDDAD-89E6-84F6-06B6-96E23C3EBBE9}"/>
+                </a:ext>
+              </a:extLst>
+            </p:cNvPr>
+            <p:cNvSpPr/>
+            <p:nvPr/>
+          </p:nvSpPr>
+          <p:spPr>
+            <a:xfrm>
+              <a:off x="878471" y="2794582"/>
+              <a:ext cx="662234" cy="869511"/>
+            </a:xfrm>
+            <a:prstGeom prst="rect">
+              <a:avLst/>
+            </a:prstGeom>
+            <a:noFill/>
+            <a:ln w="12700" cap="flat" cmpd="sng" algn="ctr">
+              <a:solidFill>
+                <a:srgbClr val="C4232A">
+                  <a:lumMod val="60000"/>
+                  <a:lumOff val="40000"/>
+                </a:srgbClr>
+              </a:solidFill>
+              <a:prstDash val="dash"/>
+              <a:miter lim="800000"/>
+            </a:ln>
+            <a:effectLst/>
+          </p:spPr>
+          <p:txBody>
+            <a:bodyPr rtlCol="0" anchor="ctr"/>
+            <a:lstStyle/>
+            <a:p>
+              <a:pPr marL="0" marR="0" lvl="0" indent="0" algn="ctr" defTabSz="914400" eaLnBrk="1" fontAlgn="auto" latinLnBrk="0" hangingPunct="1">
+                <a:lnSpc>
+                  <a:spcPct val="100000"/>
+                </a:lnSpc>
+                <a:spcBef>
+                  <a:spcPts val="0"/>
+                </a:spcBef>
+                <a:spcAft>
+                  <a:spcPts val="0"/>
+                </a:spcAft>
+                <a:buClrTx/>
+                <a:buSzTx/>
+                <a:buFontTx/>
+                <a:buNone/>
+                <a:tabLst/>
+                <a:defRPr/>
+              </a:pPr>
+              <a:endParaRPr kumimoji="0" lang="nl-NL" sz="1800" b="0" i="0" u="none" strike="noStrike" kern="0" cap="none" spc="0" normalizeH="0" baseline="0" noProof="0" dirty="0">
+                <a:ln>
+                  <a:noFill/>
+                </a:ln>
+                <a:solidFill>
+                  <a:prstClr val="white"/>
+                </a:solidFill>
+                <a:effectLst/>
+                <a:uLnTx/>
+                <a:uFillTx/>
+                <a:latin typeface="Segoe UI Light"/>
+                <a:ea typeface="+mn-ea"/>
+                <a:cs typeface="+mn-cs"/>
+              </a:endParaRPr>
+            </a:p>
+          </p:txBody>
+        </p:sp>
+      </p:grpSp>
+      <p:sp>
+        <p:nvSpPr>
+          <p:cNvPr id="15" name="Rectangle: Rounded Corners 14">
+            <a:extLst>
+              <a:ext uri="{FF2B5EF4-FFF2-40B4-BE49-F238E27FC236}">
+                <a16:creationId xmlns:a16="http://schemas.microsoft.com/office/drawing/2014/main" id="{E9BBD844-3A5A-1385-3493-8E1D71C301F1}"/>
+              </a:ext>
+            </a:extLst>
+          </p:cNvPr>
+          <p:cNvSpPr/>
+          <p:nvPr/>
+        </p:nvSpPr>
+        <p:spPr>
+          <a:xfrm>
+            <a:off x="4514100" y="3672115"/>
+            <a:ext cx="2194685" cy="645070"/>
+          </a:xfrm>
+          <a:prstGeom prst="roundRect">
+            <a:avLst/>
+          </a:prstGeom>
+          <a:solidFill>
+            <a:srgbClr val="634DA9">
+              <a:lumMod val="20000"/>
+              <a:lumOff val="80000"/>
+              <a:alpha val="24000"/>
+            </a:srgbClr>
+          </a:solidFill>
+          <a:ln w="12700" cap="flat" cmpd="sng" algn="ctr">
+            <a:solidFill>
+              <a:srgbClr val="3C9BD5">
+                <a:shade val="15000"/>
+              </a:srgbClr>
+            </a:solidFill>
+            <a:prstDash val="solid"/>
+            <a:miter lim="800000"/>
+          </a:ln>
+          <a:effectLst/>
+        </p:spPr>
+        <p:txBody>
+          <a:bodyPr rtlCol="0" anchor="ctr"/>
+          <a:lstStyle/>
+          <a:p>
+            <a:pPr marL="0" marR="0" lvl="0" indent="0" algn="ctr" defTabSz="914400" eaLnBrk="1" fontAlgn="auto" latinLnBrk="0" hangingPunct="1">
+              <a:lnSpc>
+                <a:spcPct val="100000"/>
+              </a:lnSpc>
+              <a:spcBef>
+                <a:spcPts val="0"/>
+              </a:spcBef>
+              <a:spcAft>
+                <a:spcPts val="0"/>
+              </a:spcAft>
+              <a:buClrTx/>
+              <a:buSzTx/>
+              <a:buFontTx/>
+              <a:buNone/>
+              <a:tabLst/>
+              <a:defRPr/>
+            </a:pPr>
+            <a:endParaRPr kumimoji="0" lang="nl-NL" sz="1800" b="0" i="0" u="none" strike="noStrike" kern="0" cap="none" spc="0" normalizeH="0" baseline="0" noProof="0">
+              <a:ln>
+                <a:noFill/>
+              </a:ln>
+              <a:solidFill>
+                <a:prstClr val="white"/>
+              </a:solidFill>
+              <a:effectLst/>
+              <a:uLnTx/>
+              <a:uFillTx/>
+              <a:latin typeface="Segoe UI Light"/>
+              <a:ea typeface="+mn-ea"/>
+              <a:cs typeface="+mn-cs"/>
+            </a:endParaRPr>
+          </a:p>
+        </p:txBody>
+      </p:sp>
+      <p:sp>
+        <p:nvSpPr>
+          <p:cNvPr id="16" name="TextBox 15">
+            <a:extLst>
+              <a:ext uri="{FF2B5EF4-FFF2-40B4-BE49-F238E27FC236}">
+                <a16:creationId xmlns:a16="http://schemas.microsoft.com/office/drawing/2014/main" id="{6B76591F-CD1D-748E-B2B0-925BBD730250}"/>
+              </a:ext>
+            </a:extLst>
+          </p:cNvPr>
+          <p:cNvSpPr txBox="1"/>
+          <p:nvPr/>
+        </p:nvSpPr>
+        <p:spPr>
+          <a:xfrm>
+            <a:off x="4491625" y="3701460"/>
+            <a:ext cx="1895155" cy="584775"/>
+          </a:xfrm>
+          <a:prstGeom prst="rect">
+            <a:avLst/>
+          </a:prstGeom>
+          <a:noFill/>
+        </p:spPr>
+        <p:txBody>
+          <a:bodyPr wrap="square" rtlCol="0">
+            <a:spAutoFit/>
+          </a:bodyPr>
+          <a:lstStyle/>
+          <a:p>
+            <a:r>
+              <a:rPr lang="en-US" sz="800" dirty="0">
+                <a:solidFill>
+                  <a:prstClr val="black"/>
+                </a:solidFill>
+                <a:latin typeface="Verdana" panose="020B0604030504040204" pitchFamily="34" charset="0"/>
+                <a:ea typeface="Verdana" panose="020B0604030504040204" pitchFamily="34" charset="0"/>
+              </a:rPr>
+              <a:t>Summarize arguments, identify (dis)agreements,  and Propose one question that helps both agents move toward consensus.</a:t>
+            </a:r>
+            <a:endParaRPr lang="nl-NL" sz="800" dirty="0">
+              <a:solidFill>
+                <a:prstClr val="black"/>
+              </a:solidFill>
+              <a:latin typeface="Verdana" panose="020B0604030504040204" pitchFamily="34" charset="0"/>
+              <a:ea typeface="Verdana" panose="020B0604030504040204" pitchFamily="34" charset="0"/>
+            </a:endParaRPr>
+          </a:p>
+        </p:txBody>
+      </p:sp>
+      <p:cxnSp>
+        <p:nvCxnSpPr>
+          <p:cNvPr id="17" name="Straight Arrow Connector 16">
+            <a:extLst>
+              <a:ext uri="{FF2B5EF4-FFF2-40B4-BE49-F238E27FC236}">
+                <a16:creationId xmlns:a16="http://schemas.microsoft.com/office/drawing/2014/main" id="{F60AE721-AF21-AD04-E1B3-41C6CE5A12EE}"/>
+              </a:ext>
+            </a:extLst>
+          </p:cNvPr>
+          <p:cNvCxnSpPr>
+            <a:cxnSpLocks/>
+          </p:cNvCxnSpPr>
+          <p:nvPr/>
+        </p:nvCxnSpPr>
+        <p:spPr>
+          <a:xfrm flipV="1">
+            <a:off x="5622917" y="4378335"/>
+            <a:ext cx="0" cy="182880"/>
+          </a:xfrm>
+          <a:prstGeom prst="straightConnector1">
+            <a:avLst/>
+          </a:prstGeom>
+          <a:noFill/>
+          <a:ln w="9525" cap="flat" cmpd="sng" algn="ctr">
+            <a:solidFill>
+              <a:sysClr val="windowText" lastClr="000000"/>
+            </a:solidFill>
+            <a:prstDash val="solid"/>
+            <a:miter lim="800000"/>
+            <a:tailEnd type="triangle"/>
+          </a:ln>
+          <a:effectLst/>
+        </p:spPr>
+      </p:cxnSp>
+      <p:cxnSp>
+        <p:nvCxnSpPr>
+          <p:cNvPr id="18" name="Straight Arrow Connector 17">
+            <a:extLst>
+              <a:ext uri="{FF2B5EF4-FFF2-40B4-BE49-F238E27FC236}">
+                <a16:creationId xmlns:a16="http://schemas.microsoft.com/office/drawing/2014/main" id="{97084333-D278-BE7D-1CD0-257778AC015A}"/>
+              </a:ext>
+            </a:extLst>
+          </p:cNvPr>
+          <p:cNvCxnSpPr>
+            <a:cxnSpLocks/>
+          </p:cNvCxnSpPr>
+          <p:nvPr/>
+        </p:nvCxnSpPr>
+        <p:spPr>
+          <a:xfrm>
+            <a:off x="6395726" y="3350904"/>
+            <a:ext cx="0" cy="252000"/>
+          </a:xfrm>
+          <a:prstGeom prst="straightConnector1">
+            <a:avLst/>
+          </a:prstGeom>
+          <a:noFill/>
+          <a:ln w="9525" cap="flat" cmpd="sng" algn="ctr">
+            <a:solidFill>
+              <a:sysClr val="windowText" lastClr="000000"/>
+            </a:solidFill>
+            <a:prstDash val="solid"/>
+            <a:miter lim="800000"/>
+            <a:tailEnd type="triangle"/>
+          </a:ln>
+          <a:effectLst/>
+        </p:spPr>
+      </p:cxnSp>
+      <p:pic>
+        <p:nvPicPr>
+          <p:cNvPr id="19" name="Picture 18">
+            <a:extLst>
+              <a:ext uri="{FF2B5EF4-FFF2-40B4-BE49-F238E27FC236}">
+                <a16:creationId xmlns:a16="http://schemas.microsoft.com/office/drawing/2014/main" id="{2F8AFC4B-0111-0662-C117-CDBAFA30B7F5}"/>
+              </a:ext>
+            </a:extLst>
+          </p:cNvPr>
+          <p:cNvPicPr>
+            <a:picLocks noChangeAspect="1"/>
+          </p:cNvPicPr>
+          <p:nvPr/>
+        </p:nvPicPr>
+        <p:blipFill>
+          <a:blip r:embed="rId7">
+            <a:clrChange>
+              <a:clrFrom>
+                <a:srgbClr val="F4F4F6"/>
+              </a:clrFrom>
+              <a:clrTo>
+                <a:srgbClr val="F4F4F6">
+                  <a:alpha val="0"/>
+                </a:srgbClr>
+              </a:clrTo>
+            </a:clrChange>
+          </a:blip>
+          <a:stretch>
+            <a:fillRect/>
+          </a:stretch>
+        </p:blipFill>
+        <p:spPr>
+          <a:xfrm>
+            <a:off x="6253769" y="3739489"/>
+            <a:ext cx="455016" cy="468974"/>
+          </a:xfrm>
+          <a:prstGeom prst="rect">
+            <a:avLst/>
+          </a:prstGeom>
+        </p:spPr>
+      </p:pic>
+      <p:sp>
+        <p:nvSpPr>
+          <p:cNvPr id="20" name="TextBox 19">
+            <a:extLst>
+              <a:ext uri="{FF2B5EF4-FFF2-40B4-BE49-F238E27FC236}">
+                <a16:creationId xmlns:a16="http://schemas.microsoft.com/office/drawing/2014/main" id="{9E2CCE40-CCEA-BEAD-A957-95BF4C55E46A}"/>
+              </a:ext>
+            </a:extLst>
+          </p:cNvPr>
+          <p:cNvSpPr txBox="1"/>
+          <p:nvPr/>
+        </p:nvSpPr>
+        <p:spPr>
+          <a:xfrm>
+            <a:off x="5942052" y="4596100"/>
+            <a:ext cx="1195438" cy="215444"/>
+          </a:xfrm>
+          <a:prstGeom prst="rect">
+            <a:avLst/>
+          </a:prstGeom>
+          <a:noFill/>
+        </p:spPr>
+        <p:txBody>
+          <a:bodyPr wrap="square" rtlCol="0">
+            <a:spAutoFit/>
+          </a:bodyPr>
+          <a:lstStyle/>
+          <a:p>
+            <a:r>
+              <a:rPr lang="en-US" sz="800" b="1" dirty="0">
+                <a:solidFill>
+                  <a:prstClr val="black"/>
+                </a:solidFill>
+                <a:latin typeface="Verdana" panose="020B0604030504040204" pitchFamily="34" charset="0"/>
+                <a:ea typeface="Verdana" panose="020B0604030504040204" pitchFamily="34" charset="0"/>
+              </a:rPr>
+              <a:t>gpt-oss-20b</a:t>
+            </a:r>
+            <a:endParaRPr lang="nl-NL" sz="800" b="1" dirty="0" err="1">
+              <a:solidFill>
+                <a:prstClr val="black"/>
+              </a:solidFill>
+              <a:latin typeface="Verdana" panose="020B0604030504040204" pitchFamily="34" charset="0"/>
+              <a:ea typeface="Verdana" panose="020B0604030504040204" pitchFamily="34" charset="0"/>
+            </a:endParaRPr>
+          </a:p>
+        </p:txBody>
+      </p:sp>
+      <p:cxnSp>
+        <p:nvCxnSpPr>
+          <p:cNvPr id="25" name="Straight Arrow Connector 24">
+            <a:extLst>
+              <a:ext uri="{FF2B5EF4-FFF2-40B4-BE49-F238E27FC236}">
+                <a16:creationId xmlns:a16="http://schemas.microsoft.com/office/drawing/2014/main" id="{E4B24496-1011-F2F9-5AE5-84985D444030}"/>
+              </a:ext>
+            </a:extLst>
+          </p:cNvPr>
+          <p:cNvCxnSpPr>
+            <a:cxnSpLocks/>
+          </p:cNvCxnSpPr>
+          <p:nvPr/>
+        </p:nvCxnSpPr>
+        <p:spPr>
+          <a:xfrm flipV="1">
+            <a:off x="4790125" y="3350904"/>
+            <a:ext cx="0" cy="252000"/>
+          </a:xfrm>
+          <a:prstGeom prst="straightConnector1">
+            <a:avLst/>
+          </a:prstGeom>
+          <a:noFill/>
+          <a:ln w="9525" cap="flat" cmpd="sng" algn="ctr">
+            <a:solidFill>
+              <a:sysClr val="windowText" lastClr="000000"/>
+            </a:solidFill>
+            <a:prstDash val="solid"/>
+            <a:miter lim="800000"/>
+            <a:tailEnd type="triangle"/>
+          </a:ln>
+          <a:effectLst/>
+        </p:spPr>
+      </p:cxnSp>
+      <p:pic>
+        <p:nvPicPr>
+          <p:cNvPr id="28" name="Picture 27">
+            <a:extLst>
+              <a:ext uri="{FF2B5EF4-FFF2-40B4-BE49-F238E27FC236}">
+                <a16:creationId xmlns:a16="http://schemas.microsoft.com/office/drawing/2014/main" id="{80804179-199B-7E7E-D272-E33B76C29F02}"/>
+              </a:ext>
+            </a:extLst>
+          </p:cNvPr>
+          <p:cNvPicPr>
+            <a:picLocks noChangeAspect="1"/>
+          </p:cNvPicPr>
+          <p:nvPr/>
+        </p:nvPicPr>
+        <p:blipFill>
+          <a:blip r:embed="rId6">
+            <a:clrChange>
+              <a:clrFrom>
+                <a:srgbClr val="F4F4F6"/>
+              </a:clrFrom>
+              <a:clrTo>
+                <a:srgbClr val="F4F4F6">
+                  <a:alpha val="0"/>
+                </a:srgbClr>
+              </a:clrTo>
+            </a:clrChange>
+          </a:blip>
+          <a:stretch>
+            <a:fillRect/>
+          </a:stretch>
+        </p:blipFill>
+        <p:spPr>
+          <a:xfrm>
+            <a:off x="6809062" y="3347147"/>
+            <a:ext cx="336791" cy="406956"/>
+          </a:xfrm>
+          <a:prstGeom prst="rect">
+            <a:avLst/>
+          </a:prstGeom>
+        </p:spPr>
+      </p:pic>
+      <p:pic>
+        <p:nvPicPr>
+          <p:cNvPr id="29" name="Picture 28">
+            <a:extLst>
+              <a:ext uri="{FF2B5EF4-FFF2-40B4-BE49-F238E27FC236}">
+                <a16:creationId xmlns:a16="http://schemas.microsoft.com/office/drawing/2014/main" id="{BFA90DFA-C416-5B90-B4A5-07BB9B358B24}"/>
+              </a:ext>
+            </a:extLst>
+          </p:cNvPr>
+          <p:cNvPicPr>
+            <a:picLocks noChangeAspect="1"/>
+          </p:cNvPicPr>
+          <p:nvPr/>
+        </p:nvPicPr>
+        <p:blipFill>
+          <a:blip r:embed="rId6">
+            <a:clrChange>
+              <a:clrFrom>
+                <a:srgbClr val="F4F4F6"/>
+              </a:clrFrom>
+              <a:clrTo>
+                <a:srgbClr val="F4F4F6">
+                  <a:alpha val="0"/>
+                </a:srgbClr>
+              </a:clrTo>
+            </a:clrChange>
+          </a:blip>
+          <a:stretch>
+            <a:fillRect/>
+          </a:stretch>
+        </p:blipFill>
+        <p:spPr>
+          <a:xfrm>
+            <a:off x="4077621" y="3399426"/>
+            <a:ext cx="336791" cy="406956"/>
+          </a:xfrm>
+          <a:prstGeom prst="rect">
+            <a:avLst/>
+          </a:prstGeom>
+        </p:spPr>
+      </p:pic>
+    </p:spTree>
+    <p:extLst>
+      <p:ext uri="{BB962C8B-B14F-4D97-AF65-F5344CB8AC3E}">
+        <p14:creationId xmlns:p14="http://schemas.microsoft.com/office/powerpoint/2010/main" val="57865957"/>
+      </p:ext>
+    </p:extLst>
+  </p:cSld>
+  <p:clrMapOvr>
+    <a:masterClrMapping/>
+  </p:clrMapOvr>
+  <p:timing>
+    <p:tnLst>
+      <p:par>
+        <p:cTn id="1" dur="indefinite" restart="never" nodeType="tmRoot">
+          <p:childTnLst>
+            <p:seq concurrent="1" nextAc="seek">
+              <p:cTn id="2" dur="indefinite" nodeType="mainSeq">
+                <p:childTnLst>
+                  <p:par>
+                    <p:cTn id="3" fill="hold">
+                      <p:stCondLst>
+                        <p:cond delay="indefinite"/>
+                        <p:cond evt="onBegin" delay="0">
+                          <p:tn val="2"/>
+                        </p:cond>
+                      </p:stCondLst>
+                      <p:childTnLst>
+                        <p:par>
+                          <p:cTn id="4" fill="hold">
+                            <p:stCondLst>
+                              <p:cond delay="0"/>
+                            </p:stCondLst>
+                            <p:childTnLst>
+                              <p:par>
+                                <p:cTn id="5" presetID="10" presetClass="entr" presetSubtype="0" fill="hold" grpId="0" nodeType="withEffect">
+                                  <p:stCondLst>
+                                    <p:cond delay="0"/>
+                                  </p:stCondLst>
+                                  <p:childTnLst>
+                                    <p:set>
+                                      <p:cBhvr>
+                                        <p:cTn id="6" dur="1" fill="hold">
+                                          <p:stCondLst>
+                                            <p:cond delay="0"/>
+                                          </p:stCondLst>
+                                        </p:cTn>
+                                        <p:tgtEl>
+                                          <p:spTgt spid="100"/>
+                                        </p:tgtEl>
+                                        <p:attrNameLst>
+                                          <p:attrName>style.visibility</p:attrName>
+                                        </p:attrNameLst>
+                                      </p:cBhvr>
+                                      <p:to>
+                                        <p:strVal val="visible"/>
+                                      </p:to>
+                                    </p:set>
+                                    <p:animEffect transition="in" filter="fade">
+                                      <p:cBhvr>
+                                        <p:cTn id="7" dur="500"/>
+                                        <p:tgtEl>
+                                          <p:spTgt spid="100"/>
+                                        </p:tgtEl>
+                                      </p:cBhvr>
+                                    </p:animEffect>
+                                  </p:childTnLst>
+                                </p:cTn>
+                              </p:par>
+                              <p:par>
+                                <p:cTn id="8" presetID="10" presetClass="entr" presetSubtype="0" fill="hold" grpId="0" nodeType="withEffect">
+                                  <p:stCondLst>
+                                    <p:cond delay="0"/>
+                                  </p:stCondLst>
+                                  <p:childTnLst>
+                                    <p:set>
+                                      <p:cBhvr>
+                                        <p:cTn id="9" dur="1" fill="hold">
+                                          <p:stCondLst>
+                                            <p:cond delay="0"/>
+                                          </p:stCondLst>
+                                        </p:cTn>
+                                        <p:tgtEl>
+                                          <p:spTgt spid="101"/>
+                                        </p:tgtEl>
+                                        <p:attrNameLst>
+                                          <p:attrName>style.visibility</p:attrName>
+                                        </p:attrNameLst>
+                                      </p:cBhvr>
+                                      <p:to>
+                                        <p:strVal val="visible"/>
+                                      </p:to>
+                                    </p:set>
+                                    <p:animEffect transition="in" filter="fade">
+                                      <p:cBhvr>
+                                        <p:cTn id="10" dur="500"/>
+                                        <p:tgtEl>
+                                          <p:spTgt spid="101"/>
+                                        </p:tgtEl>
+                                      </p:cBhvr>
+                                    </p:animEffect>
+                                  </p:childTnLst>
+                                </p:cTn>
+                              </p:par>
+                            </p:childTnLst>
+                          </p:cTn>
+                        </p:par>
+                      </p:childTnLst>
+                    </p:cTn>
+                  </p:par>
+                  <p:par>
+                    <p:cTn id="11" fill="hold">
+                      <p:stCondLst>
+                        <p:cond delay="indefinite"/>
+                      </p:stCondLst>
+                      <p:childTnLst>
+                        <p:par>
+                          <p:cTn id="12" fill="hold">
+                            <p:stCondLst>
+                              <p:cond delay="0"/>
+                            </p:stCondLst>
+                            <p:childTnLst>
+                              <p:par>
+                                <p:cTn id="13" presetID="10" presetClass="entr" presetSubtype="0" fill="hold" grpId="0" nodeType="clickEffect">
+                                  <p:stCondLst>
+                                    <p:cond delay="0"/>
+                                  </p:stCondLst>
+                                  <p:childTnLst>
+                                    <p:set>
+                                      <p:cBhvr>
+                                        <p:cTn id="14" dur="1" fill="hold">
+                                          <p:stCondLst>
+                                            <p:cond delay="0"/>
+                                          </p:stCondLst>
+                                        </p:cTn>
+                                        <p:tgtEl>
+                                          <p:spTgt spid="20"/>
+                                        </p:tgtEl>
+                                        <p:attrNameLst>
+                                          <p:attrName>style.visibility</p:attrName>
+                                        </p:attrNameLst>
+                                      </p:cBhvr>
+                                      <p:to>
+                                        <p:strVal val="visible"/>
+                                      </p:to>
+                                    </p:set>
+                                    <p:animEffect transition="in" filter="fade">
+                                      <p:cBhvr>
+                                        <p:cTn id="15" dur="500"/>
+                                        <p:tgtEl>
+                                          <p:spTgt spid="20"/>
+                                        </p:tgtEl>
+                                      </p:cBhvr>
+                                    </p:animEffect>
+                                  </p:childTnLst>
+                                </p:cTn>
+                              </p:par>
+                            </p:childTnLst>
+                          </p:cTn>
+                        </p:par>
+                      </p:childTnLst>
+                    </p:cTn>
+                  </p:par>
+                </p:childTnLst>
+              </p:cTn>
+              <p:prevCondLst>
+                <p:cond evt="onPrev" delay="0">
+                  <p:tgtEl>
+                    <p:sldTgt/>
+                  </p:tgtEl>
+                </p:cond>
+              </p:prevCondLst>
+              <p:nextCondLst>
+                <p:cond evt="onNext" delay="0">
+                  <p:tgtEl>
+                    <p:sldTgt/>
+                  </p:tgtEl>
+                </p:cond>
+              </p:nextCondLst>
+            </p:seq>
+          </p:childTnLst>
+        </p:cTn>
+      </p:par>
+    </p:tnLst>
+    <p:bldLst>
+      <p:bldP spid="100" grpId="0"/>
+      <p:bldP spid="101" grpId="0"/>
+      <p:bldP spid="20" grpId="0"/>
+    </p:bldLst>
+  </p:timing>
+</p:sld>
+</file>
+
+<file path=ppt/slides/slide7.xml><?xml version="1.0" encoding="utf-8"?>
+<p:sld xmlns:a="http://schemas.openxmlformats.org/drawingml/2006/main" xmlns:r="http://schemas.openxmlformats.org/officeDocument/2006/relationships" xmlns:p="http://schemas.openxmlformats.org/presentationml/2006/main">
+  <p:cSld>
+    <p:spTree>
+      <p:nvGrpSpPr>
+        <p:cNvPr id="1" name="">
+          <a:extLst>
+            <a:ext uri="{FF2B5EF4-FFF2-40B4-BE49-F238E27FC236}">
+              <a16:creationId xmlns:a16="http://schemas.microsoft.com/office/drawing/2014/main" id="{1D18E690-CC02-B866-369F-8521767F4254}"/>
+            </a:ext>
+          </a:extLst>
+        </p:cNvPr>
+        <p:cNvGrpSpPr/>
+        <p:nvPr/>
+      </p:nvGrpSpPr>
+      <p:grpSpPr>
+        <a:xfrm>
+          <a:off x="0" y="0"/>
+          <a:ext cx="0" cy="0"/>
+          <a:chOff x="0" y="0"/>
+          <a:chExt cx="0" cy="0"/>
+        </a:xfrm>
+      </p:grpSpPr>
+      <p:sp>
+        <p:nvSpPr>
+          <p:cNvPr id="58" name="Rectangle: Rounded Corners 57">
+            <a:extLst>
+              <a:ext uri="{FF2B5EF4-FFF2-40B4-BE49-F238E27FC236}">
+                <a16:creationId xmlns:a16="http://schemas.microsoft.com/office/drawing/2014/main" id="{268C6167-62A6-FB03-F729-717A3469283C}"/>
+              </a:ext>
+            </a:extLst>
+          </p:cNvPr>
+          <p:cNvSpPr/>
+          <p:nvPr/>
+        </p:nvSpPr>
+        <p:spPr>
+          <a:xfrm>
+            <a:off x="2992189" y="2646512"/>
+            <a:ext cx="1980416" cy="645070"/>
+          </a:xfrm>
+          <a:prstGeom prst="roundRect">
+            <a:avLst/>
+          </a:prstGeom>
+          <a:solidFill>
+            <a:srgbClr val="A1C93A">
+              <a:lumMod val="20000"/>
+              <a:lumOff val="80000"/>
+              <a:alpha val="24000"/>
+            </a:srgbClr>
+          </a:solidFill>
+          <a:ln w="12700" cap="flat" cmpd="sng" algn="ctr">
+            <a:solidFill>
+              <a:srgbClr val="3C9BD5">
+                <a:shade val="15000"/>
+              </a:srgbClr>
+            </a:solidFill>
+            <a:prstDash val="solid"/>
+            <a:miter lim="800000"/>
+          </a:ln>
+          <a:effectLst/>
+        </p:spPr>
+        <p:txBody>
+          <a:bodyPr rtlCol="0" anchor="ctr"/>
+          <a:lstStyle/>
+          <a:p>
+            <a:pPr marL="0" marR="0" lvl="0" indent="0" algn="ctr" defTabSz="914400" eaLnBrk="1" fontAlgn="auto" latinLnBrk="0" hangingPunct="1">
+              <a:lnSpc>
+                <a:spcPct val="100000"/>
+              </a:lnSpc>
+              <a:spcBef>
+                <a:spcPts val="0"/>
+              </a:spcBef>
+              <a:spcAft>
+                <a:spcPts val="0"/>
+              </a:spcAft>
+              <a:buClrTx/>
+              <a:buSzTx/>
+              <a:buFontTx/>
+              <a:buNone/>
+              <a:tabLst/>
+              <a:defRPr/>
+            </a:pPr>
+            <a:endParaRPr kumimoji="0" lang="nl-NL" sz="1800" b="0" i="0" u="none" strike="noStrike" kern="0" cap="none" spc="0" normalizeH="0" baseline="0" noProof="0">
+              <a:ln>
+                <a:noFill/>
+              </a:ln>
+              <a:solidFill>
+                <a:prstClr val="white"/>
+              </a:solidFill>
+              <a:effectLst/>
+              <a:uLnTx/>
+              <a:uFillTx/>
+              <a:latin typeface="Segoe UI Light"/>
+              <a:ea typeface="+mn-ea"/>
+              <a:cs typeface="+mn-cs"/>
+            </a:endParaRPr>
+          </a:p>
+        </p:txBody>
+      </p:sp>
+      <p:grpSp>
+        <p:nvGrpSpPr>
+          <p:cNvPr id="60" name="Group 59">
+            <a:extLst>
+              <a:ext uri="{FF2B5EF4-FFF2-40B4-BE49-F238E27FC236}">
+                <a16:creationId xmlns:a16="http://schemas.microsoft.com/office/drawing/2014/main" id="{0C00A460-EE01-5FBA-96FE-EC4D5CE278A0}"/>
+              </a:ext>
+            </a:extLst>
+          </p:cNvPr>
+          <p:cNvGrpSpPr/>
+          <p:nvPr/>
+        </p:nvGrpSpPr>
+        <p:grpSpPr>
+          <a:xfrm>
+            <a:off x="388946" y="2635004"/>
+            <a:ext cx="1655946" cy="638149"/>
+            <a:chOff x="1850066" y="2865619"/>
+            <a:chExt cx="1655946" cy="638149"/>
+          </a:xfrm>
+        </p:grpSpPr>
+        <p:sp>
+          <p:nvSpPr>
+            <p:cNvPr id="61" name="Rectangle: Rounded Corners 60">
+              <a:extLst>
+                <a:ext uri="{FF2B5EF4-FFF2-40B4-BE49-F238E27FC236}">
+                  <a16:creationId xmlns:a16="http://schemas.microsoft.com/office/drawing/2014/main" id="{D7B64524-45F9-F366-2E41-992FCFC0B802}"/>
+                </a:ext>
+              </a:extLst>
+            </p:cNvPr>
+            <p:cNvSpPr/>
+            <p:nvPr/>
+          </p:nvSpPr>
+          <p:spPr>
+            <a:xfrm>
+              <a:off x="1850067" y="2865619"/>
+              <a:ext cx="1633908" cy="638149"/>
+            </a:xfrm>
+            <a:prstGeom prst="roundRect">
+              <a:avLst/>
+            </a:prstGeom>
+            <a:solidFill>
+              <a:srgbClr val="FFC000">
+                <a:alpha val="24000"/>
+              </a:srgbClr>
+            </a:solidFill>
+            <a:ln w="12700" cap="flat" cmpd="sng" algn="ctr">
+              <a:solidFill>
+                <a:srgbClr val="3C9BD5">
+                  <a:shade val="15000"/>
+                </a:srgbClr>
+              </a:solidFill>
+              <a:prstDash val="solid"/>
+              <a:miter lim="800000"/>
+            </a:ln>
+            <a:effectLst/>
+          </p:spPr>
+          <p:txBody>
+            <a:bodyPr rtlCol="0" anchor="ctr"/>
+            <a:lstStyle/>
+            <a:p>
+              <a:pPr marL="0" marR="0" lvl="0" indent="0" algn="ctr" defTabSz="914400" eaLnBrk="1" fontAlgn="auto" latinLnBrk="0" hangingPunct="1">
+                <a:lnSpc>
+                  <a:spcPct val="100000"/>
+                </a:lnSpc>
+                <a:spcBef>
+                  <a:spcPts val="0"/>
+                </a:spcBef>
+                <a:spcAft>
+                  <a:spcPts val="0"/>
+                </a:spcAft>
+                <a:buClrTx/>
+                <a:buSzTx/>
+                <a:buFontTx/>
+                <a:buNone/>
+                <a:tabLst/>
+                <a:defRPr/>
+              </a:pPr>
+              <a:endParaRPr kumimoji="0" lang="nl-NL" sz="1800" b="0" i="0" u="none" strike="noStrike" kern="0" cap="none" spc="0" normalizeH="0" baseline="0" noProof="0">
+                <a:ln>
+                  <a:noFill/>
+                </a:ln>
+                <a:solidFill>
+                  <a:prstClr val="white"/>
+                </a:solidFill>
+                <a:effectLst/>
+                <a:uLnTx/>
+                <a:uFillTx/>
+                <a:latin typeface="Segoe UI Light"/>
+                <a:ea typeface="+mn-ea"/>
+                <a:cs typeface="+mn-cs"/>
+              </a:endParaRPr>
+            </a:p>
+          </p:txBody>
+        </p:sp>
+        <p:pic>
+          <p:nvPicPr>
+            <p:cNvPr id="62" name="Picture 61">
+              <a:extLst>
+                <a:ext uri="{FF2B5EF4-FFF2-40B4-BE49-F238E27FC236}">
+                  <a16:creationId xmlns:a16="http://schemas.microsoft.com/office/drawing/2014/main" id="{0ADA65C7-9829-BC67-1B8B-A726B00F7E40}"/>
+                </a:ext>
+              </a:extLst>
+            </p:cNvPr>
+            <p:cNvPicPr>
+              <a:picLocks noChangeAspect="1"/>
+            </p:cNvPicPr>
+            <p:nvPr/>
+          </p:nvPicPr>
+          <p:blipFill>
+            <a:blip r:embed="rId2">
+              <a:clrChange>
+                <a:clrFrom>
+                  <a:srgbClr val="F4F4F6"/>
+                </a:clrFrom>
+                <a:clrTo>
+                  <a:srgbClr val="F4F4F6">
+                    <a:alpha val="0"/>
+                  </a:srgbClr>
+                </a:clrTo>
+              </a:clrChange>
+            </a:blip>
+            <a:stretch>
+              <a:fillRect/>
+            </a:stretch>
+          </p:blipFill>
+          <p:spPr>
+            <a:xfrm>
+              <a:off x="2899742" y="2870864"/>
+              <a:ext cx="606270" cy="606270"/>
+            </a:xfrm>
+            <a:prstGeom prst="rect">
+              <a:avLst/>
+            </a:prstGeom>
+          </p:spPr>
+        </p:pic>
+        <p:sp>
+          <p:nvSpPr>
+            <p:cNvPr id="63" name="TextBox 62">
+              <a:extLst>
+                <a:ext uri="{FF2B5EF4-FFF2-40B4-BE49-F238E27FC236}">
+                  <a16:creationId xmlns:a16="http://schemas.microsoft.com/office/drawing/2014/main" id="{DF23CBFF-F16D-C41E-0CC6-2B8A04F7C5ED}"/>
+                </a:ext>
+              </a:extLst>
+            </p:cNvPr>
+            <p:cNvSpPr txBox="1"/>
+            <p:nvPr/>
+          </p:nvSpPr>
+          <p:spPr>
+            <a:xfrm>
+              <a:off x="1850066" y="2970231"/>
+              <a:ext cx="1200970" cy="338554"/>
+            </a:xfrm>
+            <a:prstGeom prst="rect">
+              <a:avLst/>
+            </a:prstGeom>
+            <a:noFill/>
+          </p:spPr>
+          <p:txBody>
+            <a:bodyPr wrap="none" rtlCol="0">
+              <a:spAutoFit/>
+            </a:bodyPr>
+            <a:lstStyle/>
+            <a:p>
+              <a:pPr marL="0" marR="0" lvl="0" indent="0" defTabSz="914400" eaLnBrk="1" fontAlgn="auto" latinLnBrk="0" hangingPunct="1">
+                <a:lnSpc>
+                  <a:spcPct val="100000"/>
+                </a:lnSpc>
+                <a:spcBef>
+                  <a:spcPts val="0"/>
+                </a:spcBef>
+                <a:spcAft>
+                  <a:spcPts val="0"/>
+                </a:spcAft>
+                <a:buClrTx/>
+                <a:buSzTx/>
+                <a:buFontTx/>
+                <a:buNone/>
+                <a:tabLst/>
+                <a:defRPr/>
+              </a:pPr>
+              <a:r>
+                <a:rPr kumimoji="0" lang="en-US" sz="800" b="0" i="0" u="none" strike="noStrike" kern="0" cap="none" spc="0" normalizeH="0" baseline="0" noProof="0" dirty="0">
+                  <a:ln>
+                    <a:noFill/>
+                  </a:ln>
+                  <a:solidFill>
+                    <a:prstClr val="black"/>
+                  </a:solidFill>
+                  <a:effectLst/>
+                  <a:uLnTx/>
+                  <a:uFillTx/>
+                  <a:latin typeface="Verdana" panose="020B0604030504040204" pitchFamily="34" charset="0"/>
+                  <a:ea typeface="Verdana" panose="020B0604030504040204" pitchFamily="34" charset="0"/>
+                </a:rPr>
+                <a:t>Start discussion </a:t>
+              </a:r>
+            </a:p>
+            <a:p>
+              <a:pPr marL="0" marR="0" lvl="0" indent="0" defTabSz="914400" eaLnBrk="1" fontAlgn="auto" latinLnBrk="0" hangingPunct="1">
+                <a:lnSpc>
+                  <a:spcPct val="100000"/>
+                </a:lnSpc>
+                <a:spcBef>
+                  <a:spcPts val="0"/>
+                </a:spcBef>
+                <a:spcAft>
+                  <a:spcPts val="0"/>
+                </a:spcAft>
+                <a:buClrTx/>
+                <a:buSzTx/>
+                <a:buFontTx/>
+                <a:buNone/>
+                <a:tabLst/>
+                <a:defRPr/>
+              </a:pPr>
+              <a:r>
+                <a:rPr kumimoji="0" lang="en-US" sz="800" b="0" i="0" u="none" strike="noStrike" kern="0" cap="none" spc="0" normalizeH="0" baseline="0" noProof="0" dirty="0">
+                  <a:ln>
+                    <a:noFill/>
+                  </a:ln>
+                  <a:solidFill>
+                    <a:prstClr val="black"/>
+                  </a:solidFill>
+                  <a:effectLst/>
+                  <a:uLnTx/>
+                  <a:uFillTx/>
+                  <a:latin typeface="Verdana" panose="020B0604030504040204" pitchFamily="34" charset="0"/>
+                  <a:ea typeface="Verdana" panose="020B0604030504040204" pitchFamily="34" charset="0"/>
+                </a:rPr>
+                <a:t>on topic of interest.</a:t>
+              </a:r>
+            </a:p>
+          </p:txBody>
+        </p:sp>
+      </p:grpSp>
+      <p:cxnSp>
+        <p:nvCxnSpPr>
+          <p:cNvPr id="64" name="Straight Arrow Connector 63">
+            <a:extLst>
+              <a:ext uri="{FF2B5EF4-FFF2-40B4-BE49-F238E27FC236}">
+                <a16:creationId xmlns:a16="http://schemas.microsoft.com/office/drawing/2014/main" id="{6FC2FDF8-FCAB-B36F-9F8E-1CD9FA1135AF}"/>
+              </a:ext>
+            </a:extLst>
+          </p:cNvPr>
+          <p:cNvCxnSpPr>
+            <a:cxnSpLocks/>
+          </p:cNvCxnSpPr>
+          <p:nvPr/>
+        </p:nvCxnSpPr>
+        <p:spPr>
+          <a:xfrm>
+            <a:off x="2154435" y="2960670"/>
+            <a:ext cx="365760" cy="0"/>
+          </a:xfrm>
+          <a:prstGeom prst="straightConnector1">
+            <a:avLst/>
+          </a:prstGeom>
+          <a:noFill/>
+          <a:ln w="9525" cap="flat" cmpd="sng" algn="ctr">
+            <a:solidFill>
+              <a:sysClr val="windowText" lastClr="000000"/>
+            </a:solidFill>
+            <a:prstDash val="solid"/>
+            <a:miter lim="800000"/>
+            <a:tailEnd type="triangle"/>
+          </a:ln>
+          <a:effectLst/>
+        </p:spPr>
+      </p:cxnSp>
+      <p:sp>
+        <p:nvSpPr>
+          <p:cNvPr id="65" name="TextBox 64">
+            <a:extLst>
+              <a:ext uri="{FF2B5EF4-FFF2-40B4-BE49-F238E27FC236}">
+                <a16:creationId xmlns:a16="http://schemas.microsoft.com/office/drawing/2014/main" id="{57498F3E-21BD-95C8-F9D4-3F93A6956C95}"/>
+              </a:ext>
+            </a:extLst>
+          </p:cNvPr>
+          <p:cNvSpPr txBox="1"/>
+          <p:nvPr/>
+        </p:nvSpPr>
+        <p:spPr>
+          <a:xfrm>
+            <a:off x="2971477" y="2718384"/>
+            <a:ext cx="1520147" cy="461665"/>
+          </a:xfrm>
+          <a:prstGeom prst="rect">
+            <a:avLst/>
+          </a:prstGeom>
+          <a:noFill/>
+        </p:spPr>
+        <p:txBody>
+          <a:bodyPr wrap="square" rtlCol="0">
+            <a:spAutoFit/>
+          </a:bodyPr>
+          <a:lstStyle/>
+          <a:p>
+            <a:r>
+              <a:rPr lang="en-US" sz="800" dirty="0">
+                <a:solidFill>
+                  <a:prstClr val="black"/>
+                </a:solidFill>
+                <a:latin typeface="Verdana" panose="020B0604030504040204" pitchFamily="34" charset="0"/>
+                <a:ea typeface="Verdana" panose="020B0604030504040204" pitchFamily="34" charset="0"/>
+              </a:rPr>
+              <a:t>Discuss the importance of the use of Large Language Models and AI.</a:t>
+            </a:r>
+            <a:endParaRPr lang="nl-NL" sz="800" dirty="0" err="1">
+              <a:solidFill>
+                <a:prstClr val="black"/>
+              </a:solidFill>
+              <a:latin typeface="Verdana" panose="020B0604030504040204" pitchFamily="34" charset="0"/>
+              <a:ea typeface="Verdana" panose="020B0604030504040204" pitchFamily="34" charset="0"/>
+            </a:endParaRPr>
+          </a:p>
+        </p:txBody>
+      </p:sp>
+      <p:pic>
+        <p:nvPicPr>
+          <p:cNvPr id="66" name="Picture 65">
+            <a:extLst>
+              <a:ext uri="{FF2B5EF4-FFF2-40B4-BE49-F238E27FC236}">
+                <a16:creationId xmlns:a16="http://schemas.microsoft.com/office/drawing/2014/main" id="{767689ED-1F08-6839-9EAA-175CFF325705}"/>
+              </a:ext>
+            </a:extLst>
+          </p:cNvPr>
+          <p:cNvPicPr>
+            <a:picLocks noChangeAspect="1"/>
+          </p:cNvPicPr>
+          <p:nvPr/>
+        </p:nvPicPr>
+        <p:blipFill>
+          <a:blip r:embed="rId3">
+            <a:clrChange>
+              <a:clrFrom>
+                <a:srgbClr val="F4F4F6"/>
+              </a:clrFrom>
+              <a:clrTo>
+                <a:srgbClr val="F4F4F6">
+                  <a:alpha val="0"/>
+                </a:srgbClr>
+              </a:clrTo>
+            </a:clrChange>
+          </a:blip>
+          <a:stretch>
+            <a:fillRect/>
+          </a:stretch>
+        </p:blipFill>
+        <p:spPr>
+          <a:xfrm>
+            <a:off x="4528574" y="2708103"/>
+            <a:ext cx="398594" cy="470562"/>
+          </a:xfrm>
+          <a:prstGeom prst="rect">
+            <a:avLst/>
+          </a:prstGeom>
+        </p:spPr>
+      </p:pic>
+      <p:grpSp>
+        <p:nvGrpSpPr>
+          <p:cNvPr id="67" name="Group 66">
+            <a:extLst>
+              <a:ext uri="{FF2B5EF4-FFF2-40B4-BE49-F238E27FC236}">
+                <a16:creationId xmlns:a16="http://schemas.microsoft.com/office/drawing/2014/main" id="{BF050A19-DFD5-A90E-1861-557ED6C64ADE}"/>
+              </a:ext>
+            </a:extLst>
+          </p:cNvPr>
+          <p:cNvGrpSpPr/>
+          <p:nvPr/>
+        </p:nvGrpSpPr>
+        <p:grpSpPr>
+          <a:xfrm>
+            <a:off x="3685492" y="1372778"/>
+            <a:ext cx="754288" cy="988926"/>
+            <a:chOff x="4081920" y="2487881"/>
+            <a:chExt cx="754288" cy="988926"/>
+          </a:xfrm>
+        </p:grpSpPr>
+        <p:pic>
+          <p:nvPicPr>
+            <p:cNvPr id="68" name="Picture 2" descr="Bot (informática) - EcuRed">
+              <a:extLst>
+                <a:ext uri="{FF2B5EF4-FFF2-40B4-BE49-F238E27FC236}">
+                  <a16:creationId xmlns:a16="http://schemas.microsoft.com/office/drawing/2014/main" id="{8A5008F5-E147-1248-F6FB-E9874F5AFE1A}"/>
+                </a:ext>
+              </a:extLst>
+            </p:cNvPr>
+            <p:cNvPicPr>
+              <a:picLocks noChangeAspect="1" noChangeArrowheads="1"/>
+            </p:cNvPicPr>
+            <p:nvPr/>
+          </p:nvPicPr>
+          <p:blipFill rotWithShape="1">
+            <a:blip r:embed="rId4">
+              <a:clrChange>
+                <a:clrFrom>
+                  <a:srgbClr val="FFFFFF"/>
+                </a:clrFrom>
+                <a:clrTo>
+                  <a:srgbClr val="FFFFFF">
+                    <a:alpha val="0"/>
+                  </a:srgbClr>
+                </a:clrTo>
+              </a:clrChange>
+              <a:duotone>
+                <a:srgbClr val="A1C93A">
+                  <a:shade val="45000"/>
+                  <a:satMod val="135000"/>
+                </a:srgbClr>
+                <a:prstClr val="white"/>
+              </a:duotone>
+              <a:extLst>
+                <a:ext uri="{28A0092B-C50C-407E-A947-70E740481C1C}">
+                  <a14:useLocalDpi xmlns:a14="http://schemas.microsoft.com/office/drawing/2010/main" val="0"/>
+                </a:ext>
+              </a:extLst>
+            </a:blip>
+            <a:srcRect l="18962" t="6530" r="16637" b="12432"/>
+            <a:stretch/>
+          </p:blipFill>
+          <p:spPr bwMode="auto">
+            <a:xfrm>
+              <a:off x="4289396" y="2583023"/>
+              <a:ext cx="381057" cy="479497"/>
+            </a:xfrm>
+            <a:prstGeom prst="rect">
+              <a:avLst/>
+            </a:prstGeom>
+            <a:noFill/>
+            <a:extLst>
+              <a:ext uri="{909E8E84-426E-40DD-AFC4-6F175D3DCCD1}">
+                <a14:hiddenFill xmlns:a14="http://schemas.microsoft.com/office/drawing/2010/main">
+                  <a:solidFill>
+                    <a:srgbClr val="FFFFFF"/>
+                  </a:solidFill>
+                </a14:hiddenFill>
+              </a:ext>
+            </a:extLst>
+          </p:spPr>
+        </p:pic>
+        <p:sp>
+          <p:nvSpPr>
+            <p:cNvPr id="69" name="TextBox 68">
+              <a:extLst>
+                <a:ext uri="{FF2B5EF4-FFF2-40B4-BE49-F238E27FC236}">
+                  <a16:creationId xmlns:a16="http://schemas.microsoft.com/office/drawing/2014/main" id="{E08CCD2D-1847-1BE0-B458-4B2DF8ECD9BD}"/>
+                </a:ext>
+              </a:extLst>
+            </p:cNvPr>
+            <p:cNvSpPr txBox="1"/>
+            <p:nvPr/>
+          </p:nvSpPr>
+          <p:spPr>
+            <a:xfrm>
+              <a:off x="4081920" y="3015142"/>
+              <a:ext cx="754288" cy="461665"/>
+            </a:xfrm>
+            <a:prstGeom prst="rect">
+              <a:avLst/>
+            </a:prstGeom>
+            <a:noFill/>
+          </p:spPr>
+          <p:txBody>
+            <a:bodyPr wrap="square" rtlCol="0">
+              <a:spAutoFit/>
+            </a:bodyPr>
+            <a:lstStyle/>
+            <a:p>
+              <a:pPr marL="0" marR="0" lvl="0" indent="0" algn="ctr" defTabSz="914400" eaLnBrk="1" fontAlgn="auto" latinLnBrk="0" hangingPunct="1">
+                <a:lnSpc>
+                  <a:spcPct val="100000"/>
+                </a:lnSpc>
+                <a:spcBef>
+                  <a:spcPts val="0"/>
+                </a:spcBef>
+                <a:spcAft>
+                  <a:spcPts val="0"/>
+                </a:spcAft>
+                <a:buClrTx/>
+                <a:buSzTx/>
+                <a:buFontTx/>
+                <a:buNone/>
+                <a:tabLst/>
+                <a:defRPr/>
+              </a:pPr>
+              <a:r>
+                <a:rPr kumimoji="0" lang="en-US" sz="800" b="0" i="0" u="none" strike="noStrike" kern="0" cap="none" spc="0" normalizeH="0" baseline="0" noProof="0" dirty="0">
+                  <a:ln>
+                    <a:noFill/>
+                  </a:ln>
+                  <a:solidFill>
+                    <a:prstClr val="black"/>
+                  </a:solidFill>
+                  <a:effectLst/>
+                  <a:uLnTx/>
+                  <a:uFillTx/>
+                  <a:latin typeface="Verdana" panose="020B0604030504040204" pitchFamily="34" charset="0"/>
+                  <a:ea typeface="Verdana" panose="020B0604030504040204" pitchFamily="34" charset="0"/>
+                </a:rPr>
+                <a:t>Data Science</a:t>
+              </a:r>
+            </a:p>
+            <a:p>
+              <a:pPr marL="0" marR="0" lvl="0" indent="0" algn="ctr" defTabSz="914400" eaLnBrk="1" fontAlgn="auto" latinLnBrk="0" hangingPunct="1">
+                <a:lnSpc>
+                  <a:spcPct val="100000"/>
+                </a:lnSpc>
+                <a:spcBef>
+                  <a:spcPts val="0"/>
+                </a:spcBef>
+                <a:spcAft>
+                  <a:spcPts val="0"/>
+                </a:spcAft>
+                <a:buClrTx/>
+                <a:buSzTx/>
+                <a:buFontTx/>
+                <a:buNone/>
+                <a:tabLst/>
+                <a:defRPr/>
+              </a:pPr>
+              <a:r>
+                <a:rPr kumimoji="0" lang="en-US" sz="800" b="0" i="0" u="none" strike="noStrike" kern="0" cap="none" spc="0" normalizeH="0" baseline="0" noProof="0" dirty="0">
+                  <a:ln>
+                    <a:noFill/>
+                  </a:ln>
+                  <a:solidFill>
+                    <a:prstClr val="black"/>
+                  </a:solidFill>
+                  <a:effectLst/>
+                  <a:uLnTx/>
+                  <a:uFillTx/>
+                  <a:latin typeface="Verdana" panose="020B0604030504040204" pitchFamily="34" charset="0"/>
+                  <a:ea typeface="Verdana" panose="020B0604030504040204" pitchFamily="34" charset="0"/>
+                </a:rPr>
+                <a:t>Agent</a:t>
+              </a:r>
+            </a:p>
+          </p:txBody>
+        </p:sp>
+        <p:sp>
+          <p:nvSpPr>
+            <p:cNvPr id="70" name="Rectangle 69">
+              <a:extLst>
+                <a:ext uri="{FF2B5EF4-FFF2-40B4-BE49-F238E27FC236}">
+                  <a16:creationId xmlns:a16="http://schemas.microsoft.com/office/drawing/2014/main" id="{C88C4418-77C5-30FE-2CAD-CD640ED26C1F}"/>
+                </a:ext>
+              </a:extLst>
+            </p:cNvPr>
+            <p:cNvSpPr/>
+            <p:nvPr/>
+          </p:nvSpPr>
+          <p:spPr>
+            <a:xfrm>
+              <a:off x="4127947" y="2487881"/>
+              <a:ext cx="662234" cy="972663"/>
+            </a:xfrm>
+            <a:prstGeom prst="rect">
+              <a:avLst/>
+            </a:prstGeom>
+            <a:noFill/>
+            <a:ln w="12700" cap="flat" cmpd="sng" algn="ctr">
+              <a:solidFill>
+                <a:srgbClr val="C4232A">
+                  <a:lumMod val="60000"/>
+                  <a:lumOff val="40000"/>
+                </a:srgbClr>
+              </a:solidFill>
+              <a:prstDash val="dash"/>
+              <a:miter lim="800000"/>
+            </a:ln>
+            <a:effectLst/>
+          </p:spPr>
+          <p:txBody>
+            <a:bodyPr rtlCol="0" anchor="ctr"/>
+            <a:lstStyle/>
+            <a:p>
+              <a:pPr marL="0" marR="0" lvl="0" indent="0" algn="ctr" defTabSz="914400" eaLnBrk="1" fontAlgn="auto" latinLnBrk="0" hangingPunct="1">
+                <a:lnSpc>
+                  <a:spcPct val="100000"/>
+                </a:lnSpc>
+                <a:spcBef>
+                  <a:spcPts val="0"/>
+                </a:spcBef>
+                <a:spcAft>
+                  <a:spcPts val="0"/>
+                </a:spcAft>
+                <a:buClrTx/>
+                <a:buSzTx/>
+                <a:buFontTx/>
+                <a:buNone/>
+                <a:tabLst/>
+                <a:defRPr/>
+              </a:pPr>
+              <a:endParaRPr kumimoji="0" lang="nl-NL" sz="1800" b="0" i="0" u="none" strike="noStrike" kern="0" cap="none" spc="0" normalizeH="0" baseline="0" noProof="0">
+                <a:ln>
+                  <a:noFill/>
+                </a:ln>
+                <a:solidFill>
+                  <a:prstClr val="white"/>
+                </a:solidFill>
+                <a:effectLst/>
+                <a:uLnTx/>
+                <a:uFillTx/>
+                <a:latin typeface="Segoe UI Light"/>
+                <a:ea typeface="+mn-ea"/>
+                <a:cs typeface="+mn-cs"/>
+              </a:endParaRPr>
+            </a:p>
+          </p:txBody>
+        </p:sp>
+      </p:grpSp>
+      <p:cxnSp>
+        <p:nvCxnSpPr>
+          <p:cNvPr id="71" name="Straight Arrow Connector 70">
+            <a:extLst>
+              <a:ext uri="{FF2B5EF4-FFF2-40B4-BE49-F238E27FC236}">
+                <a16:creationId xmlns:a16="http://schemas.microsoft.com/office/drawing/2014/main" id="{D823F0BC-63B3-6895-729F-813C3F9133C8}"/>
+              </a:ext>
+            </a:extLst>
+          </p:cNvPr>
+          <p:cNvCxnSpPr>
+            <a:cxnSpLocks/>
+          </p:cNvCxnSpPr>
+          <p:nvPr/>
+        </p:nvCxnSpPr>
+        <p:spPr>
+          <a:xfrm>
+            <a:off x="4043419" y="2436392"/>
+            <a:ext cx="0" cy="180896"/>
+          </a:xfrm>
+          <a:prstGeom prst="straightConnector1">
+            <a:avLst/>
+          </a:prstGeom>
+          <a:noFill/>
+          <a:ln w="9525" cap="flat" cmpd="sng" algn="ctr">
+            <a:solidFill>
+              <a:sysClr val="windowText" lastClr="000000"/>
+            </a:solidFill>
+            <a:prstDash val="solid"/>
+            <a:miter lim="800000"/>
+            <a:tailEnd type="triangle"/>
+          </a:ln>
+          <a:effectLst/>
+        </p:spPr>
+      </p:cxnSp>
+      <p:grpSp>
+        <p:nvGrpSpPr>
+          <p:cNvPr id="73" name="Group 72">
+            <a:extLst>
+              <a:ext uri="{FF2B5EF4-FFF2-40B4-BE49-F238E27FC236}">
+                <a16:creationId xmlns:a16="http://schemas.microsoft.com/office/drawing/2014/main" id="{0CBAD2A9-4DFC-0569-2020-14E5F1F576E3}"/>
+              </a:ext>
+            </a:extLst>
+          </p:cNvPr>
+          <p:cNvGrpSpPr/>
+          <p:nvPr/>
+        </p:nvGrpSpPr>
+        <p:grpSpPr>
+          <a:xfrm>
+            <a:off x="6791545" y="1417862"/>
+            <a:ext cx="754288" cy="972663"/>
+            <a:chOff x="838155" y="2691430"/>
+            <a:chExt cx="754288" cy="972663"/>
+          </a:xfrm>
+        </p:grpSpPr>
+        <p:pic>
+          <p:nvPicPr>
+            <p:cNvPr id="74" name="Picture 2" descr="Bot (informática) - EcuRed">
+              <a:extLst>
+                <a:ext uri="{FF2B5EF4-FFF2-40B4-BE49-F238E27FC236}">
+                  <a16:creationId xmlns:a16="http://schemas.microsoft.com/office/drawing/2014/main" id="{2679E1C4-FFC7-E2FD-5CC5-20426CAEBCAD}"/>
+                </a:ext>
+              </a:extLst>
+            </p:cNvPr>
+            <p:cNvPicPr>
+              <a:picLocks noChangeAspect="1" noChangeArrowheads="1"/>
+            </p:cNvPicPr>
+            <p:nvPr/>
+          </p:nvPicPr>
+          <p:blipFill rotWithShape="1">
+            <a:blip r:embed="rId4">
+              <a:clrChange>
+                <a:clrFrom>
+                  <a:srgbClr val="FFFFFF"/>
+                </a:clrFrom>
+                <a:clrTo>
+                  <a:srgbClr val="FFFFFF">
+                    <a:alpha val="0"/>
+                  </a:srgbClr>
+                </a:clrTo>
+              </a:clrChange>
+              <a:duotone>
+                <a:srgbClr val="187398">
+                  <a:shade val="45000"/>
+                  <a:satMod val="135000"/>
+                </a:srgbClr>
+                <a:prstClr val="white"/>
+              </a:duotone>
+              <a:extLst>
+                <a:ext uri="{28A0092B-C50C-407E-A947-70E740481C1C}">
+                  <a14:useLocalDpi xmlns:a14="http://schemas.microsoft.com/office/drawing/2010/main" val="0"/>
+                </a:ext>
+              </a:extLst>
+            </a:blip>
+            <a:srcRect l="18962" t="6530" r="16637" b="12432"/>
+            <a:stretch/>
+          </p:blipFill>
+          <p:spPr bwMode="auto">
+            <a:xfrm>
+              <a:off x="1036816" y="2861045"/>
+              <a:ext cx="381057" cy="479497"/>
+            </a:xfrm>
+            <a:prstGeom prst="rect">
+              <a:avLst/>
+            </a:prstGeom>
+            <a:noFill/>
+            <a:extLst>
+              <a:ext uri="{909E8E84-426E-40DD-AFC4-6F175D3DCCD1}">
+                <a14:hiddenFill xmlns:a14="http://schemas.microsoft.com/office/drawing/2010/main">
+                  <a:solidFill>
+                    <a:srgbClr val="FFFFFF"/>
+                  </a:solidFill>
+                </a14:hiddenFill>
+              </a:ext>
+            </a:extLst>
+          </p:spPr>
+        </p:pic>
+        <p:sp>
+          <p:nvSpPr>
+            <p:cNvPr id="75" name="TextBox 74">
+              <a:extLst>
+                <a:ext uri="{FF2B5EF4-FFF2-40B4-BE49-F238E27FC236}">
+                  <a16:creationId xmlns:a16="http://schemas.microsoft.com/office/drawing/2014/main" id="{B5A97F01-F8C9-5C78-0087-E13211371C4C}"/>
+                </a:ext>
+              </a:extLst>
+            </p:cNvPr>
+            <p:cNvSpPr txBox="1"/>
+            <p:nvPr/>
+          </p:nvSpPr>
+          <p:spPr>
+            <a:xfrm>
+              <a:off x="838155" y="3301091"/>
+              <a:ext cx="754288" cy="338554"/>
+            </a:xfrm>
+            <a:prstGeom prst="rect">
+              <a:avLst/>
+            </a:prstGeom>
+            <a:noFill/>
+          </p:spPr>
+          <p:txBody>
+            <a:bodyPr wrap="square" rtlCol="0">
+              <a:spAutoFit/>
+            </a:bodyPr>
+            <a:lstStyle/>
+            <a:p>
+              <a:pPr marL="0" marR="0" lvl="0" indent="0" algn="ctr" defTabSz="914400" eaLnBrk="1" fontAlgn="auto" latinLnBrk="0" hangingPunct="1">
+                <a:lnSpc>
+                  <a:spcPct val="100000"/>
+                </a:lnSpc>
+                <a:spcBef>
+                  <a:spcPts val="0"/>
+                </a:spcBef>
+                <a:spcAft>
+                  <a:spcPts val="0"/>
+                </a:spcAft>
+                <a:buClrTx/>
+                <a:buSzTx/>
+                <a:buFontTx/>
+                <a:buNone/>
+                <a:tabLst/>
+                <a:defRPr/>
+              </a:pPr>
+              <a:r>
+                <a:rPr kumimoji="0" lang="en-US" sz="800" b="0" i="0" u="none" strike="noStrike" kern="0" cap="none" spc="0" normalizeH="0" baseline="0" noProof="0" dirty="0">
+                  <a:ln>
+                    <a:noFill/>
+                  </a:ln>
+                  <a:solidFill>
+                    <a:prstClr val="black"/>
+                  </a:solidFill>
+                  <a:effectLst/>
+                  <a:uLnTx/>
+                  <a:uFillTx/>
+                  <a:latin typeface="Verdana" panose="020B0604030504040204" pitchFamily="34" charset="0"/>
+                  <a:ea typeface="Verdana" panose="020B0604030504040204" pitchFamily="34" charset="0"/>
+                </a:rPr>
+                <a:t>Farmer</a:t>
+              </a:r>
+            </a:p>
+            <a:p>
+              <a:pPr marL="0" marR="0" lvl="0" indent="0" algn="ctr" defTabSz="914400" eaLnBrk="1" fontAlgn="auto" latinLnBrk="0" hangingPunct="1">
+                <a:lnSpc>
+                  <a:spcPct val="100000"/>
+                </a:lnSpc>
+                <a:spcBef>
+                  <a:spcPts val="0"/>
+                </a:spcBef>
+                <a:spcAft>
+                  <a:spcPts val="0"/>
+                </a:spcAft>
+                <a:buClrTx/>
+                <a:buSzTx/>
+                <a:buFontTx/>
+                <a:buNone/>
+                <a:tabLst/>
+                <a:defRPr/>
+              </a:pPr>
+              <a:r>
+                <a:rPr kumimoji="0" lang="en-US" sz="800" b="0" i="0" u="none" strike="noStrike" kern="0" cap="none" spc="0" normalizeH="0" baseline="0" noProof="0" dirty="0">
+                  <a:ln>
+                    <a:noFill/>
+                  </a:ln>
+                  <a:solidFill>
+                    <a:prstClr val="black"/>
+                  </a:solidFill>
+                  <a:effectLst/>
+                  <a:uLnTx/>
+                  <a:uFillTx/>
+                  <a:latin typeface="Verdana" panose="020B0604030504040204" pitchFamily="34" charset="0"/>
+                  <a:ea typeface="Verdana" panose="020B0604030504040204" pitchFamily="34" charset="0"/>
+                </a:rPr>
+                <a:t>Agent</a:t>
+              </a:r>
+              <a:endParaRPr kumimoji="0" lang="nl-NL" sz="800" b="0" i="0" u="none" strike="noStrike" kern="0" cap="none" spc="0" normalizeH="0" baseline="0" noProof="0" dirty="0" err="1">
+                <a:ln>
+                  <a:noFill/>
+                </a:ln>
+                <a:solidFill>
+                  <a:prstClr val="black"/>
+                </a:solidFill>
+                <a:effectLst/>
+                <a:uLnTx/>
+                <a:uFillTx/>
+                <a:latin typeface="Verdana" panose="020B0604030504040204" pitchFamily="34" charset="0"/>
+                <a:ea typeface="Verdana" panose="020B0604030504040204" pitchFamily="34" charset="0"/>
+              </a:endParaRPr>
+            </a:p>
+          </p:txBody>
+        </p:sp>
+        <p:sp>
+          <p:nvSpPr>
+            <p:cNvPr id="76" name="Rectangle 75">
+              <a:extLst>
+                <a:ext uri="{FF2B5EF4-FFF2-40B4-BE49-F238E27FC236}">
+                  <a16:creationId xmlns:a16="http://schemas.microsoft.com/office/drawing/2014/main" id="{6564A907-FE18-4E32-9BBD-6EF1B0D8B8C4}"/>
+                </a:ext>
+              </a:extLst>
+            </p:cNvPr>
+            <p:cNvSpPr/>
+            <p:nvPr/>
+          </p:nvSpPr>
+          <p:spPr>
+            <a:xfrm>
+              <a:off x="878471" y="2691430"/>
+              <a:ext cx="662234" cy="972663"/>
+            </a:xfrm>
+            <a:prstGeom prst="rect">
+              <a:avLst/>
+            </a:prstGeom>
+            <a:noFill/>
+            <a:ln w="12700" cap="flat" cmpd="sng" algn="ctr">
+              <a:solidFill>
+                <a:srgbClr val="C4232A">
+                  <a:lumMod val="60000"/>
+                  <a:lumOff val="40000"/>
+                </a:srgbClr>
+              </a:solidFill>
+              <a:prstDash val="dash"/>
+              <a:miter lim="800000"/>
+            </a:ln>
+            <a:effectLst/>
+          </p:spPr>
+          <p:txBody>
+            <a:bodyPr rtlCol="0" anchor="ctr"/>
+            <a:lstStyle/>
+            <a:p>
+              <a:pPr marL="0" marR="0" lvl="0" indent="0" algn="ctr" defTabSz="914400" eaLnBrk="1" fontAlgn="auto" latinLnBrk="0" hangingPunct="1">
+                <a:lnSpc>
+                  <a:spcPct val="100000"/>
+                </a:lnSpc>
+                <a:spcBef>
+                  <a:spcPts val="0"/>
+                </a:spcBef>
+                <a:spcAft>
+                  <a:spcPts val="0"/>
+                </a:spcAft>
+                <a:buClrTx/>
+                <a:buSzTx/>
+                <a:buFontTx/>
+                <a:buNone/>
+                <a:tabLst/>
+                <a:defRPr/>
+              </a:pPr>
+              <a:endParaRPr kumimoji="0" lang="nl-NL" sz="1800" b="0" i="0" u="none" strike="noStrike" kern="0" cap="none" spc="0" normalizeH="0" baseline="0" noProof="0">
+                <a:ln>
+                  <a:noFill/>
+                </a:ln>
+                <a:solidFill>
+                  <a:prstClr val="white"/>
+                </a:solidFill>
+                <a:effectLst/>
+                <a:uLnTx/>
+                <a:uFillTx/>
+                <a:latin typeface="Segoe UI Light"/>
+                <a:ea typeface="+mn-ea"/>
+                <a:cs typeface="+mn-cs"/>
+              </a:endParaRPr>
+            </a:p>
+          </p:txBody>
+        </p:sp>
+      </p:grpSp>
+      <p:sp>
+        <p:nvSpPr>
+          <p:cNvPr id="77" name="Rectangle: Rounded Corners 76">
+            <a:extLst>
+              <a:ext uri="{FF2B5EF4-FFF2-40B4-BE49-F238E27FC236}">
+                <a16:creationId xmlns:a16="http://schemas.microsoft.com/office/drawing/2014/main" id="{61F7BAA2-0E01-6B4E-07F4-D2FB3B972C35}"/>
+              </a:ext>
+            </a:extLst>
+          </p:cNvPr>
+          <p:cNvSpPr/>
+          <p:nvPr/>
+        </p:nvSpPr>
+        <p:spPr>
+          <a:xfrm>
+            <a:off x="6052867" y="2626640"/>
+            <a:ext cx="2194685" cy="645070"/>
+          </a:xfrm>
+          <a:prstGeom prst="roundRect">
+            <a:avLst/>
+          </a:prstGeom>
+          <a:solidFill>
+            <a:srgbClr val="187398">
+              <a:lumMod val="20000"/>
+              <a:lumOff val="80000"/>
+              <a:alpha val="24000"/>
+            </a:srgbClr>
+          </a:solidFill>
+          <a:ln w="12700" cap="flat" cmpd="sng" algn="ctr">
+            <a:solidFill>
+              <a:srgbClr val="3C9BD5">
+                <a:shade val="15000"/>
+              </a:srgbClr>
+            </a:solidFill>
+            <a:prstDash val="solid"/>
+            <a:miter lim="800000"/>
+          </a:ln>
+          <a:effectLst/>
+        </p:spPr>
+        <p:txBody>
+          <a:bodyPr rtlCol="0" anchor="ctr"/>
+          <a:lstStyle/>
+          <a:p>
+            <a:pPr marL="0" marR="0" lvl="0" indent="0" algn="ctr" defTabSz="914400" eaLnBrk="1" fontAlgn="auto" latinLnBrk="0" hangingPunct="1">
+              <a:lnSpc>
+                <a:spcPct val="100000"/>
+              </a:lnSpc>
+              <a:spcBef>
+                <a:spcPts val="0"/>
+              </a:spcBef>
+              <a:spcAft>
+                <a:spcPts val="0"/>
+              </a:spcAft>
+              <a:buClrTx/>
+              <a:buSzTx/>
+              <a:buFontTx/>
+              <a:buNone/>
+              <a:tabLst/>
+              <a:defRPr/>
+            </a:pPr>
+            <a:endParaRPr kumimoji="0" lang="nl-NL" sz="1800" b="0" i="0" u="none" strike="noStrike" kern="0" cap="none" spc="0" normalizeH="0" baseline="0" noProof="0">
+              <a:ln>
+                <a:noFill/>
+              </a:ln>
+              <a:solidFill>
+                <a:prstClr val="white"/>
+              </a:solidFill>
+              <a:effectLst/>
+              <a:uLnTx/>
+              <a:uFillTx/>
+              <a:latin typeface="Segoe UI Light"/>
+              <a:ea typeface="+mn-ea"/>
+              <a:cs typeface="+mn-cs"/>
+            </a:endParaRPr>
+          </a:p>
+        </p:txBody>
+      </p:sp>
+      <p:sp>
+        <p:nvSpPr>
+          <p:cNvPr id="78" name="TextBox 77">
+            <a:extLst>
+              <a:ext uri="{FF2B5EF4-FFF2-40B4-BE49-F238E27FC236}">
+                <a16:creationId xmlns:a16="http://schemas.microsoft.com/office/drawing/2014/main" id="{4164CB78-E2B9-6357-5E9E-919B6CC50F47}"/>
+              </a:ext>
+            </a:extLst>
+          </p:cNvPr>
+          <p:cNvSpPr txBox="1"/>
+          <p:nvPr/>
+        </p:nvSpPr>
+        <p:spPr>
+          <a:xfrm>
+            <a:off x="6031724" y="2734327"/>
+            <a:ext cx="1667446" cy="461665"/>
+          </a:xfrm>
+          <a:prstGeom prst="rect">
+            <a:avLst/>
+          </a:prstGeom>
+          <a:noFill/>
+        </p:spPr>
+        <p:txBody>
+          <a:bodyPr wrap="square" rtlCol="0">
+            <a:spAutoFit/>
+          </a:bodyPr>
+          <a:lstStyle/>
+          <a:p>
+            <a:r>
+              <a:rPr lang="en-US" sz="800" u="sng" dirty="0">
+                <a:solidFill>
+                  <a:prstClr val="black"/>
+                </a:solidFill>
+                <a:latin typeface="Verdana" panose="020B0604030504040204" pitchFamily="34" charset="0"/>
+                <a:ea typeface="Verdana" panose="020B0604030504040204" pitchFamily="34" charset="0"/>
+              </a:rPr>
+              <a:t>E</a:t>
+            </a:r>
+            <a:r>
+              <a:rPr lang="en-US" sz="800" dirty="0">
+                <a:solidFill>
+                  <a:prstClr val="black"/>
+                </a:solidFill>
+                <a:latin typeface="Verdana" panose="020B0604030504040204" pitchFamily="34" charset="0"/>
+                <a:ea typeface="Verdana" panose="020B0604030504040204" pitchFamily="34" charset="0"/>
+              </a:rPr>
+              <a:t>valuate </a:t>
+            </a:r>
+            <a:r>
+              <a:rPr lang="en-US" sz="800" u="sng" dirty="0">
+                <a:solidFill>
+                  <a:prstClr val="black"/>
+                </a:solidFill>
+                <a:latin typeface="Verdana" panose="020B0604030504040204" pitchFamily="34" charset="0"/>
+                <a:ea typeface="Verdana" panose="020B0604030504040204" pitchFamily="34" charset="0"/>
+              </a:rPr>
+              <a:t>arguments</a:t>
+            </a:r>
+            <a:r>
+              <a:rPr lang="en-US" sz="800" dirty="0">
+                <a:solidFill>
+                  <a:prstClr val="black"/>
+                </a:solidFill>
+                <a:latin typeface="Verdana" panose="020B0604030504040204" pitchFamily="34" charset="0"/>
+                <a:ea typeface="Verdana" panose="020B0604030504040204" pitchFamily="34" charset="0"/>
+              </a:rPr>
+              <a:t>. </a:t>
+            </a:r>
+          </a:p>
+          <a:p>
+            <a:r>
+              <a:rPr lang="nl-NL" sz="800" dirty="0" err="1">
+                <a:solidFill>
+                  <a:prstClr val="black"/>
+                </a:solidFill>
+                <a:latin typeface="Verdana" panose="020B0604030504040204" pitchFamily="34" charset="0"/>
+                <a:ea typeface="Verdana" panose="020B0604030504040204" pitchFamily="34" charset="0"/>
+              </a:rPr>
+              <a:t>Respond</a:t>
+            </a:r>
+            <a:r>
+              <a:rPr lang="nl-NL" sz="800" dirty="0">
+                <a:solidFill>
+                  <a:prstClr val="black"/>
+                </a:solidFill>
+                <a:latin typeface="Verdana" panose="020B0604030504040204" pitchFamily="34" charset="0"/>
+                <a:ea typeface="Verdana" panose="020B0604030504040204" pitchFamily="34" charset="0"/>
+              </a:rPr>
+              <a:t> </a:t>
+            </a:r>
+            <a:r>
+              <a:rPr lang="nl-NL" sz="800" dirty="0" err="1">
+                <a:solidFill>
+                  <a:prstClr val="black"/>
+                </a:solidFill>
+                <a:latin typeface="Verdana" panose="020B0604030504040204" pitchFamily="34" charset="0"/>
+                <a:ea typeface="Verdana" panose="020B0604030504040204" pitchFamily="34" charset="0"/>
+              </a:rPr>
+              <a:t>and</a:t>
+            </a:r>
+            <a:r>
+              <a:rPr lang="nl-NL" sz="800" dirty="0">
+                <a:solidFill>
+                  <a:prstClr val="black"/>
+                </a:solidFill>
+                <a:latin typeface="Verdana" panose="020B0604030504040204" pitchFamily="34" charset="0"/>
+                <a:ea typeface="Verdana" panose="020B0604030504040204" pitchFamily="34" charset="0"/>
+              </a:rPr>
+              <a:t> </a:t>
+            </a:r>
+            <a:r>
+              <a:rPr lang="nl-NL" sz="800" dirty="0" err="1">
+                <a:solidFill>
+                  <a:prstClr val="black"/>
+                </a:solidFill>
+                <a:latin typeface="Verdana" panose="020B0604030504040204" pitchFamily="34" charset="0"/>
+                <a:ea typeface="Verdana" panose="020B0604030504040204" pitchFamily="34" charset="0"/>
+              </a:rPr>
+              <a:t>ask</a:t>
+            </a:r>
+            <a:r>
+              <a:rPr lang="nl-NL" sz="800" dirty="0">
+                <a:solidFill>
+                  <a:prstClr val="black"/>
+                </a:solidFill>
+                <a:latin typeface="Verdana" panose="020B0604030504040204" pitchFamily="34" charset="0"/>
+                <a:ea typeface="Verdana" panose="020B0604030504040204" pitchFamily="34" charset="0"/>
+              </a:rPr>
+              <a:t> follow-up</a:t>
+            </a:r>
+          </a:p>
+          <a:p>
+            <a:r>
+              <a:rPr lang="nl-NL" sz="800" dirty="0">
+                <a:solidFill>
+                  <a:prstClr val="black"/>
+                </a:solidFill>
+                <a:latin typeface="Verdana" panose="020B0604030504040204" pitchFamily="34" charset="0"/>
+                <a:ea typeface="Verdana" panose="020B0604030504040204" pitchFamily="34" charset="0"/>
+              </a:rPr>
+              <a:t>question.</a:t>
+            </a:r>
+          </a:p>
+        </p:txBody>
+      </p:sp>
+      <p:pic>
+        <p:nvPicPr>
+          <p:cNvPr id="79" name="Picture 78">
+            <a:extLst>
+              <a:ext uri="{FF2B5EF4-FFF2-40B4-BE49-F238E27FC236}">
+                <a16:creationId xmlns:a16="http://schemas.microsoft.com/office/drawing/2014/main" id="{D886C43C-6EC8-286B-E78D-48D75BC2BE65}"/>
+              </a:ext>
+            </a:extLst>
+          </p:cNvPr>
+          <p:cNvPicPr>
+            <a:picLocks noChangeAspect="1"/>
+          </p:cNvPicPr>
+          <p:nvPr/>
+        </p:nvPicPr>
+        <p:blipFill>
+          <a:blip r:embed="rId5">
+            <a:clrChange>
+              <a:clrFrom>
+                <a:srgbClr val="F4F4F6"/>
+              </a:clrFrom>
+              <a:clrTo>
+                <a:srgbClr val="F4F4F6">
+                  <a:alpha val="0"/>
+                </a:srgbClr>
+              </a:clrTo>
+            </a:clrChange>
+          </a:blip>
+          <a:stretch>
+            <a:fillRect/>
+          </a:stretch>
+        </p:blipFill>
+        <p:spPr>
+          <a:xfrm>
+            <a:off x="7552864" y="2635004"/>
+            <a:ext cx="662234" cy="620443"/>
+          </a:xfrm>
+          <a:prstGeom prst="rect">
+            <a:avLst/>
+          </a:prstGeom>
+        </p:spPr>
+      </p:pic>
+      <p:cxnSp>
+        <p:nvCxnSpPr>
+          <p:cNvPr id="80" name="Straight Arrow Connector 79">
+            <a:extLst>
+              <a:ext uri="{FF2B5EF4-FFF2-40B4-BE49-F238E27FC236}">
+                <a16:creationId xmlns:a16="http://schemas.microsoft.com/office/drawing/2014/main" id="{E5293EA0-EE32-33AE-0B72-F0FA8B214814}"/>
+              </a:ext>
+            </a:extLst>
+          </p:cNvPr>
+          <p:cNvCxnSpPr>
+            <a:cxnSpLocks/>
+          </p:cNvCxnSpPr>
+          <p:nvPr/>
+        </p:nvCxnSpPr>
+        <p:spPr>
+          <a:xfrm>
+            <a:off x="7161684" y="2431156"/>
+            <a:ext cx="0" cy="180896"/>
+          </a:xfrm>
+          <a:prstGeom prst="straightConnector1">
+            <a:avLst/>
+          </a:prstGeom>
+          <a:noFill/>
+          <a:ln w="9525" cap="flat" cmpd="sng" algn="ctr">
+            <a:solidFill>
+              <a:sysClr val="windowText" lastClr="000000"/>
+            </a:solidFill>
+            <a:prstDash val="solid"/>
+            <a:miter lim="800000"/>
+            <a:tailEnd type="triangle"/>
+          </a:ln>
+          <a:effectLst/>
+        </p:spPr>
+      </p:cxnSp>
+      <p:cxnSp>
+        <p:nvCxnSpPr>
+          <p:cNvPr id="81" name="Straight Arrow Connector 80">
+            <a:extLst>
+              <a:ext uri="{FF2B5EF4-FFF2-40B4-BE49-F238E27FC236}">
+                <a16:creationId xmlns:a16="http://schemas.microsoft.com/office/drawing/2014/main" id="{04AB6E86-01D9-7C6B-752B-09BFAF141709}"/>
+              </a:ext>
+            </a:extLst>
+          </p:cNvPr>
+          <p:cNvCxnSpPr>
+            <a:cxnSpLocks/>
+          </p:cNvCxnSpPr>
+          <p:nvPr/>
+        </p:nvCxnSpPr>
+        <p:spPr>
+          <a:xfrm>
+            <a:off x="5219381" y="2969848"/>
+            <a:ext cx="648000" cy="0"/>
+          </a:xfrm>
+          <a:prstGeom prst="straightConnector1">
+            <a:avLst/>
+          </a:prstGeom>
+          <a:noFill/>
+          <a:ln w="9525" cap="flat" cmpd="sng" algn="ctr">
+            <a:solidFill>
+              <a:sysClr val="windowText" lastClr="000000"/>
+            </a:solidFill>
+            <a:prstDash val="solid"/>
+            <a:miter lim="800000"/>
+            <a:tailEnd type="triangle"/>
+          </a:ln>
+          <a:effectLst/>
+        </p:spPr>
+      </p:cxnSp>
+      <p:sp>
+        <p:nvSpPr>
+          <p:cNvPr id="100" name="TextBox 99">
+            <a:extLst>
+              <a:ext uri="{FF2B5EF4-FFF2-40B4-BE49-F238E27FC236}">
+                <a16:creationId xmlns:a16="http://schemas.microsoft.com/office/drawing/2014/main" id="{A6D6FD9E-F694-3820-26E9-2BAC6977C6C3}"/>
+              </a:ext>
+            </a:extLst>
+          </p:cNvPr>
+          <p:cNvSpPr txBox="1"/>
+          <p:nvPr/>
+        </p:nvSpPr>
+        <p:spPr>
+          <a:xfrm>
+            <a:off x="3639411" y="1133231"/>
+            <a:ext cx="1745124" cy="215444"/>
+          </a:xfrm>
+          <a:prstGeom prst="rect">
+            <a:avLst/>
+          </a:prstGeom>
+          <a:noFill/>
+        </p:spPr>
+        <p:txBody>
+          <a:bodyPr wrap="square" rtlCol="0">
+            <a:spAutoFit/>
+          </a:bodyPr>
+          <a:lstStyle/>
+          <a:p>
+            <a:r>
+              <a:rPr lang="en-US" sz="800" b="1" dirty="0">
+                <a:solidFill>
+                  <a:prstClr val="black"/>
+                </a:solidFill>
+                <a:latin typeface="Verdana" panose="020B0604030504040204" pitchFamily="34" charset="0"/>
+                <a:ea typeface="Verdana" panose="020B0604030504040204" pitchFamily="34" charset="0"/>
+              </a:rPr>
+              <a:t>gemma-4-26b-a4b</a:t>
+            </a:r>
+            <a:endParaRPr lang="nl-NL" sz="800" b="1" dirty="0" err="1">
+              <a:solidFill>
+                <a:prstClr val="black"/>
+              </a:solidFill>
+              <a:latin typeface="Verdana" panose="020B0604030504040204" pitchFamily="34" charset="0"/>
+              <a:ea typeface="Verdana" panose="020B0604030504040204" pitchFamily="34" charset="0"/>
+            </a:endParaRPr>
+          </a:p>
+        </p:txBody>
+      </p:sp>
+      <p:sp>
+        <p:nvSpPr>
+          <p:cNvPr id="101" name="TextBox 100">
+            <a:extLst>
+              <a:ext uri="{FF2B5EF4-FFF2-40B4-BE49-F238E27FC236}">
+                <a16:creationId xmlns:a16="http://schemas.microsoft.com/office/drawing/2014/main" id="{C052A0FF-1AEA-0F2F-165B-3539B4191BA6}"/>
+              </a:ext>
+            </a:extLst>
+          </p:cNvPr>
+          <p:cNvSpPr txBox="1"/>
+          <p:nvPr/>
+        </p:nvSpPr>
+        <p:spPr>
+          <a:xfrm>
+            <a:off x="6816674" y="1129720"/>
+            <a:ext cx="1745124" cy="215444"/>
+          </a:xfrm>
+          <a:prstGeom prst="rect">
+            <a:avLst/>
+          </a:prstGeom>
+          <a:noFill/>
+        </p:spPr>
+        <p:txBody>
+          <a:bodyPr wrap="square" rtlCol="0">
+            <a:spAutoFit/>
+          </a:bodyPr>
+          <a:lstStyle/>
+          <a:p>
+            <a:r>
+              <a:rPr lang="en-US" sz="800" b="1" dirty="0">
+                <a:solidFill>
+                  <a:prstClr val="black"/>
+                </a:solidFill>
+                <a:latin typeface="Verdana" panose="020B0604030504040204" pitchFamily="34" charset="0"/>
+                <a:ea typeface="Verdana" panose="020B0604030504040204" pitchFamily="34" charset="0"/>
+              </a:rPr>
+              <a:t>gemma-4-26b-a4b</a:t>
+            </a:r>
+            <a:endParaRPr lang="nl-NL" sz="800" b="1" dirty="0" err="1">
+              <a:solidFill>
+                <a:prstClr val="black"/>
+              </a:solidFill>
+              <a:latin typeface="Verdana" panose="020B0604030504040204" pitchFamily="34" charset="0"/>
+              <a:ea typeface="Verdana" panose="020B0604030504040204" pitchFamily="34" charset="0"/>
+            </a:endParaRPr>
+          </a:p>
+        </p:txBody>
+      </p:sp>
+      <p:sp>
+        <p:nvSpPr>
+          <p:cNvPr id="2" name="Rectangle 1">
+            <a:extLst>
+              <a:ext uri="{FF2B5EF4-FFF2-40B4-BE49-F238E27FC236}">
+                <a16:creationId xmlns:a16="http://schemas.microsoft.com/office/drawing/2014/main" id="{0B01A985-C70E-04F3-511C-07A9C5AC8560}"/>
+              </a:ext>
+            </a:extLst>
+          </p:cNvPr>
+          <p:cNvSpPr/>
+          <p:nvPr/>
+        </p:nvSpPr>
+        <p:spPr>
+          <a:xfrm>
+            <a:off x="2629319" y="1105616"/>
+            <a:ext cx="6088135" cy="4693885"/>
+          </a:xfrm>
+          <a:prstGeom prst="rect">
+            <a:avLst/>
+          </a:prstGeom>
+          <a:noFill/>
+          <a:ln w="12700" cap="flat" cmpd="sng" algn="ctr">
+            <a:solidFill>
+              <a:srgbClr val="C4232A">
+                <a:lumMod val="60000"/>
+                <a:lumOff val="40000"/>
+              </a:srgbClr>
+            </a:solidFill>
+            <a:prstDash val="dash"/>
+            <a:miter lim="800000"/>
+          </a:ln>
+          <a:effectLst/>
+        </p:spPr>
+        <p:txBody>
+          <a:bodyPr rtlCol="0" anchor="ctr"/>
+          <a:lstStyle/>
+          <a:p>
+            <a:pPr marL="0" marR="0" lvl="0" indent="0" algn="ctr" defTabSz="914400" eaLnBrk="1" fontAlgn="auto" latinLnBrk="0" hangingPunct="1">
+              <a:lnSpc>
+                <a:spcPct val="100000"/>
+              </a:lnSpc>
+              <a:spcBef>
+                <a:spcPts val="0"/>
+              </a:spcBef>
+              <a:spcAft>
+                <a:spcPts val="0"/>
+              </a:spcAft>
+              <a:buClrTx/>
+              <a:buSzTx/>
+              <a:buFontTx/>
+              <a:buNone/>
+              <a:tabLst/>
+              <a:defRPr/>
+            </a:pPr>
+            <a:endParaRPr kumimoji="0" lang="nl-NL" sz="1800" b="0" i="0" u="none" strike="noStrike" kern="0" cap="none" spc="0" normalizeH="0" baseline="0" noProof="0">
+              <a:ln>
+                <a:noFill/>
+              </a:ln>
+              <a:solidFill>
+                <a:prstClr val="white"/>
+              </a:solidFill>
+              <a:effectLst/>
+              <a:uLnTx/>
+              <a:uFillTx/>
+              <a:latin typeface="Segoe UI Light"/>
+              <a:ea typeface="+mn-ea"/>
+              <a:cs typeface="+mn-cs"/>
+            </a:endParaRPr>
+          </a:p>
+        </p:txBody>
+      </p:sp>
+      <p:grpSp>
+        <p:nvGrpSpPr>
+          <p:cNvPr id="11" name="Group 10">
+            <a:extLst>
+              <a:ext uri="{FF2B5EF4-FFF2-40B4-BE49-F238E27FC236}">
+                <a16:creationId xmlns:a16="http://schemas.microsoft.com/office/drawing/2014/main" id="{700293BD-CC4E-6060-3301-25B329330A53}"/>
+              </a:ext>
+            </a:extLst>
+          </p:cNvPr>
+          <p:cNvGrpSpPr/>
+          <p:nvPr/>
+        </p:nvGrpSpPr>
+        <p:grpSpPr>
+          <a:xfrm>
+            <a:off x="6802169" y="4609916"/>
+            <a:ext cx="754288" cy="869511"/>
+            <a:chOff x="838155" y="2794582"/>
+            <a:chExt cx="754288" cy="869511"/>
+          </a:xfrm>
+        </p:grpSpPr>
+        <p:pic>
+          <p:nvPicPr>
+            <p:cNvPr id="12" name="Picture 2" descr="Bot (informática) - EcuRed">
+              <a:extLst>
+                <a:ext uri="{FF2B5EF4-FFF2-40B4-BE49-F238E27FC236}">
+                  <a16:creationId xmlns:a16="http://schemas.microsoft.com/office/drawing/2014/main" id="{879CBB31-5E2E-7515-7A21-637E442680A8}"/>
+                </a:ext>
+              </a:extLst>
+            </p:cNvPr>
+            <p:cNvPicPr>
+              <a:picLocks noChangeAspect="1" noChangeArrowheads="1"/>
+            </p:cNvPicPr>
+            <p:nvPr/>
+          </p:nvPicPr>
+          <p:blipFill rotWithShape="1">
+            <a:blip r:embed="rId4">
+              <a:clrChange>
+                <a:clrFrom>
+                  <a:srgbClr val="FFFFFF"/>
+                </a:clrFrom>
+                <a:clrTo>
+                  <a:srgbClr val="FFFFFF">
+                    <a:alpha val="0"/>
+                  </a:srgbClr>
+                </a:clrTo>
+              </a:clrChange>
+              <a:duotone>
+                <a:srgbClr val="634DA9">
+                  <a:shade val="45000"/>
+                  <a:satMod val="135000"/>
+                </a:srgbClr>
+                <a:prstClr val="white"/>
+              </a:duotone>
+              <a:extLst>
+                <a:ext uri="{28A0092B-C50C-407E-A947-70E740481C1C}">
+                  <a14:useLocalDpi xmlns:a14="http://schemas.microsoft.com/office/drawing/2010/main" val="0"/>
+                </a:ext>
+              </a:extLst>
+            </a:blip>
+            <a:srcRect l="18962" t="6530" r="16637" b="12432"/>
+            <a:stretch/>
+          </p:blipFill>
+          <p:spPr bwMode="auto">
+            <a:xfrm>
+              <a:off x="1036816" y="2861045"/>
+              <a:ext cx="381057" cy="479497"/>
+            </a:xfrm>
+            <a:prstGeom prst="rect">
+              <a:avLst/>
+            </a:prstGeom>
+            <a:noFill/>
+            <a:extLst>
+              <a:ext uri="{909E8E84-426E-40DD-AFC4-6F175D3DCCD1}">
+                <a14:hiddenFill xmlns:a14="http://schemas.microsoft.com/office/drawing/2010/main">
+                  <a:solidFill>
+                    <a:srgbClr val="FFFFFF"/>
+                  </a:solidFill>
+                </a14:hiddenFill>
+              </a:ext>
+            </a:extLst>
+          </p:spPr>
+        </p:pic>
+        <p:sp>
+          <p:nvSpPr>
+            <p:cNvPr id="13" name="TextBox 12">
+              <a:extLst>
+                <a:ext uri="{FF2B5EF4-FFF2-40B4-BE49-F238E27FC236}">
+                  <a16:creationId xmlns:a16="http://schemas.microsoft.com/office/drawing/2014/main" id="{9EEEABBC-C55F-A3E3-6702-EADB8C4133CB}"/>
+                </a:ext>
+              </a:extLst>
+            </p:cNvPr>
+            <p:cNvSpPr txBox="1"/>
+            <p:nvPr/>
+          </p:nvSpPr>
+          <p:spPr>
+            <a:xfrm>
+              <a:off x="838155" y="3301091"/>
+              <a:ext cx="754288" cy="338554"/>
+            </a:xfrm>
+            <a:prstGeom prst="rect">
+              <a:avLst/>
+            </a:prstGeom>
+            <a:noFill/>
+          </p:spPr>
+          <p:txBody>
+            <a:bodyPr wrap="square" rtlCol="0">
+              <a:spAutoFit/>
+            </a:bodyPr>
+            <a:lstStyle/>
+            <a:p>
+              <a:pPr marL="0" marR="0" lvl="0" indent="0" algn="ctr" defTabSz="914400" eaLnBrk="1" fontAlgn="auto" latinLnBrk="0" hangingPunct="1">
+                <a:lnSpc>
+                  <a:spcPct val="100000"/>
+                </a:lnSpc>
+                <a:spcBef>
+                  <a:spcPts val="0"/>
+                </a:spcBef>
+                <a:spcAft>
+                  <a:spcPts val="0"/>
+                </a:spcAft>
+                <a:buClrTx/>
+                <a:buSzTx/>
+                <a:buFontTx/>
+                <a:buNone/>
+                <a:tabLst/>
+                <a:defRPr/>
+              </a:pPr>
+              <a:r>
+                <a:rPr kumimoji="0" lang="en-US" sz="800" b="0" i="0" u="none" strike="noStrike" kern="0" cap="none" spc="0" normalizeH="0" baseline="0" noProof="0" dirty="0">
+                  <a:ln>
+                    <a:noFill/>
+                  </a:ln>
+                  <a:solidFill>
+                    <a:prstClr val="black"/>
+                  </a:solidFill>
+                  <a:effectLst/>
+                  <a:uLnTx/>
+                  <a:uFillTx/>
+                  <a:latin typeface="Verdana" panose="020B0604030504040204" pitchFamily="34" charset="0"/>
+                  <a:ea typeface="Verdana" panose="020B0604030504040204" pitchFamily="34" charset="0"/>
+                </a:rPr>
+                <a:t>Moderator</a:t>
+              </a:r>
+            </a:p>
+            <a:p>
+              <a:pPr marL="0" marR="0" lvl="0" indent="0" algn="ctr" defTabSz="914400" eaLnBrk="1" fontAlgn="auto" latinLnBrk="0" hangingPunct="1">
+                <a:lnSpc>
+                  <a:spcPct val="100000"/>
+                </a:lnSpc>
+                <a:spcBef>
+                  <a:spcPts val="0"/>
+                </a:spcBef>
+                <a:spcAft>
+                  <a:spcPts val="0"/>
+                </a:spcAft>
+                <a:buClrTx/>
+                <a:buSzTx/>
+                <a:buFontTx/>
+                <a:buNone/>
+                <a:tabLst/>
+                <a:defRPr/>
+              </a:pPr>
+              <a:r>
+                <a:rPr kumimoji="0" lang="en-US" sz="800" b="0" i="0" u="none" strike="noStrike" kern="0" cap="none" spc="0" normalizeH="0" baseline="0" noProof="0" dirty="0">
+                  <a:ln>
+                    <a:noFill/>
+                  </a:ln>
+                  <a:solidFill>
+                    <a:prstClr val="black"/>
+                  </a:solidFill>
+                  <a:effectLst/>
+                  <a:uLnTx/>
+                  <a:uFillTx/>
+                  <a:latin typeface="Verdana" panose="020B0604030504040204" pitchFamily="34" charset="0"/>
+                  <a:ea typeface="Verdana" panose="020B0604030504040204" pitchFamily="34" charset="0"/>
+                </a:rPr>
+                <a:t>Agent</a:t>
+              </a:r>
+              <a:endParaRPr kumimoji="0" lang="nl-NL" sz="800" b="0" i="0" u="none" strike="noStrike" kern="0" cap="none" spc="0" normalizeH="0" baseline="0" noProof="0" dirty="0" err="1">
+                <a:ln>
+                  <a:noFill/>
+                </a:ln>
+                <a:solidFill>
+                  <a:prstClr val="black"/>
+                </a:solidFill>
+                <a:effectLst/>
+                <a:uLnTx/>
+                <a:uFillTx/>
+                <a:latin typeface="Verdana" panose="020B0604030504040204" pitchFamily="34" charset="0"/>
+                <a:ea typeface="Verdana" panose="020B0604030504040204" pitchFamily="34" charset="0"/>
+              </a:endParaRPr>
+            </a:p>
+          </p:txBody>
+        </p:sp>
+        <p:sp>
+          <p:nvSpPr>
+            <p:cNvPr id="14" name="Rectangle 13">
+              <a:extLst>
+                <a:ext uri="{FF2B5EF4-FFF2-40B4-BE49-F238E27FC236}">
+                  <a16:creationId xmlns:a16="http://schemas.microsoft.com/office/drawing/2014/main" id="{2F0AB7F8-CB23-C817-F2D4-856D73FA9B9F}"/>
+                </a:ext>
+              </a:extLst>
+            </p:cNvPr>
+            <p:cNvSpPr/>
+            <p:nvPr/>
+          </p:nvSpPr>
+          <p:spPr>
+            <a:xfrm>
+              <a:off x="878471" y="2794582"/>
+              <a:ext cx="662234" cy="869511"/>
+            </a:xfrm>
+            <a:prstGeom prst="rect">
+              <a:avLst/>
+            </a:prstGeom>
+            <a:noFill/>
+            <a:ln w="12700" cap="flat" cmpd="sng" algn="ctr">
+              <a:solidFill>
+                <a:srgbClr val="C4232A">
+                  <a:lumMod val="60000"/>
+                  <a:lumOff val="40000"/>
+                </a:srgbClr>
+              </a:solidFill>
+              <a:prstDash val="dash"/>
+              <a:miter lim="800000"/>
+            </a:ln>
+            <a:effectLst/>
+          </p:spPr>
+          <p:txBody>
+            <a:bodyPr rtlCol="0" anchor="ctr"/>
+            <a:lstStyle/>
+            <a:p>
+              <a:pPr marL="0" marR="0" lvl="0" indent="0" algn="ctr" defTabSz="914400" eaLnBrk="1" fontAlgn="auto" latinLnBrk="0" hangingPunct="1">
+                <a:lnSpc>
+                  <a:spcPct val="100000"/>
+                </a:lnSpc>
+                <a:spcBef>
+                  <a:spcPts val="0"/>
+                </a:spcBef>
+                <a:spcAft>
+                  <a:spcPts val="0"/>
+                </a:spcAft>
+                <a:buClrTx/>
+                <a:buSzTx/>
+                <a:buFontTx/>
+                <a:buNone/>
+                <a:tabLst/>
+                <a:defRPr/>
+              </a:pPr>
+              <a:endParaRPr kumimoji="0" lang="nl-NL" sz="1800" b="0" i="0" u="none" strike="noStrike" kern="0" cap="none" spc="0" normalizeH="0" baseline="0" noProof="0" dirty="0">
+                <a:ln>
+                  <a:noFill/>
+                </a:ln>
+                <a:solidFill>
+                  <a:prstClr val="white"/>
+                </a:solidFill>
+                <a:effectLst/>
+                <a:uLnTx/>
+                <a:uFillTx/>
+                <a:latin typeface="Segoe UI Light"/>
+                <a:ea typeface="+mn-ea"/>
+                <a:cs typeface="+mn-cs"/>
+              </a:endParaRPr>
+            </a:p>
+          </p:txBody>
+        </p:sp>
+      </p:grpSp>
+      <p:sp>
+        <p:nvSpPr>
+          <p:cNvPr id="15" name="Rectangle: Rounded Corners 14">
+            <a:extLst>
+              <a:ext uri="{FF2B5EF4-FFF2-40B4-BE49-F238E27FC236}">
+                <a16:creationId xmlns:a16="http://schemas.microsoft.com/office/drawing/2014/main" id="{7FBFF585-7301-822E-73AB-0A31B3AECD1F}"/>
+              </a:ext>
+            </a:extLst>
+          </p:cNvPr>
+          <p:cNvSpPr/>
+          <p:nvPr/>
+        </p:nvSpPr>
+        <p:spPr>
+          <a:xfrm>
+            <a:off x="6081971" y="3666340"/>
+            <a:ext cx="2194685" cy="645070"/>
+          </a:xfrm>
+          <a:prstGeom prst="roundRect">
+            <a:avLst/>
+          </a:prstGeom>
+          <a:solidFill>
+            <a:srgbClr val="634DA9">
+              <a:lumMod val="20000"/>
+              <a:lumOff val="80000"/>
+              <a:alpha val="24000"/>
+            </a:srgbClr>
+          </a:solidFill>
+          <a:ln w="12700" cap="flat" cmpd="sng" algn="ctr">
+            <a:solidFill>
+              <a:srgbClr val="3C9BD5">
+                <a:shade val="15000"/>
+              </a:srgbClr>
+            </a:solidFill>
+            <a:prstDash val="solid"/>
+            <a:miter lim="800000"/>
+          </a:ln>
+          <a:effectLst/>
+        </p:spPr>
+        <p:txBody>
+          <a:bodyPr rtlCol="0" anchor="ctr"/>
+          <a:lstStyle/>
+          <a:p>
+            <a:pPr marL="0" marR="0" lvl="0" indent="0" algn="ctr" defTabSz="914400" eaLnBrk="1" fontAlgn="auto" latinLnBrk="0" hangingPunct="1">
+              <a:lnSpc>
+                <a:spcPct val="100000"/>
+              </a:lnSpc>
+              <a:spcBef>
+                <a:spcPts val="0"/>
+              </a:spcBef>
+              <a:spcAft>
+                <a:spcPts val="0"/>
+              </a:spcAft>
+              <a:buClrTx/>
+              <a:buSzTx/>
+              <a:buFontTx/>
+              <a:buNone/>
+              <a:tabLst/>
+              <a:defRPr/>
+            </a:pPr>
+            <a:endParaRPr kumimoji="0" lang="nl-NL" sz="1800" b="0" i="0" u="none" strike="noStrike" kern="0" cap="none" spc="0" normalizeH="0" baseline="0" noProof="0">
+              <a:ln>
+                <a:noFill/>
+              </a:ln>
+              <a:solidFill>
+                <a:prstClr val="white"/>
+              </a:solidFill>
+              <a:effectLst/>
+              <a:uLnTx/>
+              <a:uFillTx/>
+              <a:latin typeface="Segoe UI Light"/>
+              <a:ea typeface="+mn-ea"/>
+              <a:cs typeface="+mn-cs"/>
+            </a:endParaRPr>
+          </a:p>
+        </p:txBody>
+      </p:sp>
+      <p:sp>
+        <p:nvSpPr>
+          <p:cNvPr id="16" name="TextBox 15">
+            <a:extLst>
+              <a:ext uri="{FF2B5EF4-FFF2-40B4-BE49-F238E27FC236}">
+                <a16:creationId xmlns:a16="http://schemas.microsoft.com/office/drawing/2014/main" id="{4109E4AD-7A77-2B09-03DD-15C3A16A9150}"/>
+              </a:ext>
+            </a:extLst>
+          </p:cNvPr>
+          <p:cNvSpPr txBox="1"/>
+          <p:nvPr/>
+        </p:nvSpPr>
+        <p:spPr>
+          <a:xfrm>
+            <a:off x="6059496" y="3695685"/>
+            <a:ext cx="1895155" cy="584775"/>
+          </a:xfrm>
+          <a:prstGeom prst="rect">
+            <a:avLst/>
+          </a:prstGeom>
+          <a:noFill/>
+        </p:spPr>
+        <p:txBody>
+          <a:bodyPr wrap="square" rtlCol="0">
+            <a:spAutoFit/>
+          </a:bodyPr>
+          <a:lstStyle/>
+          <a:p>
+            <a:r>
+              <a:rPr lang="en-US" sz="800" dirty="0">
+                <a:solidFill>
+                  <a:prstClr val="black"/>
+                </a:solidFill>
+                <a:latin typeface="Verdana" panose="020B0604030504040204" pitchFamily="34" charset="0"/>
+                <a:ea typeface="Verdana" panose="020B0604030504040204" pitchFamily="34" charset="0"/>
+              </a:rPr>
+              <a:t>Summarize arguments, identify (dis)agreements,  and Propose one question that helps both agents move toward consensus.</a:t>
+            </a:r>
+            <a:endParaRPr lang="nl-NL" sz="800" dirty="0">
+              <a:solidFill>
+                <a:prstClr val="black"/>
+              </a:solidFill>
+              <a:latin typeface="Verdana" panose="020B0604030504040204" pitchFamily="34" charset="0"/>
+              <a:ea typeface="Verdana" panose="020B0604030504040204" pitchFamily="34" charset="0"/>
+            </a:endParaRPr>
+          </a:p>
+        </p:txBody>
+      </p:sp>
+      <p:cxnSp>
+        <p:nvCxnSpPr>
+          <p:cNvPr id="17" name="Straight Arrow Connector 16">
+            <a:extLst>
+              <a:ext uri="{FF2B5EF4-FFF2-40B4-BE49-F238E27FC236}">
+                <a16:creationId xmlns:a16="http://schemas.microsoft.com/office/drawing/2014/main" id="{4915A251-2469-9A4C-DFF9-0143D75C9781}"/>
+              </a:ext>
+            </a:extLst>
+          </p:cNvPr>
+          <p:cNvCxnSpPr>
+            <a:cxnSpLocks/>
+          </p:cNvCxnSpPr>
+          <p:nvPr/>
+        </p:nvCxnSpPr>
+        <p:spPr>
+          <a:xfrm flipV="1">
+            <a:off x="7190788" y="4372560"/>
+            <a:ext cx="0" cy="182880"/>
+          </a:xfrm>
+          <a:prstGeom prst="straightConnector1">
+            <a:avLst/>
+          </a:prstGeom>
+          <a:noFill/>
+          <a:ln w="9525" cap="flat" cmpd="sng" algn="ctr">
+            <a:solidFill>
+              <a:sysClr val="windowText" lastClr="000000"/>
+            </a:solidFill>
+            <a:prstDash val="solid"/>
+            <a:miter lim="800000"/>
+            <a:tailEnd type="triangle"/>
+          </a:ln>
+          <a:effectLst/>
+        </p:spPr>
+      </p:cxnSp>
+      <p:cxnSp>
+        <p:nvCxnSpPr>
+          <p:cNvPr id="18" name="Straight Arrow Connector 17">
+            <a:extLst>
+              <a:ext uri="{FF2B5EF4-FFF2-40B4-BE49-F238E27FC236}">
+                <a16:creationId xmlns:a16="http://schemas.microsoft.com/office/drawing/2014/main" id="{E169F87D-6A14-1349-CD6C-0B393F177888}"/>
+              </a:ext>
+            </a:extLst>
+          </p:cNvPr>
+          <p:cNvCxnSpPr>
+            <a:cxnSpLocks/>
+          </p:cNvCxnSpPr>
+          <p:nvPr/>
+        </p:nvCxnSpPr>
+        <p:spPr>
+          <a:xfrm>
+            <a:off x="7173440" y="3350904"/>
+            <a:ext cx="0" cy="252000"/>
+          </a:xfrm>
+          <a:prstGeom prst="straightConnector1">
+            <a:avLst/>
+          </a:prstGeom>
+          <a:noFill/>
+          <a:ln w="9525" cap="flat" cmpd="sng" algn="ctr">
+            <a:solidFill>
+              <a:sysClr val="windowText" lastClr="000000"/>
+            </a:solidFill>
+            <a:prstDash val="solid"/>
+            <a:miter lim="800000"/>
+            <a:tailEnd type="triangle"/>
+          </a:ln>
+          <a:effectLst/>
+        </p:spPr>
+      </p:cxnSp>
+      <p:pic>
+        <p:nvPicPr>
+          <p:cNvPr id="19" name="Picture 18">
+            <a:extLst>
+              <a:ext uri="{FF2B5EF4-FFF2-40B4-BE49-F238E27FC236}">
+                <a16:creationId xmlns:a16="http://schemas.microsoft.com/office/drawing/2014/main" id="{B77DFB50-6273-C5DE-E93C-72D889193617}"/>
+              </a:ext>
+            </a:extLst>
+          </p:cNvPr>
+          <p:cNvPicPr>
+            <a:picLocks noChangeAspect="1"/>
+          </p:cNvPicPr>
+          <p:nvPr/>
+        </p:nvPicPr>
+        <p:blipFill>
+          <a:blip r:embed="rId6">
+            <a:clrChange>
+              <a:clrFrom>
+                <a:srgbClr val="F4F4F6"/>
+              </a:clrFrom>
+              <a:clrTo>
+                <a:srgbClr val="F4F4F6">
+                  <a:alpha val="0"/>
+                </a:srgbClr>
+              </a:clrTo>
+            </a:clrChange>
+          </a:blip>
+          <a:stretch>
+            <a:fillRect/>
+          </a:stretch>
+        </p:blipFill>
+        <p:spPr>
+          <a:xfrm>
+            <a:off x="7821640" y="3733714"/>
+            <a:ext cx="455016" cy="468974"/>
+          </a:xfrm>
+          <a:prstGeom prst="rect">
+            <a:avLst/>
+          </a:prstGeom>
+        </p:spPr>
+      </p:pic>
+      <p:sp>
+        <p:nvSpPr>
+          <p:cNvPr id="20" name="TextBox 19">
+            <a:extLst>
+              <a:ext uri="{FF2B5EF4-FFF2-40B4-BE49-F238E27FC236}">
+                <a16:creationId xmlns:a16="http://schemas.microsoft.com/office/drawing/2014/main" id="{72A64926-4398-B4A7-995B-017E6123750F}"/>
+              </a:ext>
+            </a:extLst>
+          </p:cNvPr>
+          <p:cNvSpPr txBox="1"/>
+          <p:nvPr/>
+        </p:nvSpPr>
+        <p:spPr>
+          <a:xfrm>
+            <a:off x="6688543" y="5536040"/>
+            <a:ext cx="1195438" cy="215444"/>
+          </a:xfrm>
+          <a:prstGeom prst="rect">
+            <a:avLst/>
+          </a:prstGeom>
+          <a:noFill/>
+        </p:spPr>
+        <p:txBody>
+          <a:bodyPr wrap="square" rtlCol="0">
+            <a:spAutoFit/>
+          </a:bodyPr>
+          <a:lstStyle/>
+          <a:p>
+            <a:r>
+              <a:rPr lang="en-US" sz="800" b="1" dirty="0">
+                <a:solidFill>
+                  <a:prstClr val="black"/>
+                </a:solidFill>
+                <a:latin typeface="Verdana" panose="020B0604030504040204" pitchFamily="34" charset="0"/>
+                <a:ea typeface="Verdana" panose="020B0604030504040204" pitchFamily="34" charset="0"/>
+              </a:rPr>
+              <a:t>gpt-oss-20b</a:t>
+            </a:r>
+            <a:endParaRPr lang="nl-NL" sz="800" b="1" dirty="0" err="1">
+              <a:solidFill>
+                <a:prstClr val="black"/>
+              </a:solidFill>
+              <a:latin typeface="Verdana" panose="020B0604030504040204" pitchFamily="34" charset="0"/>
+              <a:ea typeface="Verdana" panose="020B0604030504040204" pitchFamily="34" charset="0"/>
+            </a:endParaRPr>
+          </a:p>
+        </p:txBody>
+      </p:sp>
+      <p:grpSp>
+        <p:nvGrpSpPr>
+          <p:cNvPr id="3" name="Group 2">
+            <a:extLst>
+              <a:ext uri="{FF2B5EF4-FFF2-40B4-BE49-F238E27FC236}">
+                <a16:creationId xmlns:a16="http://schemas.microsoft.com/office/drawing/2014/main" id="{2290408A-9487-B050-3902-B686F34985AB}"/>
+              </a:ext>
+            </a:extLst>
+          </p:cNvPr>
+          <p:cNvGrpSpPr/>
+          <p:nvPr/>
+        </p:nvGrpSpPr>
+        <p:grpSpPr>
+          <a:xfrm>
+            <a:off x="3743142" y="4632992"/>
+            <a:ext cx="754288" cy="869511"/>
+            <a:chOff x="838155" y="2794582"/>
+            <a:chExt cx="754288" cy="869511"/>
+          </a:xfrm>
+        </p:grpSpPr>
+        <p:pic>
+          <p:nvPicPr>
+            <p:cNvPr id="4" name="Picture 2" descr="Bot (informática) - EcuRed">
+              <a:extLst>
+                <a:ext uri="{FF2B5EF4-FFF2-40B4-BE49-F238E27FC236}">
+                  <a16:creationId xmlns:a16="http://schemas.microsoft.com/office/drawing/2014/main" id="{40AB2B56-4095-670F-236A-047BF4D9AE8E}"/>
+                </a:ext>
+              </a:extLst>
+            </p:cNvPr>
+            <p:cNvPicPr>
+              <a:picLocks noChangeAspect="1" noChangeArrowheads="1"/>
+            </p:cNvPicPr>
+            <p:nvPr/>
+          </p:nvPicPr>
+          <p:blipFill rotWithShape="1">
+            <a:blip r:embed="rId4">
+              <a:clrChange>
+                <a:clrFrom>
+                  <a:srgbClr val="FFFFFF"/>
+                </a:clrFrom>
+                <a:clrTo>
+                  <a:srgbClr val="FFFFFF">
+                    <a:alpha val="0"/>
+                  </a:srgbClr>
+                </a:clrTo>
+              </a:clrChange>
+              <a:duotone>
+                <a:srgbClr val="C4232A">
+                  <a:shade val="45000"/>
+                  <a:satMod val="135000"/>
+                </a:srgbClr>
+                <a:prstClr val="white"/>
+              </a:duotone>
+              <a:extLst>
+                <a:ext uri="{28A0092B-C50C-407E-A947-70E740481C1C}">
+                  <a14:useLocalDpi xmlns:a14="http://schemas.microsoft.com/office/drawing/2010/main" val="0"/>
+                </a:ext>
+              </a:extLst>
+            </a:blip>
+            <a:srcRect l="18962" t="6530" r="16637" b="12432"/>
+            <a:stretch/>
+          </p:blipFill>
+          <p:spPr bwMode="auto">
+            <a:xfrm>
+              <a:off x="1036816" y="2861045"/>
+              <a:ext cx="381057" cy="479497"/>
+            </a:xfrm>
+            <a:prstGeom prst="rect">
+              <a:avLst/>
+            </a:prstGeom>
+            <a:noFill/>
+            <a:extLst>
+              <a:ext uri="{909E8E84-426E-40DD-AFC4-6F175D3DCCD1}">
+                <a14:hiddenFill xmlns:a14="http://schemas.microsoft.com/office/drawing/2010/main">
+                  <a:solidFill>
+                    <a:srgbClr val="FFFFFF"/>
+                  </a:solidFill>
+                </a14:hiddenFill>
+              </a:ext>
+            </a:extLst>
+          </p:spPr>
+        </p:pic>
+        <p:sp>
+          <p:nvSpPr>
+            <p:cNvPr id="5" name="TextBox 4">
+              <a:extLst>
+                <a:ext uri="{FF2B5EF4-FFF2-40B4-BE49-F238E27FC236}">
+                  <a16:creationId xmlns:a16="http://schemas.microsoft.com/office/drawing/2014/main" id="{B79B7899-47F5-0049-F58F-A770B59F761C}"/>
+                </a:ext>
+              </a:extLst>
+            </p:cNvPr>
+            <p:cNvSpPr txBox="1"/>
+            <p:nvPr/>
+          </p:nvSpPr>
+          <p:spPr>
+            <a:xfrm>
+              <a:off x="838155" y="3301091"/>
+              <a:ext cx="754288" cy="338554"/>
+            </a:xfrm>
+            <a:prstGeom prst="rect">
+              <a:avLst/>
+            </a:prstGeom>
+            <a:noFill/>
+          </p:spPr>
+          <p:txBody>
+            <a:bodyPr wrap="square" rtlCol="0">
+              <a:spAutoFit/>
+            </a:bodyPr>
+            <a:lstStyle/>
+            <a:p>
+              <a:pPr marL="0" marR="0" lvl="0" indent="0" algn="ctr" defTabSz="914400" eaLnBrk="1" fontAlgn="auto" latinLnBrk="0" hangingPunct="1">
+                <a:lnSpc>
+                  <a:spcPct val="100000"/>
+                </a:lnSpc>
+                <a:spcBef>
+                  <a:spcPts val="0"/>
+                </a:spcBef>
+                <a:spcAft>
+                  <a:spcPts val="0"/>
+                </a:spcAft>
+                <a:buClrTx/>
+                <a:buSzTx/>
+                <a:buFontTx/>
+                <a:buNone/>
+                <a:tabLst/>
+                <a:defRPr/>
+              </a:pPr>
+              <a:r>
+                <a:rPr kumimoji="0" lang="en-US" sz="800" b="0" i="0" u="none" strike="noStrike" kern="0" cap="none" spc="0" normalizeH="0" baseline="0" noProof="0" dirty="0">
+                  <a:ln>
+                    <a:noFill/>
+                  </a:ln>
+                  <a:solidFill>
+                    <a:prstClr val="black"/>
+                  </a:solidFill>
+                  <a:effectLst/>
+                  <a:uLnTx/>
+                  <a:uFillTx/>
+                  <a:latin typeface="Verdana" panose="020B0604030504040204" pitchFamily="34" charset="0"/>
+                  <a:ea typeface="Verdana" panose="020B0604030504040204" pitchFamily="34" charset="0"/>
+                </a:rPr>
+                <a:t>Scoring</a:t>
+              </a:r>
+            </a:p>
+            <a:p>
+              <a:pPr marL="0" marR="0" lvl="0" indent="0" algn="ctr" defTabSz="914400" eaLnBrk="1" fontAlgn="auto" latinLnBrk="0" hangingPunct="1">
+                <a:lnSpc>
+                  <a:spcPct val="100000"/>
+                </a:lnSpc>
+                <a:spcBef>
+                  <a:spcPts val="0"/>
+                </a:spcBef>
+                <a:spcAft>
+                  <a:spcPts val="0"/>
+                </a:spcAft>
+                <a:buClrTx/>
+                <a:buSzTx/>
+                <a:buFontTx/>
+                <a:buNone/>
+                <a:tabLst/>
+                <a:defRPr/>
+              </a:pPr>
+              <a:r>
+                <a:rPr kumimoji="0" lang="en-US" sz="800" b="0" i="0" u="none" strike="noStrike" kern="0" cap="none" spc="0" normalizeH="0" baseline="0" noProof="0" dirty="0">
+                  <a:ln>
+                    <a:noFill/>
+                  </a:ln>
+                  <a:solidFill>
+                    <a:prstClr val="black"/>
+                  </a:solidFill>
+                  <a:effectLst/>
+                  <a:uLnTx/>
+                  <a:uFillTx/>
+                  <a:latin typeface="Verdana" panose="020B0604030504040204" pitchFamily="34" charset="0"/>
+                  <a:ea typeface="Verdana" panose="020B0604030504040204" pitchFamily="34" charset="0"/>
+                </a:rPr>
+                <a:t>Agent</a:t>
+              </a:r>
+              <a:endParaRPr kumimoji="0" lang="nl-NL" sz="800" b="0" i="0" u="none" strike="noStrike" kern="0" cap="none" spc="0" normalizeH="0" baseline="0" noProof="0" dirty="0" err="1">
+                <a:ln>
+                  <a:noFill/>
+                </a:ln>
+                <a:solidFill>
+                  <a:prstClr val="black"/>
+                </a:solidFill>
+                <a:effectLst/>
+                <a:uLnTx/>
+                <a:uFillTx/>
+                <a:latin typeface="Verdana" panose="020B0604030504040204" pitchFamily="34" charset="0"/>
+                <a:ea typeface="Verdana" panose="020B0604030504040204" pitchFamily="34" charset="0"/>
+              </a:endParaRPr>
+            </a:p>
+          </p:txBody>
+        </p:sp>
+        <p:sp>
+          <p:nvSpPr>
+            <p:cNvPr id="6" name="Rectangle 5">
+              <a:extLst>
+                <a:ext uri="{FF2B5EF4-FFF2-40B4-BE49-F238E27FC236}">
+                  <a16:creationId xmlns:a16="http://schemas.microsoft.com/office/drawing/2014/main" id="{4BBE2FF9-39BF-ED57-94E2-DC2E887B520E}"/>
+                </a:ext>
+              </a:extLst>
+            </p:cNvPr>
+            <p:cNvSpPr/>
+            <p:nvPr/>
+          </p:nvSpPr>
+          <p:spPr>
+            <a:xfrm>
+              <a:off x="878471" y="2794582"/>
+              <a:ext cx="662234" cy="869511"/>
+            </a:xfrm>
+            <a:prstGeom prst="rect">
+              <a:avLst/>
+            </a:prstGeom>
+            <a:noFill/>
+            <a:ln w="12700" cap="flat" cmpd="sng" algn="ctr">
+              <a:solidFill>
+                <a:srgbClr val="C4232A">
+                  <a:lumMod val="60000"/>
+                  <a:lumOff val="40000"/>
+                </a:srgbClr>
+              </a:solidFill>
+              <a:prstDash val="dash"/>
+              <a:miter lim="800000"/>
+            </a:ln>
+            <a:effectLst/>
+          </p:spPr>
+          <p:txBody>
+            <a:bodyPr rtlCol="0" anchor="ctr"/>
+            <a:lstStyle/>
+            <a:p>
+              <a:pPr marL="0" marR="0" lvl="0" indent="0" algn="ctr" defTabSz="914400" eaLnBrk="1" fontAlgn="auto" latinLnBrk="0" hangingPunct="1">
+                <a:lnSpc>
+                  <a:spcPct val="100000"/>
+                </a:lnSpc>
+                <a:spcBef>
+                  <a:spcPts val="0"/>
+                </a:spcBef>
+                <a:spcAft>
+                  <a:spcPts val="0"/>
+                </a:spcAft>
+                <a:buClrTx/>
+                <a:buSzTx/>
+                <a:buFontTx/>
+                <a:buNone/>
+                <a:tabLst/>
+                <a:defRPr/>
+              </a:pPr>
+              <a:endParaRPr kumimoji="0" lang="nl-NL" sz="1800" b="0" i="0" u="none" strike="noStrike" kern="0" cap="none" spc="0" normalizeH="0" baseline="0" noProof="0" dirty="0">
+                <a:ln>
+                  <a:noFill/>
+                </a:ln>
+                <a:solidFill>
+                  <a:prstClr val="white"/>
+                </a:solidFill>
+                <a:effectLst/>
+                <a:uLnTx/>
+                <a:uFillTx/>
+                <a:latin typeface="Segoe UI Light"/>
+                <a:ea typeface="+mn-ea"/>
+                <a:cs typeface="+mn-cs"/>
+              </a:endParaRPr>
+            </a:p>
+          </p:txBody>
+        </p:sp>
+      </p:grpSp>
+      <p:sp>
+        <p:nvSpPr>
+          <p:cNvPr id="7" name="Rectangle: Rounded Corners 6">
+            <a:extLst>
+              <a:ext uri="{FF2B5EF4-FFF2-40B4-BE49-F238E27FC236}">
+                <a16:creationId xmlns:a16="http://schemas.microsoft.com/office/drawing/2014/main" id="{CE1007F5-B8CF-EAD5-DF3A-8C1CD5EAE9C8}"/>
+              </a:ext>
+            </a:extLst>
+          </p:cNvPr>
+          <p:cNvSpPr/>
+          <p:nvPr/>
+        </p:nvSpPr>
+        <p:spPr>
+          <a:xfrm>
+            <a:off x="3003763" y="3695685"/>
+            <a:ext cx="1980416" cy="645070"/>
+          </a:xfrm>
+          <a:prstGeom prst="roundRect">
+            <a:avLst/>
+          </a:prstGeom>
+          <a:solidFill>
+            <a:srgbClr val="C4232A">
+              <a:lumMod val="20000"/>
+              <a:lumOff val="80000"/>
+              <a:alpha val="24000"/>
+            </a:srgbClr>
+          </a:solidFill>
+          <a:ln w="12700" cap="flat" cmpd="sng" algn="ctr">
+            <a:solidFill>
+              <a:srgbClr val="3C9BD5">
+                <a:shade val="15000"/>
+              </a:srgbClr>
+            </a:solidFill>
+            <a:prstDash val="solid"/>
+            <a:miter lim="800000"/>
+          </a:ln>
+          <a:effectLst/>
+        </p:spPr>
+        <p:txBody>
+          <a:bodyPr rtlCol="0" anchor="ctr"/>
+          <a:lstStyle/>
+          <a:p>
+            <a:pPr marL="0" marR="0" lvl="0" indent="0" algn="ctr" defTabSz="914400" eaLnBrk="1" fontAlgn="auto" latinLnBrk="0" hangingPunct="1">
+              <a:lnSpc>
+                <a:spcPct val="100000"/>
+              </a:lnSpc>
+              <a:spcBef>
+                <a:spcPts val="0"/>
+              </a:spcBef>
+              <a:spcAft>
+                <a:spcPts val="0"/>
+              </a:spcAft>
+              <a:buClrTx/>
+              <a:buSzTx/>
+              <a:buFontTx/>
+              <a:buNone/>
+              <a:tabLst/>
+              <a:defRPr/>
+            </a:pPr>
+            <a:endParaRPr kumimoji="0" lang="nl-NL" sz="1800" b="0" i="0" u="none" strike="noStrike" kern="0" cap="none" spc="0" normalizeH="0" baseline="0" noProof="0">
+              <a:ln>
+                <a:noFill/>
+              </a:ln>
+              <a:solidFill>
+                <a:prstClr val="white"/>
+              </a:solidFill>
+              <a:effectLst/>
+              <a:uLnTx/>
+              <a:uFillTx/>
+              <a:latin typeface="Segoe UI Light"/>
+              <a:ea typeface="+mn-ea"/>
+              <a:cs typeface="+mn-cs"/>
+            </a:endParaRPr>
+          </a:p>
+        </p:txBody>
+      </p:sp>
+      <p:sp>
+        <p:nvSpPr>
+          <p:cNvPr id="8" name="TextBox 7">
+            <a:extLst>
+              <a:ext uri="{FF2B5EF4-FFF2-40B4-BE49-F238E27FC236}">
+                <a16:creationId xmlns:a16="http://schemas.microsoft.com/office/drawing/2014/main" id="{1F3F3DA6-8D87-D672-8D44-02D502D3CDF6}"/>
+              </a:ext>
+            </a:extLst>
+          </p:cNvPr>
+          <p:cNvSpPr txBox="1"/>
+          <p:nvPr/>
+        </p:nvSpPr>
+        <p:spPr>
+          <a:xfrm>
+            <a:off x="2990234" y="3785929"/>
+            <a:ext cx="1579001" cy="461665"/>
+          </a:xfrm>
+          <a:prstGeom prst="rect">
+            <a:avLst/>
+          </a:prstGeom>
+          <a:noFill/>
+        </p:spPr>
+        <p:txBody>
+          <a:bodyPr wrap="square" rtlCol="0">
+            <a:spAutoFit/>
+          </a:bodyPr>
+          <a:lstStyle/>
+          <a:p>
+            <a:r>
+              <a:rPr lang="en-US" sz="800" dirty="0">
+                <a:solidFill>
+                  <a:prstClr val="black"/>
+                </a:solidFill>
+                <a:latin typeface="Verdana" panose="020B0604030504040204" pitchFamily="34" charset="0"/>
+                <a:ea typeface="Verdana" panose="020B0604030504040204" pitchFamily="34" charset="0"/>
+              </a:rPr>
+              <a:t>Analyze all points, then</a:t>
+            </a:r>
+          </a:p>
+          <a:p>
+            <a:r>
+              <a:rPr lang="en-US" sz="800" dirty="0">
+                <a:solidFill>
+                  <a:prstClr val="black"/>
+                </a:solidFill>
+                <a:latin typeface="Verdana" panose="020B0604030504040204" pitchFamily="34" charset="0"/>
+                <a:ea typeface="Verdana" panose="020B0604030504040204" pitchFamily="34" charset="0"/>
+              </a:rPr>
+              <a:t>Score whether there is agreement.</a:t>
+            </a:r>
+            <a:endParaRPr lang="nl-NL" sz="800" dirty="0">
+              <a:solidFill>
+                <a:prstClr val="black"/>
+              </a:solidFill>
+              <a:latin typeface="Verdana" panose="020B0604030504040204" pitchFamily="34" charset="0"/>
+              <a:ea typeface="Verdana" panose="020B0604030504040204" pitchFamily="34" charset="0"/>
+            </a:endParaRPr>
+          </a:p>
+        </p:txBody>
+      </p:sp>
+      <p:cxnSp>
+        <p:nvCxnSpPr>
+          <p:cNvPr id="9" name="Straight Arrow Connector 8">
+            <a:extLst>
+              <a:ext uri="{FF2B5EF4-FFF2-40B4-BE49-F238E27FC236}">
+                <a16:creationId xmlns:a16="http://schemas.microsoft.com/office/drawing/2014/main" id="{4C125386-B970-E4CE-B6B2-1332D4758913}"/>
+              </a:ext>
+            </a:extLst>
+          </p:cNvPr>
+          <p:cNvCxnSpPr>
+            <a:cxnSpLocks/>
+          </p:cNvCxnSpPr>
+          <p:nvPr/>
+        </p:nvCxnSpPr>
+        <p:spPr>
+          <a:xfrm flipV="1">
+            <a:off x="4112579" y="4401905"/>
+            <a:ext cx="0" cy="182880"/>
+          </a:xfrm>
+          <a:prstGeom prst="straightConnector1">
+            <a:avLst/>
+          </a:prstGeom>
+          <a:noFill/>
+          <a:ln w="9525" cap="flat" cmpd="sng" algn="ctr">
+            <a:solidFill>
+              <a:sysClr val="windowText" lastClr="000000"/>
+            </a:solidFill>
+            <a:prstDash val="solid"/>
+            <a:miter lim="800000"/>
+            <a:tailEnd type="triangle"/>
+          </a:ln>
+          <a:effectLst/>
+        </p:spPr>
+      </p:cxnSp>
+      <p:pic>
+        <p:nvPicPr>
+          <p:cNvPr id="10" name="Picture 9">
+            <a:extLst>
+              <a:ext uri="{FF2B5EF4-FFF2-40B4-BE49-F238E27FC236}">
+                <a16:creationId xmlns:a16="http://schemas.microsoft.com/office/drawing/2014/main" id="{81A5FB9E-C956-6CFB-311B-8F585F0CECAE}"/>
+              </a:ext>
+            </a:extLst>
+          </p:cNvPr>
+          <p:cNvPicPr>
+            <a:picLocks noChangeAspect="1"/>
+          </p:cNvPicPr>
+          <p:nvPr/>
+        </p:nvPicPr>
+        <p:blipFill>
+          <a:blip r:embed="rId7">
+            <a:clrChange>
+              <a:clrFrom>
+                <a:srgbClr val="F4F4F6"/>
+              </a:clrFrom>
+              <a:clrTo>
+                <a:srgbClr val="F4F4F6">
+                  <a:alpha val="0"/>
+                </a:srgbClr>
+              </a:clrTo>
+            </a:clrChange>
+          </a:blip>
+          <a:stretch>
+            <a:fillRect/>
+          </a:stretch>
+        </p:blipFill>
+        <p:spPr>
+          <a:xfrm>
+            <a:off x="4444004" y="3708849"/>
+            <a:ext cx="540174" cy="581994"/>
+          </a:xfrm>
+          <a:prstGeom prst="rect">
+            <a:avLst/>
+          </a:prstGeom>
+        </p:spPr>
+      </p:pic>
+      <p:cxnSp>
+        <p:nvCxnSpPr>
+          <p:cNvPr id="21" name="Straight Arrow Connector 20">
+            <a:extLst>
+              <a:ext uri="{FF2B5EF4-FFF2-40B4-BE49-F238E27FC236}">
+                <a16:creationId xmlns:a16="http://schemas.microsoft.com/office/drawing/2014/main" id="{4691223D-E282-ED3B-2772-24BA525BDB59}"/>
+              </a:ext>
+            </a:extLst>
+          </p:cNvPr>
+          <p:cNvCxnSpPr>
+            <a:cxnSpLocks/>
+          </p:cNvCxnSpPr>
+          <p:nvPr/>
+        </p:nvCxnSpPr>
+        <p:spPr>
+          <a:xfrm flipV="1">
+            <a:off x="4064954" y="3335788"/>
+            <a:ext cx="0" cy="274320"/>
+          </a:xfrm>
+          <a:prstGeom prst="straightConnector1">
+            <a:avLst/>
+          </a:prstGeom>
+          <a:noFill/>
+          <a:ln w="9525" cap="flat" cmpd="sng" algn="ctr">
+            <a:solidFill>
+              <a:sysClr val="windowText" lastClr="000000"/>
+            </a:solidFill>
+            <a:prstDash val="solid"/>
+            <a:miter lim="800000"/>
+            <a:tailEnd type="triangle"/>
+          </a:ln>
+          <a:effectLst/>
+        </p:spPr>
+      </p:cxnSp>
+      <p:sp>
+        <p:nvSpPr>
+          <p:cNvPr id="22" name="TextBox 21">
+            <a:extLst>
+              <a:ext uri="{FF2B5EF4-FFF2-40B4-BE49-F238E27FC236}">
+                <a16:creationId xmlns:a16="http://schemas.microsoft.com/office/drawing/2014/main" id="{EA164DC9-498A-FCB7-E87B-812DDAD3A0F0}"/>
+              </a:ext>
+            </a:extLst>
+          </p:cNvPr>
+          <p:cNvSpPr txBox="1"/>
+          <p:nvPr/>
+        </p:nvSpPr>
+        <p:spPr>
+          <a:xfrm>
+            <a:off x="3063774" y="5550520"/>
+            <a:ext cx="1505461" cy="215444"/>
+          </a:xfrm>
+          <a:prstGeom prst="rect">
+            <a:avLst/>
+          </a:prstGeom>
+          <a:noFill/>
+        </p:spPr>
+        <p:txBody>
+          <a:bodyPr wrap="square" rtlCol="0">
+            <a:spAutoFit/>
+          </a:bodyPr>
+          <a:lstStyle/>
+          <a:p>
+            <a:pPr algn="r"/>
+            <a:r>
+              <a:rPr lang="en-US" sz="800" b="1" dirty="0">
+                <a:solidFill>
+                  <a:prstClr val="black"/>
+                </a:solidFill>
+                <a:latin typeface="Verdana" panose="020B0604030504040204" pitchFamily="34" charset="0"/>
+                <a:ea typeface="Verdana" panose="020B0604030504040204" pitchFamily="34" charset="0"/>
+              </a:rPr>
+              <a:t>lfm2-24b-a2b</a:t>
+            </a:r>
+            <a:endParaRPr lang="nl-NL" sz="800" b="1" dirty="0" err="1">
+              <a:solidFill>
+                <a:prstClr val="black"/>
+              </a:solidFill>
+              <a:latin typeface="Verdana" panose="020B0604030504040204" pitchFamily="34" charset="0"/>
+              <a:ea typeface="Verdana" panose="020B0604030504040204" pitchFamily="34" charset="0"/>
+            </a:endParaRPr>
+          </a:p>
+        </p:txBody>
+      </p:sp>
+      <p:cxnSp>
+        <p:nvCxnSpPr>
+          <p:cNvPr id="23" name="Straight Arrow Connector 22">
+            <a:extLst>
+              <a:ext uri="{FF2B5EF4-FFF2-40B4-BE49-F238E27FC236}">
+                <a16:creationId xmlns:a16="http://schemas.microsoft.com/office/drawing/2014/main" id="{13CC1B76-48C9-5FE1-230D-B4EF3CCFFB56}"/>
+              </a:ext>
+            </a:extLst>
+          </p:cNvPr>
+          <p:cNvCxnSpPr>
+            <a:cxnSpLocks/>
+          </p:cNvCxnSpPr>
+          <p:nvPr/>
+        </p:nvCxnSpPr>
+        <p:spPr>
+          <a:xfrm flipH="1">
+            <a:off x="5239702" y="4013827"/>
+            <a:ext cx="648000" cy="0"/>
+          </a:xfrm>
+          <a:prstGeom prst="straightConnector1">
+            <a:avLst/>
+          </a:prstGeom>
+          <a:noFill/>
+          <a:ln w="9525" cap="flat" cmpd="sng" algn="ctr">
+            <a:solidFill>
+              <a:sysClr val="windowText" lastClr="000000"/>
+            </a:solidFill>
+            <a:prstDash val="solid"/>
+            <a:miter lim="800000"/>
+            <a:tailEnd type="triangle"/>
+          </a:ln>
+          <a:effectLst/>
+        </p:spPr>
+      </p:cxnSp>
+      <p:sp>
+        <p:nvSpPr>
+          <p:cNvPr id="26" name="TextBox 25">
+            <a:extLst>
+              <a:ext uri="{FF2B5EF4-FFF2-40B4-BE49-F238E27FC236}">
+                <a16:creationId xmlns:a16="http://schemas.microsoft.com/office/drawing/2014/main" id="{12789CCB-9560-B253-2F6D-2E9B746C72D6}"/>
+              </a:ext>
+            </a:extLst>
+          </p:cNvPr>
+          <p:cNvSpPr txBox="1"/>
+          <p:nvPr/>
+        </p:nvSpPr>
+        <p:spPr>
+          <a:xfrm>
+            <a:off x="5129929" y="4577949"/>
+            <a:ext cx="867545" cy="338554"/>
+          </a:xfrm>
+          <a:prstGeom prst="rect">
+            <a:avLst/>
+          </a:prstGeom>
+          <a:noFill/>
+        </p:spPr>
+        <p:txBody>
+          <a:bodyPr wrap="none" rtlCol="0">
+            <a:spAutoFit/>
+          </a:bodyPr>
+          <a:lstStyle/>
+          <a:p>
+            <a:pPr algn="ctr"/>
+            <a:r>
+              <a:rPr lang="en-US" sz="800" dirty="0">
+                <a:solidFill>
+                  <a:prstClr val="black"/>
+                </a:solidFill>
+                <a:latin typeface="Verdana" panose="020B0604030504040204" pitchFamily="34" charset="0"/>
+                <a:ea typeface="Verdana" panose="020B0604030504040204" pitchFamily="34" charset="0"/>
+              </a:rPr>
+              <a:t>Constructive </a:t>
+            </a:r>
+          </a:p>
+          <a:p>
+            <a:pPr algn="ctr"/>
+            <a:r>
+              <a:rPr lang="en-US" sz="800" dirty="0">
+                <a:solidFill>
+                  <a:prstClr val="black"/>
+                </a:solidFill>
+                <a:latin typeface="Verdana" panose="020B0604030504040204" pitchFamily="34" charset="0"/>
+                <a:ea typeface="Verdana" panose="020B0604030504040204" pitchFamily="34" charset="0"/>
+              </a:rPr>
+              <a:t>Feedback</a:t>
+            </a:r>
+          </a:p>
+        </p:txBody>
+      </p:sp>
+      <p:cxnSp>
+        <p:nvCxnSpPr>
+          <p:cNvPr id="27" name="Straight Arrow Connector 26">
+            <a:extLst>
+              <a:ext uri="{FF2B5EF4-FFF2-40B4-BE49-F238E27FC236}">
+                <a16:creationId xmlns:a16="http://schemas.microsoft.com/office/drawing/2014/main" id="{303E2D0F-AFF8-D43E-6647-29B26644FC67}"/>
+              </a:ext>
+            </a:extLst>
+          </p:cNvPr>
+          <p:cNvCxnSpPr>
+            <a:cxnSpLocks/>
+          </p:cNvCxnSpPr>
+          <p:nvPr/>
+        </p:nvCxnSpPr>
+        <p:spPr>
+          <a:xfrm flipH="1">
+            <a:off x="2151146" y="3994777"/>
+            <a:ext cx="731520" cy="0"/>
+          </a:xfrm>
+          <a:prstGeom prst="straightConnector1">
+            <a:avLst/>
+          </a:prstGeom>
+          <a:noFill/>
+          <a:ln w="9525" cap="flat" cmpd="sng" algn="ctr">
+            <a:solidFill>
+              <a:sysClr val="windowText" lastClr="000000"/>
+            </a:solidFill>
+            <a:prstDash val="solid"/>
+            <a:miter lim="800000"/>
+            <a:tailEnd type="triangle"/>
+          </a:ln>
+          <a:effectLst/>
+        </p:spPr>
+      </p:cxnSp>
+      <p:sp>
+        <p:nvSpPr>
+          <p:cNvPr id="30" name="TextBox 29">
+            <a:extLst>
+              <a:ext uri="{FF2B5EF4-FFF2-40B4-BE49-F238E27FC236}">
+                <a16:creationId xmlns:a16="http://schemas.microsoft.com/office/drawing/2014/main" id="{31E69B2B-9577-EAF0-4EF7-7EB60D592603}"/>
+              </a:ext>
+            </a:extLst>
+          </p:cNvPr>
+          <p:cNvSpPr txBox="1"/>
+          <p:nvPr/>
+        </p:nvSpPr>
+        <p:spPr>
+          <a:xfrm>
+            <a:off x="4096535" y="3396582"/>
+            <a:ext cx="1277372" cy="215444"/>
+          </a:xfrm>
+          <a:prstGeom prst="rect">
+            <a:avLst/>
+          </a:prstGeom>
+          <a:noFill/>
+        </p:spPr>
+        <p:txBody>
+          <a:bodyPr wrap="square" rtlCol="0">
+            <a:spAutoFit/>
+          </a:bodyPr>
+          <a:lstStyle/>
+          <a:p>
+            <a:r>
+              <a:rPr lang="en-US" sz="800" i="1" dirty="0">
+                <a:solidFill>
+                  <a:prstClr val="black"/>
+                </a:solidFill>
+                <a:latin typeface="Verdana" panose="020B0604030504040204" pitchFamily="34" charset="0"/>
+                <a:ea typeface="Verdana" panose="020B0604030504040204" pitchFamily="34" charset="0"/>
+              </a:rPr>
+              <a:t>Is there agreement?</a:t>
+            </a:r>
+          </a:p>
+        </p:txBody>
+      </p:sp>
+      <p:sp>
+        <p:nvSpPr>
+          <p:cNvPr id="31" name="TextBox 30">
+            <a:extLst>
+              <a:ext uri="{FF2B5EF4-FFF2-40B4-BE49-F238E27FC236}">
+                <a16:creationId xmlns:a16="http://schemas.microsoft.com/office/drawing/2014/main" id="{C8254A2F-8480-0E26-4850-19426A977FD1}"/>
+              </a:ext>
+            </a:extLst>
+          </p:cNvPr>
+          <p:cNvSpPr txBox="1"/>
+          <p:nvPr/>
+        </p:nvSpPr>
+        <p:spPr>
+          <a:xfrm>
+            <a:off x="2642983" y="3748846"/>
+            <a:ext cx="453712" cy="215444"/>
+          </a:xfrm>
+          <a:prstGeom prst="rect">
+            <a:avLst/>
+          </a:prstGeom>
+          <a:noFill/>
+        </p:spPr>
+        <p:txBody>
+          <a:bodyPr wrap="square" rtlCol="0">
+            <a:spAutoFit/>
+          </a:bodyPr>
+          <a:lstStyle/>
+          <a:p>
+            <a:r>
+              <a:rPr lang="en-US" sz="800" i="1" dirty="0">
+                <a:solidFill>
+                  <a:prstClr val="black"/>
+                </a:solidFill>
+                <a:latin typeface="Verdana" panose="020B0604030504040204" pitchFamily="34" charset="0"/>
+                <a:ea typeface="Verdana" panose="020B0604030504040204" pitchFamily="34" charset="0"/>
+              </a:rPr>
+              <a:t>Yes</a:t>
+            </a:r>
+          </a:p>
+        </p:txBody>
+      </p:sp>
+      <p:sp>
+        <p:nvSpPr>
+          <p:cNvPr id="32" name="TextBox 31">
+            <a:extLst>
+              <a:ext uri="{FF2B5EF4-FFF2-40B4-BE49-F238E27FC236}">
+                <a16:creationId xmlns:a16="http://schemas.microsoft.com/office/drawing/2014/main" id="{A0CADC5F-B3F0-911B-7CA1-56A57E808FBC}"/>
+              </a:ext>
+            </a:extLst>
+          </p:cNvPr>
+          <p:cNvSpPr txBox="1"/>
+          <p:nvPr/>
+        </p:nvSpPr>
+        <p:spPr>
+          <a:xfrm>
+            <a:off x="3613966" y="3400792"/>
+            <a:ext cx="453712" cy="215444"/>
+          </a:xfrm>
+          <a:prstGeom prst="rect">
+            <a:avLst/>
+          </a:prstGeom>
+          <a:noFill/>
+        </p:spPr>
+        <p:txBody>
+          <a:bodyPr wrap="square" rtlCol="0">
+            <a:spAutoFit/>
+          </a:bodyPr>
+          <a:lstStyle/>
+          <a:p>
+            <a:pPr algn="r"/>
+            <a:r>
+              <a:rPr lang="en-US" sz="800" i="1" dirty="0">
+                <a:solidFill>
+                  <a:prstClr val="black"/>
+                </a:solidFill>
+                <a:latin typeface="Verdana" panose="020B0604030504040204" pitchFamily="34" charset="0"/>
+                <a:ea typeface="Verdana" panose="020B0604030504040204" pitchFamily="34" charset="0"/>
+              </a:rPr>
+              <a:t>No</a:t>
+            </a:r>
+          </a:p>
+        </p:txBody>
+      </p:sp>
+      <p:pic>
+        <p:nvPicPr>
+          <p:cNvPr id="33" name="Picture 32">
+            <a:extLst>
+              <a:ext uri="{FF2B5EF4-FFF2-40B4-BE49-F238E27FC236}">
+                <a16:creationId xmlns:a16="http://schemas.microsoft.com/office/drawing/2014/main" id="{FF716A48-2E9A-64B5-2797-AAD2CC6E5DF8}"/>
+              </a:ext>
+            </a:extLst>
+          </p:cNvPr>
+          <p:cNvPicPr>
+            <a:picLocks noChangeAspect="1"/>
+          </p:cNvPicPr>
+          <p:nvPr/>
+        </p:nvPicPr>
+        <p:blipFill>
+          <a:blip r:embed="rId8">
+            <a:clrChange>
+              <a:clrFrom>
+                <a:srgbClr val="F4F4F6"/>
+              </a:clrFrom>
+              <a:clrTo>
+                <a:srgbClr val="F4F4F6">
+                  <a:alpha val="0"/>
+                </a:srgbClr>
+              </a:clrTo>
+            </a:clrChange>
+          </a:blip>
+          <a:stretch>
+            <a:fillRect/>
+          </a:stretch>
+        </p:blipFill>
+        <p:spPr>
+          <a:xfrm>
+            <a:off x="1611630" y="3748846"/>
+            <a:ext cx="453712" cy="467566"/>
+          </a:xfrm>
+          <a:prstGeom prst="rect">
+            <a:avLst/>
+          </a:prstGeom>
+        </p:spPr>
+      </p:pic>
+      <p:sp>
+        <p:nvSpPr>
+          <p:cNvPr id="34" name="TextBox 33">
+            <a:extLst>
+              <a:ext uri="{FF2B5EF4-FFF2-40B4-BE49-F238E27FC236}">
+                <a16:creationId xmlns:a16="http://schemas.microsoft.com/office/drawing/2014/main" id="{FC6CE284-F5E8-A70B-8DC1-33375B57BD63}"/>
+              </a:ext>
+            </a:extLst>
+          </p:cNvPr>
+          <p:cNvSpPr txBox="1"/>
+          <p:nvPr/>
+        </p:nvSpPr>
+        <p:spPr>
+          <a:xfrm>
+            <a:off x="1278245" y="4216412"/>
+            <a:ext cx="1143262" cy="338554"/>
+          </a:xfrm>
+          <a:prstGeom prst="rect">
+            <a:avLst/>
+          </a:prstGeom>
+          <a:noFill/>
+        </p:spPr>
+        <p:txBody>
+          <a:bodyPr wrap="none" rtlCol="0">
+            <a:spAutoFit/>
+          </a:bodyPr>
+          <a:lstStyle/>
+          <a:p>
+            <a:pPr algn="ctr"/>
+            <a:r>
+              <a:rPr lang="en-US" sz="800" dirty="0">
+                <a:solidFill>
+                  <a:prstClr val="black"/>
+                </a:solidFill>
+                <a:latin typeface="Verdana" panose="020B0604030504040204" pitchFamily="34" charset="0"/>
+                <a:ea typeface="Verdana" panose="020B0604030504040204" pitchFamily="34" charset="0"/>
+              </a:rPr>
+              <a:t>Summary with the</a:t>
+            </a:r>
+          </a:p>
+          <a:p>
+            <a:pPr algn="ctr"/>
+            <a:r>
+              <a:rPr lang="en-US" sz="800" dirty="0">
+                <a:solidFill>
+                  <a:prstClr val="black"/>
+                </a:solidFill>
+                <a:latin typeface="Verdana" panose="020B0604030504040204" pitchFamily="34" charset="0"/>
+                <a:ea typeface="Verdana" panose="020B0604030504040204" pitchFamily="34" charset="0"/>
+              </a:rPr>
+              <a:t>output results</a:t>
+            </a:r>
+          </a:p>
+        </p:txBody>
+      </p:sp>
+      <p:pic>
+        <p:nvPicPr>
+          <p:cNvPr id="35" name="Picture 34">
+            <a:extLst>
+              <a:ext uri="{FF2B5EF4-FFF2-40B4-BE49-F238E27FC236}">
+                <a16:creationId xmlns:a16="http://schemas.microsoft.com/office/drawing/2014/main" id="{A87713A2-B0BA-6938-BB06-CF0D163202BF}"/>
+              </a:ext>
+            </a:extLst>
+          </p:cNvPr>
+          <p:cNvPicPr>
+            <a:picLocks noChangeAspect="1"/>
+          </p:cNvPicPr>
+          <p:nvPr/>
+        </p:nvPicPr>
+        <p:blipFill>
+          <a:blip r:embed="rId9">
+            <a:clrChange>
+              <a:clrFrom>
+                <a:srgbClr val="F4F4F6"/>
+              </a:clrFrom>
+              <a:clrTo>
+                <a:srgbClr val="F4F4F6">
+                  <a:alpha val="0"/>
+                </a:srgbClr>
+              </a:clrTo>
+            </a:clrChange>
+          </a:blip>
+          <a:stretch>
+            <a:fillRect/>
+          </a:stretch>
+        </p:blipFill>
+        <p:spPr>
+          <a:xfrm>
+            <a:off x="5395305" y="4182211"/>
+            <a:ext cx="336791" cy="406956"/>
+          </a:xfrm>
+          <a:prstGeom prst="rect">
+            <a:avLst/>
+          </a:prstGeom>
+        </p:spPr>
+      </p:pic>
+    </p:spTree>
+    <p:extLst>
+      <p:ext uri="{BB962C8B-B14F-4D97-AF65-F5344CB8AC3E}">
+        <p14:creationId xmlns:p14="http://schemas.microsoft.com/office/powerpoint/2010/main" val="4138819497"/>
+      </p:ext>
+    </p:extLst>
+  </p:cSld>
+  <p:clrMapOvr>
+    <a:masterClrMapping/>
+  </p:clrMapOvr>
+  <p:timing>
+    <p:tnLst>
+      <p:par>
+        <p:cTn id="1" dur="indefinite" restart="never" nodeType="tmRoot">
+          <p:childTnLst>
+            <p:seq concurrent="1" nextAc="seek">
+              <p:cTn id="2" dur="indefinite" nodeType="mainSeq">
+                <p:childTnLst>
+                  <p:par>
+                    <p:cTn id="3" fill="hold">
+                      <p:stCondLst>
+                        <p:cond delay="indefinite"/>
+                        <p:cond evt="onBegin" delay="0">
+                          <p:tn val="2"/>
+                        </p:cond>
+                      </p:stCondLst>
+                      <p:childTnLst>
+                        <p:par>
+                          <p:cTn id="4" fill="hold">
+                            <p:stCondLst>
+                              <p:cond delay="0"/>
+                            </p:stCondLst>
+                            <p:childTnLst>
+                              <p:par>
+                                <p:cTn id="5" presetID="10" presetClass="entr" presetSubtype="0" fill="hold" grpId="0" nodeType="withEffect">
+                                  <p:stCondLst>
+                                    <p:cond delay="0"/>
+                                  </p:stCondLst>
+                                  <p:childTnLst>
+                                    <p:set>
+                                      <p:cBhvr>
+                                        <p:cTn id="6" dur="1" fill="hold">
+                                          <p:stCondLst>
+                                            <p:cond delay="0"/>
+                                          </p:stCondLst>
+                                        </p:cTn>
+                                        <p:tgtEl>
+                                          <p:spTgt spid="100"/>
+                                        </p:tgtEl>
+                                        <p:attrNameLst>
+                                          <p:attrName>style.visibility</p:attrName>
+                                        </p:attrNameLst>
+                                      </p:cBhvr>
+                                      <p:to>
+                                        <p:strVal val="visible"/>
+                                      </p:to>
+                                    </p:set>
+                                    <p:animEffect transition="in" filter="fade">
+                                      <p:cBhvr>
+                                        <p:cTn id="7" dur="500"/>
+                                        <p:tgtEl>
+                                          <p:spTgt spid="100"/>
+                                        </p:tgtEl>
+                                      </p:cBhvr>
+                                    </p:animEffect>
+                                  </p:childTnLst>
+                                </p:cTn>
+                              </p:par>
+                              <p:par>
+                                <p:cTn id="8" presetID="10" presetClass="entr" presetSubtype="0" fill="hold" grpId="0" nodeType="withEffect">
+                                  <p:stCondLst>
+                                    <p:cond delay="0"/>
+                                  </p:stCondLst>
+                                  <p:childTnLst>
+                                    <p:set>
+                                      <p:cBhvr>
+                                        <p:cTn id="9" dur="1" fill="hold">
+                                          <p:stCondLst>
+                                            <p:cond delay="0"/>
+                                          </p:stCondLst>
+                                        </p:cTn>
+                                        <p:tgtEl>
+                                          <p:spTgt spid="101"/>
+                                        </p:tgtEl>
+                                        <p:attrNameLst>
+                                          <p:attrName>style.visibility</p:attrName>
+                                        </p:attrNameLst>
+                                      </p:cBhvr>
+                                      <p:to>
+                                        <p:strVal val="visible"/>
+                                      </p:to>
+                                    </p:set>
+                                    <p:animEffect transition="in" filter="fade">
+                                      <p:cBhvr>
+                                        <p:cTn id="10" dur="500"/>
+                                        <p:tgtEl>
+                                          <p:spTgt spid="101"/>
+                                        </p:tgtEl>
+                                      </p:cBhvr>
+                                    </p:animEffect>
+                                  </p:childTnLst>
+                                </p:cTn>
+                              </p:par>
+                            </p:childTnLst>
+                          </p:cTn>
+                        </p:par>
+                      </p:childTnLst>
+                    </p:cTn>
+                  </p:par>
+                  <p:par>
+                    <p:cTn id="11" fill="hold">
+                      <p:stCondLst>
+                        <p:cond delay="indefinite"/>
+                      </p:stCondLst>
+                      <p:childTnLst>
+                        <p:par>
+                          <p:cTn id="12" fill="hold">
+                            <p:stCondLst>
+                              <p:cond delay="0"/>
+                            </p:stCondLst>
+                            <p:childTnLst>
+                              <p:par>
+                                <p:cTn id="13" presetID="10" presetClass="entr" presetSubtype="0" fill="hold" grpId="0" nodeType="clickEffect">
+                                  <p:stCondLst>
+                                    <p:cond delay="0"/>
+                                  </p:stCondLst>
+                                  <p:childTnLst>
+                                    <p:set>
+                                      <p:cBhvr>
+                                        <p:cTn id="14" dur="1" fill="hold">
+                                          <p:stCondLst>
+                                            <p:cond delay="0"/>
+                                          </p:stCondLst>
+                                        </p:cTn>
+                                        <p:tgtEl>
+                                          <p:spTgt spid="20"/>
+                                        </p:tgtEl>
+                                        <p:attrNameLst>
+                                          <p:attrName>style.visibility</p:attrName>
+                                        </p:attrNameLst>
+                                      </p:cBhvr>
+                                      <p:to>
+                                        <p:strVal val="visible"/>
+                                      </p:to>
+                                    </p:set>
+                                    <p:animEffect transition="in" filter="fade">
+                                      <p:cBhvr>
+                                        <p:cTn id="15" dur="500"/>
+                                        <p:tgtEl>
+                                          <p:spTgt spid="20"/>
+                                        </p:tgtEl>
+                                      </p:cBhvr>
+                                    </p:animEffect>
+                                  </p:childTnLst>
+                                </p:cTn>
+                              </p:par>
+                              <p:par>
+                                <p:cTn id="16" presetID="10" presetClass="entr" presetSubtype="0" fill="hold" grpId="0" nodeType="withEffect">
+                                  <p:stCondLst>
+                                    <p:cond delay="0"/>
+                                  </p:stCondLst>
+                                  <p:childTnLst>
+                                    <p:set>
+                                      <p:cBhvr>
+                                        <p:cTn id="17" dur="1" fill="hold">
+                                          <p:stCondLst>
+                                            <p:cond delay="0"/>
+                                          </p:stCondLst>
+                                        </p:cTn>
+                                        <p:tgtEl>
+                                          <p:spTgt spid="22"/>
+                                        </p:tgtEl>
+                                        <p:attrNameLst>
+                                          <p:attrName>style.visibility</p:attrName>
+                                        </p:attrNameLst>
+                                      </p:cBhvr>
+                                      <p:to>
+                                        <p:strVal val="visible"/>
+                                      </p:to>
+                                    </p:set>
+                                    <p:animEffect transition="in" filter="fade">
+                                      <p:cBhvr>
+                                        <p:cTn id="18" dur="500"/>
+                                        <p:tgtEl>
+                                          <p:spTgt spid="22"/>
+                                        </p:tgtEl>
+                                      </p:cBhvr>
+                                    </p:animEffect>
+                                  </p:childTnLst>
+                                </p:cTn>
+                              </p:par>
+                            </p:childTnLst>
+                          </p:cTn>
+                        </p:par>
+                      </p:childTnLst>
+                    </p:cTn>
+                  </p:par>
+                </p:childTnLst>
+              </p:cTn>
+              <p:prevCondLst>
+                <p:cond evt="onPrev" delay="0">
+                  <p:tgtEl>
+                    <p:sldTgt/>
+                  </p:tgtEl>
+                </p:cond>
+              </p:prevCondLst>
+              <p:nextCondLst>
+                <p:cond evt="onNext" delay="0">
+                  <p:tgtEl>
+                    <p:sldTgt/>
+                  </p:tgtEl>
+                </p:cond>
+              </p:nextCondLst>
+            </p:seq>
+          </p:childTnLst>
+        </p:cTn>
+      </p:par>
+    </p:tnLst>
+    <p:bldLst>
+      <p:bldP spid="100" grpId="0"/>
+      <p:bldP spid="101" grpId="0"/>
+      <p:bldP spid="20" grpId="0"/>
+      <p:bldP spid="22" grpId="0"/>
+    </p:bldLst>
+  </p:timing>
+</p:sld>
+</file>
+
 <file path=ppt/theme/theme1.xml><?xml version="1.0" encoding="utf-8"?>
 <a:theme xmlns:a="http://schemas.openxmlformats.org/drawingml/2006/main" name="Office Theme">
   <a:themeElements>

--- a/docs/figs/blog_figures.pptx
+++ b/docs/figs/blog_figures.pptx
@@ -6,12 +6,14 @@
   </p:sldMasterIdLst>
   <p:sldIdLst>
     <p:sldId id="258" r:id="rId2"/>
-    <p:sldId id="257" r:id="rId3"/>
-    <p:sldId id="259" r:id="rId4"/>
-    <p:sldId id="260" r:id="rId5"/>
-    <p:sldId id="261" r:id="rId6"/>
-    <p:sldId id="264" r:id="rId7"/>
-    <p:sldId id="265" r:id="rId8"/>
+    <p:sldId id="266" r:id="rId3"/>
+    <p:sldId id="269" r:id="rId4"/>
+    <p:sldId id="257" r:id="rId5"/>
+    <p:sldId id="259" r:id="rId6"/>
+    <p:sldId id="260" r:id="rId7"/>
+    <p:sldId id="261" r:id="rId8"/>
+    <p:sldId id="264" r:id="rId9"/>
+    <p:sldId id="265" r:id="rId10"/>
   </p:sldIdLst>
   <p:sldSz cx="12192000" cy="6858000"/>
   <p:notesSz cx="6858000" cy="9144000"/>
@@ -267,7 +269,7 @@
           <a:p>
             <a:fld id="{922860D0-EBC9-4CCD-82FB-90EB89E22FA7}" type="datetimeFigureOut">
               <a:rPr lang="en-NL" smtClean="0"/>
-              <a:t>11/06/2026</a:t>
+              <a:t>28/06/2026</a:t>
             </a:fld>
             <a:endParaRPr lang="en-NL"/>
           </a:p>
@@ -467,7 +469,7 @@
           <a:p>
             <a:fld id="{922860D0-EBC9-4CCD-82FB-90EB89E22FA7}" type="datetimeFigureOut">
               <a:rPr lang="en-NL" smtClean="0"/>
-              <a:t>11/06/2026</a:t>
+              <a:t>28/06/2026</a:t>
             </a:fld>
             <a:endParaRPr lang="en-NL"/>
           </a:p>
@@ -677,7 +679,7 @@
           <a:p>
             <a:fld id="{922860D0-EBC9-4CCD-82FB-90EB89E22FA7}" type="datetimeFigureOut">
               <a:rPr lang="en-NL" smtClean="0"/>
-              <a:t>11/06/2026</a:t>
+              <a:t>28/06/2026</a:t>
             </a:fld>
             <a:endParaRPr lang="en-NL"/>
           </a:p>
@@ -877,7 +879,7 @@
           <a:p>
             <a:fld id="{922860D0-EBC9-4CCD-82FB-90EB89E22FA7}" type="datetimeFigureOut">
               <a:rPr lang="en-NL" smtClean="0"/>
-              <a:t>11/06/2026</a:t>
+              <a:t>28/06/2026</a:t>
             </a:fld>
             <a:endParaRPr lang="en-NL"/>
           </a:p>
@@ -1153,7 +1155,7 @@
           <a:p>
             <a:fld id="{922860D0-EBC9-4CCD-82FB-90EB89E22FA7}" type="datetimeFigureOut">
               <a:rPr lang="en-NL" smtClean="0"/>
-              <a:t>11/06/2026</a:t>
+              <a:t>28/06/2026</a:t>
             </a:fld>
             <a:endParaRPr lang="en-NL"/>
           </a:p>
@@ -1421,7 +1423,7 @@
           <a:p>
             <a:fld id="{922860D0-EBC9-4CCD-82FB-90EB89E22FA7}" type="datetimeFigureOut">
               <a:rPr lang="en-NL" smtClean="0"/>
-              <a:t>11/06/2026</a:t>
+              <a:t>28/06/2026</a:t>
             </a:fld>
             <a:endParaRPr lang="en-NL"/>
           </a:p>
@@ -1836,7 +1838,7 @@
           <a:p>
             <a:fld id="{922860D0-EBC9-4CCD-82FB-90EB89E22FA7}" type="datetimeFigureOut">
               <a:rPr lang="en-NL" smtClean="0"/>
-              <a:t>11/06/2026</a:t>
+              <a:t>28/06/2026</a:t>
             </a:fld>
             <a:endParaRPr lang="en-NL"/>
           </a:p>
@@ -1978,7 +1980,7 @@
           <a:p>
             <a:fld id="{922860D0-EBC9-4CCD-82FB-90EB89E22FA7}" type="datetimeFigureOut">
               <a:rPr lang="en-NL" smtClean="0"/>
-              <a:t>11/06/2026</a:t>
+              <a:t>28/06/2026</a:t>
             </a:fld>
             <a:endParaRPr lang="en-NL"/>
           </a:p>
@@ -2091,7 +2093,7 @@
           <a:p>
             <a:fld id="{922860D0-EBC9-4CCD-82FB-90EB89E22FA7}" type="datetimeFigureOut">
               <a:rPr lang="en-NL" smtClean="0"/>
-              <a:t>11/06/2026</a:t>
+              <a:t>28/06/2026</a:t>
             </a:fld>
             <a:endParaRPr lang="en-NL"/>
           </a:p>
@@ -2404,7 +2406,7 @@
           <a:p>
             <a:fld id="{922860D0-EBC9-4CCD-82FB-90EB89E22FA7}" type="datetimeFigureOut">
               <a:rPr lang="en-NL" smtClean="0"/>
-              <a:t>11/06/2026</a:t>
+              <a:t>28/06/2026</a:t>
             </a:fld>
             <a:endParaRPr lang="en-NL"/>
           </a:p>
@@ -2693,7 +2695,7 @@
           <a:p>
             <a:fld id="{922860D0-EBC9-4CCD-82FB-90EB89E22FA7}" type="datetimeFigureOut">
               <a:rPr lang="en-NL" smtClean="0"/>
-              <a:t>11/06/2026</a:t>
+              <a:t>28/06/2026</a:t>
             </a:fld>
             <a:endParaRPr lang="en-NL"/>
           </a:p>
@@ -2936,7 +2938,7 @@
           <a:p>
             <a:fld id="{922860D0-EBC9-4CCD-82FB-90EB89E22FA7}" type="datetimeFigureOut">
               <a:rPr lang="en-NL" smtClean="0"/>
-              <a:t>11/06/2026</a:t>
+              <a:t>28/06/2026</a:t>
             </a:fld>
             <a:endParaRPr lang="en-NL"/>
           </a:p>
@@ -3984,6 +3986,1307 @@
 </file>
 
 <file path=ppt/slides/slide2.xml><?xml version="1.0" encoding="utf-8"?>
+<p:sld xmlns:a="http://schemas.openxmlformats.org/drawingml/2006/main" xmlns:r="http://schemas.openxmlformats.org/officeDocument/2006/relationships" xmlns:p="http://schemas.openxmlformats.org/presentationml/2006/main">
+  <p:cSld>
+    <p:spTree>
+      <p:nvGrpSpPr>
+        <p:cNvPr id="1" name="">
+          <a:extLst>
+            <a:ext uri="{FF2B5EF4-FFF2-40B4-BE49-F238E27FC236}">
+              <a16:creationId xmlns:a16="http://schemas.microsoft.com/office/drawing/2014/main" id="{ECEC3E8F-4735-3D37-A7A0-F8C23C3BF746}"/>
+            </a:ext>
+          </a:extLst>
+        </p:cNvPr>
+        <p:cNvGrpSpPr/>
+        <p:nvPr/>
+      </p:nvGrpSpPr>
+      <p:grpSpPr>
+        <a:xfrm>
+          <a:off x="0" y="0"/>
+          <a:ext cx="0" cy="0"/>
+          <a:chOff x="0" y="0"/>
+          <a:chExt cx="0" cy="0"/>
+        </a:xfrm>
+      </p:grpSpPr>
+      <p:sp>
+        <p:nvSpPr>
+          <p:cNvPr id="167" name="Rectangle: Rounded Corners 166">
+            <a:extLst>
+              <a:ext uri="{FF2B5EF4-FFF2-40B4-BE49-F238E27FC236}">
+                <a16:creationId xmlns:a16="http://schemas.microsoft.com/office/drawing/2014/main" id="{6AD4C536-91FF-BC42-83A1-E4CBD27FB52B}"/>
+              </a:ext>
+            </a:extLst>
+          </p:cNvPr>
+          <p:cNvSpPr/>
+          <p:nvPr/>
+        </p:nvSpPr>
+        <p:spPr>
+          <a:xfrm>
+            <a:off x="1499452" y="2209289"/>
+            <a:ext cx="7638410" cy="2111098"/>
+          </a:xfrm>
+          <a:prstGeom prst="roundRect">
+            <a:avLst>
+              <a:gd name="adj" fmla="val 4602"/>
+            </a:avLst>
+          </a:prstGeom>
+          <a:solidFill>
+            <a:schemeClr val="bg1">
+              <a:lumMod val="95000"/>
+            </a:schemeClr>
+          </a:solidFill>
+        </p:spPr>
+        <p:style>
+          <a:lnRef idx="2">
+            <a:schemeClr val="accent1">
+              <a:shade val="15000"/>
+            </a:schemeClr>
+          </a:lnRef>
+          <a:fillRef idx="1">
+            <a:schemeClr val="accent1"/>
+          </a:fillRef>
+          <a:effectRef idx="0">
+            <a:schemeClr val="accent1"/>
+          </a:effectRef>
+          <a:fontRef idx="minor">
+            <a:schemeClr val="lt1"/>
+          </a:fontRef>
+        </p:style>
+        <p:txBody>
+          <a:bodyPr rtlCol="0" anchor="ctr"/>
+          <a:lstStyle/>
+          <a:p>
+            <a:pPr algn="ctr"/>
+            <a:endParaRPr lang="en-NL" dirty="0"/>
+          </a:p>
+        </p:txBody>
+      </p:sp>
+      <p:sp>
+        <p:nvSpPr>
+          <p:cNvPr id="168" name="TextBox 167">
+            <a:extLst>
+              <a:ext uri="{FF2B5EF4-FFF2-40B4-BE49-F238E27FC236}">
+                <a16:creationId xmlns:a16="http://schemas.microsoft.com/office/drawing/2014/main" id="{5728632A-14E3-FD80-B319-ADE5D21D48C4}"/>
+              </a:ext>
+            </a:extLst>
+          </p:cNvPr>
+          <p:cNvSpPr txBox="1"/>
+          <p:nvPr/>
+        </p:nvSpPr>
+        <p:spPr>
+          <a:xfrm rot="16200000">
+            <a:off x="1763044" y="3040801"/>
+            <a:ext cx="1379160" cy="369332"/>
+          </a:xfrm>
+          <a:prstGeom prst="rect">
+            <a:avLst/>
+          </a:prstGeom>
+          <a:noFill/>
+        </p:spPr>
+        <p:txBody>
+          <a:bodyPr wrap="none" rtlCol="0">
+            <a:spAutoFit/>
+          </a:bodyPr>
+          <a:lstStyle/>
+          <a:p>
+            <a:r>
+              <a:rPr lang="en-US" dirty="0"/>
+              <a:t>Instructions</a:t>
+            </a:r>
+            <a:endParaRPr lang="en-NL" dirty="0"/>
+          </a:p>
+        </p:txBody>
+      </p:sp>
+      <p:sp>
+        <p:nvSpPr>
+          <p:cNvPr id="169" name="TextBox 168">
+            <a:extLst>
+              <a:ext uri="{FF2B5EF4-FFF2-40B4-BE49-F238E27FC236}">
+                <a16:creationId xmlns:a16="http://schemas.microsoft.com/office/drawing/2014/main" id="{3E14F842-8810-E8B1-5CBE-2C2CF392EDD1}"/>
+              </a:ext>
+            </a:extLst>
+          </p:cNvPr>
+          <p:cNvSpPr txBox="1"/>
+          <p:nvPr/>
+        </p:nvSpPr>
+        <p:spPr>
+          <a:xfrm>
+            <a:off x="4852503" y="2941663"/>
+            <a:ext cx="1018227" cy="646331"/>
+          </a:xfrm>
+          <a:prstGeom prst="rect">
+            <a:avLst/>
+          </a:prstGeom>
+          <a:noFill/>
+        </p:spPr>
+        <p:txBody>
+          <a:bodyPr wrap="none" rtlCol="0">
+            <a:spAutoFit/>
+          </a:bodyPr>
+          <a:lstStyle/>
+          <a:p>
+            <a:r>
+              <a:rPr lang="en-US" dirty="0"/>
+              <a:t>Context</a:t>
+            </a:r>
+          </a:p>
+          <a:p>
+            <a:r>
+              <a:rPr lang="en-US" dirty="0"/>
+              <a:t>Dataset </a:t>
+            </a:r>
+          </a:p>
+        </p:txBody>
+      </p:sp>
+      <p:sp>
+        <p:nvSpPr>
+          <p:cNvPr id="170" name="TextBox 169">
+            <a:extLst>
+              <a:ext uri="{FF2B5EF4-FFF2-40B4-BE49-F238E27FC236}">
+                <a16:creationId xmlns:a16="http://schemas.microsoft.com/office/drawing/2014/main" id="{FA77AC21-06AB-B57D-0FB2-01643E3B7844}"/>
+              </a:ext>
+            </a:extLst>
+          </p:cNvPr>
+          <p:cNvSpPr txBox="1"/>
+          <p:nvPr/>
+        </p:nvSpPr>
+        <p:spPr>
+          <a:xfrm>
+            <a:off x="7818427" y="3059668"/>
+            <a:ext cx="889987" cy="369332"/>
+          </a:xfrm>
+          <a:prstGeom prst="rect">
+            <a:avLst/>
+          </a:prstGeom>
+          <a:noFill/>
+        </p:spPr>
+        <p:txBody>
+          <a:bodyPr wrap="none" rtlCol="0">
+            <a:spAutoFit/>
+          </a:bodyPr>
+          <a:lstStyle/>
+          <a:p>
+            <a:r>
+              <a:rPr lang="en-US" dirty="0"/>
+              <a:t>Output</a:t>
+            </a:r>
+            <a:endParaRPr lang="en-NL" dirty="0"/>
+          </a:p>
+        </p:txBody>
+      </p:sp>
+      <p:sp>
+        <p:nvSpPr>
+          <p:cNvPr id="171" name="TextBox 170">
+            <a:extLst>
+              <a:ext uri="{FF2B5EF4-FFF2-40B4-BE49-F238E27FC236}">
+                <a16:creationId xmlns:a16="http://schemas.microsoft.com/office/drawing/2014/main" id="{392F7D65-3534-C207-2AED-C5107283649F}"/>
+              </a:ext>
+            </a:extLst>
+          </p:cNvPr>
+          <p:cNvSpPr txBox="1"/>
+          <p:nvPr/>
+        </p:nvSpPr>
+        <p:spPr>
+          <a:xfrm rot="16200000">
+            <a:off x="1451624" y="3080172"/>
+            <a:ext cx="787652" cy="369332"/>
+          </a:xfrm>
+          <a:prstGeom prst="rect">
+            <a:avLst/>
+          </a:prstGeom>
+          <a:noFill/>
+        </p:spPr>
+        <p:txBody>
+          <a:bodyPr wrap="none" rtlCol="0">
+            <a:spAutoFit/>
+          </a:bodyPr>
+          <a:lstStyle/>
+          <a:p>
+            <a:r>
+              <a:rPr lang="en-US" dirty="0"/>
+              <a:t>Query</a:t>
+            </a:r>
+            <a:endParaRPr lang="en-NL" dirty="0"/>
+          </a:p>
+        </p:txBody>
+      </p:sp>
+      <p:sp>
+        <p:nvSpPr>
+          <p:cNvPr id="174" name="TextBox 173">
+            <a:extLst>
+              <a:ext uri="{FF2B5EF4-FFF2-40B4-BE49-F238E27FC236}">
+                <a16:creationId xmlns:a16="http://schemas.microsoft.com/office/drawing/2014/main" id="{B85831A2-9AB8-487E-0C24-E4D80DD317B7}"/>
+              </a:ext>
+            </a:extLst>
+          </p:cNvPr>
+          <p:cNvSpPr txBox="1"/>
+          <p:nvPr/>
+        </p:nvSpPr>
+        <p:spPr>
+          <a:xfrm rot="16200000">
+            <a:off x="2071371" y="2941668"/>
+            <a:ext cx="1960601" cy="646331"/>
+          </a:xfrm>
+          <a:prstGeom prst="rect">
+            <a:avLst/>
+          </a:prstGeom>
+          <a:noFill/>
+        </p:spPr>
+        <p:txBody>
+          <a:bodyPr wrap="none" rtlCol="0">
+            <a:spAutoFit/>
+          </a:bodyPr>
+          <a:lstStyle/>
+          <a:p>
+            <a:pPr algn="ctr"/>
+            <a:r>
+              <a:rPr lang="en-US" dirty="0"/>
+              <a:t>Role Information/ </a:t>
+            </a:r>
+          </a:p>
+          <a:p>
+            <a:pPr algn="ctr"/>
+            <a:r>
+              <a:rPr lang="en-US" dirty="0"/>
+              <a:t>System</a:t>
+            </a:r>
+            <a:endParaRPr lang="en-NL" dirty="0"/>
+          </a:p>
+        </p:txBody>
+      </p:sp>
+      <p:cxnSp>
+        <p:nvCxnSpPr>
+          <p:cNvPr id="177" name="Straight Connector 176">
+            <a:extLst>
+              <a:ext uri="{FF2B5EF4-FFF2-40B4-BE49-F238E27FC236}">
+                <a16:creationId xmlns:a16="http://schemas.microsoft.com/office/drawing/2014/main" id="{57E8594F-CA69-4CBA-9229-7E26483BCD93}"/>
+              </a:ext>
+            </a:extLst>
+          </p:cNvPr>
+          <p:cNvCxnSpPr>
+            <a:cxnSpLocks/>
+          </p:cNvCxnSpPr>
+          <p:nvPr/>
+        </p:nvCxnSpPr>
+        <p:spPr>
+          <a:xfrm>
+            <a:off x="2184740" y="2209289"/>
+            <a:ext cx="0" cy="2111098"/>
+          </a:xfrm>
+          <a:prstGeom prst="line">
+            <a:avLst/>
+          </a:prstGeom>
+          <a:ln w="19050" cap="flat" cmpd="sng" algn="ctr">
+            <a:solidFill>
+              <a:schemeClr val="dk1"/>
+            </a:solidFill>
+            <a:prstDash val="dash"/>
+            <a:round/>
+            <a:headEnd type="none" w="med" len="med"/>
+            <a:tailEnd type="none" w="med" len="med"/>
+          </a:ln>
+        </p:spPr>
+        <p:style>
+          <a:lnRef idx="0">
+            <a:scrgbClr r="0" g="0" b="0"/>
+          </a:lnRef>
+          <a:fillRef idx="0">
+            <a:scrgbClr r="0" g="0" b="0"/>
+          </a:fillRef>
+          <a:effectRef idx="0">
+            <a:scrgbClr r="0" g="0" b="0"/>
+          </a:effectRef>
+          <a:fontRef idx="minor">
+            <a:schemeClr val="tx1"/>
+          </a:fontRef>
+        </p:style>
+      </p:cxnSp>
+      <p:cxnSp>
+        <p:nvCxnSpPr>
+          <p:cNvPr id="179" name="Straight Connector 178">
+            <a:extLst>
+              <a:ext uri="{FF2B5EF4-FFF2-40B4-BE49-F238E27FC236}">
+                <a16:creationId xmlns:a16="http://schemas.microsoft.com/office/drawing/2014/main" id="{0DAF17BC-B428-CC71-4E1C-21E9D66A2D44}"/>
+              </a:ext>
+            </a:extLst>
+          </p:cNvPr>
+          <p:cNvCxnSpPr>
+            <a:cxnSpLocks/>
+          </p:cNvCxnSpPr>
+          <p:nvPr/>
+        </p:nvCxnSpPr>
+        <p:spPr>
+          <a:xfrm>
+            <a:off x="2773884" y="2209289"/>
+            <a:ext cx="0" cy="2111098"/>
+          </a:xfrm>
+          <a:prstGeom prst="line">
+            <a:avLst/>
+          </a:prstGeom>
+          <a:ln w="19050" cap="flat" cmpd="sng" algn="ctr">
+            <a:solidFill>
+              <a:schemeClr val="dk1"/>
+            </a:solidFill>
+            <a:prstDash val="dash"/>
+            <a:round/>
+            <a:headEnd type="none" w="med" len="med"/>
+            <a:tailEnd type="none" w="med" len="med"/>
+          </a:ln>
+        </p:spPr>
+        <p:style>
+          <a:lnRef idx="0">
+            <a:scrgbClr r="0" g="0" b="0"/>
+          </a:lnRef>
+          <a:fillRef idx="0">
+            <a:scrgbClr r="0" g="0" b="0"/>
+          </a:fillRef>
+          <a:effectRef idx="0">
+            <a:scrgbClr r="0" g="0" b="0"/>
+          </a:effectRef>
+          <a:fontRef idx="minor">
+            <a:schemeClr val="tx1"/>
+          </a:fontRef>
+        </p:style>
+      </p:cxnSp>
+      <p:cxnSp>
+        <p:nvCxnSpPr>
+          <p:cNvPr id="180" name="Straight Connector 179">
+            <a:extLst>
+              <a:ext uri="{FF2B5EF4-FFF2-40B4-BE49-F238E27FC236}">
+                <a16:creationId xmlns:a16="http://schemas.microsoft.com/office/drawing/2014/main" id="{1E2ABFB5-7CA5-C712-88D3-8455D592612F}"/>
+              </a:ext>
+            </a:extLst>
+          </p:cNvPr>
+          <p:cNvCxnSpPr>
+            <a:cxnSpLocks/>
+          </p:cNvCxnSpPr>
+          <p:nvPr/>
+        </p:nvCxnSpPr>
+        <p:spPr>
+          <a:xfrm>
+            <a:off x="3430534" y="2209281"/>
+            <a:ext cx="0" cy="2111098"/>
+          </a:xfrm>
+          <a:prstGeom prst="line">
+            <a:avLst/>
+          </a:prstGeom>
+          <a:ln w="19050" cap="flat" cmpd="sng" algn="ctr">
+            <a:solidFill>
+              <a:schemeClr val="dk1"/>
+            </a:solidFill>
+            <a:prstDash val="dash"/>
+            <a:round/>
+            <a:headEnd type="none" w="med" len="med"/>
+            <a:tailEnd type="none" w="med" len="med"/>
+          </a:ln>
+        </p:spPr>
+        <p:style>
+          <a:lnRef idx="0">
+            <a:scrgbClr r="0" g="0" b="0"/>
+          </a:lnRef>
+          <a:fillRef idx="0">
+            <a:scrgbClr r="0" g="0" b="0"/>
+          </a:fillRef>
+          <a:effectRef idx="0">
+            <a:scrgbClr r="0" g="0" b="0"/>
+          </a:effectRef>
+          <a:fontRef idx="minor">
+            <a:schemeClr val="tx1"/>
+          </a:fontRef>
+        </p:style>
+      </p:cxnSp>
+      <p:cxnSp>
+        <p:nvCxnSpPr>
+          <p:cNvPr id="181" name="Straight Connector 180">
+            <a:extLst>
+              <a:ext uri="{FF2B5EF4-FFF2-40B4-BE49-F238E27FC236}">
+                <a16:creationId xmlns:a16="http://schemas.microsoft.com/office/drawing/2014/main" id="{DA6AE112-C164-3FCE-3B9E-75170398004B}"/>
+              </a:ext>
+            </a:extLst>
+          </p:cNvPr>
+          <p:cNvCxnSpPr>
+            <a:cxnSpLocks/>
+          </p:cNvCxnSpPr>
+          <p:nvPr/>
+        </p:nvCxnSpPr>
+        <p:spPr>
+          <a:xfrm>
+            <a:off x="7229283" y="2209280"/>
+            <a:ext cx="0" cy="2111098"/>
+          </a:xfrm>
+          <a:prstGeom prst="line">
+            <a:avLst/>
+          </a:prstGeom>
+          <a:ln w="19050" cap="flat" cmpd="sng" algn="ctr">
+            <a:solidFill>
+              <a:schemeClr val="dk1"/>
+            </a:solidFill>
+            <a:prstDash val="dash"/>
+            <a:round/>
+            <a:headEnd type="none" w="med" len="med"/>
+            <a:tailEnd type="none" w="med" len="med"/>
+          </a:ln>
+        </p:spPr>
+        <p:style>
+          <a:lnRef idx="0">
+            <a:scrgbClr r="0" g="0" b="0"/>
+          </a:lnRef>
+          <a:fillRef idx="0">
+            <a:scrgbClr r="0" g="0" b="0"/>
+          </a:fillRef>
+          <a:effectRef idx="0">
+            <a:scrgbClr r="0" g="0" b="0"/>
+          </a:effectRef>
+          <a:fontRef idx="minor">
+            <a:schemeClr val="tx1"/>
+          </a:fontRef>
+        </p:style>
+      </p:cxnSp>
+      <p:cxnSp>
+        <p:nvCxnSpPr>
+          <p:cNvPr id="183" name="Straight Arrow Connector 182">
+            <a:extLst>
+              <a:ext uri="{FF2B5EF4-FFF2-40B4-BE49-F238E27FC236}">
+                <a16:creationId xmlns:a16="http://schemas.microsoft.com/office/drawing/2014/main" id="{A22B8E92-37DD-2D77-DF0D-C899A4DBE8DD}"/>
+              </a:ext>
+            </a:extLst>
+          </p:cNvPr>
+          <p:cNvCxnSpPr>
+            <a:cxnSpLocks/>
+          </p:cNvCxnSpPr>
+          <p:nvPr/>
+        </p:nvCxnSpPr>
+        <p:spPr>
+          <a:xfrm>
+            <a:off x="1457256" y="1663102"/>
+            <a:ext cx="7638410" cy="0"/>
+          </a:xfrm>
+          <a:prstGeom prst="straightConnector1">
+            <a:avLst/>
+          </a:prstGeom>
+          <a:ln w="19050" cap="flat" cmpd="sng" algn="ctr">
+            <a:solidFill>
+              <a:schemeClr val="dk1"/>
+            </a:solidFill>
+            <a:prstDash val="solid"/>
+            <a:round/>
+            <a:headEnd type="arrow" w="med" len="med"/>
+            <a:tailEnd type="arrow" w="med" len="med"/>
+          </a:ln>
+        </p:spPr>
+        <p:style>
+          <a:lnRef idx="0">
+            <a:scrgbClr r="0" g="0" b="0"/>
+          </a:lnRef>
+          <a:fillRef idx="0">
+            <a:scrgbClr r="0" g="0" b="0"/>
+          </a:fillRef>
+          <a:effectRef idx="0">
+            <a:scrgbClr r="0" g="0" b="0"/>
+          </a:effectRef>
+          <a:fontRef idx="minor">
+            <a:schemeClr val="tx1"/>
+          </a:fontRef>
+        </p:style>
+      </p:cxnSp>
+      <p:sp>
+        <p:nvSpPr>
+          <p:cNvPr id="185" name="TextBox 184">
+            <a:extLst>
+              <a:ext uri="{FF2B5EF4-FFF2-40B4-BE49-F238E27FC236}">
+                <a16:creationId xmlns:a16="http://schemas.microsoft.com/office/drawing/2014/main" id="{9EE69B63-EE36-22C2-C47F-6D3283CBD7DA}"/>
+              </a:ext>
+            </a:extLst>
+          </p:cNvPr>
+          <p:cNvSpPr txBox="1"/>
+          <p:nvPr/>
+        </p:nvSpPr>
+        <p:spPr>
+          <a:xfrm>
+            <a:off x="1499453" y="1235751"/>
+            <a:ext cx="7638410" cy="369332"/>
+          </a:xfrm>
+          <a:prstGeom prst="rect">
+            <a:avLst/>
+          </a:prstGeom>
+          <a:noFill/>
+        </p:spPr>
+        <p:txBody>
+          <a:bodyPr wrap="square" rtlCol="0">
+            <a:spAutoFit/>
+          </a:bodyPr>
+          <a:lstStyle/>
+          <a:p>
+            <a:pPr algn="ctr"/>
+            <a:r>
+              <a:rPr lang="en-US" dirty="0"/>
+              <a:t>Context Window</a:t>
+            </a:r>
+          </a:p>
+        </p:txBody>
+      </p:sp>
+      <p:cxnSp>
+        <p:nvCxnSpPr>
+          <p:cNvPr id="2" name="Straight Connector 1">
+            <a:extLst>
+              <a:ext uri="{FF2B5EF4-FFF2-40B4-BE49-F238E27FC236}">
+                <a16:creationId xmlns:a16="http://schemas.microsoft.com/office/drawing/2014/main" id="{4D68AFEE-AE4D-56B0-87D8-8D75B859B67D}"/>
+              </a:ext>
+            </a:extLst>
+          </p:cNvPr>
+          <p:cNvCxnSpPr>
+            <a:cxnSpLocks/>
+          </p:cNvCxnSpPr>
+          <p:nvPr/>
+        </p:nvCxnSpPr>
+        <p:spPr>
+          <a:xfrm>
+            <a:off x="4001267" y="2209279"/>
+            <a:ext cx="0" cy="2111098"/>
+          </a:xfrm>
+          <a:prstGeom prst="line">
+            <a:avLst/>
+          </a:prstGeom>
+          <a:ln w="19050" cap="flat" cmpd="sng" algn="ctr">
+            <a:solidFill>
+              <a:schemeClr val="dk1"/>
+            </a:solidFill>
+            <a:prstDash val="dash"/>
+            <a:round/>
+            <a:headEnd type="none" w="med" len="med"/>
+            <a:tailEnd type="none" w="med" len="med"/>
+          </a:ln>
+        </p:spPr>
+        <p:style>
+          <a:lnRef idx="0">
+            <a:scrgbClr r="0" g="0" b="0"/>
+          </a:lnRef>
+          <a:fillRef idx="0">
+            <a:scrgbClr r="0" g="0" b="0"/>
+          </a:fillRef>
+          <a:effectRef idx="0">
+            <a:scrgbClr r="0" g="0" b="0"/>
+          </a:effectRef>
+          <a:fontRef idx="minor">
+            <a:schemeClr val="tx1"/>
+          </a:fontRef>
+        </p:style>
+      </p:cxnSp>
+      <p:sp>
+        <p:nvSpPr>
+          <p:cNvPr id="3" name="TextBox 2">
+            <a:extLst>
+              <a:ext uri="{FF2B5EF4-FFF2-40B4-BE49-F238E27FC236}">
+                <a16:creationId xmlns:a16="http://schemas.microsoft.com/office/drawing/2014/main" id="{384CA35B-1034-06B2-1940-414024F765BE}"/>
+              </a:ext>
+            </a:extLst>
+          </p:cNvPr>
+          <p:cNvSpPr txBox="1"/>
+          <p:nvPr/>
+        </p:nvSpPr>
+        <p:spPr>
+          <a:xfrm rot="16200000">
+            <a:off x="2767419" y="3080162"/>
+            <a:ext cx="1885260" cy="369332"/>
+          </a:xfrm>
+          <a:prstGeom prst="rect">
+            <a:avLst/>
+          </a:prstGeom>
+          <a:noFill/>
+        </p:spPr>
+        <p:txBody>
+          <a:bodyPr wrap="none" rtlCol="0">
+            <a:spAutoFit/>
+          </a:bodyPr>
+          <a:lstStyle/>
+          <a:p>
+            <a:r>
+              <a:rPr lang="en-US" dirty="0"/>
+              <a:t>Response format</a:t>
+            </a:r>
+            <a:endParaRPr lang="en-NL" dirty="0"/>
+          </a:p>
+        </p:txBody>
+      </p:sp>
+    </p:spTree>
+    <p:extLst>
+      <p:ext uri="{BB962C8B-B14F-4D97-AF65-F5344CB8AC3E}">
+        <p14:creationId xmlns:p14="http://schemas.microsoft.com/office/powerpoint/2010/main" val="262852453"/>
+      </p:ext>
+    </p:extLst>
+  </p:cSld>
+  <p:clrMapOvr>
+    <a:masterClrMapping/>
+  </p:clrMapOvr>
+</p:sld>
+</file>
+
+<file path=ppt/slides/slide3.xml><?xml version="1.0" encoding="utf-8"?>
+<p:sld xmlns:a="http://schemas.openxmlformats.org/drawingml/2006/main" xmlns:r="http://schemas.openxmlformats.org/officeDocument/2006/relationships" xmlns:p="http://schemas.openxmlformats.org/presentationml/2006/main">
+  <p:cSld>
+    <p:spTree>
+      <p:nvGrpSpPr>
+        <p:cNvPr id="1" name="">
+          <a:extLst>
+            <a:ext uri="{FF2B5EF4-FFF2-40B4-BE49-F238E27FC236}">
+              <a16:creationId xmlns:a16="http://schemas.microsoft.com/office/drawing/2014/main" id="{13346AF6-C29C-DC6F-4096-C7F1EE521CE7}"/>
+            </a:ext>
+          </a:extLst>
+        </p:cNvPr>
+        <p:cNvGrpSpPr/>
+        <p:nvPr/>
+      </p:nvGrpSpPr>
+      <p:grpSpPr>
+        <a:xfrm>
+          <a:off x="0" y="0"/>
+          <a:ext cx="0" cy="0"/>
+          <a:chOff x="0" y="0"/>
+          <a:chExt cx="0" cy="0"/>
+        </a:xfrm>
+      </p:grpSpPr>
+      <p:sp>
+        <p:nvSpPr>
+          <p:cNvPr id="14" name="Rectangle: Rounded Corners 13">
+            <a:extLst>
+              <a:ext uri="{FF2B5EF4-FFF2-40B4-BE49-F238E27FC236}">
+                <a16:creationId xmlns:a16="http://schemas.microsoft.com/office/drawing/2014/main" id="{6072D6FE-EB94-5C02-74B3-919C7AC61D07}"/>
+              </a:ext>
+            </a:extLst>
+          </p:cNvPr>
+          <p:cNvSpPr/>
+          <p:nvPr/>
+        </p:nvSpPr>
+        <p:spPr>
+          <a:xfrm>
+            <a:off x="2319099" y="3763231"/>
+            <a:ext cx="7638410" cy="2111098"/>
+          </a:xfrm>
+          <a:prstGeom prst="roundRect">
+            <a:avLst>
+              <a:gd name="adj" fmla="val 4602"/>
+            </a:avLst>
+          </a:prstGeom>
+          <a:solidFill>
+            <a:srgbClr val="ECEBE5"/>
+          </a:solidFill>
+        </p:spPr>
+        <p:style>
+          <a:lnRef idx="2">
+            <a:schemeClr val="accent1">
+              <a:shade val="15000"/>
+            </a:schemeClr>
+          </a:lnRef>
+          <a:fillRef idx="1">
+            <a:schemeClr val="accent1"/>
+          </a:fillRef>
+          <a:effectRef idx="0">
+            <a:schemeClr val="accent1"/>
+          </a:effectRef>
+          <a:fontRef idx="minor">
+            <a:schemeClr val="lt1"/>
+          </a:fontRef>
+        </p:style>
+        <p:txBody>
+          <a:bodyPr rtlCol="0" anchor="ctr"/>
+          <a:lstStyle/>
+          <a:p>
+            <a:pPr algn="ctr"/>
+            <a:endParaRPr lang="en-NL" dirty="0"/>
+          </a:p>
+        </p:txBody>
+      </p:sp>
+      <p:cxnSp>
+        <p:nvCxnSpPr>
+          <p:cNvPr id="24" name="Straight Arrow Connector 23">
+            <a:extLst>
+              <a:ext uri="{FF2B5EF4-FFF2-40B4-BE49-F238E27FC236}">
+                <a16:creationId xmlns:a16="http://schemas.microsoft.com/office/drawing/2014/main" id="{6FE1EEF2-9243-4DB8-A116-E8C72BCCEEA2}"/>
+              </a:ext>
+            </a:extLst>
+          </p:cNvPr>
+          <p:cNvCxnSpPr>
+            <a:cxnSpLocks/>
+          </p:cNvCxnSpPr>
+          <p:nvPr/>
+        </p:nvCxnSpPr>
+        <p:spPr>
+          <a:xfrm>
+            <a:off x="2319099" y="6235019"/>
+            <a:ext cx="7638410" cy="0"/>
+          </a:xfrm>
+          <a:prstGeom prst="straightConnector1">
+            <a:avLst/>
+          </a:prstGeom>
+          <a:ln w="19050" cap="flat" cmpd="sng" algn="ctr">
+            <a:solidFill>
+              <a:schemeClr val="dk1"/>
+            </a:solidFill>
+            <a:prstDash val="solid"/>
+            <a:round/>
+            <a:headEnd type="arrow" w="med" len="med"/>
+            <a:tailEnd type="arrow" w="med" len="med"/>
+          </a:ln>
+        </p:spPr>
+        <p:style>
+          <a:lnRef idx="0">
+            <a:scrgbClr r="0" g="0" b="0"/>
+          </a:lnRef>
+          <a:fillRef idx="0">
+            <a:scrgbClr r="0" g="0" b="0"/>
+          </a:fillRef>
+          <a:effectRef idx="0">
+            <a:scrgbClr r="0" g="0" b="0"/>
+          </a:effectRef>
+          <a:fontRef idx="minor">
+            <a:schemeClr val="tx1"/>
+          </a:fontRef>
+        </p:style>
+      </p:cxnSp>
+      <p:sp>
+        <p:nvSpPr>
+          <p:cNvPr id="25" name="TextBox 24">
+            <a:extLst>
+              <a:ext uri="{FF2B5EF4-FFF2-40B4-BE49-F238E27FC236}">
+                <a16:creationId xmlns:a16="http://schemas.microsoft.com/office/drawing/2014/main" id="{F1DB731C-6DFD-246E-F021-3166A63C95A2}"/>
+              </a:ext>
+            </a:extLst>
+          </p:cNvPr>
+          <p:cNvSpPr txBox="1"/>
+          <p:nvPr/>
+        </p:nvSpPr>
+        <p:spPr>
+          <a:xfrm>
+            <a:off x="2319099" y="6276133"/>
+            <a:ext cx="7638410" cy="369332"/>
+          </a:xfrm>
+          <a:prstGeom prst="rect">
+            <a:avLst/>
+          </a:prstGeom>
+          <a:noFill/>
+        </p:spPr>
+        <p:txBody>
+          <a:bodyPr wrap="square" rtlCol="0">
+            <a:spAutoFit/>
+          </a:bodyPr>
+          <a:lstStyle/>
+          <a:p>
+            <a:pPr algn="ctr"/>
+            <a:r>
+              <a:rPr lang="en-US" dirty="0"/>
+              <a:t>Context Window</a:t>
+            </a:r>
+          </a:p>
+        </p:txBody>
+      </p:sp>
+      <p:pic>
+        <p:nvPicPr>
+          <p:cNvPr id="4" name="Picture 3">
+            <a:extLst>
+              <a:ext uri="{FF2B5EF4-FFF2-40B4-BE49-F238E27FC236}">
+                <a16:creationId xmlns:a16="http://schemas.microsoft.com/office/drawing/2014/main" id="{29681D0C-DEDD-C47F-2CF2-BAB6424204CB}"/>
+              </a:ext>
+            </a:extLst>
+          </p:cNvPr>
+          <p:cNvPicPr>
+            <a:picLocks noChangeAspect="1"/>
+          </p:cNvPicPr>
+          <p:nvPr/>
+        </p:nvPicPr>
+        <p:blipFill>
+          <a:blip r:embed="rId2"/>
+          <a:srcRect l="4010" r="3499" b="29010"/>
+          <a:stretch>
+            <a:fillRect/>
+          </a:stretch>
+        </p:blipFill>
+        <p:spPr>
+          <a:xfrm>
+            <a:off x="2381694" y="385096"/>
+            <a:ext cx="7491203" cy="3723690"/>
+          </a:xfrm>
+          <a:prstGeom prst="rect">
+            <a:avLst/>
+          </a:prstGeom>
+        </p:spPr>
+      </p:pic>
+      <p:sp>
+        <p:nvSpPr>
+          <p:cNvPr id="28" name="TextBox 27">
+            <a:extLst>
+              <a:ext uri="{FF2B5EF4-FFF2-40B4-BE49-F238E27FC236}">
+                <a16:creationId xmlns:a16="http://schemas.microsoft.com/office/drawing/2014/main" id="{F888649D-97BD-BBF6-5D95-4FB95CF54769}"/>
+              </a:ext>
+            </a:extLst>
+          </p:cNvPr>
+          <p:cNvSpPr txBox="1"/>
+          <p:nvPr/>
+        </p:nvSpPr>
+        <p:spPr>
+          <a:xfrm rot="16200000">
+            <a:off x="2582691" y="4594743"/>
+            <a:ext cx="1379160" cy="369332"/>
+          </a:xfrm>
+          <a:prstGeom prst="rect">
+            <a:avLst/>
+          </a:prstGeom>
+          <a:noFill/>
+        </p:spPr>
+        <p:txBody>
+          <a:bodyPr wrap="none" rtlCol="0">
+            <a:spAutoFit/>
+          </a:bodyPr>
+          <a:lstStyle/>
+          <a:p>
+            <a:r>
+              <a:rPr lang="en-US" dirty="0"/>
+              <a:t>Instructions</a:t>
+            </a:r>
+            <a:endParaRPr lang="en-NL" dirty="0"/>
+          </a:p>
+        </p:txBody>
+      </p:sp>
+      <p:sp>
+        <p:nvSpPr>
+          <p:cNvPr id="29" name="TextBox 28">
+            <a:extLst>
+              <a:ext uri="{FF2B5EF4-FFF2-40B4-BE49-F238E27FC236}">
+                <a16:creationId xmlns:a16="http://schemas.microsoft.com/office/drawing/2014/main" id="{1D47DEA0-96F7-59E3-84CE-AB753F6FB0CA}"/>
+              </a:ext>
+            </a:extLst>
+          </p:cNvPr>
+          <p:cNvSpPr txBox="1"/>
+          <p:nvPr/>
+        </p:nvSpPr>
+        <p:spPr>
+          <a:xfrm>
+            <a:off x="5672150" y="4495605"/>
+            <a:ext cx="1018227" cy="646331"/>
+          </a:xfrm>
+          <a:prstGeom prst="rect">
+            <a:avLst/>
+          </a:prstGeom>
+          <a:noFill/>
+        </p:spPr>
+        <p:txBody>
+          <a:bodyPr wrap="none" rtlCol="0">
+            <a:spAutoFit/>
+          </a:bodyPr>
+          <a:lstStyle/>
+          <a:p>
+            <a:r>
+              <a:rPr lang="en-US" dirty="0"/>
+              <a:t>Context</a:t>
+            </a:r>
+          </a:p>
+          <a:p>
+            <a:r>
+              <a:rPr lang="en-US" dirty="0"/>
+              <a:t>Dataset </a:t>
+            </a:r>
+          </a:p>
+        </p:txBody>
+      </p:sp>
+      <p:sp>
+        <p:nvSpPr>
+          <p:cNvPr id="30" name="TextBox 29">
+            <a:extLst>
+              <a:ext uri="{FF2B5EF4-FFF2-40B4-BE49-F238E27FC236}">
+                <a16:creationId xmlns:a16="http://schemas.microsoft.com/office/drawing/2014/main" id="{A8151390-EC0E-78DF-CEF8-EEEB7493FBFD}"/>
+              </a:ext>
+            </a:extLst>
+          </p:cNvPr>
+          <p:cNvSpPr txBox="1"/>
+          <p:nvPr/>
+        </p:nvSpPr>
+        <p:spPr>
+          <a:xfrm>
+            <a:off x="8638074" y="4613610"/>
+            <a:ext cx="889987" cy="369332"/>
+          </a:xfrm>
+          <a:prstGeom prst="rect">
+            <a:avLst/>
+          </a:prstGeom>
+          <a:noFill/>
+        </p:spPr>
+        <p:txBody>
+          <a:bodyPr wrap="none" rtlCol="0">
+            <a:spAutoFit/>
+          </a:bodyPr>
+          <a:lstStyle/>
+          <a:p>
+            <a:r>
+              <a:rPr lang="en-US" dirty="0"/>
+              <a:t>Output</a:t>
+            </a:r>
+            <a:endParaRPr lang="en-NL" dirty="0"/>
+          </a:p>
+        </p:txBody>
+      </p:sp>
+      <p:sp>
+        <p:nvSpPr>
+          <p:cNvPr id="31" name="TextBox 30">
+            <a:extLst>
+              <a:ext uri="{FF2B5EF4-FFF2-40B4-BE49-F238E27FC236}">
+                <a16:creationId xmlns:a16="http://schemas.microsoft.com/office/drawing/2014/main" id="{715DC4A2-2860-0A91-D0C5-38F5DEAAD3C7}"/>
+              </a:ext>
+            </a:extLst>
+          </p:cNvPr>
+          <p:cNvSpPr txBox="1"/>
+          <p:nvPr/>
+        </p:nvSpPr>
+        <p:spPr>
+          <a:xfrm rot="16200000">
+            <a:off x="2271271" y="4634114"/>
+            <a:ext cx="787652" cy="369332"/>
+          </a:xfrm>
+          <a:prstGeom prst="rect">
+            <a:avLst/>
+          </a:prstGeom>
+          <a:noFill/>
+        </p:spPr>
+        <p:txBody>
+          <a:bodyPr wrap="none" rtlCol="0">
+            <a:spAutoFit/>
+          </a:bodyPr>
+          <a:lstStyle/>
+          <a:p>
+            <a:r>
+              <a:rPr lang="en-US" dirty="0"/>
+              <a:t>Query</a:t>
+            </a:r>
+            <a:endParaRPr lang="en-NL" dirty="0"/>
+          </a:p>
+        </p:txBody>
+      </p:sp>
+      <p:sp>
+        <p:nvSpPr>
+          <p:cNvPr id="32" name="TextBox 31">
+            <a:extLst>
+              <a:ext uri="{FF2B5EF4-FFF2-40B4-BE49-F238E27FC236}">
+                <a16:creationId xmlns:a16="http://schemas.microsoft.com/office/drawing/2014/main" id="{FF71E483-57E2-7894-BB60-8F7D68566B4F}"/>
+              </a:ext>
+            </a:extLst>
+          </p:cNvPr>
+          <p:cNvSpPr txBox="1"/>
+          <p:nvPr/>
+        </p:nvSpPr>
+        <p:spPr>
+          <a:xfrm rot="16200000">
+            <a:off x="2891018" y="4495610"/>
+            <a:ext cx="1960601" cy="646331"/>
+          </a:xfrm>
+          <a:prstGeom prst="rect">
+            <a:avLst/>
+          </a:prstGeom>
+          <a:noFill/>
+        </p:spPr>
+        <p:txBody>
+          <a:bodyPr wrap="none" rtlCol="0">
+            <a:spAutoFit/>
+          </a:bodyPr>
+          <a:lstStyle/>
+          <a:p>
+            <a:pPr algn="ctr"/>
+            <a:r>
+              <a:rPr lang="en-US" dirty="0"/>
+              <a:t>Role Information/ </a:t>
+            </a:r>
+          </a:p>
+          <a:p>
+            <a:pPr algn="ctr"/>
+            <a:r>
+              <a:rPr lang="en-US" dirty="0"/>
+              <a:t>System</a:t>
+            </a:r>
+            <a:endParaRPr lang="en-NL" dirty="0"/>
+          </a:p>
+        </p:txBody>
+      </p:sp>
+      <p:cxnSp>
+        <p:nvCxnSpPr>
+          <p:cNvPr id="33" name="Straight Connector 32">
+            <a:extLst>
+              <a:ext uri="{FF2B5EF4-FFF2-40B4-BE49-F238E27FC236}">
+                <a16:creationId xmlns:a16="http://schemas.microsoft.com/office/drawing/2014/main" id="{0DAFB164-EB54-1867-ECDA-18F4B00C6CFF}"/>
+              </a:ext>
+            </a:extLst>
+          </p:cNvPr>
+          <p:cNvCxnSpPr>
+            <a:cxnSpLocks/>
+          </p:cNvCxnSpPr>
+          <p:nvPr/>
+        </p:nvCxnSpPr>
+        <p:spPr>
+          <a:xfrm>
+            <a:off x="3004387" y="3763231"/>
+            <a:ext cx="0" cy="2111098"/>
+          </a:xfrm>
+          <a:prstGeom prst="line">
+            <a:avLst/>
+          </a:prstGeom>
+          <a:ln w="19050" cap="flat" cmpd="sng" algn="ctr">
+            <a:solidFill>
+              <a:schemeClr val="dk1"/>
+            </a:solidFill>
+            <a:prstDash val="dash"/>
+            <a:round/>
+            <a:headEnd type="none" w="med" len="med"/>
+            <a:tailEnd type="none" w="med" len="med"/>
+          </a:ln>
+        </p:spPr>
+        <p:style>
+          <a:lnRef idx="0">
+            <a:scrgbClr r="0" g="0" b="0"/>
+          </a:lnRef>
+          <a:fillRef idx="0">
+            <a:scrgbClr r="0" g="0" b="0"/>
+          </a:fillRef>
+          <a:effectRef idx="0">
+            <a:scrgbClr r="0" g="0" b="0"/>
+          </a:effectRef>
+          <a:fontRef idx="minor">
+            <a:schemeClr val="tx1"/>
+          </a:fontRef>
+        </p:style>
+      </p:cxnSp>
+      <p:cxnSp>
+        <p:nvCxnSpPr>
+          <p:cNvPr id="34" name="Straight Connector 33">
+            <a:extLst>
+              <a:ext uri="{FF2B5EF4-FFF2-40B4-BE49-F238E27FC236}">
+                <a16:creationId xmlns:a16="http://schemas.microsoft.com/office/drawing/2014/main" id="{4CB1A026-2B05-BD8F-0F4C-7A226C97AED1}"/>
+              </a:ext>
+            </a:extLst>
+          </p:cNvPr>
+          <p:cNvCxnSpPr>
+            <a:cxnSpLocks/>
+          </p:cNvCxnSpPr>
+          <p:nvPr/>
+        </p:nvCxnSpPr>
+        <p:spPr>
+          <a:xfrm>
+            <a:off x="3593531" y="3763231"/>
+            <a:ext cx="0" cy="2111098"/>
+          </a:xfrm>
+          <a:prstGeom prst="line">
+            <a:avLst/>
+          </a:prstGeom>
+          <a:ln w="19050" cap="flat" cmpd="sng" algn="ctr">
+            <a:solidFill>
+              <a:schemeClr val="dk1"/>
+            </a:solidFill>
+            <a:prstDash val="dash"/>
+            <a:round/>
+            <a:headEnd type="none" w="med" len="med"/>
+            <a:tailEnd type="none" w="med" len="med"/>
+          </a:ln>
+        </p:spPr>
+        <p:style>
+          <a:lnRef idx="0">
+            <a:scrgbClr r="0" g="0" b="0"/>
+          </a:lnRef>
+          <a:fillRef idx="0">
+            <a:scrgbClr r="0" g="0" b="0"/>
+          </a:fillRef>
+          <a:effectRef idx="0">
+            <a:scrgbClr r="0" g="0" b="0"/>
+          </a:effectRef>
+          <a:fontRef idx="minor">
+            <a:schemeClr val="tx1"/>
+          </a:fontRef>
+        </p:style>
+      </p:cxnSp>
+      <p:cxnSp>
+        <p:nvCxnSpPr>
+          <p:cNvPr id="35" name="Straight Connector 34">
+            <a:extLst>
+              <a:ext uri="{FF2B5EF4-FFF2-40B4-BE49-F238E27FC236}">
+                <a16:creationId xmlns:a16="http://schemas.microsoft.com/office/drawing/2014/main" id="{19493EF3-C888-A82E-5349-380B012838B0}"/>
+              </a:ext>
+            </a:extLst>
+          </p:cNvPr>
+          <p:cNvCxnSpPr>
+            <a:cxnSpLocks/>
+          </p:cNvCxnSpPr>
+          <p:nvPr/>
+        </p:nvCxnSpPr>
+        <p:spPr>
+          <a:xfrm>
+            <a:off x="4250181" y="3763223"/>
+            <a:ext cx="0" cy="2111098"/>
+          </a:xfrm>
+          <a:prstGeom prst="line">
+            <a:avLst/>
+          </a:prstGeom>
+          <a:ln w="19050" cap="flat" cmpd="sng" algn="ctr">
+            <a:solidFill>
+              <a:schemeClr val="dk1"/>
+            </a:solidFill>
+            <a:prstDash val="dash"/>
+            <a:round/>
+            <a:headEnd type="none" w="med" len="med"/>
+            <a:tailEnd type="none" w="med" len="med"/>
+          </a:ln>
+        </p:spPr>
+        <p:style>
+          <a:lnRef idx="0">
+            <a:scrgbClr r="0" g="0" b="0"/>
+          </a:lnRef>
+          <a:fillRef idx="0">
+            <a:scrgbClr r="0" g="0" b="0"/>
+          </a:fillRef>
+          <a:effectRef idx="0">
+            <a:scrgbClr r="0" g="0" b="0"/>
+          </a:effectRef>
+          <a:fontRef idx="minor">
+            <a:schemeClr val="tx1"/>
+          </a:fontRef>
+        </p:style>
+      </p:cxnSp>
+      <p:cxnSp>
+        <p:nvCxnSpPr>
+          <p:cNvPr id="36" name="Straight Connector 35">
+            <a:extLst>
+              <a:ext uri="{FF2B5EF4-FFF2-40B4-BE49-F238E27FC236}">
+                <a16:creationId xmlns:a16="http://schemas.microsoft.com/office/drawing/2014/main" id="{141BC3FF-4C16-F0FA-74DB-2A63320167DA}"/>
+              </a:ext>
+            </a:extLst>
+          </p:cNvPr>
+          <p:cNvCxnSpPr>
+            <a:cxnSpLocks/>
+          </p:cNvCxnSpPr>
+          <p:nvPr/>
+        </p:nvCxnSpPr>
+        <p:spPr>
+          <a:xfrm>
+            <a:off x="8048930" y="3763222"/>
+            <a:ext cx="0" cy="2111098"/>
+          </a:xfrm>
+          <a:prstGeom prst="line">
+            <a:avLst/>
+          </a:prstGeom>
+          <a:ln w="19050" cap="flat" cmpd="sng" algn="ctr">
+            <a:solidFill>
+              <a:schemeClr val="dk1"/>
+            </a:solidFill>
+            <a:prstDash val="dash"/>
+            <a:round/>
+            <a:headEnd type="none" w="med" len="med"/>
+            <a:tailEnd type="none" w="med" len="med"/>
+          </a:ln>
+        </p:spPr>
+        <p:style>
+          <a:lnRef idx="0">
+            <a:scrgbClr r="0" g="0" b="0"/>
+          </a:lnRef>
+          <a:fillRef idx="0">
+            <a:scrgbClr r="0" g="0" b="0"/>
+          </a:fillRef>
+          <a:effectRef idx="0">
+            <a:scrgbClr r="0" g="0" b="0"/>
+          </a:effectRef>
+          <a:fontRef idx="minor">
+            <a:schemeClr val="tx1"/>
+          </a:fontRef>
+        </p:style>
+      </p:cxnSp>
+      <p:cxnSp>
+        <p:nvCxnSpPr>
+          <p:cNvPr id="37" name="Straight Connector 36">
+            <a:extLst>
+              <a:ext uri="{FF2B5EF4-FFF2-40B4-BE49-F238E27FC236}">
+                <a16:creationId xmlns:a16="http://schemas.microsoft.com/office/drawing/2014/main" id="{A3116E7F-2019-4419-F5DE-F163A0B99292}"/>
+              </a:ext>
+            </a:extLst>
+          </p:cNvPr>
+          <p:cNvCxnSpPr>
+            <a:cxnSpLocks/>
+          </p:cNvCxnSpPr>
+          <p:nvPr/>
+        </p:nvCxnSpPr>
+        <p:spPr>
+          <a:xfrm>
+            <a:off x="4820914" y="3763221"/>
+            <a:ext cx="0" cy="2111098"/>
+          </a:xfrm>
+          <a:prstGeom prst="line">
+            <a:avLst/>
+          </a:prstGeom>
+          <a:ln w="19050" cap="flat" cmpd="sng" algn="ctr">
+            <a:solidFill>
+              <a:schemeClr val="dk1"/>
+            </a:solidFill>
+            <a:prstDash val="dash"/>
+            <a:round/>
+            <a:headEnd type="none" w="med" len="med"/>
+            <a:tailEnd type="none" w="med" len="med"/>
+          </a:ln>
+        </p:spPr>
+        <p:style>
+          <a:lnRef idx="0">
+            <a:scrgbClr r="0" g="0" b="0"/>
+          </a:lnRef>
+          <a:fillRef idx="0">
+            <a:scrgbClr r="0" g="0" b="0"/>
+          </a:fillRef>
+          <a:effectRef idx="0">
+            <a:scrgbClr r="0" g="0" b="0"/>
+          </a:effectRef>
+          <a:fontRef idx="minor">
+            <a:schemeClr val="tx1"/>
+          </a:fontRef>
+        </p:style>
+      </p:cxnSp>
+      <p:sp>
+        <p:nvSpPr>
+          <p:cNvPr id="38" name="TextBox 37">
+            <a:extLst>
+              <a:ext uri="{FF2B5EF4-FFF2-40B4-BE49-F238E27FC236}">
+                <a16:creationId xmlns:a16="http://schemas.microsoft.com/office/drawing/2014/main" id="{7B59995F-101F-9D07-AA46-A47833E42147}"/>
+              </a:ext>
+            </a:extLst>
+          </p:cNvPr>
+          <p:cNvSpPr txBox="1"/>
+          <p:nvPr/>
+        </p:nvSpPr>
+        <p:spPr>
+          <a:xfrm rot="16200000">
+            <a:off x="3587066" y="4634104"/>
+            <a:ext cx="1885260" cy="369332"/>
+          </a:xfrm>
+          <a:prstGeom prst="rect">
+            <a:avLst/>
+          </a:prstGeom>
+          <a:noFill/>
+        </p:spPr>
+        <p:txBody>
+          <a:bodyPr wrap="none" rtlCol="0">
+            <a:spAutoFit/>
+          </a:bodyPr>
+          <a:lstStyle/>
+          <a:p>
+            <a:r>
+              <a:rPr lang="en-US" dirty="0"/>
+              <a:t>Response format</a:t>
+            </a:r>
+            <a:endParaRPr lang="en-NL" dirty="0"/>
+          </a:p>
+        </p:txBody>
+      </p:sp>
+    </p:spTree>
+    <p:extLst>
+      <p:ext uri="{BB962C8B-B14F-4D97-AF65-F5344CB8AC3E}">
+        <p14:creationId xmlns:p14="http://schemas.microsoft.com/office/powerpoint/2010/main" val="3724300958"/>
+      </p:ext>
+    </p:extLst>
+  </p:cSld>
+  <p:clrMapOvr>
+    <a:masterClrMapping/>
+  </p:clrMapOvr>
+</p:sld>
+</file>
+
+<file path=ppt/slides/slide4.xml><?xml version="1.0" encoding="utf-8"?>
 <p:sld xmlns:a="http://schemas.openxmlformats.org/drawingml/2006/main" xmlns:r="http://schemas.openxmlformats.org/officeDocument/2006/relationships" xmlns:p="http://schemas.openxmlformats.org/presentationml/2006/main">
   <p:cSld>
     <p:spTree>
@@ -6509,7 +7812,7 @@
 </p:sld>
 </file>
 
-<file path=ppt/slides/slide3.xml><?xml version="1.0" encoding="utf-8"?>
+<file path=ppt/slides/slide5.xml><?xml version="1.0" encoding="utf-8"?>
 <p:sld xmlns:a="http://schemas.openxmlformats.org/drawingml/2006/main" xmlns:r="http://schemas.openxmlformats.org/officeDocument/2006/relationships" xmlns:p="http://schemas.openxmlformats.org/presentationml/2006/main">
   <p:cSld>
     <p:spTree>
@@ -10078,7 +11381,7 @@
 </p:sld>
 </file>
 
-<file path=ppt/slides/slide4.xml><?xml version="1.0" encoding="utf-8"?>
+<file path=ppt/slides/slide6.xml><?xml version="1.0" encoding="utf-8"?>
 <p:sld xmlns:a="http://schemas.openxmlformats.org/drawingml/2006/main" xmlns:r="http://schemas.openxmlformats.org/officeDocument/2006/relationships" xmlns:p="http://schemas.openxmlformats.org/presentationml/2006/main">
   <p:cSld>
     <p:spTree>
@@ -12808,7 +14111,7 @@
 </p:sld>
 </file>
 
-<file path=ppt/slides/slide5.xml><?xml version="1.0" encoding="utf-8"?>
+<file path=ppt/slides/slide7.xml><?xml version="1.0" encoding="utf-8"?>
 <p:sld xmlns:a="http://schemas.openxmlformats.org/drawingml/2006/main" xmlns:r="http://schemas.openxmlformats.org/officeDocument/2006/relationships" xmlns:p="http://schemas.openxmlformats.org/presentationml/2006/main">
   <p:cSld>
     <p:spTree>
@@ -14563,7 +15866,7 @@
 </p:sld>
 </file>
 
-<file path=ppt/slides/slide6.xml><?xml version="1.0" encoding="utf-8"?>
+<file path=ppt/slides/slide8.xml><?xml version="1.0" encoding="utf-8"?>
 <p:sld xmlns:a="http://schemas.openxmlformats.org/drawingml/2006/main" xmlns:r="http://schemas.openxmlformats.org/officeDocument/2006/relationships" xmlns:p="http://schemas.openxmlformats.org/presentationml/2006/main">
   <p:cSld>
     <p:spTree>
@@ -16966,7 +18269,7 @@
 </p:sld>
 </file>
 
-<file path=ppt/slides/slide7.xml><?xml version="1.0" encoding="utf-8"?>
+<file path=ppt/slides/slide9.xml><?xml version="1.0" encoding="utf-8"?>
 <p:sld xmlns:a="http://schemas.openxmlformats.org/drawingml/2006/main" xmlns:r="http://schemas.openxmlformats.org/officeDocument/2006/relationships" xmlns:p="http://schemas.openxmlformats.org/presentationml/2006/main">
   <p:cSld>
     <p:spTree>
